--- a/assets/decks/episodio-12-gold-governada-agente-solto.pptx
+++ b/assets/decks/episodio-12-gold-governada-agente-solto.pptx
@@ -2,35 +2,35 @@
 <file path=ppt/presentation.xml><?xml version="1.0" encoding="utf-8"?>
 <p:presentation xmlns:p="http://schemas.openxmlformats.org/presentationml/2006/main">
   <p:sldMasterIdLst>
-    <p:sldMasterId xmlns:r="http://schemas.openxmlformats.org/officeDocument/2006/relationships" id="2147483648" r:id="R708e5c74006f4fda"/>
-    <p:sldMasterId xmlns:r="http://schemas.openxmlformats.org/officeDocument/2006/relationships" id="2147483650" r:id="R56463677da1241c7"/>
+    <p:sldMasterId xmlns:r="http://schemas.openxmlformats.org/officeDocument/2006/relationships" id="2147483648" r:id="Rc10203aa6f294d4b"/>
+    <p:sldMasterId xmlns:r="http://schemas.openxmlformats.org/officeDocument/2006/relationships" id="2147483650" r:id="R996a1a408c834baa"/>
   </p:sldMasterIdLst>
   <p:notesMasterIdLst>
-    <p:notesMasterId xmlns:r="http://schemas.openxmlformats.org/officeDocument/2006/relationships" r:id="R8a90cfd9da2c4e63"/>
+    <p:notesMasterId xmlns:r="http://schemas.openxmlformats.org/officeDocument/2006/relationships" r:id="R5e8e24c79cfc4de5"/>
   </p:notesMasterIdLst>
   <p:sldIdLst>
-    <p:sldId xmlns:r="http://schemas.openxmlformats.org/officeDocument/2006/relationships" id="256" r:id="R47d9eba7c72a435b"/>
-    <p:sldId xmlns:r="http://schemas.openxmlformats.org/officeDocument/2006/relationships" id="257" r:id="Rb8117ad67f724a3e"/>
-    <p:sldId xmlns:r="http://schemas.openxmlformats.org/officeDocument/2006/relationships" id="258" r:id="R75f5c4787ff14cf4"/>
-    <p:sldId xmlns:r="http://schemas.openxmlformats.org/officeDocument/2006/relationships" id="259" r:id="R317ce55c18ed41cf"/>
-    <p:sldId xmlns:r="http://schemas.openxmlformats.org/officeDocument/2006/relationships" id="260" r:id="R9689844fb0c1443a"/>
-    <p:sldId xmlns:r="http://schemas.openxmlformats.org/officeDocument/2006/relationships" id="261" r:id="R657560e4f6134070"/>
-    <p:sldId xmlns:r="http://schemas.openxmlformats.org/officeDocument/2006/relationships" id="262" r:id="R07582d54d5e44505"/>
-    <p:sldId xmlns:r="http://schemas.openxmlformats.org/officeDocument/2006/relationships" id="263" r:id="R1857af12eb464a61"/>
-    <p:sldId xmlns:r="http://schemas.openxmlformats.org/officeDocument/2006/relationships" id="264" r:id="R5eb92e5c36864cfb"/>
-    <p:sldId xmlns:r="http://schemas.openxmlformats.org/officeDocument/2006/relationships" id="265" r:id="R0805ed57d10a4ba5"/>
-    <p:sldId xmlns:r="http://schemas.openxmlformats.org/officeDocument/2006/relationships" id="266" r:id="Rbe1cd650aada49ea"/>
-    <p:sldId xmlns:r="http://schemas.openxmlformats.org/officeDocument/2006/relationships" id="267" r:id="Rdb98daea03e349a3"/>
-    <p:sldId xmlns:r="http://schemas.openxmlformats.org/officeDocument/2006/relationships" id="268" r:id="R9f11dbf882724b05"/>
-    <p:sldId xmlns:r="http://schemas.openxmlformats.org/officeDocument/2006/relationships" id="269" r:id="R21f7a183af5242c7"/>
-    <p:sldId xmlns:r="http://schemas.openxmlformats.org/officeDocument/2006/relationships" id="270" r:id="Rdddaee98e00d40ab"/>
-    <p:sldId xmlns:r="http://schemas.openxmlformats.org/officeDocument/2006/relationships" id="271" r:id="Rb38f9f7488494e77"/>
-    <p:sldId xmlns:r="http://schemas.openxmlformats.org/officeDocument/2006/relationships" id="272" r:id="Rfd850978cc59493b"/>
-    <p:sldId xmlns:r="http://schemas.openxmlformats.org/officeDocument/2006/relationships" id="273" r:id="R24754bdf05614c34"/>
-    <p:sldId xmlns:r="http://schemas.openxmlformats.org/officeDocument/2006/relationships" id="274" r:id="R7eed9c0917a64d74"/>
-    <p:sldId xmlns:r="http://schemas.openxmlformats.org/officeDocument/2006/relationships" id="275" r:id="Rcf85e777f25a430e"/>
-    <p:sldId xmlns:r="http://schemas.openxmlformats.org/officeDocument/2006/relationships" id="276" r:id="R544f0d6902584045"/>
-    <p:sldId xmlns:r="http://schemas.openxmlformats.org/officeDocument/2006/relationships" id="277" r:id="Ree94058f1b164251"/>
+    <p:sldId xmlns:r="http://schemas.openxmlformats.org/officeDocument/2006/relationships" id="256" r:id="R14e99a6842d940dc"/>
+    <p:sldId xmlns:r="http://schemas.openxmlformats.org/officeDocument/2006/relationships" id="257" r:id="R5353ad3ed3894d15"/>
+    <p:sldId xmlns:r="http://schemas.openxmlformats.org/officeDocument/2006/relationships" id="258" r:id="R0eb1252d8a574a59"/>
+    <p:sldId xmlns:r="http://schemas.openxmlformats.org/officeDocument/2006/relationships" id="259" r:id="Rac31f41641604064"/>
+    <p:sldId xmlns:r="http://schemas.openxmlformats.org/officeDocument/2006/relationships" id="260" r:id="R21cf39f99c844e41"/>
+    <p:sldId xmlns:r="http://schemas.openxmlformats.org/officeDocument/2006/relationships" id="261" r:id="Rf2e71317046f48b1"/>
+    <p:sldId xmlns:r="http://schemas.openxmlformats.org/officeDocument/2006/relationships" id="262" r:id="Rfe515c82c7154900"/>
+    <p:sldId xmlns:r="http://schemas.openxmlformats.org/officeDocument/2006/relationships" id="263" r:id="R023e1449fe31472b"/>
+    <p:sldId xmlns:r="http://schemas.openxmlformats.org/officeDocument/2006/relationships" id="264" r:id="R49d9b9e5d80e42c9"/>
+    <p:sldId xmlns:r="http://schemas.openxmlformats.org/officeDocument/2006/relationships" id="265" r:id="Rc2ac5cae72b54b55"/>
+    <p:sldId xmlns:r="http://schemas.openxmlformats.org/officeDocument/2006/relationships" id="266" r:id="R96181344bbe543c5"/>
+    <p:sldId xmlns:r="http://schemas.openxmlformats.org/officeDocument/2006/relationships" id="267" r:id="Re7b4a7c3cbd94a4a"/>
+    <p:sldId xmlns:r="http://schemas.openxmlformats.org/officeDocument/2006/relationships" id="268" r:id="R2acbe646a006427e"/>
+    <p:sldId xmlns:r="http://schemas.openxmlformats.org/officeDocument/2006/relationships" id="269" r:id="R2063284cf7644d46"/>
+    <p:sldId xmlns:r="http://schemas.openxmlformats.org/officeDocument/2006/relationships" id="270" r:id="Rf8d82cf3193a4e57"/>
+    <p:sldId xmlns:r="http://schemas.openxmlformats.org/officeDocument/2006/relationships" id="271" r:id="R2afb01d595614350"/>
+    <p:sldId xmlns:r="http://schemas.openxmlformats.org/officeDocument/2006/relationships" id="272" r:id="R69bef8d237c2402d"/>
+    <p:sldId xmlns:r="http://schemas.openxmlformats.org/officeDocument/2006/relationships" id="273" r:id="R4d3e9c288c9d4838"/>
+    <p:sldId xmlns:r="http://schemas.openxmlformats.org/officeDocument/2006/relationships" id="274" r:id="R568724494cb24585"/>
+    <p:sldId xmlns:r="http://schemas.openxmlformats.org/officeDocument/2006/relationships" id="275" r:id="Ra97fdbf0b0a64564"/>
+    <p:sldId xmlns:r="http://schemas.openxmlformats.org/officeDocument/2006/relationships" id="276" r:id="R12a641f204124ab2"/>
+    <p:sldId xmlns:r="http://schemas.openxmlformats.org/officeDocument/2006/relationships" id="277" r:id="Rc851f4cc00c841ce"/>
   </p:sldIdLst>
   <p:sldSz cx="12192000" cy="6858000"/>
   <p:notesSz cx="6858000" cy="9144000"/>
@@ -464,7 +464,57 @@
           <a:lstStyle xmlns:a="http://schemas.openxmlformats.org/drawingml/2006/main"/>
           <a:p xmlns:a="http://schemas.openxmlformats.org/drawingml/2006/main">
             <a:r>
-              <a:t>Apresente o objetivo do EPISÓDIO 12 e conecte-o ao checkpoint executável. O agente não deve inventar as regras que o pipeline pode executar e testar.</a:t>
+              <a:t>[Roteiro recomendado]</a:t>
+            </a:r>
+          </a:p>
+          <a:p xmlns:a="http://schemas.openxmlformats.org/drawingml/2006/main">
+            <a:r>
+              <a:t>[Tempo sugerido: 00:45]</a:t>
+            </a:r>
+          </a:p>
+          <a:p xmlns:a="http://schemas.openxmlformats.org/drawingml/2006/main">
+            <a:r>
+              <a:t/>
+            </a:r>
+          </a:p>
+          <a:p xmlns:a="http://schemas.openxmlformats.org/drawingml/2006/main">
+            <a:r>
+              <a:t>Fala sugerida:</a:t>
+            </a:r>
+          </a:p>
+          <a:p xmlns:a="http://schemas.openxmlformats.org/drawingml/2006/main">
+            <a:r>
+              <a:t>Bem-vindo ao episódio 12 do dbt Moderno na Prática. Hoje vamos trabalhar o tema “Gold governada versus agente solto”. Compare raw, manifest e métricas contra o mesmo ground truth. O objetivo não é apenas conhecer o conceito: vamos conectá-lo ao laboratório e terminar com uma evidência que você consegue reproduzir no seu próprio ambiente. Ao longo da aula, separe sempre o que é recurso aberto e estável daquilo que aparecerá apenas no Radar.</a:t>
+            </a:r>
+          </a:p>
+          <a:p xmlns:a="http://schemas.openxmlformats.org/drawingml/2006/main">
+            <a:r>
+              <a:t/>
+            </a:r>
+          </a:p>
+          <a:p xmlns:a="http://schemas.openxmlformats.org/drawingml/2006/main">
+            <a:r>
+              <a:t>O que destacar:</a:t>
+            </a:r>
+          </a:p>
+          <a:p xmlns:a="http://schemas.openxmlformats.org/drawingml/2006/main">
+            <a:r>
+              <a:t>- Apresente o título, situe o checkpoint 12 e deixe claro que a aula faz parte da trilha open/stable.</a:t>
+            </a:r>
+          </a:p>
+          <a:p xmlns:a="http://schemas.openxmlformats.org/drawingml/2006/main">
+            <a:r>
+              <a:t/>
+            </a:r>
+          </a:p>
+          <a:p xmlns:a="http://schemas.openxmlformats.org/drawingml/2006/main">
+            <a:r>
+              <a:t>Transição:</a:t>
+            </a:r>
+          </a:p>
+          <a:p xmlns:a="http://schemas.openxmlformats.org/drawingml/2006/main">
+            <a:r>
+              <a:t>Com esse ponto estabelecido, avance para “O agente não deve inventar as regras que o pipeline pode executar e testar.”.</a:t>
             </a:r>
           </a:p>
           <a:p xmlns:a="http://schemas.openxmlformats.org/drawingml/2006/main">
@@ -579,7 +629,57 @@
           <a:lstStyle xmlns:a="http://schemas.openxmlformats.org/drawingml/2006/main"/>
           <a:p xmlns:a="http://schemas.openxmlformats.org/drawingml/2006/main">
             <a:r>
-              <a:t>Use a composição para explicar visualmente: Traces gravados testam o avaliador; não provam desempenho de um LLM. CI sem chave Dados sintéticos Execução real posterior</a:t>
+              <a:t>[Roteiro recomendado]</a:t>
+            </a:r>
+          </a:p>
+          <a:p xmlns:a="http://schemas.openxmlformats.org/drawingml/2006/main">
+            <a:r>
+              <a:t>[Tempo sugerido: 00:55]</a:t>
+            </a:r>
+          </a:p>
+          <a:p xmlns:a="http://schemas.openxmlformats.org/drawingml/2006/main">
+            <a:r>
+              <a:t/>
+            </a:r>
+          </a:p>
+          <a:p xmlns:a="http://schemas.openxmlformats.org/drawingml/2006/main">
+            <a:r>
+              <a:t>Fala sugerida:</a:t>
+            </a:r>
+          </a:p>
+          <a:p xmlns:a="http://schemas.openxmlformats.org/drawingml/2006/main">
+            <a:r>
+              <a:t>Agora vamos ler a ideia visualmente. Traces gravados testam o avaliador; não provam desempenho de um LLM. Siga a composição na ordem mostrada e conecte fixture, Validação e LLM real. A imagem ou o fluxo não cria uma regra nova; ele torna visível a relação que acabamos de explicar. Use a disposição dos elementos para reforçar causa, dependência ou comparação.</a:t>
+            </a:r>
+          </a:p>
+          <a:p xmlns:a="http://schemas.openxmlformats.org/drawingml/2006/main">
+            <a:r>
+              <a:t/>
+            </a:r>
+          </a:p>
+          <a:p xmlns:a="http://schemas.openxmlformats.org/drawingml/2006/main">
+            <a:r>
+              <a:t>O que destacar:</a:t>
+            </a:r>
+          </a:p>
+          <a:p xmlns:a="http://schemas.openxmlformats.org/drawingml/2006/main">
+            <a:r>
+              <a:t>- Acompanhe o fluxo ou a comparação com o cursor e preserve a ordem de leitura do slide.</a:t>
+            </a:r>
+          </a:p>
+          <a:p xmlns:a="http://schemas.openxmlformats.org/drawingml/2006/main">
+            <a:r>
+              <a:t/>
+            </a:r>
+          </a:p>
+          <a:p xmlns:a="http://schemas.openxmlformats.org/drawingml/2006/main">
+            <a:r>
+              <a:t>Transição:</a:t>
+            </a:r>
+          </a:p>
+          <a:p xmlns:a="http://schemas.openxmlformats.org/drawingml/2006/main">
+            <a:r>
+              <a:t>Com esse ponto estabelecido, avance para “A recomendação oficial favorece contexto semântico”.</a:t>
             </a:r>
           </a:p>
           <a:p xmlns:a="http://schemas.openxmlformats.org/drawingml/2006/main">
@@ -694,7 +794,57 @@
           <a:lstStyle xmlns:a="http://schemas.openxmlformats.org/drawingml/2006/main"/>
           <a:p xmlns:a="http://schemas.openxmlformats.org/drawingml/2006/main">
             <a:r>
-              <a:t>Mais modelagem tende a ampliar precisão e segurança das respostas. Desenvolva os pontos: Cobertura; Precisão; Confiabilidade.</a:t>
+              <a:t>[Roteiro recomendado]</a:t>
+            </a:r>
+          </a:p>
+          <a:p xmlns:a="http://schemas.openxmlformats.org/drawingml/2006/main">
+            <a:r>
+              <a:t>[Tempo sugerido: 01:10]</a:t>
+            </a:r>
+          </a:p>
+          <a:p xmlns:a="http://schemas.openxmlformats.org/drawingml/2006/main">
+            <a:r>
+              <a:t/>
+            </a:r>
+          </a:p>
+          <a:p xmlns:a="http://schemas.openxmlformats.org/drawingml/2006/main">
+            <a:r>
+              <a:t>Fala sugerida:</a:t>
+            </a:r>
+          </a:p>
+          <a:p xmlns:a="http://schemas.openxmlformats.org/drawingml/2006/main">
+            <a:r>
+              <a:t>A mensagem principal deste slide é: Mais modelagem tende a ampliar precisão e segurança das respostas. Para tornar isso concreto, observe cobertura, Precisão e Confiabilidade. Esses pontos devem ser entendidos em conjunto; não são funcionalidades isoladas. No projeto, essa combinação transforma uma convenção informal em algo que pode ser revisado, testado ou consumido de maneira consistente.</a:t>
+            </a:r>
+          </a:p>
+          <a:p xmlns:a="http://schemas.openxmlformats.org/drawingml/2006/main">
+            <a:r>
+              <a:t/>
+            </a:r>
+          </a:p>
+          <a:p xmlns:a="http://schemas.openxmlformats.org/drawingml/2006/main">
+            <a:r>
+              <a:t>O que destacar:</a:t>
+            </a:r>
+          </a:p>
+          <a:p xmlns:a="http://schemas.openxmlformats.org/drawingml/2006/main">
+            <a:r>
+              <a:t>- Comece pelo título, leia a afirmação abaixo dele e depois desenvolva os itens sem repetir o texto palavra por palavra.</a:t>
+            </a:r>
+          </a:p>
+          <a:p xmlns:a="http://schemas.openxmlformats.org/drawingml/2006/main">
+            <a:r>
+              <a:t/>
+            </a:r>
+          </a:p>
+          <a:p xmlns:a="http://schemas.openxmlformats.org/drawingml/2006/main">
+            <a:r>
+              <a:t>Transição:</a:t>
+            </a:r>
+          </a:p>
+          <a:p xmlns:a="http://schemas.openxmlformats.org/drawingml/2006/main">
+            <a:r>
+              <a:t>Com esse ponto estabelecido, avance para “A recomendação oficial favorece contexto semântico”.</a:t>
             </a:r>
           </a:p>
           <a:p xmlns:a="http://schemas.openxmlformats.org/drawingml/2006/main">
@@ -809,7 +959,57 @@
           <a:lstStyle xmlns:a="http://schemas.openxmlformats.org/drawingml/2006/main"/>
           <a:p xmlns:a="http://schemas.openxmlformats.org/drawingml/2006/main">
             <a:r>
-              <a:t>Use a composição para explicar visualmente: Mais modelagem tende a ampliar precisão e segurança das respostas. Cobertura Precisão Confiabilidade</a:t>
+              <a:t>[Roteiro recomendado]</a:t>
+            </a:r>
+          </a:p>
+          <a:p xmlns:a="http://schemas.openxmlformats.org/drawingml/2006/main">
+            <a:r>
+              <a:t>[Tempo sugerido: 00:55]</a:t>
+            </a:r>
+          </a:p>
+          <a:p xmlns:a="http://schemas.openxmlformats.org/drawingml/2006/main">
+            <a:r>
+              <a:t/>
+            </a:r>
+          </a:p>
+          <a:p xmlns:a="http://schemas.openxmlformats.org/drawingml/2006/main">
+            <a:r>
+              <a:t>Fala sugerida:</a:t>
+            </a:r>
+          </a:p>
+          <a:p xmlns:a="http://schemas.openxmlformats.org/drawingml/2006/main">
+            <a:r>
+              <a:t>Agora vamos ler a ideia visualmente. Mais modelagem tende a ampliar precisão e segurança das respostas. Siga a composição na ordem mostrada e conecte os elementos principais. A imagem ou o fluxo não cria uma regra nova; ele torna visível a relação que acabamos de explicar. A figura é identificada como figura oficial dbt Labs — Apache 2.0</a:t>
+            </a:r>
+          </a:p>
+          <a:p xmlns:a="http://schemas.openxmlformats.org/drawingml/2006/main">
+            <a:r>
+              <a:t/>
+            </a:r>
+          </a:p>
+          <a:p xmlns:a="http://schemas.openxmlformats.org/drawingml/2006/main">
+            <a:r>
+              <a:t>O que destacar:</a:t>
+            </a:r>
+          </a:p>
+          <a:p xmlns:a="http://schemas.openxmlformats.org/drawingml/2006/main">
+            <a:r>
+              <a:t>- Aponte a legenda e deixe explícito quando a figura é oficial; as anotações do curso ficam fora da imagem.</a:t>
+            </a:r>
+          </a:p>
+          <a:p xmlns:a="http://schemas.openxmlformats.org/drawingml/2006/main">
+            <a:r>
+              <a:t/>
+            </a:r>
+          </a:p>
+          <a:p xmlns:a="http://schemas.openxmlformats.org/drawingml/2006/main">
+            <a:r>
+              <a:t>Transição:</a:t>
+            </a:r>
+          </a:p>
+          <a:p xmlns:a="http://schemas.openxmlformats.org/drawingml/2006/main">
+            <a:r>
+              <a:t>Com esse ponto estabelecido, avance para “A arquitetura recomendada termina no agente”.</a:t>
             </a:r>
           </a:p>
           <a:p xmlns:a="http://schemas.openxmlformats.org/drawingml/2006/main">
@@ -929,7 +1129,57 @@
           <a:lstStyle xmlns:a="http://schemas.openxmlformats.org/drawingml/2006/main"/>
           <a:p xmlns:a="http://schemas.openxmlformats.org/drawingml/2006/main">
             <a:r>
-              <a:t>Regras ficam na Gold e nas métricas; o agente consome e explica. Desenvolva os pontos: Silver prepara; Gold aplica regra; Métrica nomeia; MCP entrega contexto.</a:t>
+              <a:t>[Roteiro recomendado]</a:t>
+            </a:r>
+          </a:p>
+          <a:p xmlns:a="http://schemas.openxmlformats.org/drawingml/2006/main">
+            <a:r>
+              <a:t>[Tempo sugerido: 01:10]</a:t>
+            </a:r>
+          </a:p>
+          <a:p xmlns:a="http://schemas.openxmlformats.org/drawingml/2006/main">
+            <a:r>
+              <a:t/>
+            </a:r>
+          </a:p>
+          <a:p xmlns:a="http://schemas.openxmlformats.org/drawingml/2006/main">
+            <a:r>
+              <a:t>Fala sugerida:</a:t>
+            </a:r>
+          </a:p>
+          <a:p xmlns:a="http://schemas.openxmlformats.org/drawingml/2006/main">
+            <a:r>
+              <a:t>A mensagem principal deste slide é: Regras ficam na Gold e nas métricas; o agente consome e explica. Para tornar isso concreto, observe silver prepara, Gold aplica regra, Métrica nomeia e MCP entrega contexto. Esses pontos devem ser entendidos em conjunto; não são funcionalidades isoladas. No projeto, essa combinação transforma uma convenção informal em algo que pode ser revisado, testado ou consumido de maneira consistente.</a:t>
+            </a:r>
+          </a:p>
+          <a:p xmlns:a="http://schemas.openxmlformats.org/drawingml/2006/main">
+            <a:r>
+              <a:t/>
+            </a:r>
+          </a:p>
+          <a:p xmlns:a="http://schemas.openxmlformats.org/drawingml/2006/main">
+            <a:r>
+              <a:t>O que destacar:</a:t>
+            </a:r>
+          </a:p>
+          <a:p xmlns:a="http://schemas.openxmlformats.org/drawingml/2006/main">
+            <a:r>
+              <a:t>- Comece pelo título, leia a afirmação abaixo dele e depois desenvolva os itens sem repetir o texto palavra por palavra.</a:t>
+            </a:r>
+          </a:p>
+          <a:p xmlns:a="http://schemas.openxmlformats.org/drawingml/2006/main">
+            <a:r>
+              <a:t/>
+            </a:r>
+          </a:p>
+          <a:p xmlns:a="http://schemas.openxmlformats.org/drawingml/2006/main">
+            <a:r>
+              <a:t>Transição:</a:t>
+            </a:r>
+          </a:p>
+          <a:p xmlns:a="http://schemas.openxmlformats.org/drawingml/2006/main">
+            <a:r>
+              <a:t>Com esse ponto estabelecido, avance para “A arquitetura recomendada termina no agente”.</a:t>
             </a:r>
           </a:p>
           <a:p xmlns:a="http://schemas.openxmlformats.org/drawingml/2006/main">
@@ -1044,7 +1294,57 @@
           <a:lstStyle xmlns:a="http://schemas.openxmlformats.org/drawingml/2006/main"/>
           <a:p xmlns:a="http://schemas.openxmlformats.org/drawingml/2006/main">
             <a:r>
-              <a:t>Use a composição para explicar visualmente: Regras ficam na Gold e nas métricas; o agente consome e explica. Silver prepara Gold aplica regra Métrica nomeia MCP entrega contexto</a:t>
+              <a:t>[Roteiro recomendado]</a:t>
+            </a:r>
+          </a:p>
+          <a:p xmlns:a="http://schemas.openxmlformats.org/drawingml/2006/main">
+            <a:r>
+              <a:t>[Tempo sugerido: 00:55]</a:t>
+            </a:r>
+          </a:p>
+          <a:p xmlns:a="http://schemas.openxmlformats.org/drawingml/2006/main">
+            <a:r>
+              <a:t/>
+            </a:r>
+          </a:p>
+          <a:p xmlns:a="http://schemas.openxmlformats.org/drawingml/2006/main">
+            <a:r>
+              <a:t>Fala sugerida:</a:t>
+            </a:r>
+          </a:p>
+          <a:p xmlns:a="http://schemas.openxmlformats.org/drawingml/2006/main">
+            <a:r>
+              <a:t>Agora vamos ler a ideia visualmente. Regras ficam na Gold e nas métricas; o agente consome e explica. Siga a composição na ordem mostrada e conecte silver, Gold, Métricas, MCP e Agente. A imagem ou o fluxo não cria uma regra nova; ele torna visível a relação que acabamos de explicar. Use a disposição dos elementos para reforçar causa, dependência ou comparação.</a:t>
+            </a:r>
+          </a:p>
+          <a:p xmlns:a="http://schemas.openxmlformats.org/drawingml/2006/main">
+            <a:r>
+              <a:t/>
+            </a:r>
+          </a:p>
+          <a:p xmlns:a="http://schemas.openxmlformats.org/drawingml/2006/main">
+            <a:r>
+              <a:t>O que destacar:</a:t>
+            </a:r>
+          </a:p>
+          <a:p xmlns:a="http://schemas.openxmlformats.org/drawingml/2006/main">
+            <a:r>
+              <a:t>- Acompanhe o fluxo ou a comparação com o cursor e preserve a ordem de leitura do slide.</a:t>
+            </a:r>
+          </a:p>
+          <a:p xmlns:a="http://schemas.openxmlformats.org/drawingml/2006/main">
+            <a:r>
+              <a:t/>
+            </a:r>
+          </a:p>
+          <a:p xmlns:a="http://schemas.openxmlformats.org/drawingml/2006/main">
+            <a:r>
+              <a:t>Transição:</a:t>
+            </a:r>
+          </a:p>
+          <a:p xmlns:a="http://schemas.openxmlformats.org/drawingml/2006/main">
+            <a:r>
+              <a:t>Com esse ponto estabelecido, avance para “Demonstração — execute”.</a:t>
             </a:r>
           </a:p>
           <a:p xmlns:a="http://schemas.openxmlformats.org/drawingml/2006/main">
@@ -1159,7 +1459,57 @@
           <a:lstStyle xmlns:a="http://schemas.openxmlformats.org/drawingml/2006/main"/>
           <a:p xmlns:a="http://schemas.openxmlformats.org/drawingml/2006/main">
             <a:r>
-              <a:t>Execute python course.py checkpoint 12. Pause para o aluno acompanhar o terminal.</a:t>
+              <a:t>[Roteiro recomendado]</a:t>
+            </a:r>
+          </a:p>
+          <a:p xmlns:a="http://schemas.openxmlformats.org/drawingml/2006/main">
+            <a:r>
+              <a:t>[Tempo sugerido: 01:20]</a:t>
+            </a:r>
+          </a:p>
+          <a:p xmlns:a="http://schemas.openxmlformats.org/drawingml/2006/main">
+            <a:r>
+              <a:t/>
+            </a:r>
+          </a:p>
+          <a:p xmlns:a="http://schemas.openxmlformats.org/drawingml/2006/main">
+            <a:r>
+              <a:t>Fala sugerida:</a:t>
+            </a:r>
+          </a:p>
+          <a:p xmlns:a="http://schemas.openxmlformats.org/drawingml/2006/main">
+            <a:r>
+              <a:t>Agora vamos sair da explicação e comprovar o comportamento. Execute os comandos exatamente como aparecem: python course.py checkpoint 12. Não é necessário ativar o ambiente virtual manualmente; o launcher do curso seleciona o ambiente correto. Antes de avançar, confirme que o comando iniciou sem erro e dê tempo para o aluno acompanhar a mesma etapa.</a:t>
+            </a:r>
+          </a:p>
+          <a:p xmlns:a="http://schemas.openxmlformats.org/drawingml/2006/main">
+            <a:r>
+              <a:t/>
+            </a:r>
+          </a:p>
+          <a:p xmlns:a="http://schemas.openxmlformats.org/drawingml/2006/main">
+            <a:r>
+              <a:t>O que destacar:</a:t>
+            </a:r>
+          </a:p>
+          <a:p xmlns:a="http://schemas.openxmlformats.org/drawingml/2006/main">
+            <a:r>
+              <a:t>- Mostre o comando completo, execute uma linha por vez quando houver mais de uma e mantenha o terminal visível.</a:t>
+            </a:r>
+          </a:p>
+          <a:p xmlns:a="http://schemas.openxmlformats.org/drawingml/2006/main">
+            <a:r>
+              <a:t/>
+            </a:r>
+          </a:p>
+          <a:p xmlns:a="http://schemas.openxmlformats.org/drawingml/2006/main">
+            <a:r>
+              <a:t>Transição:</a:t>
+            </a:r>
+          </a:p>
+          <a:p xmlns:a="http://schemas.openxmlformats.org/drawingml/2006/main">
+            <a:r>
+              <a:t>Com esse ponto estabelecido, avance para “Demonstração — observe”.</a:t>
             </a:r>
           </a:p>
           <a:p xmlns:a="http://schemas.openxmlformats.org/drawingml/2006/main">
@@ -1274,7 +1624,57 @@
           <a:lstStyle xmlns:a="http://schemas.openxmlformats.org/drawingml/2006/main"/>
           <a:p xmlns:a="http://schemas.openxmlformats.org/drawingml/2006/main">
             <a:r>
-              <a:t>Durante a execução, destaque: Perguntas fixas; Traces gravados; Avaliador e ground truth.</a:t>
+              <a:t>[Roteiro recomendado]</a:t>
+            </a:r>
+          </a:p>
+          <a:p xmlns:a="http://schemas.openxmlformats.org/drawingml/2006/main">
+            <a:r>
+              <a:t>[Tempo sugerido: 01:10]</a:t>
+            </a:r>
+          </a:p>
+          <a:p xmlns:a="http://schemas.openxmlformats.org/drawingml/2006/main">
+            <a:r>
+              <a:t/>
+            </a:r>
+          </a:p>
+          <a:p xmlns:a="http://schemas.openxmlformats.org/drawingml/2006/main">
+            <a:r>
+              <a:t>Fala sugerida:</a:t>
+            </a:r>
+          </a:p>
+          <a:p xmlns:a="http://schemas.openxmlformats.org/drawingml/2006/main">
+            <a:r>
+              <a:t>Enquanto a execução acontece, não olhe apenas para a mensagem final. Observe perguntas fixas, Traces gravados e Avaliador e ground truth. Cada sinal responde a uma pergunta diferente sobre o pipeline. Se um deles divergir, interrompa a demonstração e investigue; o objetivo do hands-on é produzir evidência, não apenas chegar rapidamente a uma tela verde.</a:t>
+            </a:r>
+          </a:p>
+          <a:p xmlns:a="http://schemas.openxmlformats.org/drawingml/2006/main">
+            <a:r>
+              <a:t/>
+            </a:r>
+          </a:p>
+          <a:p xmlns:a="http://schemas.openxmlformats.org/drawingml/2006/main">
+            <a:r>
+              <a:t>O que destacar:</a:t>
+            </a:r>
+          </a:p>
+          <a:p xmlns:a="http://schemas.openxmlformats.org/drawingml/2006/main">
+            <a:r>
+              <a:t>- Marque cada observação quando ela aparecer no terminal ou no artifact correspondente.</a:t>
+            </a:r>
+          </a:p>
+          <a:p xmlns:a="http://schemas.openxmlformats.org/drawingml/2006/main">
+            <a:r>
+              <a:t/>
+            </a:r>
+          </a:p>
+          <a:p xmlns:a="http://schemas.openxmlformats.org/drawingml/2006/main">
+            <a:r>
+              <a:t>Transição:</a:t>
+            </a:r>
+          </a:p>
+          <a:p xmlns:a="http://schemas.openxmlformats.org/drawingml/2006/main">
+            <a:r>
+              <a:t>Com esse ponto estabelecido, avance para “RESULTADO ESPERADO”.</a:t>
             </a:r>
           </a:p>
           <a:p xmlns:a="http://schemas.openxmlformats.org/drawingml/2006/main">
@@ -1389,7 +1789,57 @@
           <a:lstStyle xmlns:a="http://schemas.openxmlformats.org/drawingml/2006/main"/>
           <a:p xmlns:a="http://schemas.openxmlformats.org/drawingml/2006/main">
             <a:r>
-              <a:t>Confirme o resultado esperado: Benchmark determinístico sem chave de LLM. Se o valor divergir, não avance sem investigar.</a:t>
+              <a:t>[Roteiro recomendado]</a:t>
+            </a:r>
+          </a:p>
+          <a:p xmlns:a="http://schemas.openxmlformats.org/drawingml/2006/main">
+            <a:r>
+              <a:t>[Tempo sugerido: 00:45]</a:t>
+            </a:r>
+          </a:p>
+          <a:p xmlns:a="http://schemas.openxmlformats.org/drawingml/2006/main">
+            <a:r>
+              <a:t/>
+            </a:r>
+          </a:p>
+          <a:p xmlns:a="http://schemas.openxmlformats.org/drawingml/2006/main">
+            <a:r>
+              <a:t>Fala sugerida:</a:t>
+            </a:r>
+          </a:p>
+          <a:p xmlns:a="http://schemas.openxmlformats.org/drawingml/2006/main">
+            <a:r>
+              <a:t>Este é o ponto de parada da demonstração: Benchmark determinístico sem chave de LLM. Esse resultado confirma que a etapa executada produziu a evidência esperada para o checkpoint 12. Se o valor, o status ou o artifact estiver diferente, não trate a divergência como detalhe de ambiente. Use o diagnóstico do curso e só avance quando a causa estiver compreendida.</a:t>
+            </a:r>
+          </a:p>
+          <a:p xmlns:a="http://schemas.openxmlformats.org/drawingml/2006/main">
+            <a:r>
+              <a:t/>
+            </a:r>
+          </a:p>
+          <a:p xmlns:a="http://schemas.openxmlformats.org/drawingml/2006/main">
+            <a:r>
+              <a:t>O que destacar:</a:t>
+            </a:r>
+          </a:p>
+          <a:p xmlns:a="http://schemas.openxmlformats.org/drawingml/2006/main">
+            <a:r>
+              <a:t>- Compare o resultado do terminal com a frase central do slide e registre a evidência antes de continuar.</a:t>
+            </a:r>
+          </a:p>
+          <a:p xmlns:a="http://schemas.openxmlformats.org/drawingml/2006/main">
+            <a:r>
+              <a:t/>
+            </a:r>
+          </a:p>
+          <a:p xmlns:a="http://schemas.openxmlformats.org/drawingml/2006/main">
+            <a:r>
+              <a:t>Transição:</a:t>
+            </a:r>
+          </a:p>
+          <a:p xmlns:a="http://schemas.openxmlformats.org/drawingml/2006/main">
+            <a:r>
+              <a:t>Com esse ponto estabelecido, avance para “O mesmo recurso afeta três decisões”.</a:t>
             </a:r>
           </a:p>
           <a:p xmlns:a="http://schemas.openxmlformats.org/drawingml/2006/main">
@@ -1504,7 +1954,57 @@
           <a:lstStyle xmlns:a="http://schemas.openxmlformats.org/drawingml/2006/main"/>
           <a:p xmlns:a="http://schemas.openxmlformats.org/drawingml/2006/main">
             <a:r>
-              <a:t>Conecte a técnica aos efeitos: Governança: consenso em código; FinOps: custo normalizado; IA: consumidor, não inventor. Não prometa economia sem medição.</a:t>
+              <a:t>[Roteiro recomendado]</a:t>
+            </a:r>
+          </a:p>
+          <a:p xmlns:a="http://schemas.openxmlformats.org/drawingml/2006/main">
+            <a:r>
+              <a:t>[Tempo sugerido: 01:00]</a:t>
+            </a:r>
+          </a:p>
+          <a:p xmlns:a="http://schemas.openxmlformats.org/drawingml/2006/main">
+            <a:r>
+              <a:t/>
+            </a:r>
+          </a:p>
+          <a:p xmlns:a="http://schemas.openxmlformats.org/drawingml/2006/main">
+            <a:r>
+              <a:t>Fala sugerida:</a:t>
+            </a:r>
+          </a:p>
+          <a:p xmlns:a="http://schemas.openxmlformats.org/drawingml/2006/main">
+            <a:r>
+              <a:t>Antes de seguir, conecte a técnica às decisões que ela afeta: Governança: consenso em código, FinOps: custo normalizado e IA: consumidor, não inventor. Governança define responsabilidade e consistência; FinOps pergunta quanto trabalho estamos repetindo; e IA depende do contexto que decidimos expor. A mesma implementação pode melhorar os três eixos, mas os ganhos devem ser medidos separadamente.</a:t>
+            </a:r>
+          </a:p>
+          <a:p xmlns:a="http://schemas.openxmlformats.org/drawingml/2006/main">
+            <a:r>
+              <a:t/>
+            </a:r>
+          </a:p>
+          <a:p xmlns:a="http://schemas.openxmlformats.org/drawingml/2006/main">
+            <a:r>
+              <a:t>O que destacar:</a:t>
+            </a:r>
+          </a:p>
+          <a:p xmlns:a="http://schemas.openxmlformats.org/drawingml/2006/main">
+            <a:r>
+              <a:t>- Percorra os três eixos e evite apresentar economia ou acurácia como consequência automática.</a:t>
+            </a:r>
+          </a:p>
+          <a:p xmlns:a="http://schemas.openxmlformats.org/drawingml/2006/main">
+            <a:r>
+              <a:t/>
+            </a:r>
+          </a:p>
+          <a:p xmlns:a="http://schemas.openxmlformats.org/drawingml/2006/main">
+            <a:r>
+              <a:t>Transição:</a:t>
+            </a:r>
+          </a:p>
+          <a:p xmlns:a="http://schemas.openxmlformats.org/drawingml/2006/main">
+            <a:r>
+              <a:t>Com esse ponto estabelecido, avance para “80%”.</a:t>
             </a:r>
           </a:p>
           <a:p xmlns:a="http://schemas.openxmlformats.org/drawingml/2006/main">
@@ -1619,7 +2119,57 @@
           <a:lstStyle xmlns:a="http://schemas.openxmlformats.org/drawingml/2006/main"/>
           <a:p xmlns:a="http://schemas.openxmlformats.org/drawingml/2006/main">
             <a:r>
-              <a:t>80%: redução de analytics reportada pela Bilt. Resultado reportado; o laboratório não generaliza o percentual.</a:t>
+              <a:t>[Roteiro recomendado]</a:t>
+            </a:r>
+          </a:p>
+          <a:p xmlns:a="http://schemas.openxmlformats.org/drawingml/2006/main">
+            <a:r>
+              <a:t>[Tempo sugerido: 00:55]</a:t>
+            </a:r>
+          </a:p>
+          <a:p xmlns:a="http://schemas.openxmlformats.org/drawingml/2006/main">
+            <a:r>
+              <a:t/>
+            </a:r>
+          </a:p>
+          <a:p xmlns:a="http://schemas.openxmlformats.org/drawingml/2006/main">
+            <a:r>
+              <a:t>Fala sugerida:</a:t>
+            </a:r>
+          </a:p>
+          <a:p xmlns:a="http://schemas.openxmlformats.org/drawingml/2006/main">
+            <a:r>
+              <a:t>Aqui temos 80%: redução de analytics reportada pela Bilt. O número ajuda a dimensionar o exemplo, mas precisa ser lido com a ressalva correta. Resultado reportado; o laboratório não generaliza o percentual. Use o case como evidência contextual e não como promessa de que outro projeto repetirá o mesmo resultado sem as mesmas condições.</a:t>
+            </a:r>
+          </a:p>
+          <a:p xmlns:a="http://schemas.openxmlformats.org/drawingml/2006/main">
+            <a:r>
+              <a:t/>
+            </a:r>
+          </a:p>
+          <a:p xmlns:a="http://schemas.openxmlformats.org/drawingml/2006/main">
+            <a:r>
+              <a:t>O que destacar:</a:t>
+            </a:r>
+          </a:p>
+          <a:p xmlns:a="http://schemas.openxmlformats.org/drawingml/2006/main">
+            <a:r>
+              <a:t>- Apresente primeiro o número, depois a definição e termine obrigatoriamente com a ressalva.</a:t>
+            </a:r>
+          </a:p>
+          <a:p xmlns:a="http://schemas.openxmlformats.org/drawingml/2006/main">
+            <a:r>
+              <a:t/>
+            </a:r>
+          </a:p>
+          <a:p xmlns:a="http://schemas.openxmlformats.org/drawingml/2006/main">
+            <a:r>
+              <a:t>Transição:</a:t>
+            </a:r>
+          </a:p>
+          <a:p xmlns:a="http://schemas.openxmlformats.org/drawingml/2006/main">
+            <a:r>
+              <a:t>Com esse ponto estabelecido, avance para “Limitações que precisam permanecer visíveis”.</a:t>
             </a:r>
           </a:p>
           <a:p xmlns:a="http://schemas.openxmlformats.org/drawingml/2006/main">
@@ -1734,7 +2284,57 @@
           <a:lstStyle xmlns:a="http://schemas.openxmlformats.org/drawingml/2006/main"/>
           <a:p xmlns:a="http://schemas.openxmlformats.org/drawingml/2006/main">
             <a:r>
-              <a:t>O agente não deve inventar as regras que o pipeline pode executar e testar. Use o diagrama para antecipar o problema que será comprovado no laboratório.</a:t>
+              <a:t>[Roteiro recomendado]</a:t>
+            </a:r>
+          </a:p>
+          <a:p xmlns:a="http://schemas.openxmlformats.org/drawingml/2006/main">
+            <a:r>
+              <a:t>[Tempo sugerido: 01:00]</a:t>
+            </a:r>
+          </a:p>
+          <a:p xmlns:a="http://schemas.openxmlformats.org/drawingml/2006/main">
+            <a:r>
+              <a:t/>
+            </a:r>
+          </a:p>
+          <a:p xmlns:a="http://schemas.openxmlformats.org/drawingml/2006/main">
+            <a:r>
+              <a:t>Fala sugerida:</a:t>
+            </a:r>
+          </a:p>
+          <a:p xmlns:a="http://schemas.openxmlformats.org/drawingml/2006/main">
+            <a:r>
+              <a:t>Quero começar com uma provocação: O agente não deve inventar as regras que o pipeline pode executar e testar. Essa pergunta orienta toda a aula. Em vez de aceitar uma afirmação porque ela parece correta, vamos procurar uma definição verificável e uma demonstração executável. Guarde essa tensão, porque voltaremos a ela quando compararmos o conceito com o resultado do laboratório.</a:t>
+            </a:r>
+          </a:p>
+          <a:p xmlns:a="http://schemas.openxmlformats.org/drawingml/2006/main">
+            <a:r>
+              <a:t/>
+            </a:r>
+          </a:p>
+          <a:p xmlns:a="http://schemas.openxmlformats.org/drawingml/2006/main">
+            <a:r>
+              <a:t>O que destacar:</a:t>
+            </a:r>
+          </a:p>
+          <a:p xmlns:a="http://schemas.openxmlformats.org/drawingml/2006/main">
+            <a:r>
+              <a:t>- Dê uma pausa depois da provocação e use o diagrama como mapa do problema, sem explicar todas as etapas ainda.</a:t>
+            </a:r>
+          </a:p>
+          <a:p xmlns:a="http://schemas.openxmlformats.org/drawingml/2006/main">
+            <a:r>
+              <a:t/>
+            </a:r>
+          </a:p>
+          <a:p xmlns:a="http://schemas.openxmlformats.org/drawingml/2006/main">
+            <a:r>
+              <a:t>Transição:</a:t>
+            </a:r>
+          </a:p>
+          <a:p xmlns:a="http://schemas.openxmlformats.org/drawingml/2006/main">
+            <a:r>
+              <a:t>Com esse ponto estabelecido, avance para “Ao final, você consegue...”.</a:t>
             </a:r>
           </a:p>
           <a:p xmlns:a="http://schemas.openxmlformats.org/drawingml/2006/main">
@@ -1849,7 +2449,57 @@
           <a:lstStyle xmlns:a="http://schemas.openxmlformats.org/drawingml/2006/main"/>
           <a:p xmlns:a="http://schemas.openxmlformats.org/drawingml/2006/main">
             <a:r>
-              <a:t>Apresente os limites sem minimizá-los: Fixtures não medem qualidade real do modelo; Tokens variam por cliente; Semântica não elimina toda ambiguidade.</a:t>
+              <a:t>[Roteiro recomendado]</a:t>
+            </a:r>
+          </a:p>
+          <a:p xmlns:a="http://schemas.openxmlformats.org/drawingml/2006/main">
+            <a:r>
+              <a:t>[Tempo sugerido: 01:00]</a:t>
+            </a:r>
+          </a:p>
+          <a:p xmlns:a="http://schemas.openxmlformats.org/drawingml/2006/main">
+            <a:r>
+              <a:t/>
+            </a:r>
+          </a:p>
+          <a:p xmlns:a="http://schemas.openxmlformats.org/drawingml/2006/main">
+            <a:r>
+              <a:t>Fala sugerida:</a:t>
+            </a:r>
+          </a:p>
+          <a:p xmlns:a="http://schemas.openxmlformats.org/drawingml/2006/main">
+            <a:r>
+              <a:t>Também precisamos declarar os limites da recomendação. Neste cenário, considere fixtures não medem qualidade real do modelo, Tokens variam por cliente e Semântica não elimina toda ambiguidade. Esses pontos não anulam a técnica; eles delimitam onde a demonstração é válida e quais condições precisam ser verificadas antes de levar o padrão para produção. Tratar limites como parte do design evita transformar uma boa prática em regra universal.</a:t>
+            </a:r>
+          </a:p>
+          <a:p xmlns:a="http://schemas.openxmlformats.org/drawingml/2006/main">
+            <a:r>
+              <a:t/>
+            </a:r>
+          </a:p>
+          <a:p xmlns:a="http://schemas.openxmlformats.org/drawingml/2006/main">
+            <a:r>
+              <a:t>O que destacar:</a:t>
+            </a:r>
+          </a:p>
+          <a:p xmlns:a="http://schemas.openxmlformats.org/drawingml/2006/main">
+            <a:r>
+              <a:t>- Leia os limites com o mesmo peso dado aos benefícios e diferencie restrição do laboratório de restrição do produto.</a:t>
+            </a:r>
+          </a:p>
+          <a:p xmlns:a="http://schemas.openxmlformats.org/drawingml/2006/main">
+            <a:r>
+              <a:t/>
+            </a:r>
+          </a:p>
+          <a:p xmlns:a="http://schemas.openxmlformats.org/drawingml/2006/main">
+            <a:r>
+              <a:t>Transição:</a:t>
+            </a:r>
+          </a:p>
+          <a:p xmlns:a="http://schemas.openxmlformats.org/drawingml/2006/main">
+            <a:r>
+              <a:t>Com esse ponto estabelecido, avance para “RADAR”.</a:t>
             </a:r>
           </a:p>
           <a:p xmlns:a="http://schemas.openxmlformats.org/drawingml/2006/main">
@@ -1964,7 +2614,57 @@
           <a:lstStyle xmlns:a="http://schemas.openxmlformats.org/drawingml/2006/main"/>
           <a:p xmlns:a="http://schemas.openxmlformats.org/drawingml/2006/main">
             <a:r>
-              <a:t>dbt State e MCP gerenciado continuam fora da aceitação open. Reforce que beta e preview não fazem parte da aceitação.</a:t>
+              <a:t>[Roteiro recomendado]</a:t>
+            </a:r>
+          </a:p>
+          <a:p xmlns:a="http://schemas.openxmlformats.org/drawingml/2006/main">
+            <a:r>
+              <a:t>[Tempo sugerido: 00:55]</a:t>
+            </a:r>
+          </a:p>
+          <a:p xmlns:a="http://schemas.openxmlformats.org/drawingml/2006/main">
+            <a:r>
+              <a:t/>
+            </a:r>
+          </a:p>
+          <a:p xmlns:a="http://schemas.openxmlformats.org/drawingml/2006/main">
+            <a:r>
+              <a:t>Fala sugerida:</a:t>
+            </a:r>
+          </a:p>
+          <a:p xmlns:a="http://schemas.openxmlformats.org/drawingml/2006/main">
+            <a:r>
+              <a:t>Este é o nosso Radar: dbt State e MCP gerenciado continuam fora da aceitação open. A intenção é mostrar a direção da ferramenta sem misturar preview com o caminho suportado da aula. Novidade observada não é recomendação de produção. Para adotar qualquer recurso futuro, confirme maturidade, adaptador, documentação e impacto sobre o projeto antes de alterar o baseline estável.</a:t>
+            </a:r>
+          </a:p>
+          <a:p xmlns:a="http://schemas.openxmlformats.org/drawingml/2006/main">
+            <a:r>
+              <a:t/>
+            </a:r>
+          </a:p>
+          <a:p xmlns:a="http://schemas.openxmlformats.org/drawingml/2006/main">
+            <a:r>
+              <a:t>O que destacar:</a:t>
+            </a:r>
+          </a:p>
+          <a:p xmlns:a="http://schemas.openxmlformats.org/drawingml/2006/main">
+            <a:r>
+              <a:t>- Reforce visualmente a regra do rodapé e não execute comandos beta ou preview como parte obrigatória da aula.</a:t>
+            </a:r>
+          </a:p>
+          <a:p xmlns:a="http://schemas.openxmlformats.org/drawingml/2006/main">
+            <a:r>
+              <a:t/>
+            </a:r>
+          </a:p>
+          <a:p xmlns:a="http://schemas.openxmlformats.org/drawingml/2006/main">
+            <a:r>
+              <a:t>Transição:</a:t>
+            </a:r>
+          </a:p>
+          <a:p xmlns:a="http://schemas.openxmlformats.org/drawingml/2006/main">
+            <a:r>
+              <a:t>Com esse ponto estabelecido, avance para “PRÓXIMO PASSO”.</a:t>
             </a:r>
           </a:p>
           <a:p xmlns:a="http://schemas.openxmlformats.org/drawingml/2006/main">
@@ -2079,7 +2779,57 @@
           <a:lstStyle xmlns:a="http://schemas.openxmlformats.org/drawingml/2006/main"/>
           <a:p xmlns:a="http://schemas.openxmlformats.org/drawingml/2006/main">
             <a:r>
-              <a:t>Mova uma regra determinística do prompt para o pipeline e teste-a. Encerre conectando a aula ao próximo checkpoint.</a:t>
+              <a:t>[Roteiro recomendado]</a:t>
+            </a:r>
+          </a:p>
+          <a:p xmlns:a="http://schemas.openxmlformats.org/drawingml/2006/main">
+            <a:r>
+              <a:t>[Tempo sugerido: 00:40]</a:t>
+            </a:r>
+          </a:p>
+          <a:p xmlns:a="http://schemas.openxmlformats.org/drawingml/2006/main">
+            <a:r>
+              <a:t/>
+            </a:r>
+          </a:p>
+          <a:p xmlns:a="http://schemas.openxmlformats.org/drawingml/2006/main">
+            <a:r>
+              <a:t>Fala sugerida:</a:t>
+            </a:r>
+          </a:p>
+          <a:p xmlns:a="http://schemas.openxmlformats.org/drawingml/2006/main">
+            <a:r>
+              <a:t>Mova uma regra determinística do prompt para o pipeline e teste-a. Faça essa etapa antes de seguir para o próximo episódio, porque o curso é cumulativo e o checkpoint atual se torna a base da aula seguinte. Se houver divergência, use o relatório de suporte e registre o que foi observado. O objetivo é avançar com um estado conhecido e reproduzível, não apenas assistir ao conteúdo.</a:t>
+            </a:r>
+          </a:p>
+          <a:p xmlns:a="http://schemas.openxmlformats.org/drawingml/2006/main">
+            <a:r>
+              <a:t/>
+            </a:r>
+          </a:p>
+          <a:p xmlns:a="http://schemas.openxmlformats.org/drawingml/2006/main">
+            <a:r>
+              <a:t>O que destacar:</a:t>
+            </a:r>
+          </a:p>
+          <a:p xmlns:a="http://schemas.openxmlformats.org/drawingml/2006/main">
+            <a:r>
+              <a:t>- Mostre o checkpoint e indique no repositório onde ficam o roteiro, os comandos e as referências da aula.</a:t>
+            </a:r>
+          </a:p>
+          <a:p xmlns:a="http://schemas.openxmlformats.org/drawingml/2006/main">
+            <a:r>
+              <a:t/>
+            </a:r>
+          </a:p>
+          <a:p xmlns:a="http://schemas.openxmlformats.org/drawingml/2006/main">
+            <a:r>
+              <a:t>Transição:</a:t>
+            </a:r>
+          </a:p>
+          <a:p xmlns:a="http://schemas.openxmlformats.org/drawingml/2006/main">
+            <a:r>
+              <a:t>Encerre retomando a pergunta inicial e confirme que o aluno sabe qual ação executar depois do episódio 12.</a:t>
             </a:r>
           </a:p>
           <a:p xmlns:a="http://schemas.openxmlformats.org/drawingml/2006/main">
@@ -2194,7 +2944,57 @@
           <a:lstStyle xmlns:a="http://schemas.openxmlformats.org/drawingml/2006/main"/>
           <a:p xmlns:a="http://schemas.openxmlformats.org/drawingml/2006/main">
             <a:r>
-              <a:t>Explique os três resultados observáveis da aula: Fixar ground truth; Comparar três tratamentos; Medir qualidade e custo normalizado.</a:t>
+              <a:t>[Roteiro recomendado]</a:t>
+            </a:r>
+          </a:p>
+          <a:p xmlns:a="http://schemas.openxmlformats.org/drawingml/2006/main">
+            <a:r>
+              <a:t>[Tempo sugerido: 01:00]</a:t>
+            </a:r>
+          </a:p>
+          <a:p xmlns:a="http://schemas.openxmlformats.org/drawingml/2006/main">
+            <a:r>
+              <a:t/>
+            </a:r>
+          </a:p>
+          <a:p xmlns:a="http://schemas.openxmlformats.org/drawingml/2006/main">
+            <a:r>
+              <a:t>Fala sugerida:</a:t>
+            </a:r>
+          </a:p>
+          <a:p xmlns:a="http://schemas.openxmlformats.org/drawingml/2006/main">
+            <a:r>
+              <a:t>Ao final desta aula, você deverá conseguir fixar ground truth, Comparar três tratamentos e Medir qualidade e custo normalizado. Esses resultados formam uma sequência: primeiro entendemos a regra, depois observamos sua representação no projeto e, por fim, comprovamos o comportamento no checkpoint. Se alguma dessas três partes não estiver clara, volte ao slide correspondente antes de executar a demonstração.</a:t>
+            </a:r>
+          </a:p>
+          <a:p xmlns:a="http://schemas.openxmlformats.org/drawingml/2006/main">
+            <a:r>
+              <a:t/>
+            </a:r>
+          </a:p>
+          <a:p xmlns:a="http://schemas.openxmlformats.org/drawingml/2006/main">
+            <a:r>
+              <a:t>O que destacar:</a:t>
+            </a:r>
+          </a:p>
+          <a:p xmlns:a="http://schemas.openxmlformats.org/drawingml/2006/main">
+            <a:r>
+              <a:t>- Percorra os objetivos da esquerda para a direita e apresente-os como resultados observáveis, não como uma agenda abstrata.</a:t>
+            </a:r>
+          </a:p>
+          <a:p xmlns:a="http://schemas.openxmlformats.org/drawingml/2006/main">
+            <a:r>
+              <a:t/>
+            </a:r>
+          </a:p>
+          <a:p xmlns:a="http://schemas.openxmlformats.org/drawingml/2006/main">
+            <a:r>
+              <a:t>Transição:</a:t>
+            </a:r>
+          </a:p>
+          <a:p xmlns:a="http://schemas.openxmlformats.org/drawingml/2006/main">
+            <a:r>
+              <a:t>Com esse ponto estabelecido, avance para “Três tratamentos, uma pergunta”.</a:t>
             </a:r>
           </a:p>
           <a:p xmlns:a="http://schemas.openxmlformats.org/drawingml/2006/main">
@@ -2309,7 +3109,57 @@
           <a:lstStyle xmlns:a="http://schemas.openxmlformats.org/drawingml/2006/main"/>
           <a:p xmlns:a="http://schemas.openxmlformats.org/drawingml/2006/main">
             <a:r>
-              <a:t>Tudo permanece igual, exceto a interface oferecida ao agente. Desenvolva os pontos: A: schema bruto; B: manifest e docs; C: métricas governadas.</a:t>
+              <a:t>[Roteiro recomendado]</a:t>
+            </a:r>
+          </a:p>
+          <a:p xmlns:a="http://schemas.openxmlformats.org/drawingml/2006/main">
+            <a:r>
+              <a:t>[Tempo sugerido: 01:10]</a:t>
+            </a:r>
+          </a:p>
+          <a:p xmlns:a="http://schemas.openxmlformats.org/drawingml/2006/main">
+            <a:r>
+              <a:t/>
+            </a:r>
+          </a:p>
+          <a:p xmlns:a="http://schemas.openxmlformats.org/drawingml/2006/main">
+            <a:r>
+              <a:t>Fala sugerida:</a:t>
+            </a:r>
+          </a:p>
+          <a:p xmlns:a="http://schemas.openxmlformats.org/drawingml/2006/main">
+            <a:r>
+              <a:t>A mensagem principal deste slide é: Tudo permanece igual, exceto a interface oferecida ao agente. Para tornar isso concreto, observe a: schema bruto, B: manifest e docs e C: métricas governadas. Esses pontos devem ser entendidos em conjunto; não são funcionalidades isoladas. No projeto, essa combinação transforma uma convenção informal em algo que pode ser revisado, testado ou consumido de maneira consistente.</a:t>
+            </a:r>
+          </a:p>
+          <a:p xmlns:a="http://schemas.openxmlformats.org/drawingml/2006/main">
+            <a:r>
+              <a:t/>
+            </a:r>
+          </a:p>
+          <a:p xmlns:a="http://schemas.openxmlformats.org/drawingml/2006/main">
+            <a:r>
+              <a:t>O que destacar:</a:t>
+            </a:r>
+          </a:p>
+          <a:p xmlns:a="http://schemas.openxmlformats.org/drawingml/2006/main">
+            <a:r>
+              <a:t>- Comece pelo título, leia a afirmação abaixo dele e depois desenvolva os itens sem repetir o texto palavra por palavra.</a:t>
+            </a:r>
+          </a:p>
+          <a:p xmlns:a="http://schemas.openxmlformats.org/drawingml/2006/main">
+            <a:r>
+              <a:t/>
+            </a:r>
+          </a:p>
+          <a:p xmlns:a="http://schemas.openxmlformats.org/drawingml/2006/main">
+            <a:r>
+              <a:t>Transição:</a:t>
+            </a:r>
+          </a:p>
+          <a:p xmlns:a="http://schemas.openxmlformats.org/drawingml/2006/main">
+            <a:r>
+              <a:t>Com esse ponto estabelecido, avance para “Ground truth vem antes do LLM”.</a:t>
             </a:r>
           </a:p>
           <a:p xmlns:a="http://schemas.openxmlformats.org/drawingml/2006/main">
@@ -2424,7 +3274,57 @@
           <a:lstStyle xmlns:a="http://schemas.openxmlformats.org/drawingml/2006/main"/>
           <a:p xmlns:a="http://schemas.openxmlformats.org/drawingml/2006/main">
             <a:r>
-              <a:t>O pipeline calcula as respostas esperadas sem depender do modelo. Desenvolva os pontos: Pergunta fixa; SQL conhecido; Resultado versionado.</a:t>
+              <a:t>[Roteiro recomendado]</a:t>
+            </a:r>
+          </a:p>
+          <a:p xmlns:a="http://schemas.openxmlformats.org/drawingml/2006/main">
+            <a:r>
+              <a:t>[Tempo sugerido: 01:10]</a:t>
+            </a:r>
+          </a:p>
+          <a:p xmlns:a="http://schemas.openxmlformats.org/drawingml/2006/main">
+            <a:r>
+              <a:t/>
+            </a:r>
+          </a:p>
+          <a:p xmlns:a="http://schemas.openxmlformats.org/drawingml/2006/main">
+            <a:r>
+              <a:t>Fala sugerida:</a:t>
+            </a:r>
+          </a:p>
+          <a:p xmlns:a="http://schemas.openxmlformats.org/drawingml/2006/main">
+            <a:r>
+              <a:t>A mensagem principal deste slide é: O pipeline calcula as respostas esperadas sem depender do modelo. Para tornar isso concreto, observe pergunta fixa, SQL conhecido e Resultado versionado. Esses pontos devem ser entendidos em conjunto; não são funcionalidades isoladas. No projeto, essa combinação transforma uma convenção informal em algo que pode ser revisado, testado ou consumido de maneira consistente.</a:t>
+            </a:r>
+          </a:p>
+          <a:p xmlns:a="http://schemas.openxmlformats.org/drawingml/2006/main">
+            <a:r>
+              <a:t/>
+            </a:r>
+          </a:p>
+          <a:p xmlns:a="http://schemas.openxmlformats.org/drawingml/2006/main">
+            <a:r>
+              <a:t>O que destacar:</a:t>
+            </a:r>
+          </a:p>
+          <a:p xmlns:a="http://schemas.openxmlformats.org/drawingml/2006/main">
+            <a:r>
+              <a:t>- Comece pelo título, leia a afirmação abaixo dele e depois desenvolva os itens sem repetir o texto palavra por palavra.</a:t>
+            </a:r>
+          </a:p>
+          <a:p xmlns:a="http://schemas.openxmlformats.org/drawingml/2006/main">
+            <a:r>
+              <a:t/>
+            </a:r>
+          </a:p>
+          <a:p xmlns:a="http://schemas.openxmlformats.org/drawingml/2006/main">
+            <a:r>
+              <a:t>Transição:</a:t>
+            </a:r>
+          </a:p>
+          <a:p xmlns:a="http://schemas.openxmlformats.org/drawingml/2006/main">
+            <a:r>
+              <a:t>Com esse ponto estabelecido, avance para “Ground truth vem antes do LLM”.</a:t>
             </a:r>
           </a:p>
           <a:p xmlns:a="http://schemas.openxmlformats.org/drawingml/2006/main">
@@ -2539,7 +3439,57 @@
           <a:lstStyle xmlns:a="http://schemas.openxmlformats.org/drawingml/2006/main"/>
           <a:p xmlns:a="http://schemas.openxmlformats.org/drawingml/2006/main">
             <a:r>
-              <a:t>Use a composição para explicar visualmente: O pipeline calcula as respostas esperadas sem depender do modelo. Pergunta fixa SQL conhecido Resultado versionado</a:t>
+              <a:t>[Roteiro recomendado]</a:t>
+            </a:r>
+          </a:p>
+          <a:p xmlns:a="http://schemas.openxmlformats.org/drawingml/2006/main">
+            <a:r>
+              <a:t>[Tempo sugerido: 00:55]</a:t>
+            </a:r>
+          </a:p>
+          <a:p xmlns:a="http://schemas.openxmlformats.org/drawingml/2006/main">
+            <a:r>
+              <a:t/>
+            </a:r>
+          </a:p>
+          <a:p xmlns:a="http://schemas.openxmlformats.org/drawingml/2006/main">
+            <a:r>
+              <a:t>Fala sugerida:</a:t>
+            </a:r>
+          </a:p>
+          <a:p xmlns:a="http://schemas.openxmlformats.org/drawingml/2006/main">
+            <a:r>
+              <a:t>Agora vamos ler a ideia visualmente. O pipeline calcula as respostas esperadas sem depender do modelo. Siga a composição na ordem mostrada e conecte pipeline, Ground truth e Avaliador. A imagem ou o fluxo não cria uma regra nova; ele torna visível a relação que acabamos de explicar. Use a disposição dos elementos para reforçar causa, dependência ou comparação.</a:t>
+            </a:r>
+          </a:p>
+          <a:p xmlns:a="http://schemas.openxmlformats.org/drawingml/2006/main">
+            <a:r>
+              <a:t/>
+            </a:r>
+          </a:p>
+          <a:p xmlns:a="http://schemas.openxmlformats.org/drawingml/2006/main">
+            <a:r>
+              <a:t>O que destacar:</a:t>
+            </a:r>
+          </a:p>
+          <a:p xmlns:a="http://schemas.openxmlformats.org/drawingml/2006/main">
+            <a:r>
+              <a:t>- Acompanhe o fluxo ou a comparação com o cursor e preserve a ordem de leitura do slide.</a:t>
+            </a:r>
+          </a:p>
+          <a:p xmlns:a="http://schemas.openxmlformats.org/drawingml/2006/main">
+            <a:r>
+              <a:t/>
+            </a:r>
+          </a:p>
+          <a:p xmlns:a="http://schemas.openxmlformats.org/drawingml/2006/main">
+            <a:r>
+              <a:t>Transição:</a:t>
+            </a:r>
+          </a:p>
+          <a:p xmlns:a="http://schemas.openxmlformats.org/drawingml/2006/main">
+            <a:r>
+              <a:t>Com esse ponto estabelecido, avance para “Trace transforma opinião em evidência”.</a:t>
             </a:r>
           </a:p>
           <a:p xmlns:a="http://schemas.openxmlformats.org/drawingml/2006/main">
@@ -2654,7 +3604,57 @@
           <a:lstStyle xmlns:a="http://schemas.openxmlformats.org/drawingml/2006/main"/>
           <a:p xmlns:a="http://schemas.openxmlformats.org/drawingml/2006/main">
             <a:r>
-              <a:t>Resposta, SQL, resultado, tokens, tools e latência ficam no mesmo JSON. Desenvolva os pontos: input/output tokens; tool calls; joins inválidos; custo normalizado.</a:t>
+              <a:t>[Roteiro recomendado]</a:t>
+            </a:r>
+          </a:p>
+          <a:p xmlns:a="http://schemas.openxmlformats.org/drawingml/2006/main">
+            <a:r>
+              <a:t>[Tempo sugerido: 01:10]</a:t>
+            </a:r>
+          </a:p>
+          <a:p xmlns:a="http://schemas.openxmlformats.org/drawingml/2006/main">
+            <a:r>
+              <a:t/>
+            </a:r>
+          </a:p>
+          <a:p xmlns:a="http://schemas.openxmlformats.org/drawingml/2006/main">
+            <a:r>
+              <a:t>Fala sugerida:</a:t>
+            </a:r>
+          </a:p>
+          <a:p xmlns:a="http://schemas.openxmlformats.org/drawingml/2006/main">
+            <a:r>
+              <a:t>A mensagem principal deste slide é: Resposta, SQL, resultado, tokens, tools e latência ficam no mesmo JSON. Para tornar isso concreto, observe input/output tokens, tool calls, joins inválidos e custo normalizado. Esses pontos devem ser entendidos em conjunto; não são funcionalidades isoladas. No projeto, essa combinação transforma uma convenção informal em algo que pode ser revisado, testado ou consumido de maneira consistente.</a:t>
+            </a:r>
+          </a:p>
+          <a:p xmlns:a="http://schemas.openxmlformats.org/drawingml/2006/main">
+            <a:r>
+              <a:t/>
+            </a:r>
+          </a:p>
+          <a:p xmlns:a="http://schemas.openxmlformats.org/drawingml/2006/main">
+            <a:r>
+              <a:t>O que destacar:</a:t>
+            </a:r>
+          </a:p>
+          <a:p xmlns:a="http://schemas.openxmlformats.org/drawingml/2006/main">
+            <a:r>
+              <a:t>- Comece pelo título, leia a afirmação abaixo dele e depois desenvolva os itens sem repetir o texto palavra por palavra.</a:t>
+            </a:r>
+          </a:p>
+          <a:p xmlns:a="http://schemas.openxmlformats.org/drawingml/2006/main">
+            <a:r>
+              <a:t/>
+            </a:r>
+          </a:p>
+          <a:p xmlns:a="http://schemas.openxmlformats.org/drawingml/2006/main">
+            <a:r>
+              <a:t>Transição:</a:t>
+            </a:r>
+          </a:p>
+          <a:p xmlns:a="http://schemas.openxmlformats.org/drawingml/2006/main">
+            <a:r>
+              <a:t>Com esse ponto estabelecido, avance para “Trace transforma opinião em evidência”.</a:t>
             </a:r>
           </a:p>
           <a:p xmlns:a="http://schemas.openxmlformats.org/drawingml/2006/main">
@@ -2769,7 +3769,57 @@
           <a:lstStyle xmlns:a="http://schemas.openxmlformats.org/drawingml/2006/main"/>
           <a:p xmlns:a="http://schemas.openxmlformats.org/drawingml/2006/main">
             <a:r>
-              <a:t>Use a composição para explicar visualmente: Resposta, SQL, resultado, tokens, tools e latência ficam no mesmo JSON. input/output tokens tool calls joins inválidos custo normalizado</a:t>
+              <a:t>[Roteiro recomendado]</a:t>
+            </a:r>
+          </a:p>
+          <a:p xmlns:a="http://schemas.openxmlformats.org/drawingml/2006/main">
+            <a:r>
+              <a:t>[Tempo sugerido: 00:55]</a:t>
+            </a:r>
+          </a:p>
+          <a:p xmlns:a="http://schemas.openxmlformats.org/drawingml/2006/main">
+            <a:r>
+              <a:t/>
+            </a:r>
+          </a:p>
+          <a:p xmlns:a="http://schemas.openxmlformats.org/drawingml/2006/main">
+            <a:r>
+              <a:t>Fala sugerida:</a:t>
+            </a:r>
+          </a:p>
+          <a:p xmlns:a="http://schemas.openxmlformats.org/drawingml/2006/main">
+            <a:r>
+              <a:t>Agora vamos ler a ideia visualmente. Resposta, SQL, resultado, tokens, tools e latência ficam no mesmo JSON. Siga a composição na ordem mostrada e conecte pergunta, Trace, Score e Comparação. A imagem ou o fluxo não cria uma regra nova; ele torna visível a relação que acabamos de explicar. Use a disposição dos elementos para reforçar causa, dependência ou comparação.</a:t>
+            </a:r>
+          </a:p>
+          <a:p xmlns:a="http://schemas.openxmlformats.org/drawingml/2006/main">
+            <a:r>
+              <a:t/>
+            </a:r>
+          </a:p>
+          <a:p xmlns:a="http://schemas.openxmlformats.org/drawingml/2006/main">
+            <a:r>
+              <a:t>O que destacar:</a:t>
+            </a:r>
+          </a:p>
+          <a:p xmlns:a="http://schemas.openxmlformats.org/drawingml/2006/main">
+            <a:r>
+              <a:t>- Acompanhe o fluxo ou a comparação com o cursor e preserve a ordem de leitura do slide.</a:t>
+            </a:r>
+          </a:p>
+          <a:p xmlns:a="http://schemas.openxmlformats.org/drawingml/2006/main">
+            <a:r>
+              <a:t/>
+            </a:r>
+          </a:p>
+          <a:p xmlns:a="http://schemas.openxmlformats.org/drawingml/2006/main">
+            <a:r>
+              <a:t>Transição:</a:t>
+            </a:r>
+          </a:p>
+          <a:p xmlns:a="http://schemas.openxmlformats.org/drawingml/2006/main">
+            <a:r>
+              <a:t>Com esse ponto estabelecido, avance para “Fixture não é execução real”.</a:t>
             </a:r>
           </a:p>
           <a:p xmlns:a="http://schemas.openxmlformats.org/drawingml/2006/main">
@@ -2884,7 +3934,57 @@
           <a:lstStyle xmlns:a="http://schemas.openxmlformats.org/drawingml/2006/main"/>
           <a:p xmlns:a="http://schemas.openxmlformats.org/drawingml/2006/main">
             <a:r>
-              <a:t>Traces gravados testam o avaliador; não provam desempenho de um LLM. Desenvolva os pontos: CI sem chave; Dados sintéticos; Execução real posterior.</a:t>
+              <a:t>[Roteiro recomendado]</a:t>
+            </a:r>
+          </a:p>
+          <a:p xmlns:a="http://schemas.openxmlformats.org/drawingml/2006/main">
+            <a:r>
+              <a:t>[Tempo sugerido: 01:10]</a:t>
+            </a:r>
+          </a:p>
+          <a:p xmlns:a="http://schemas.openxmlformats.org/drawingml/2006/main">
+            <a:r>
+              <a:t/>
+            </a:r>
+          </a:p>
+          <a:p xmlns:a="http://schemas.openxmlformats.org/drawingml/2006/main">
+            <a:r>
+              <a:t>Fala sugerida:</a:t>
+            </a:r>
+          </a:p>
+          <a:p xmlns:a="http://schemas.openxmlformats.org/drawingml/2006/main">
+            <a:r>
+              <a:t>A mensagem principal deste slide é: Traces gravados testam o avaliador; não provam desempenho de um LLM. Para tornar isso concreto, observe CI sem chave, Dados sintéticos e Execução real posterior. Esses pontos devem ser entendidos em conjunto; não são funcionalidades isoladas. No projeto, essa combinação transforma uma convenção informal em algo que pode ser revisado, testado ou consumido de maneira consistente.</a:t>
+            </a:r>
+          </a:p>
+          <a:p xmlns:a="http://schemas.openxmlformats.org/drawingml/2006/main">
+            <a:r>
+              <a:t/>
+            </a:r>
+          </a:p>
+          <a:p xmlns:a="http://schemas.openxmlformats.org/drawingml/2006/main">
+            <a:r>
+              <a:t>O que destacar:</a:t>
+            </a:r>
+          </a:p>
+          <a:p xmlns:a="http://schemas.openxmlformats.org/drawingml/2006/main">
+            <a:r>
+              <a:t>- Comece pelo título, leia a afirmação abaixo dele e depois desenvolva os itens sem repetir o texto palavra por palavra.</a:t>
+            </a:r>
+          </a:p>
+          <a:p xmlns:a="http://schemas.openxmlformats.org/drawingml/2006/main">
+            <a:r>
+              <a:t/>
+            </a:r>
+          </a:p>
+          <a:p xmlns:a="http://schemas.openxmlformats.org/drawingml/2006/main">
+            <a:r>
+              <a:t>Transição:</a:t>
+            </a:r>
+          </a:p>
+          <a:p xmlns:a="http://schemas.openxmlformats.org/drawingml/2006/main">
+            <a:r>
+              <a:t>Com esse ponto estabelecido, avance para “Fixture não é execução real”.</a:t>
             </a:r>
           </a:p>
           <a:p xmlns:a="http://schemas.openxmlformats.org/drawingml/2006/main">
@@ -3031,7 +4131,7 @@
   </p:cSld>
   <p:clrMap bg1="lt1" tx1="dk1" bg2="lt2" tx2="dk2" accent1="accent1" accent2="accent2" accent3="accent3" accent4="accent4" accent5="accent5" accent6="accent6" hlink="hlink" folHlink="folHlink"/>
   <p:sldLayoutIdLst>
-    <p:sldLayoutId xmlns:r="http://schemas.openxmlformats.org/officeDocument/2006/relationships" id="2147483649" r:id="R477d9f320ff64a8a"/>
+    <p:sldLayoutId xmlns:r="http://schemas.openxmlformats.org/officeDocument/2006/relationships" id="2147483649" r:id="Ra05e491241bc40f1"/>
   </p:sldLayoutIdLst>
   <p:txStyles>
     <p:titleStyle>
@@ -3329,8 +4429,8 @@
   </p:cSld>
   <p:clrMap bg1="lt1" tx1="dk1" bg2="lt2" tx2="dk2" accent1="accent1" accent2="accent2" accent3="accent3" accent4="accent4" accent5="accent5" accent6="accent6" hlink="hlink" folHlink="folHlink"/>
   <p:sldLayoutIdLst>
-    <p:sldLayoutId xmlns:r="http://schemas.openxmlformats.org/officeDocument/2006/relationships" id="2147483651" r:id="R6484cfa71b934249"/>
-    <p:sldLayoutId xmlns:r="http://schemas.openxmlformats.org/officeDocument/2006/relationships" id="2147483652" r:id="R71c9e3c075614cf3"/>
+    <p:sldLayoutId xmlns:r="http://schemas.openxmlformats.org/officeDocument/2006/relationships" id="2147483651" r:id="Rd7b932e783204509"/>
+    <p:sldLayoutId xmlns:r="http://schemas.openxmlformats.org/officeDocument/2006/relationships" id="2147483652" r:id="R991da4e698b644a2"/>
   </p:sldLayoutIdLst>
 </p:sldMaster>
 </file>
@@ -3854,14 +4954,14 @@
       </p:grpSpPr>
       <p:pic>
         <p:nvPicPr>
-          <p:cNvPr id="9" name="" descr="Ilustração conceitual autoral da capa: EPISÓDIO 12 — Gold governada versus agente solto."/>
+          <p:cNvPr id="10" name="" descr="Ilustração conceitual autoral da capa: EPISÓDIO 12 — Gold governada versus agente solto."/>
           <p:cNvPicPr>
             <a:picLocks xmlns:a="http://schemas.openxmlformats.org/drawingml/2006/main" noChangeAspect="1"/>
           </p:cNvPicPr>
           <p:nvPr/>
         </p:nvPicPr>
         <p:blipFill>
-          <a:blip xmlns:r="http://schemas.openxmlformats.org/officeDocument/2006/relationships" xmlns:a="http://schemas.openxmlformats.org/drawingml/2006/main" r:embed="Ra890c17883704ad7"/>
+          <a:blip xmlns:r="http://schemas.openxmlformats.org/officeDocument/2006/relationships" xmlns:a="http://schemas.openxmlformats.org/drawingml/2006/main" r:embed="R90f847dfdd4a4e96"/>
           <a:srcRect xmlns:a="http://schemas.openxmlformats.org/drawingml/2006/main" l="19785" t="0" r="19785" b="0"/>
           <a:stretch xmlns:a="http://schemas.openxmlformats.org/drawingml/2006/main">
             <a:fillRect l="0" t="0" r="0" b="0"/>
@@ -3974,6 +5074,7 @@
           <a:lstStyle xmlns:a="http://schemas.openxmlformats.org/drawingml/2006/main"/>
           <a:p xmlns:a="http://schemas.openxmlformats.org/drawingml/2006/main">
             <a:pPr>
+              <a:buNone/>
               <a:defRPr sz="1350" b="1">
                 <a:solidFill>
                   <a:srgbClr val="1EC5FF"/>
@@ -4024,6 +5125,7 @@
           <a:lstStyle xmlns:a="http://schemas.openxmlformats.org/drawingml/2006/main"/>
           <a:p xmlns:a="http://schemas.openxmlformats.org/drawingml/2006/main">
             <a:pPr>
+              <a:buNone/>
               <a:defRPr sz="3225" b="1">
                 <a:solidFill>
                   <a:srgbClr val="FFFFFF"/>
@@ -4074,6 +5176,7 @@
           <a:lstStyle xmlns:a="http://schemas.openxmlformats.org/drawingml/2006/main"/>
           <a:p xmlns:a="http://schemas.openxmlformats.org/drawingml/2006/main">
             <a:pPr>
+              <a:buNone/>
               <a:defRPr sz="1800">
                 <a:solidFill>
                   <a:srgbClr val="E2F2FF"/>
@@ -4155,6 +5258,7 @@
           <a:lstStyle xmlns:a="http://schemas.openxmlformats.org/drawingml/2006/main"/>
           <a:p xmlns:a="http://schemas.openxmlformats.org/drawingml/2006/main">
             <a:pPr>
+              <a:buNone/>
               <a:defRPr sz="1200" b="1">
                 <a:solidFill>
                   <a:srgbClr val="FFFFFF">
@@ -4246,6 +5350,7 @@
           <a:lstStyle xmlns:a="http://schemas.openxmlformats.org/drawingml/2006/main"/>
           <a:p xmlns:a="http://schemas.openxmlformats.org/drawingml/2006/main">
             <a:pPr>
+              <a:buNone/>
               <a:defRPr sz="2925" b="1">
                 <a:solidFill>
                   <a:srgbClr val="FFFFFF"/>
@@ -4329,6 +5434,7 @@
           <a:lstStyle xmlns:a="http://schemas.openxmlformats.org/drawingml/2006/main"/>
           <a:p xmlns:a="http://schemas.openxmlformats.org/drawingml/2006/main">
             <a:pPr algn="ctr">
+              <a:buNone/>
               <a:defRPr sz="1575" b="1">
                 <a:solidFill>
                   <a:srgbClr val="FFFFFF"/>
@@ -4412,6 +5518,7 @@
           <a:lstStyle xmlns:a="http://schemas.openxmlformats.org/drawingml/2006/main"/>
           <a:p xmlns:a="http://schemas.openxmlformats.org/drawingml/2006/main">
             <a:pPr algn="ctr">
+              <a:buNone/>
               <a:defRPr sz="1575" b="1">
                 <a:solidFill>
                   <a:srgbClr val="FFFFFF"/>
@@ -4495,6 +5602,7 @@
           <a:lstStyle xmlns:a="http://schemas.openxmlformats.org/drawingml/2006/main"/>
           <a:p xmlns:a="http://schemas.openxmlformats.org/drawingml/2006/main">
             <a:pPr algn="ctr">
+              <a:buNone/>
               <a:defRPr sz="1575" b="1">
                 <a:solidFill>
                   <a:srgbClr val="FFFFFF"/>
@@ -4545,6 +5653,7 @@
           <a:lstStyle xmlns:a="http://schemas.openxmlformats.org/drawingml/2006/main"/>
           <a:p xmlns:a="http://schemas.openxmlformats.org/drawingml/2006/main">
             <a:pPr>
+              <a:buNone/>
               <a:defRPr sz="1050" b="1">
                 <a:solidFill>
                   <a:srgbClr val="1EC5FF"/>
@@ -4628,6 +5737,7 @@
           <a:lstStyle xmlns:a="http://schemas.openxmlformats.org/drawingml/2006/main"/>
           <a:p xmlns:a="http://schemas.openxmlformats.org/drawingml/2006/main">
             <a:pPr>
+              <a:buNone/>
               <a:defRPr sz="825">
                 <a:solidFill>
                   <a:srgbClr val="FFFFFF">
@@ -4682,6 +5792,7 @@
           <a:lstStyle xmlns:a="http://schemas.openxmlformats.org/drawingml/2006/main"/>
           <a:p xmlns:a="http://schemas.openxmlformats.org/drawingml/2006/main">
             <a:pPr algn="r">
+              <a:buNone/>
               <a:defRPr sz="825" b="1">
                 <a:solidFill>
                   <a:srgbClr val="FFFFFF">
@@ -4773,6 +5884,7 @@
           <a:lstStyle xmlns:a="http://schemas.openxmlformats.org/drawingml/2006/main"/>
           <a:p xmlns:a="http://schemas.openxmlformats.org/drawingml/2006/main">
             <a:pPr>
+              <a:buNone/>
               <a:defRPr sz="2925" b="1">
                 <a:solidFill>
                   <a:srgbClr val="FFFFFF"/>
@@ -4823,6 +5935,7 @@
           <a:lstStyle xmlns:a="http://schemas.openxmlformats.org/drawingml/2006/main"/>
           <a:p xmlns:a="http://schemas.openxmlformats.org/drawingml/2006/main">
             <a:pPr>
+              <a:buNone/>
               <a:defRPr sz="1650">
                 <a:solidFill>
                   <a:srgbClr val="E2F2FF"/>
@@ -4873,6 +5986,7 @@
           <a:lstStyle xmlns:a="http://schemas.openxmlformats.org/drawingml/2006/main"/>
           <a:p xmlns:a="http://schemas.openxmlformats.org/drawingml/2006/main">
             <a:pPr>
+              <a:buNone/>
               <a:defRPr sz="1800">
                 <a:solidFill>
                   <a:srgbClr val="FFFFFF"/>
@@ -4890,6 +6004,7 @@
           </a:p>
           <a:p xmlns:a="http://schemas.openxmlformats.org/drawingml/2006/main">
             <a:pPr>
+              <a:buNone/>
               <a:defRPr sz="1800">
                 <a:solidFill>
                   <a:srgbClr val="FFFFFF"/>
@@ -4907,6 +6022,7 @@
           </a:p>
           <a:p xmlns:a="http://schemas.openxmlformats.org/drawingml/2006/main">
             <a:pPr>
+              <a:buNone/>
               <a:defRPr sz="1800">
                 <a:solidFill>
                   <a:srgbClr val="FFFFFF"/>
@@ -5031,6 +6147,7 @@
           <a:lstStyle xmlns:a="http://schemas.openxmlformats.org/drawingml/2006/main"/>
           <a:p xmlns:a="http://schemas.openxmlformats.org/drawingml/2006/main">
             <a:pPr algn="ctr">
+              <a:buNone/>
               <a:defRPr sz="4650" b="1">
                 <a:solidFill>
                   <a:srgbClr val="1EC5FF"/>
@@ -5081,6 +6198,7 @@
           <a:lstStyle xmlns:a="http://schemas.openxmlformats.org/drawingml/2006/main"/>
           <a:p xmlns:a="http://schemas.openxmlformats.org/drawingml/2006/main">
             <a:pPr>
+              <a:buNone/>
               <a:defRPr sz="1050" b="1">
                 <a:solidFill>
                   <a:srgbClr val="1EC5FF"/>
@@ -5164,6 +6282,7 @@
           <a:lstStyle xmlns:a="http://schemas.openxmlformats.org/drawingml/2006/main"/>
           <a:p xmlns:a="http://schemas.openxmlformats.org/drawingml/2006/main">
             <a:pPr>
+              <a:buNone/>
               <a:defRPr sz="825">
                 <a:solidFill>
                   <a:srgbClr val="FFFFFF">
@@ -5218,6 +6337,7 @@
           <a:lstStyle xmlns:a="http://schemas.openxmlformats.org/drawingml/2006/main"/>
           <a:p xmlns:a="http://schemas.openxmlformats.org/drawingml/2006/main">
             <a:pPr algn="r">
+              <a:buNone/>
               <a:defRPr sz="825" b="1">
                 <a:solidFill>
                   <a:srgbClr val="FFFFFF">
@@ -5301,6 +6421,7 @@
           <a:lstStyle xmlns:a="http://schemas.openxmlformats.org/drawingml/2006/main"/>
           <a:p xmlns:a="http://schemas.openxmlformats.org/drawingml/2006/main">
             <a:pPr>
+              <a:buNone/>
               <a:defRPr sz="2925" b="1">
                 <a:solidFill>
                   <a:srgbClr val="0B1F3A"/>
@@ -5351,6 +6472,7 @@
           <a:lstStyle xmlns:a="http://schemas.openxmlformats.org/drawingml/2006/main"/>
           <a:p xmlns:a="http://schemas.openxmlformats.org/drawingml/2006/main">
             <a:pPr>
+              <a:buNone/>
               <a:defRPr sz="1950" b="1">
                 <a:solidFill>
                   <a:srgbClr val="0B1F3A"/>
@@ -5405,14 +6527,14 @@
       </p:sp>
       <p:pic>
         <p:nvPicPr>
-          <p:cNvPr id="13" name="" descr="Figura oficial da documentação dbt usada para explicar: A recomendação oficial favorece contexto semântico — Mais modelagem tende a ampliar precisão e segurança das respostas.."/>
+          <p:cNvPr id="15" name="" descr="Figura oficial da documentação dbt usada para explicar: A recomendação oficial favorece contexto semântico — Mais modelagem tende a ampliar precisão e segurança das respostas.."/>
           <p:cNvPicPr>
             <a:picLocks xmlns:a="http://schemas.openxmlformats.org/drawingml/2006/main" noChangeAspect="1"/>
           </p:cNvPicPr>
           <p:nvPr/>
         </p:nvPicPr>
         <p:blipFill>
-          <a:blip xmlns:r="http://schemas.openxmlformats.org/officeDocument/2006/relationships" xmlns:a="http://schemas.openxmlformats.org/drawingml/2006/main" r:embed="Rd124591230c549ce"/>
+          <a:blip xmlns:r="http://schemas.openxmlformats.org/officeDocument/2006/relationships" xmlns:a="http://schemas.openxmlformats.org/drawingml/2006/main" r:embed="R72c26d719aa541f5"/>
           <a:stretch xmlns:a="http://schemas.openxmlformats.org/drawingml/2006/main"/>
         </p:blipFill>
         <p:spPr>
@@ -5458,6 +6580,7 @@
           <a:lstStyle xmlns:a="http://schemas.openxmlformats.org/drawingml/2006/main"/>
           <a:p xmlns:a="http://schemas.openxmlformats.org/drawingml/2006/main">
             <a:pPr>
+              <a:buNone/>
               <a:defRPr sz="900" i="1">
                 <a:solidFill>
                   <a:srgbClr val="5C6F86"/>
@@ -5508,6 +6631,7 @@
           <a:lstStyle xmlns:a="http://schemas.openxmlformats.org/drawingml/2006/main"/>
           <a:p xmlns:a="http://schemas.openxmlformats.org/drawingml/2006/main">
             <a:pPr>
+              <a:buNone/>
               <a:defRPr sz="1050" b="1">
                 <a:solidFill>
                   <a:srgbClr val="1565C0"/>
@@ -5591,6 +6715,7 @@
           <a:lstStyle xmlns:a="http://schemas.openxmlformats.org/drawingml/2006/main"/>
           <a:p xmlns:a="http://schemas.openxmlformats.org/drawingml/2006/main">
             <a:pPr>
+              <a:buNone/>
               <a:defRPr sz="825">
                 <a:solidFill>
                   <a:srgbClr val="0B1F3A">
@@ -5645,6 +6770,7 @@
           <a:lstStyle xmlns:a="http://schemas.openxmlformats.org/drawingml/2006/main"/>
           <a:p xmlns:a="http://schemas.openxmlformats.org/drawingml/2006/main">
             <a:pPr algn="r">
+              <a:buNone/>
               <a:defRPr sz="825" b="1">
                 <a:solidFill>
                   <a:srgbClr val="0B1F3A">
@@ -5728,6 +6854,7 @@
           <a:lstStyle xmlns:a="http://schemas.openxmlformats.org/drawingml/2006/main"/>
           <a:p xmlns:a="http://schemas.openxmlformats.org/drawingml/2006/main">
             <a:pPr>
+              <a:buNone/>
               <a:defRPr sz="2925" b="1">
                 <a:solidFill>
                   <a:srgbClr val="0B1F3A"/>
@@ -5778,6 +6905,7 @@
           <a:lstStyle xmlns:a="http://schemas.openxmlformats.org/drawingml/2006/main"/>
           <a:p xmlns:a="http://schemas.openxmlformats.org/drawingml/2006/main">
             <a:pPr>
+              <a:buNone/>
               <a:defRPr sz="1650">
                 <a:solidFill>
                   <a:srgbClr val="5C6F86"/>
@@ -5828,6 +6956,7 @@
           <a:lstStyle xmlns:a="http://schemas.openxmlformats.org/drawingml/2006/main"/>
           <a:p xmlns:a="http://schemas.openxmlformats.org/drawingml/2006/main">
             <a:pPr>
+              <a:buNone/>
               <a:defRPr sz="1800">
                 <a:solidFill>
                   <a:srgbClr val="0B1F3A"/>
@@ -5845,6 +6974,7 @@
           </a:p>
           <a:p xmlns:a="http://schemas.openxmlformats.org/drawingml/2006/main">
             <a:pPr>
+              <a:buNone/>
               <a:defRPr sz="1800">
                 <a:solidFill>
                   <a:srgbClr val="0B1F3A"/>
@@ -5862,6 +6992,7 @@
           </a:p>
           <a:p xmlns:a="http://schemas.openxmlformats.org/drawingml/2006/main">
             <a:pPr>
+              <a:buNone/>
               <a:defRPr sz="1800">
                 <a:solidFill>
                   <a:srgbClr val="0B1F3A"/>
@@ -5879,6 +7010,7 @@
           </a:p>
           <a:p xmlns:a="http://schemas.openxmlformats.org/drawingml/2006/main">
             <a:pPr>
+              <a:buNone/>
               <a:defRPr sz="1800">
                 <a:solidFill>
                   <a:srgbClr val="0B1F3A"/>
@@ -6003,6 +7135,7 @@
           <a:lstStyle xmlns:a="http://schemas.openxmlformats.org/drawingml/2006/main"/>
           <a:p xmlns:a="http://schemas.openxmlformats.org/drawingml/2006/main">
             <a:pPr algn="ctr">
+              <a:buNone/>
               <a:defRPr sz="4650" b="1">
                 <a:solidFill>
                   <a:srgbClr val="1565C0"/>
@@ -6053,6 +7186,7 @@
           <a:lstStyle xmlns:a="http://schemas.openxmlformats.org/drawingml/2006/main"/>
           <a:p xmlns:a="http://schemas.openxmlformats.org/drawingml/2006/main">
             <a:pPr>
+              <a:buNone/>
               <a:defRPr sz="1050" b="1">
                 <a:solidFill>
                   <a:srgbClr val="1565C0"/>
@@ -6136,6 +7270,7 @@
           <a:lstStyle xmlns:a="http://schemas.openxmlformats.org/drawingml/2006/main"/>
           <a:p xmlns:a="http://schemas.openxmlformats.org/drawingml/2006/main">
             <a:pPr>
+              <a:buNone/>
               <a:defRPr sz="825">
                 <a:solidFill>
                   <a:srgbClr val="0B1F3A">
@@ -6190,6 +7325,7 @@
           <a:lstStyle xmlns:a="http://schemas.openxmlformats.org/drawingml/2006/main"/>
           <a:p xmlns:a="http://schemas.openxmlformats.org/drawingml/2006/main">
             <a:pPr algn="r">
+              <a:buNone/>
               <a:defRPr sz="825" b="1">
                 <a:solidFill>
                   <a:srgbClr val="0B1F3A">
@@ -6281,6 +7417,7 @@
           <a:lstStyle xmlns:a="http://schemas.openxmlformats.org/drawingml/2006/main"/>
           <a:p xmlns:a="http://schemas.openxmlformats.org/drawingml/2006/main">
             <a:pPr>
+              <a:buNone/>
               <a:defRPr sz="2925" b="1">
                 <a:solidFill>
                   <a:srgbClr val="FFFFFF"/>
@@ -6337,6 +7474,7 @@
           <a:lstStyle xmlns:a="http://schemas.openxmlformats.org/drawingml/2006/main"/>
           <a:p xmlns:a="http://schemas.openxmlformats.org/drawingml/2006/main">
             <a:pPr algn="ctr">
+              <a:buNone/>
               <a:defRPr sz="1350" b="1">
                 <a:solidFill>
                   <a:srgbClr val="FFFFFF"/>
@@ -6393,6 +7531,7 @@
           <a:lstStyle xmlns:a="http://schemas.openxmlformats.org/drawingml/2006/main"/>
           <a:p xmlns:a="http://schemas.openxmlformats.org/drawingml/2006/main">
             <a:pPr algn="ctr">
+              <a:buNone/>
               <a:defRPr sz="1350" b="1">
                 <a:solidFill>
                   <a:srgbClr val="FFFFFF"/>
@@ -6449,6 +7588,7 @@
           <a:lstStyle xmlns:a="http://schemas.openxmlformats.org/drawingml/2006/main"/>
           <a:p xmlns:a="http://schemas.openxmlformats.org/drawingml/2006/main">
             <a:pPr algn="ctr">
+              <a:buNone/>
               <a:defRPr sz="1350" b="1">
                 <a:solidFill>
                   <a:srgbClr val="FFFFFF"/>
@@ -6505,6 +7645,7 @@
           <a:lstStyle xmlns:a="http://schemas.openxmlformats.org/drawingml/2006/main"/>
           <a:p xmlns:a="http://schemas.openxmlformats.org/drawingml/2006/main">
             <a:pPr algn="ctr">
+              <a:buNone/>
               <a:defRPr sz="1350" b="1">
                 <a:solidFill>
                   <a:srgbClr val="FFFFFF"/>
@@ -6561,6 +7702,7 @@
           <a:lstStyle xmlns:a="http://schemas.openxmlformats.org/drawingml/2006/main"/>
           <a:p xmlns:a="http://schemas.openxmlformats.org/drawingml/2006/main">
             <a:pPr algn="ctr">
+              <a:buNone/>
               <a:defRPr sz="1350" b="1">
                 <a:solidFill>
                   <a:srgbClr val="FFFFFF"/>
@@ -6580,7 +7722,7 @@
       </p:sp>
       <p:cxnSp>
         <p:nvCxnSpPr>
-          <p:cNvPr id="21" name=""/>
+          <p:cNvPr id="31" name=""/>
           <p:cNvCxnSpPr>
             <a:stCxn xmlns:a="http://schemas.openxmlformats.org/drawingml/2006/main" id="2" idx="3"/>
             <a:endCxn xmlns:a="http://schemas.openxmlformats.org/drawingml/2006/main" id="3" idx="1"/>
@@ -6606,7 +7748,7 @@
       </p:cxnSp>
       <p:cxnSp>
         <p:nvCxnSpPr>
-          <p:cNvPr id="22" name=""/>
+          <p:cNvPr id="32" name=""/>
           <p:cNvCxnSpPr>
             <a:stCxn xmlns:a="http://schemas.openxmlformats.org/drawingml/2006/main" id="3" idx="3"/>
             <a:endCxn xmlns:a="http://schemas.openxmlformats.org/drawingml/2006/main" id="4" idx="1"/>
@@ -6632,7 +7774,7 @@
       </p:cxnSp>
       <p:cxnSp>
         <p:nvCxnSpPr>
-          <p:cNvPr id="23" name=""/>
+          <p:cNvPr id="33" name=""/>
           <p:cNvCxnSpPr>
             <a:stCxn xmlns:a="http://schemas.openxmlformats.org/drawingml/2006/main" id="4" idx="3"/>
             <a:endCxn xmlns:a="http://schemas.openxmlformats.org/drawingml/2006/main" id="5" idx="1"/>
@@ -6658,7 +7800,7 @@
       </p:cxnSp>
       <p:cxnSp>
         <p:nvCxnSpPr>
-          <p:cNvPr id="24" name=""/>
+          <p:cNvPr id="34" name=""/>
           <p:cNvCxnSpPr>
             <a:stCxn xmlns:a="http://schemas.openxmlformats.org/drawingml/2006/main" id="5" idx="3"/>
             <a:endCxn xmlns:a="http://schemas.openxmlformats.org/drawingml/2006/main" id="6" idx="1"/>
@@ -6715,6 +7857,7 @@
           <a:lstStyle xmlns:a="http://schemas.openxmlformats.org/drawingml/2006/main"/>
           <a:p xmlns:a="http://schemas.openxmlformats.org/drawingml/2006/main">
             <a:pPr>
+              <a:buNone/>
               <a:defRPr sz="1050" b="1">
                 <a:solidFill>
                   <a:srgbClr val="1EC5FF"/>
@@ -6798,6 +7941,7 @@
           <a:lstStyle xmlns:a="http://schemas.openxmlformats.org/drawingml/2006/main"/>
           <a:p xmlns:a="http://schemas.openxmlformats.org/drawingml/2006/main">
             <a:pPr>
+              <a:buNone/>
               <a:defRPr sz="825">
                 <a:solidFill>
                   <a:srgbClr val="FFFFFF">
@@ -6852,6 +7996,7 @@
           <a:lstStyle xmlns:a="http://schemas.openxmlformats.org/drawingml/2006/main"/>
           <a:p xmlns:a="http://schemas.openxmlformats.org/drawingml/2006/main">
             <a:pPr algn="r">
+              <a:buNone/>
               <a:defRPr sz="825" b="1">
                 <a:solidFill>
                   <a:srgbClr val="FFFFFF">
@@ -6943,6 +8088,7 @@
           <a:lstStyle xmlns:a="http://schemas.openxmlformats.org/drawingml/2006/main"/>
           <a:p xmlns:a="http://schemas.openxmlformats.org/drawingml/2006/main">
             <a:pPr>
+              <a:buNone/>
               <a:defRPr sz="2925" b="1">
                 <a:solidFill>
                   <a:srgbClr val="FFFFFF"/>
@@ -7028,6 +8174,7 @@
           <a:lstStyle xmlns:a="http://schemas.openxmlformats.org/drawingml/2006/main"/>
           <a:p xmlns:a="http://schemas.openxmlformats.org/drawingml/2006/main">
             <a:pPr>
+              <a:buNone/>
               <a:defRPr sz="1875" b="1">
                 <a:solidFill>
                   <a:srgbClr val="1EC5FF"/>
@@ -7078,6 +8225,7 @@
           <a:lstStyle xmlns:a="http://schemas.openxmlformats.org/drawingml/2006/main"/>
           <a:p xmlns:a="http://schemas.openxmlformats.org/drawingml/2006/main">
             <a:pPr>
+              <a:buNone/>
               <a:defRPr sz="1425">
                 <a:solidFill>
                   <a:srgbClr val="E2F2FF"/>
@@ -7128,6 +8276,7 @@
           <a:lstStyle xmlns:a="http://schemas.openxmlformats.org/drawingml/2006/main"/>
           <a:p xmlns:a="http://schemas.openxmlformats.org/drawingml/2006/main">
             <a:pPr>
+              <a:buNone/>
               <a:defRPr sz="1050" b="1">
                 <a:solidFill>
                   <a:srgbClr val="1EC5FF"/>
@@ -7211,6 +8360,7 @@
           <a:lstStyle xmlns:a="http://schemas.openxmlformats.org/drawingml/2006/main"/>
           <a:p xmlns:a="http://schemas.openxmlformats.org/drawingml/2006/main">
             <a:pPr>
+              <a:buNone/>
               <a:defRPr sz="825">
                 <a:solidFill>
                   <a:srgbClr val="FFFFFF">
@@ -7265,6 +8415,7 @@
           <a:lstStyle xmlns:a="http://schemas.openxmlformats.org/drawingml/2006/main"/>
           <a:p xmlns:a="http://schemas.openxmlformats.org/drawingml/2006/main">
             <a:pPr algn="r">
+              <a:buNone/>
               <a:defRPr sz="825" b="1">
                 <a:solidFill>
                   <a:srgbClr val="FFFFFF">
@@ -7348,6 +8499,7 @@
           <a:lstStyle xmlns:a="http://schemas.openxmlformats.org/drawingml/2006/main"/>
           <a:p xmlns:a="http://schemas.openxmlformats.org/drawingml/2006/main">
             <a:pPr>
+              <a:buNone/>
               <a:defRPr sz="2925" b="1">
                 <a:solidFill>
                   <a:srgbClr val="0B1F3A"/>
@@ -7398,6 +8550,7 @@
           <a:lstStyle xmlns:a="http://schemas.openxmlformats.org/drawingml/2006/main"/>
           <a:p xmlns:a="http://schemas.openxmlformats.org/drawingml/2006/main">
             <a:pPr>
+              <a:buNone/>
               <a:defRPr sz="3450" b="1">
                 <a:solidFill>
                   <a:srgbClr val="1565C0"/>
@@ -7448,6 +8601,7 @@
           <a:lstStyle xmlns:a="http://schemas.openxmlformats.org/drawingml/2006/main"/>
           <a:p xmlns:a="http://schemas.openxmlformats.org/drawingml/2006/main">
             <a:pPr>
+              <a:buNone/>
               <a:defRPr sz="1575" b="1">
                 <a:solidFill>
                   <a:srgbClr val="0B1F3A"/>
@@ -7529,6 +8683,7 @@
           <a:lstStyle xmlns:a="http://schemas.openxmlformats.org/drawingml/2006/main"/>
           <a:p xmlns:a="http://schemas.openxmlformats.org/drawingml/2006/main">
             <a:pPr>
+              <a:buNone/>
               <a:defRPr sz="3450" b="1">
                 <a:solidFill>
                   <a:srgbClr val="1565C0"/>
@@ -7579,6 +8734,7 @@
           <a:lstStyle xmlns:a="http://schemas.openxmlformats.org/drawingml/2006/main"/>
           <a:p xmlns:a="http://schemas.openxmlformats.org/drawingml/2006/main">
             <a:pPr>
+              <a:buNone/>
               <a:defRPr sz="1575" b="1">
                 <a:solidFill>
                   <a:srgbClr val="0B1F3A"/>
@@ -7660,6 +8816,7 @@
           <a:lstStyle xmlns:a="http://schemas.openxmlformats.org/drawingml/2006/main"/>
           <a:p xmlns:a="http://schemas.openxmlformats.org/drawingml/2006/main">
             <a:pPr>
+              <a:buNone/>
               <a:defRPr sz="3450" b="1">
                 <a:solidFill>
                   <a:srgbClr val="1565C0"/>
@@ -7710,6 +8867,7 @@
           <a:lstStyle xmlns:a="http://schemas.openxmlformats.org/drawingml/2006/main"/>
           <a:p xmlns:a="http://schemas.openxmlformats.org/drawingml/2006/main">
             <a:pPr>
+              <a:buNone/>
               <a:defRPr sz="1575" b="1">
                 <a:solidFill>
                   <a:srgbClr val="0B1F3A"/>
@@ -7760,6 +8918,7 @@
           <a:lstStyle xmlns:a="http://schemas.openxmlformats.org/drawingml/2006/main"/>
           <a:p xmlns:a="http://schemas.openxmlformats.org/drawingml/2006/main">
             <a:pPr>
+              <a:buNone/>
               <a:defRPr sz="1050" b="1">
                 <a:solidFill>
                   <a:srgbClr val="1565C0"/>
@@ -7843,6 +9002,7 @@
           <a:lstStyle xmlns:a="http://schemas.openxmlformats.org/drawingml/2006/main"/>
           <a:p xmlns:a="http://schemas.openxmlformats.org/drawingml/2006/main">
             <a:pPr>
+              <a:buNone/>
               <a:defRPr sz="825">
                 <a:solidFill>
                   <a:srgbClr val="0B1F3A">
@@ -7897,6 +9057,7 @@
           <a:lstStyle xmlns:a="http://schemas.openxmlformats.org/drawingml/2006/main"/>
           <a:p xmlns:a="http://schemas.openxmlformats.org/drawingml/2006/main">
             <a:pPr algn="r">
+              <a:buNone/>
               <a:defRPr sz="825" b="1">
                 <a:solidFill>
                   <a:srgbClr val="0B1F3A">
@@ -7988,6 +9149,7 @@
           <a:lstStyle xmlns:a="http://schemas.openxmlformats.org/drawingml/2006/main"/>
           <a:p xmlns:a="http://schemas.openxmlformats.org/drawingml/2006/main">
             <a:pPr>
+              <a:buNone/>
               <a:defRPr sz="1350" b="1">
                 <a:solidFill>
                   <a:srgbClr val="1EC5FF"/>
@@ -8038,6 +9200,7 @@
           <a:lstStyle xmlns:a="http://schemas.openxmlformats.org/drawingml/2006/main"/>
           <a:p xmlns:a="http://schemas.openxmlformats.org/drawingml/2006/main">
             <a:pPr>
+              <a:buNone/>
               <a:defRPr sz="3450" b="1">
                 <a:solidFill>
                   <a:srgbClr val="FFFFFF"/>
@@ -8088,6 +9251,7 @@
           <a:lstStyle xmlns:a="http://schemas.openxmlformats.org/drawingml/2006/main"/>
           <a:p xmlns:a="http://schemas.openxmlformats.org/drawingml/2006/main">
             <a:pPr>
+              <a:buNone/>
               <a:defRPr sz="1650">
                 <a:solidFill>
                   <a:srgbClr val="E2F2FF"/>
@@ -8212,6 +9376,7 @@
           <a:lstStyle xmlns:a="http://schemas.openxmlformats.org/drawingml/2006/main"/>
           <a:p xmlns:a="http://schemas.openxmlformats.org/drawingml/2006/main">
             <a:pPr>
+              <a:buNone/>
               <a:defRPr sz="1050" b="1">
                 <a:solidFill>
                   <a:srgbClr val="1EC5FF"/>
@@ -8295,6 +9460,7 @@
           <a:lstStyle xmlns:a="http://schemas.openxmlformats.org/drawingml/2006/main"/>
           <a:p xmlns:a="http://schemas.openxmlformats.org/drawingml/2006/main">
             <a:pPr>
+              <a:buNone/>
               <a:defRPr sz="825">
                 <a:solidFill>
                   <a:srgbClr val="FFFFFF">
@@ -8349,6 +9515,7 @@
           <a:lstStyle xmlns:a="http://schemas.openxmlformats.org/drawingml/2006/main"/>
           <a:p xmlns:a="http://schemas.openxmlformats.org/drawingml/2006/main">
             <a:pPr algn="r">
+              <a:buNone/>
               <a:defRPr sz="825" b="1">
                 <a:solidFill>
                   <a:srgbClr val="FFFFFF">
@@ -8432,6 +9599,7 @@
           <a:lstStyle xmlns:a="http://schemas.openxmlformats.org/drawingml/2006/main"/>
           <a:p xmlns:a="http://schemas.openxmlformats.org/drawingml/2006/main">
             <a:pPr>
+              <a:buNone/>
               <a:defRPr sz="2925" b="1">
                 <a:solidFill>
                   <a:srgbClr val="0B1F3A"/>
@@ -8482,6 +9650,7 @@
           <a:lstStyle xmlns:a="http://schemas.openxmlformats.org/drawingml/2006/main"/>
           <a:p xmlns:a="http://schemas.openxmlformats.org/drawingml/2006/main">
             <a:pPr>
+              <a:buNone/>
               <a:defRPr sz="3450" b="1">
                 <a:solidFill>
                   <a:srgbClr val="1565C0"/>
@@ -8532,6 +9701,7 @@
           <a:lstStyle xmlns:a="http://schemas.openxmlformats.org/drawingml/2006/main"/>
           <a:p xmlns:a="http://schemas.openxmlformats.org/drawingml/2006/main">
             <a:pPr>
+              <a:buNone/>
               <a:defRPr sz="1575" b="1">
                 <a:solidFill>
                   <a:srgbClr val="0B1F3A"/>
@@ -8613,6 +9783,7 @@
           <a:lstStyle xmlns:a="http://schemas.openxmlformats.org/drawingml/2006/main"/>
           <a:p xmlns:a="http://schemas.openxmlformats.org/drawingml/2006/main">
             <a:pPr>
+              <a:buNone/>
               <a:defRPr sz="3450" b="1">
                 <a:solidFill>
                   <a:srgbClr val="1565C0"/>
@@ -8663,6 +9834,7 @@
           <a:lstStyle xmlns:a="http://schemas.openxmlformats.org/drawingml/2006/main"/>
           <a:p xmlns:a="http://schemas.openxmlformats.org/drawingml/2006/main">
             <a:pPr>
+              <a:buNone/>
               <a:defRPr sz="1575" b="1">
                 <a:solidFill>
                   <a:srgbClr val="0B1F3A"/>
@@ -8744,6 +9916,7 @@
           <a:lstStyle xmlns:a="http://schemas.openxmlformats.org/drawingml/2006/main"/>
           <a:p xmlns:a="http://schemas.openxmlformats.org/drawingml/2006/main">
             <a:pPr>
+              <a:buNone/>
               <a:defRPr sz="3450" b="1">
                 <a:solidFill>
                   <a:srgbClr val="1565C0"/>
@@ -8794,6 +9967,7 @@
           <a:lstStyle xmlns:a="http://schemas.openxmlformats.org/drawingml/2006/main"/>
           <a:p xmlns:a="http://schemas.openxmlformats.org/drawingml/2006/main">
             <a:pPr>
+              <a:buNone/>
               <a:defRPr sz="1575" b="1">
                 <a:solidFill>
                   <a:srgbClr val="0B1F3A"/>
@@ -8844,6 +10018,7 @@
           <a:lstStyle xmlns:a="http://schemas.openxmlformats.org/drawingml/2006/main"/>
           <a:p xmlns:a="http://schemas.openxmlformats.org/drawingml/2006/main">
             <a:pPr>
+              <a:buNone/>
               <a:defRPr sz="1050" b="1">
                 <a:solidFill>
                   <a:srgbClr val="1565C0"/>
@@ -8927,6 +10102,7 @@
           <a:lstStyle xmlns:a="http://schemas.openxmlformats.org/drawingml/2006/main"/>
           <a:p xmlns:a="http://schemas.openxmlformats.org/drawingml/2006/main">
             <a:pPr>
+              <a:buNone/>
               <a:defRPr sz="825">
                 <a:solidFill>
                   <a:srgbClr val="0B1F3A">
@@ -8981,6 +10157,7 @@
           <a:lstStyle xmlns:a="http://schemas.openxmlformats.org/drawingml/2006/main"/>
           <a:p xmlns:a="http://schemas.openxmlformats.org/drawingml/2006/main">
             <a:pPr algn="r">
+              <a:buNone/>
               <a:defRPr sz="825" b="1">
                 <a:solidFill>
                   <a:srgbClr val="0B1F3A">
@@ -9072,6 +10249,7 @@
           <a:lstStyle xmlns:a="http://schemas.openxmlformats.org/drawingml/2006/main"/>
           <a:p xmlns:a="http://schemas.openxmlformats.org/drawingml/2006/main">
             <a:pPr>
+              <a:buNone/>
               <a:defRPr sz="5550" b="1">
                 <a:solidFill>
                   <a:srgbClr val="1EC5FF"/>
@@ -9122,6 +10300,7 @@
           <a:lstStyle xmlns:a="http://schemas.openxmlformats.org/drawingml/2006/main"/>
           <a:p xmlns:a="http://schemas.openxmlformats.org/drawingml/2006/main">
             <a:pPr>
+              <a:buNone/>
               <a:defRPr sz="2250" b="1">
                 <a:solidFill>
                   <a:srgbClr val="FFFFFF"/>
@@ -9205,6 +10384,7 @@
           <a:lstStyle xmlns:a="http://schemas.openxmlformats.org/drawingml/2006/main"/>
           <a:p xmlns:a="http://schemas.openxmlformats.org/drawingml/2006/main">
             <a:pPr>
+              <a:buNone/>
               <a:defRPr sz="1800">
                 <a:solidFill>
                   <a:srgbClr val="E2F2FF"/>
@@ -9255,6 +10435,7 @@
           <a:lstStyle xmlns:a="http://schemas.openxmlformats.org/drawingml/2006/main"/>
           <a:p xmlns:a="http://schemas.openxmlformats.org/drawingml/2006/main">
             <a:pPr>
+              <a:buNone/>
               <a:defRPr sz="1050" b="1">
                 <a:solidFill>
                   <a:srgbClr val="1EC5FF"/>
@@ -9338,6 +10519,7 @@
           <a:lstStyle xmlns:a="http://schemas.openxmlformats.org/drawingml/2006/main"/>
           <a:p xmlns:a="http://schemas.openxmlformats.org/drawingml/2006/main">
             <a:pPr>
+              <a:buNone/>
               <a:defRPr sz="825">
                 <a:solidFill>
                   <a:srgbClr val="FFFFFF">
@@ -9392,6 +10574,7 @@
           <a:lstStyle xmlns:a="http://schemas.openxmlformats.org/drawingml/2006/main"/>
           <a:p xmlns:a="http://schemas.openxmlformats.org/drawingml/2006/main">
             <a:pPr algn="r">
+              <a:buNone/>
               <a:defRPr sz="825" b="1">
                 <a:solidFill>
                   <a:srgbClr val="FFFFFF">
@@ -9475,6 +10658,7 @@
           <a:lstStyle xmlns:a="http://schemas.openxmlformats.org/drawingml/2006/main"/>
           <a:p xmlns:a="http://schemas.openxmlformats.org/drawingml/2006/main">
             <a:pPr>
+              <a:buNone/>
               <a:defRPr sz="2850" b="1">
                 <a:solidFill>
                   <a:srgbClr val="0B1F3A"/>
@@ -9556,6 +10740,7 @@
           <a:lstStyle xmlns:a="http://schemas.openxmlformats.org/drawingml/2006/main"/>
           <a:p xmlns:a="http://schemas.openxmlformats.org/drawingml/2006/main">
             <a:pPr>
+              <a:buNone/>
               <a:defRPr sz="1425" b="1">
                 <a:solidFill>
                   <a:srgbClr val="1565C0"/>
@@ -9610,14 +10795,14 @@
       </p:sp>
       <p:pic>
         <p:nvPicPr>
-          <p:cNvPr id="14" name="" descr="Diagrama didático autoral que apresenta: O agente não deve inventar as regras que o pipeline pode executar e testar. — A pergunta que guia a aula."/>
+          <p:cNvPr id="16" name="" descr="Diagrama didático autoral que apresenta: O agente não deve inventar as regras que o pipeline pode executar e testar. — A pergunta que guia a aula."/>
           <p:cNvPicPr>
             <a:picLocks xmlns:a="http://schemas.openxmlformats.org/drawingml/2006/main" noChangeAspect="1"/>
           </p:cNvPicPr>
           <p:nvPr/>
         </p:nvPicPr>
         <p:blipFill>
-          <a:blip xmlns:r="http://schemas.openxmlformats.org/officeDocument/2006/relationships" xmlns:a="http://schemas.openxmlformats.org/drawingml/2006/main" r:embed="Rb9dbbdee43084b56"/>
+          <a:blip xmlns:r="http://schemas.openxmlformats.org/officeDocument/2006/relationships" xmlns:a="http://schemas.openxmlformats.org/drawingml/2006/main" r:embed="R5f079af318ab4faf"/>
           <a:stretch xmlns:a="http://schemas.openxmlformats.org/drawingml/2006/main"/>
         </p:blipFill>
         <p:spPr>
@@ -9663,6 +10848,7 @@
           <a:lstStyle xmlns:a="http://schemas.openxmlformats.org/drawingml/2006/main"/>
           <a:p xmlns:a="http://schemas.openxmlformats.org/drawingml/2006/main">
             <a:pPr>
+              <a:buNone/>
               <a:defRPr sz="1050" b="1">
                 <a:solidFill>
                   <a:srgbClr val="1565C0"/>
@@ -9746,6 +10932,7 @@
           <a:lstStyle xmlns:a="http://schemas.openxmlformats.org/drawingml/2006/main"/>
           <a:p xmlns:a="http://schemas.openxmlformats.org/drawingml/2006/main">
             <a:pPr>
+              <a:buNone/>
               <a:defRPr sz="825">
                 <a:solidFill>
                   <a:srgbClr val="0B1F3A">
@@ -9800,6 +10987,7 @@
           <a:lstStyle xmlns:a="http://schemas.openxmlformats.org/drawingml/2006/main"/>
           <a:p xmlns:a="http://schemas.openxmlformats.org/drawingml/2006/main">
             <a:pPr algn="r">
+              <a:buNone/>
               <a:defRPr sz="825" b="1">
                 <a:solidFill>
                   <a:srgbClr val="0B1F3A">
@@ -9883,6 +11071,7 @@
           <a:lstStyle xmlns:a="http://schemas.openxmlformats.org/drawingml/2006/main"/>
           <a:p xmlns:a="http://schemas.openxmlformats.org/drawingml/2006/main">
             <a:pPr>
+              <a:buNone/>
               <a:defRPr sz="2925" b="1">
                 <a:solidFill>
                   <a:srgbClr val="0B1F3A"/>
@@ -9933,6 +11122,7 @@
           <a:lstStyle xmlns:a="http://schemas.openxmlformats.org/drawingml/2006/main"/>
           <a:p xmlns:a="http://schemas.openxmlformats.org/drawingml/2006/main">
             <a:pPr>
+              <a:buNone/>
               <a:defRPr sz="1950">
                 <a:solidFill>
                   <a:srgbClr val="0B1F3A"/>
@@ -9950,6 +11140,7 @@
           </a:p>
           <a:p xmlns:a="http://schemas.openxmlformats.org/drawingml/2006/main">
             <a:pPr>
+              <a:buNone/>
               <a:defRPr sz="1950">
                 <a:solidFill>
                   <a:srgbClr val="0B1F3A"/>
@@ -9967,6 +11158,7 @@
           </a:p>
           <a:p xmlns:a="http://schemas.openxmlformats.org/drawingml/2006/main">
             <a:pPr>
+              <a:buNone/>
               <a:defRPr sz="1950">
                 <a:solidFill>
                   <a:srgbClr val="0B1F3A"/>
@@ -10017,6 +11209,7 @@
           <a:lstStyle xmlns:a="http://schemas.openxmlformats.org/drawingml/2006/main"/>
           <a:p xmlns:a="http://schemas.openxmlformats.org/drawingml/2006/main">
             <a:pPr>
+              <a:buNone/>
               <a:defRPr sz="1050" b="1">
                 <a:solidFill>
                   <a:srgbClr val="1565C0"/>
@@ -10100,6 +11293,7 @@
           <a:lstStyle xmlns:a="http://schemas.openxmlformats.org/drawingml/2006/main"/>
           <a:p xmlns:a="http://schemas.openxmlformats.org/drawingml/2006/main">
             <a:pPr>
+              <a:buNone/>
               <a:defRPr sz="825">
                 <a:solidFill>
                   <a:srgbClr val="0B1F3A">
@@ -10154,6 +11348,7 @@
           <a:lstStyle xmlns:a="http://schemas.openxmlformats.org/drawingml/2006/main"/>
           <a:p xmlns:a="http://schemas.openxmlformats.org/drawingml/2006/main">
             <a:pPr algn="r">
+              <a:buNone/>
               <a:defRPr sz="825" b="1">
                 <a:solidFill>
                   <a:srgbClr val="0B1F3A">
@@ -10245,6 +11440,7 @@
           <a:lstStyle xmlns:a="http://schemas.openxmlformats.org/drawingml/2006/main"/>
           <a:p xmlns:a="http://schemas.openxmlformats.org/drawingml/2006/main">
             <a:pPr>
+              <a:buNone/>
               <a:defRPr sz="1500" b="1">
                 <a:solidFill>
                   <a:srgbClr val="1EC5FF"/>
@@ -10295,6 +11491,7 @@
           <a:lstStyle xmlns:a="http://schemas.openxmlformats.org/drawingml/2006/main"/>
           <a:p xmlns:a="http://schemas.openxmlformats.org/drawingml/2006/main">
             <a:pPr>
+              <a:buNone/>
               <a:defRPr sz="2850" b="1">
                 <a:solidFill>
                   <a:srgbClr val="FFFFFF"/>
@@ -10345,6 +11542,7 @@
           <a:lstStyle xmlns:a="http://schemas.openxmlformats.org/drawingml/2006/main"/>
           <a:p xmlns:a="http://schemas.openxmlformats.org/drawingml/2006/main">
             <a:pPr>
+              <a:buNone/>
               <a:defRPr sz="1500">
                 <a:solidFill>
                   <a:srgbClr val="E2F2FF"/>
@@ -10469,6 +11667,7 @@
           <a:lstStyle xmlns:a="http://schemas.openxmlformats.org/drawingml/2006/main"/>
           <a:p xmlns:a="http://schemas.openxmlformats.org/drawingml/2006/main">
             <a:pPr>
+              <a:buNone/>
               <a:defRPr sz="1050" b="1">
                 <a:solidFill>
                   <a:srgbClr val="1EC5FF"/>
@@ -10552,6 +11751,7 @@
           <a:lstStyle xmlns:a="http://schemas.openxmlformats.org/drawingml/2006/main"/>
           <a:p xmlns:a="http://schemas.openxmlformats.org/drawingml/2006/main">
             <a:pPr>
+              <a:buNone/>
               <a:defRPr sz="825">
                 <a:solidFill>
                   <a:srgbClr val="FFFFFF">
@@ -10606,6 +11806,7 @@
           <a:lstStyle xmlns:a="http://schemas.openxmlformats.org/drawingml/2006/main"/>
           <a:p xmlns:a="http://schemas.openxmlformats.org/drawingml/2006/main">
             <a:pPr algn="r">
+              <a:buNone/>
               <a:defRPr sz="825" b="1">
                 <a:solidFill>
                   <a:srgbClr val="FFFFFF">
@@ -10689,6 +11890,7 @@
           <a:lstStyle xmlns:a="http://schemas.openxmlformats.org/drawingml/2006/main"/>
           <a:p xmlns:a="http://schemas.openxmlformats.org/drawingml/2006/main">
             <a:pPr>
+              <a:buNone/>
               <a:defRPr sz="1350" b="1">
                 <a:solidFill>
                   <a:srgbClr val="1565C0"/>
@@ -10739,6 +11941,7 @@
           <a:lstStyle xmlns:a="http://schemas.openxmlformats.org/drawingml/2006/main"/>
           <a:p xmlns:a="http://schemas.openxmlformats.org/drawingml/2006/main">
             <a:pPr>
+              <a:buNone/>
               <a:defRPr sz="3300" b="1">
                 <a:solidFill>
                   <a:srgbClr val="0B1F3A"/>
@@ -10789,6 +11992,7 @@
           <a:lstStyle xmlns:a="http://schemas.openxmlformats.org/drawingml/2006/main"/>
           <a:p xmlns:a="http://schemas.openxmlformats.org/drawingml/2006/main">
             <a:pPr>
+              <a:buNone/>
               <a:defRPr sz="1500">
                 <a:solidFill>
                   <a:srgbClr val="5C6F86"/>
@@ -10839,6 +12043,7 @@
           <a:lstStyle xmlns:a="http://schemas.openxmlformats.org/drawingml/2006/main"/>
           <a:p xmlns:a="http://schemas.openxmlformats.org/drawingml/2006/main">
             <a:pPr>
+              <a:buNone/>
               <a:defRPr sz="1050" b="1">
                 <a:solidFill>
                   <a:srgbClr val="1565C0"/>
@@ -10922,6 +12127,7 @@
           <a:lstStyle xmlns:a="http://schemas.openxmlformats.org/drawingml/2006/main"/>
           <a:p xmlns:a="http://schemas.openxmlformats.org/drawingml/2006/main">
             <a:pPr>
+              <a:buNone/>
               <a:defRPr sz="825">
                 <a:solidFill>
                   <a:srgbClr val="0B1F3A">
@@ -10976,6 +12182,7 @@
           <a:lstStyle xmlns:a="http://schemas.openxmlformats.org/drawingml/2006/main"/>
           <a:p xmlns:a="http://schemas.openxmlformats.org/drawingml/2006/main">
             <a:pPr algn="r">
+              <a:buNone/>
               <a:defRPr sz="825" b="1">
                 <a:solidFill>
                   <a:srgbClr val="0B1F3A">
@@ -11067,6 +12274,7 @@
           <a:lstStyle xmlns:a="http://schemas.openxmlformats.org/drawingml/2006/main"/>
           <a:p xmlns:a="http://schemas.openxmlformats.org/drawingml/2006/main">
             <a:pPr>
+              <a:buNone/>
               <a:defRPr sz="2925" b="1">
                 <a:solidFill>
                   <a:srgbClr val="FFFFFF"/>
@@ -11117,6 +12325,7 @@
           <a:lstStyle xmlns:a="http://schemas.openxmlformats.org/drawingml/2006/main"/>
           <a:p xmlns:a="http://schemas.openxmlformats.org/drawingml/2006/main">
             <a:pPr>
+              <a:buNone/>
               <a:defRPr sz="3450" b="1">
                 <a:solidFill>
                   <a:srgbClr val="1EC5FF"/>
@@ -11167,6 +12376,7 @@
           <a:lstStyle xmlns:a="http://schemas.openxmlformats.org/drawingml/2006/main"/>
           <a:p xmlns:a="http://schemas.openxmlformats.org/drawingml/2006/main">
             <a:pPr>
+              <a:buNone/>
               <a:defRPr sz="1575" b="1">
                 <a:solidFill>
                   <a:srgbClr val="FFFFFF"/>
@@ -11248,6 +12458,7 @@
           <a:lstStyle xmlns:a="http://schemas.openxmlformats.org/drawingml/2006/main"/>
           <a:p xmlns:a="http://schemas.openxmlformats.org/drawingml/2006/main">
             <a:pPr>
+              <a:buNone/>
               <a:defRPr sz="3450" b="1">
                 <a:solidFill>
                   <a:srgbClr val="1EC5FF"/>
@@ -11298,6 +12509,7 @@
           <a:lstStyle xmlns:a="http://schemas.openxmlformats.org/drawingml/2006/main"/>
           <a:p xmlns:a="http://schemas.openxmlformats.org/drawingml/2006/main">
             <a:pPr>
+              <a:buNone/>
               <a:defRPr sz="1575" b="1">
                 <a:solidFill>
                   <a:srgbClr val="FFFFFF"/>
@@ -11379,6 +12591,7 @@
           <a:lstStyle xmlns:a="http://schemas.openxmlformats.org/drawingml/2006/main"/>
           <a:p xmlns:a="http://schemas.openxmlformats.org/drawingml/2006/main">
             <a:pPr>
+              <a:buNone/>
               <a:defRPr sz="3450" b="1">
                 <a:solidFill>
                   <a:srgbClr val="1EC5FF"/>
@@ -11429,6 +12642,7 @@
           <a:lstStyle xmlns:a="http://schemas.openxmlformats.org/drawingml/2006/main"/>
           <a:p xmlns:a="http://schemas.openxmlformats.org/drawingml/2006/main">
             <a:pPr>
+              <a:buNone/>
               <a:defRPr sz="1575" b="1">
                 <a:solidFill>
                   <a:srgbClr val="FFFFFF"/>
@@ -11479,6 +12693,7 @@
           <a:lstStyle xmlns:a="http://schemas.openxmlformats.org/drawingml/2006/main"/>
           <a:p xmlns:a="http://schemas.openxmlformats.org/drawingml/2006/main">
             <a:pPr>
+              <a:buNone/>
               <a:defRPr sz="1050" b="1">
                 <a:solidFill>
                   <a:srgbClr val="1EC5FF"/>
@@ -11562,6 +12777,7 @@
           <a:lstStyle xmlns:a="http://schemas.openxmlformats.org/drawingml/2006/main"/>
           <a:p xmlns:a="http://schemas.openxmlformats.org/drawingml/2006/main">
             <a:pPr>
+              <a:buNone/>
               <a:defRPr sz="825">
                 <a:solidFill>
                   <a:srgbClr val="FFFFFF">
@@ -11616,6 +12832,7 @@
           <a:lstStyle xmlns:a="http://schemas.openxmlformats.org/drawingml/2006/main"/>
           <a:p xmlns:a="http://schemas.openxmlformats.org/drawingml/2006/main">
             <a:pPr algn="r">
+              <a:buNone/>
               <a:defRPr sz="825" b="1">
                 <a:solidFill>
                   <a:srgbClr val="FFFFFF">
@@ -11707,6 +12924,7 @@
           <a:lstStyle xmlns:a="http://schemas.openxmlformats.org/drawingml/2006/main"/>
           <a:p xmlns:a="http://schemas.openxmlformats.org/drawingml/2006/main">
             <a:pPr>
+              <a:buNone/>
               <a:defRPr sz="2925" b="1">
                 <a:solidFill>
                   <a:srgbClr val="FFFFFF"/>
@@ -11757,6 +12975,7 @@
           <a:lstStyle xmlns:a="http://schemas.openxmlformats.org/drawingml/2006/main"/>
           <a:p xmlns:a="http://schemas.openxmlformats.org/drawingml/2006/main">
             <a:pPr>
+              <a:buNone/>
               <a:defRPr sz="1650">
                 <a:solidFill>
                   <a:srgbClr val="E2F2FF"/>
@@ -11807,6 +13026,7 @@
           <a:lstStyle xmlns:a="http://schemas.openxmlformats.org/drawingml/2006/main"/>
           <a:p xmlns:a="http://schemas.openxmlformats.org/drawingml/2006/main">
             <a:pPr>
+              <a:buNone/>
               <a:defRPr sz="1800">
                 <a:solidFill>
                   <a:srgbClr val="FFFFFF"/>
@@ -11824,6 +13044,7 @@
           </a:p>
           <a:p xmlns:a="http://schemas.openxmlformats.org/drawingml/2006/main">
             <a:pPr>
+              <a:buNone/>
               <a:defRPr sz="1800">
                 <a:solidFill>
                   <a:srgbClr val="FFFFFF"/>
@@ -11841,6 +13062,7 @@
           </a:p>
           <a:p xmlns:a="http://schemas.openxmlformats.org/drawingml/2006/main">
             <a:pPr>
+              <a:buNone/>
               <a:defRPr sz="1800">
                 <a:solidFill>
                   <a:srgbClr val="FFFFFF"/>
@@ -11965,6 +13187,7 @@
           <a:lstStyle xmlns:a="http://schemas.openxmlformats.org/drawingml/2006/main"/>
           <a:p xmlns:a="http://schemas.openxmlformats.org/drawingml/2006/main">
             <a:pPr algn="ctr">
+              <a:buNone/>
               <a:defRPr sz="4650" b="1">
                 <a:solidFill>
                   <a:srgbClr val="1EC5FF"/>
@@ -12015,6 +13238,7 @@
           <a:lstStyle xmlns:a="http://schemas.openxmlformats.org/drawingml/2006/main"/>
           <a:p xmlns:a="http://schemas.openxmlformats.org/drawingml/2006/main">
             <a:pPr>
+              <a:buNone/>
               <a:defRPr sz="1050" b="1">
                 <a:solidFill>
                   <a:srgbClr val="1EC5FF"/>
@@ -12098,6 +13322,7 @@
           <a:lstStyle xmlns:a="http://schemas.openxmlformats.org/drawingml/2006/main"/>
           <a:p xmlns:a="http://schemas.openxmlformats.org/drawingml/2006/main">
             <a:pPr>
+              <a:buNone/>
               <a:defRPr sz="825">
                 <a:solidFill>
                   <a:srgbClr val="FFFFFF">
@@ -12152,6 +13377,7 @@
           <a:lstStyle xmlns:a="http://schemas.openxmlformats.org/drawingml/2006/main"/>
           <a:p xmlns:a="http://schemas.openxmlformats.org/drawingml/2006/main">
             <a:pPr algn="r">
+              <a:buNone/>
               <a:defRPr sz="825" b="1">
                 <a:solidFill>
                   <a:srgbClr val="FFFFFF">
@@ -12235,6 +13461,7 @@
           <a:lstStyle xmlns:a="http://schemas.openxmlformats.org/drawingml/2006/main"/>
           <a:p xmlns:a="http://schemas.openxmlformats.org/drawingml/2006/main">
             <a:pPr>
+              <a:buNone/>
               <a:defRPr sz="2925" b="1">
                 <a:solidFill>
                   <a:srgbClr val="0B1F3A"/>
@@ -12285,6 +13512,7 @@
           <a:lstStyle xmlns:a="http://schemas.openxmlformats.org/drawingml/2006/main"/>
           <a:p xmlns:a="http://schemas.openxmlformats.org/drawingml/2006/main">
             <a:pPr>
+              <a:buNone/>
               <a:defRPr sz="1650">
                 <a:solidFill>
                   <a:srgbClr val="5C6F86"/>
@@ -12335,6 +13563,7 @@
           <a:lstStyle xmlns:a="http://schemas.openxmlformats.org/drawingml/2006/main"/>
           <a:p xmlns:a="http://schemas.openxmlformats.org/drawingml/2006/main">
             <a:pPr>
+              <a:buNone/>
               <a:defRPr sz="1800">
                 <a:solidFill>
                   <a:srgbClr val="0B1F3A"/>
@@ -12352,6 +13581,7 @@
           </a:p>
           <a:p xmlns:a="http://schemas.openxmlformats.org/drawingml/2006/main">
             <a:pPr>
+              <a:buNone/>
               <a:defRPr sz="1800">
                 <a:solidFill>
                   <a:srgbClr val="0B1F3A"/>
@@ -12369,6 +13599,7 @@
           </a:p>
           <a:p xmlns:a="http://schemas.openxmlformats.org/drawingml/2006/main">
             <a:pPr>
+              <a:buNone/>
               <a:defRPr sz="1800">
                 <a:solidFill>
                   <a:srgbClr val="0B1F3A"/>
@@ -12493,6 +13724,7 @@
           <a:lstStyle xmlns:a="http://schemas.openxmlformats.org/drawingml/2006/main"/>
           <a:p xmlns:a="http://schemas.openxmlformats.org/drawingml/2006/main">
             <a:pPr algn="ctr">
+              <a:buNone/>
               <a:defRPr sz="4650" b="1">
                 <a:solidFill>
                   <a:srgbClr val="1565C0"/>
@@ -12543,6 +13775,7 @@
           <a:lstStyle xmlns:a="http://schemas.openxmlformats.org/drawingml/2006/main"/>
           <a:p xmlns:a="http://schemas.openxmlformats.org/drawingml/2006/main">
             <a:pPr>
+              <a:buNone/>
               <a:defRPr sz="1050" b="1">
                 <a:solidFill>
                   <a:srgbClr val="1565C0"/>
@@ -12626,6 +13859,7 @@
           <a:lstStyle xmlns:a="http://schemas.openxmlformats.org/drawingml/2006/main"/>
           <a:p xmlns:a="http://schemas.openxmlformats.org/drawingml/2006/main">
             <a:pPr>
+              <a:buNone/>
               <a:defRPr sz="825">
                 <a:solidFill>
                   <a:srgbClr val="0B1F3A">
@@ -12680,6 +13914,7 @@
           <a:lstStyle xmlns:a="http://schemas.openxmlformats.org/drawingml/2006/main"/>
           <a:p xmlns:a="http://schemas.openxmlformats.org/drawingml/2006/main">
             <a:pPr algn="r">
+              <a:buNone/>
               <a:defRPr sz="825" b="1">
                 <a:solidFill>
                   <a:srgbClr val="0B1F3A">
@@ -12771,6 +14006,7 @@
           <a:lstStyle xmlns:a="http://schemas.openxmlformats.org/drawingml/2006/main"/>
           <a:p xmlns:a="http://schemas.openxmlformats.org/drawingml/2006/main">
             <a:pPr>
+              <a:buNone/>
               <a:defRPr sz="2925" b="1">
                 <a:solidFill>
                   <a:srgbClr val="FFFFFF"/>
@@ -12827,6 +14063,7 @@
           <a:lstStyle xmlns:a="http://schemas.openxmlformats.org/drawingml/2006/main"/>
           <a:p xmlns:a="http://schemas.openxmlformats.org/drawingml/2006/main">
             <a:pPr algn="ctr">
+              <a:buNone/>
               <a:defRPr sz="1575" b="1">
                 <a:solidFill>
                   <a:srgbClr val="FFFFFF"/>
@@ -12883,6 +14120,7 @@
           <a:lstStyle xmlns:a="http://schemas.openxmlformats.org/drawingml/2006/main"/>
           <a:p xmlns:a="http://schemas.openxmlformats.org/drawingml/2006/main">
             <a:pPr algn="ctr">
+              <a:buNone/>
               <a:defRPr sz="1575" b="1">
                 <a:solidFill>
                   <a:srgbClr val="FFFFFF"/>
@@ -12939,6 +14177,7 @@
           <a:lstStyle xmlns:a="http://schemas.openxmlformats.org/drawingml/2006/main"/>
           <a:p xmlns:a="http://schemas.openxmlformats.org/drawingml/2006/main">
             <a:pPr algn="ctr">
+              <a:buNone/>
               <a:defRPr sz="1575" b="1">
                 <a:solidFill>
                   <a:srgbClr val="FFFFFF"/>
@@ -12958,7 +14197,7 @@
       </p:sp>
       <p:cxnSp>
         <p:nvCxnSpPr>
-          <p:cNvPr id="15" name=""/>
+          <p:cNvPr id="21" name=""/>
           <p:cNvCxnSpPr>
             <a:stCxn xmlns:a="http://schemas.openxmlformats.org/drawingml/2006/main" id="2" idx="3"/>
             <a:endCxn xmlns:a="http://schemas.openxmlformats.org/drawingml/2006/main" id="3" idx="1"/>
@@ -12984,7 +14223,7 @@
       </p:cxnSp>
       <p:cxnSp>
         <p:nvCxnSpPr>
-          <p:cNvPr id="16" name=""/>
+          <p:cNvPr id="22" name=""/>
           <p:cNvCxnSpPr>
             <a:stCxn xmlns:a="http://schemas.openxmlformats.org/drawingml/2006/main" id="3" idx="3"/>
             <a:endCxn xmlns:a="http://schemas.openxmlformats.org/drawingml/2006/main" id="4" idx="1"/>
@@ -13041,6 +14280,7 @@
           <a:lstStyle xmlns:a="http://schemas.openxmlformats.org/drawingml/2006/main"/>
           <a:p xmlns:a="http://schemas.openxmlformats.org/drawingml/2006/main">
             <a:pPr>
+              <a:buNone/>
               <a:defRPr sz="1050" b="1">
                 <a:solidFill>
                   <a:srgbClr val="1EC5FF"/>
@@ -13124,6 +14364,7 @@
           <a:lstStyle xmlns:a="http://schemas.openxmlformats.org/drawingml/2006/main"/>
           <a:p xmlns:a="http://schemas.openxmlformats.org/drawingml/2006/main">
             <a:pPr>
+              <a:buNone/>
               <a:defRPr sz="825">
                 <a:solidFill>
                   <a:srgbClr val="FFFFFF">
@@ -13178,6 +14419,7 @@
           <a:lstStyle xmlns:a="http://schemas.openxmlformats.org/drawingml/2006/main"/>
           <a:p xmlns:a="http://schemas.openxmlformats.org/drawingml/2006/main">
             <a:pPr algn="r">
+              <a:buNone/>
               <a:defRPr sz="825" b="1">
                 <a:solidFill>
                   <a:srgbClr val="FFFFFF">
@@ -13269,6 +14511,7 @@
           <a:lstStyle xmlns:a="http://schemas.openxmlformats.org/drawingml/2006/main"/>
           <a:p xmlns:a="http://schemas.openxmlformats.org/drawingml/2006/main">
             <a:pPr>
+              <a:buNone/>
               <a:defRPr sz="2925" b="1">
                 <a:solidFill>
                   <a:srgbClr val="FFFFFF"/>
@@ -13319,6 +14562,7 @@
           <a:lstStyle xmlns:a="http://schemas.openxmlformats.org/drawingml/2006/main"/>
           <a:p xmlns:a="http://schemas.openxmlformats.org/drawingml/2006/main">
             <a:pPr>
+              <a:buNone/>
               <a:defRPr sz="1650">
                 <a:solidFill>
                   <a:srgbClr val="E2F2FF"/>
@@ -13369,6 +14613,7 @@
           <a:lstStyle xmlns:a="http://schemas.openxmlformats.org/drawingml/2006/main"/>
           <a:p xmlns:a="http://schemas.openxmlformats.org/drawingml/2006/main">
             <a:pPr>
+              <a:buNone/>
               <a:defRPr sz="1800">
                 <a:solidFill>
                   <a:srgbClr val="FFFFFF"/>
@@ -13386,6 +14631,7 @@
           </a:p>
           <a:p xmlns:a="http://schemas.openxmlformats.org/drawingml/2006/main">
             <a:pPr>
+              <a:buNone/>
               <a:defRPr sz="1800">
                 <a:solidFill>
                   <a:srgbClr val="FFFFFF"/>
@@ -13403,6 +14649,7 @@
           </a:p>
           <a:p xmlns:a="http://schemas.openxmlformats.org/drawingml/2006/main">
             <a:pPr>
+              <a:buNone/>
               <a:defRPr sz="1800">
                 <a:solidFill>
                   <a:srgbClr val="FFFFFF"/>
@@ -13420,6 +14667,7 @@
           </a:p>
           <a:p xmlns:a="http://schemas.openxmlformats.org/drawingml/2006/main">
             <a:pPr>
+              <a:buNone/>
               <a:defRPr sz="1800">
                 <a:solidFill>
                   <a:srgbClr val="FFFFFF"/>
@@ -13544,6 +14792,7 @@
           <a:lstStyle xmlns:a="http://schemas.openxmlformats.org/drawingml/2006/main"/>
           <a:p xmlns:a="http://schemas.openxmlformats.org/drawingml/2006/main">
             <a:pPr algn="ctr">
+              <a:buNone/>
               <a:defRPr sz="4650" b="1">
                 <a:solidFill>
                   <a:srgbClr val="1EC5FF"/>
@@ -13594,6 +14843,7 @@
           <a:lstStyle xmlns:a="http://schemas.openxmlformats.org/drawingml/2006/main"/>
           <a:p xmlns:a="http://schemas.openxmlformats.org/drawingml/2006/main">
             <a:pPr>
+              <a:buNone/>
               <a:defRPr sz="1050" b="1">
                 <a:solidFill>
                   <a:srgbClr val="1EC5FF"/>
@@ -13677,6 +14927,7 @@
           <a:lstStyle xmlns:a="http://schemas.openxmlformats.org/drawingml/2006/main"/>
           <a:p xmlns:a="http://schemas.openxmlformats.org/drawingml/2006/main">
             <a:pPr>
+              <a:buNone/>
               <a:defRPr sz="825">
                 <a:solidFill>
                   <a:srgbClr val="FFFFFF">
@@ -13731,6 +14982,7 @@
           <a:lstStyle xmlns:a="http://schemas.openxmlformats.org/drawingml/2006/main"/>
           <a:p xmlns:a="http://schemas.openxmlformats.org/drawingml/2006/main">
             <a:pPr algn="r">
+              <a:buNone/>
               <a:defRPr sz="825" b="1">
                 <a:solidFill>
                   <a:srgbClr val="FFFFFF">
@@ -13814,6 +15066,7 @@
           <a:lstStyle xmlns:a="http://schemas.openxmlformats.org/drawingml/2006/main"/>
           <a:p xmlns:a="http://schemas.openxmlformats.org/drawingml/2006/main">
             <a:pPr>
+              <a:buNone/>
               <a:defRPr sz="2925" b="1">
                 <a:solidFill>
                   <a:srgbClr val="0B1F3A"/>
@@ -13864,6 +15117,7 @@
           <a:lstStyle xmlns:a="http://schemas.openxmlformats.org/drawingml/2006/main"/>
           <a:p xmlns:a="http://schemas.openxmlformats.org/drawingml/2006/main">
             <a:pPr>
+              <a:buNone/>
               <a:defRPr sz="3450" b="1">
                 <a:solidFill>
                   <a:srgbClr val="1565C0"/>
@@ -13914,6 +15168,7 @@
           <a:lstStyle xmlns:a="http://schemas.openxmlformats.org/drawingml/2006/main"/>
           <a:p xmlns:a="http://schemas.openxmlformats.org/drawingml/2006/main">
             <a:pPr>
+              <a:buNone/>
               <a:defRPr sz="1575" b="1">
                 <a:solidFill>
                   <a:srgbClr val="0B1F3A"/>
@@ -13995,6 +15250,7 @@
           <a:lstStyle xmlns:a="http://schemas.openxmlformats.org/drawingml/2006/main"/>
           <a:p xmlns:a="http://schemas.openxmlformats.org/drawingml/2006/main">
             <a:pPr>
+              <a:buNone/>
               <a:defRPr sz="3450" b="1">
                 <a:solidFill>
                   <a:srgbClr val="1565C0"/>
@@ -14045,6 +15301,7 @@
           <a:lstStyle xmlns:a="http://schemas.openxmlformats.org/drawingml/2006/main"/>
           <a:p xmlns:a="http://schemas.openxmlformats.org/drawingml/2006/main">
             <a:pPr>
+              <a:buNone/>
               <a:defRPr sz="1575" b="1">
                 <a:solidFill>
                   <a:srgbClr val="0B1F3A"/>
@@ -14126,6 +15383,7 @@
           <a:lstStyle xmlns:a="http://schemas.openxmlformats.org/drawingml/2006/main"/>
           <a:p xmlns:a="http://schemas.openxmlformats.org/drawingml/2006/main">
             <a:pPr>
+              <a:buNone/>
               <a:defRPr sz="3450" b="1">
                 <a:solidFill>
                   <a:srgbClr val="1565C0"/>
@@ -14176,6 +15434,7 @@
           <a:lstStyle xmlns:a="http://schemas.openxmlformats.org/drawingml/2006/main"/>
           <a:p xmlns:a="http://schemas.openxmlformats.org/drawingml/2006/main">
             <a:pPr>
+              <a:buNone/>
               <a:defRPr sz="1575" b="1">
                 <a:solidFill>
                   <a:srgbClr val="0B1F3A"/>
@@ -14257,6 +15516,7 @@
           <a:lstStyle xmlns:a="http://schemas.openxmlformats.org/drawingml/2006/main"/>
           <a:p xmlns:a="http://schemas.openxmlformats.org/drawingml/2006/main">
             <a:pPr>
+              <a:buNone/>
               <a:defRPr sz="3450" b="1">
                 <a:solidFill>
                   <a:srgbClr val="1565C0"/>
@@ -14307,6 +15567,7 @@
           <a:lstStyle xmlns:a="http://schemas.openxmlformats.org/drawingml/2006/main"/>
           <a:p xmlns:a="http://schemas.openxmlformats.org/drawingml/2006/main">
             <a:pPr>
+              <a:buNone/>
               <a:defRPr sz="1575" b="1">
                 <a:solidFill>
                   <a:srgbClr val="0B1F3A"/>
@@ -14357,6 +15618,7 @@
           <a:lstStyle xmlns:a="http://schemas.openxmlformats.org/drawingml/2006/main"/>
           <a:p xmlns:a="http://schemas.openxmlformats.org/drawingml/2006/main">
             <a:pPr>
+              <a:buNone/>
               <a:defRPr sz="1050" b="1">
                 <a:solidFill>
                   <a:srgbClr val="1565C0"/>
@@ -14440,6 +15702,7 @@
           <a:lstStyle xmlns:a="http://schemas.openxmlformats.org/drawingml/2006/main"/>
           <a:p xmlns:a="http://schemas.openxmlformats.org/drawingml/2006/main">
             <a:pPr>
+              <a:buNone/>
               <a:defRPr sz="825">
                 <a:solidFill>
                   <a:srgbClr val="0B1F3A">
@@ -14494,6 +15757,7 @@
           <a:lstStyle xmlns:a="http://schemas.openxmlformats.org/drawingml/2006/main"/>
           <a:p xmlns:a="http://schemas.openxmlformats.org/drawingml/2006/main">
             <a:pPr algn="r">
+              <a:buNone/>
               <a:defRPr sz="825" b="1">
                 <a:solidFill>
                   <a:srgbClr val="0B1F3A">
@@ -14577,6 +15841,7 @@
           <a:lstStyle xmlns:a="http://schemas.openxmlformats.org/drawingml/2006/main"/>
           <a:p xmlns:a="http://schemas.openxmlformats.org/drawingml/2006/main">
             <a:pPr>
+              <a:buNone/>
               <a:defRPr sz="2925" b="1">
                 <a:solidFill>
                   <a:srgbClr val="0B1F3A"/>
@@ -14627,6 +15892,7 @@
           <a:lstStyle xmlns:a="http://schemas.openxmlformats.org/drawingml/2006/main"/>
           <a:p xmlns:a="http://schemas.openxmlformats.org/drawingml/2006/main">
             <a:pPr>
+              <a:buNone/>
               <a:defRPr sz="1650">
                 <a:solidFill>
                   <a:srgbClr val="5C6F86"/>
@@ -14677,6 +15943,7 @@
           <a:lstStyle xmlns:a="http://schemas.openxmlformats.org/drawingml/2006/main"/>
           <a:p xmlns:a="http://schemas.openxmlformats.org/drawingml/2006/main">
             <a:pPr>
+              <a:buNone/>
               <a:defRPr sz="1800">
                 <a:solidFill>
                   <a:srgbClr val="0B1F3A"/>
@@ -14694,6 +15961,7 @@
           </a:p>
           <a:p xmlns:a="http://schemas.openxmlformats.org/drawingml/2006/main">
             <a:pPr>
+              <a:buNone/>
               <a:defRPr sz="1800">
                 <a:solidFill>
                   <a:srgbClr val="0B1F3A"/>
@@ -14711,6 +15979,7 @@
           </a:p>
           <a:p xmlns:a="http://schemas.openxmlformats.org/drawingml/2006/main">
             <a:pPr>
+              <a:buNone/>
               <a:defRPr sz="1800">
                 <a:solidFill>
                   <a:srgbClr val="0B1F3A"/>
@@ -14835,6 +16104,7 @@
           <a:lstStyle xmlns:a="http://schemas.openxmlformats.org/drawingml/2006/main"/>
           <a:p xmlns:a="http://schemas.openxmlformats.org/drawingml/2006/main">
             <a:pPr algn="ctr">
+              <a:buNone/>
               <a:defRPr sz="4650" b="1">
                 <a:solidFill>
                   <a:srgbClr val="1565C0"/>
@@ -14885,6 +16155,7 @@
           <a:lstStyle xmlns:a="http://schemas.openxmlformats.org/drawingml/2006/main"/>
           <a:p xmlns:a="http://schemas.openxmlformats.org/drawingml/2006/main">
             <a:pPr>
+              <a:buNone/>
               <a:defRPr sz="1050" b="1">
                 <a:solidFill>
                   <a:srgbClr val="1565C0"/>
@@ -14968,6 +16239,7 @@
           <a:lstStyle xmlns:a="http://schemas.openxmlformats.org/drawingml/2006/main"/>
           <a:p xmlns:a="http://schemas.openxmlformats.org/drawingml/2006/main">
             <a:pPr>
+              <a:buNone/>
               <a:defRPr sz="825">
                 <a:solidFill>
                   <a:srgbClr val="0B1F3A">
@@ -15022,6 +16294,7 @@
           <a:lstStyle xmlns:a="http://schemas.openxmlformats.org/drawingml/2006/main"/>
           <a:p xmlns:a="http://schemas.openxmlformats.org/drawingml/2006/main">
             <a:pPr algn="r">
+              <a:buNone/>
               <a:defRPr sz="825" b="1">
                 <a:solidFill>
                   <a:srgbClr val="0B1F3A">

--- a/assets/decks/episodio-12-gold-governada-agente-solto.pptx
+++ b/assets/decks/episodio-12-gold-governada-agente-solto.pptx
@@ -2,35 +2,35 @@
 <file path=ppt/presentation.xml><?xml version="1.0" encoding="utf-8"?>
 <p:presentation xmlns:p="http://schemas.openxmlformats.org/presentationml/2006/main">
   <p:sldMasterIdLst>
-    <p:sldMasterId xmlns:r="http://schemas.openxmlformats.org/officeDocument/2006/relationships" id="2147483648" r:id="Rc10203aa6f294d4b"/>
-    <p:sldMasterId xmlns:r="http://schemas.openxmlformats.org/officeDocument/2006/relationships" id="2147483650" r:id="R996a1a408c834baa"/>
+    <p:sldMasterId xmlns:r="http://schemas.openxmlformats.org/officeDocument/2006/relationships" id="2147483648" r:id="Red3d16dfc9b74c5e"/>
+    <p:sldMasterId xmlns:r="http://schemas.openxmlformats.org/officeDocument/2006/relationships" id="2147483650" r:id="R777c65c82d2b458f"/>
   </p:sldMasterIdLst>
   <p:notesMasterIdLst>
-    <p:notesMasterId xmlns:r="http://schemas.openxmlformats.org/officeDocument/2006/relationships" r:id="R5e8e24c79cfc4de5"/>
+    <p:notesMasterId xmlns:r="http://schemas.openxmlformats.org/officeDocument/2006/relationships" r:id="R1ba79d83631141d4"/>
   </p:notesMasterIdLst>
   <p:sldIdLst>
-    <p:sldId xmlns:r="http://schemas.openxmlformats.org/officeDocument/2006/relationships" id="256" r:id="R14e99a6842d940dc"/>
-    <p:sldId xmlns:r="http://schemas.openxmlformats.org/officeDocument/2006/relationships" id="257" r:id="R5353ad3ed3894d15"/>
-    <p:sldId xmlns:r="http://schemas.openxmlformats.org/officeDocument/2006/relationships" id="258" r:id="R0eb1252d8a574a59"/>
-    <p:sldId xmlns:r="http://schemas.openxmlformats.org/officeDocument/2006/relationships" id="259" r:id="Rac31f41641604064"/>
-    <p:sldId xmlns:r="http://schemas.openxmlformats.org/officeDocument/2006/relationships" id="260" r:id="R21cf39f99c844e41"/>
-    <p:sldId xmlns:r="http://schemas.openxmlformats.org/officeDocument/2006/relationships" id="261" r:id="Rf2e71317046f48b1"/>
-    <p:sldId xmlns:r="http://schemas.openxmlformats.org/officeDocument/2006/relationships" id="262" r:id="Rfe515c82c7154900"/>
-    <p:sldId xmlns:r="http://schemas.openxmlformats.org/officeDocument/2006/relationships" id="263" r:id="R023e1449fe31472b"/>
-    <p:sldId xmlns:r="http://schemas.openxmlformats.org/officeDocument/2006/relationships" id="264" r:id="R49d9b9e5d80e42c9"/>
-    <p:sldId xmlns:r="http://schemas.openxmlformats.org/officeDocument/2006/relationships" id="265" r:id="Rc2ac5cae72b54b55"/>
-    <p:sldId xmlns:r="http://schemas.openxmlformats.org/officeDocument/2006/relationships" id="266" r:id="R96181344bbe543c5"/>
-    <p:sldId xmlns:r="http://schemas.openxmlformats.org/officeDocument/2006/relationships" id="267" r:id="Re7b4a7c3cbd94a4a"/>
-    <p:sldId xmlns:r="http://schemas.openxmlformats.org/officeDocument/2006/relationships" id="268" r:id="R2acbe646a006427e"/>
-    <p:sldId xmlns:r="http://schemas.openxmlformats.org/officeDocument/2006/relationships" id="269" r:id="R2063284cf7644d46"/>
-    <p:sldId xmlns:r="http://schemas.openxmlformats.org/officeDocument/2006/relationships" id="270" r:id="Rf8d82cf3193a4e57"/>
-    <p:sldId xmlns:r="http://schemas.openxmlformats.org/officeDocument/2006/relationships" id="271" r:id="R2afb01d595614350"/>
-    <p:sldId xmlns:r="http://schemas.openxmlformats.org/officeDocument/2006/relationships" id="272" r:id="R69bef8d237c2402d"/>
-    <p:sldId xmlns:r="http://schemas.openxmlformats.org/officeDocument/2006/relationships" id="273" r:id="R4d3e9c288c9d4838"/>
-    <p:sldId xmlns:r="http://schemas.openxmlformats.org/officeDocument/2006/relationships" id="274" r:id="R568724494cb24585"/>
-    <p:sldId xmlns:r="http://schemas.openxmlformats.org/officeDocument/2006/relationships" id="275" r:id="Ra97fdbf0b0a64564"/>
-    <p:sldId xmlns:r="http://schemas.openxmlformats.org/officeDocument/2006/relationships" id="276" r:id="R12a641f204124ab2"/>
-    <p:sldId xmlns:r="http://schemas.openxmlformats.org/officeDocument/2006/relationships" id="277" r:id="Rc851f4cc00c841ce"/>
+    <p:sldId xmlns:r="http://schemas.openxmlformats.org/officeDocument/2006/relationships" id="256" r:id="Rbc89902cd54b4c51"/>
+    <p:sldId xmlns:r="http://schemas.openxmlformats.org/officeDocument/2006/relationships" id="257" r:id="Rff67f6b95b7e42c8"/>
+    <p:sldId xmlns:r="http://schemas.openxmlformats.org/officeDocument/2006/relationships" id="258" r:id="R1d1e3df214fa44cd"/>
+    <p:sldId xmlns:r="http://schemas.openxmlformats.org/officeDocument/2006/relationships" id="259" r:id="R0837d6497a0e4591"/>
+    <p:sldId xmlns:r="http://schemas.openxmlformats.org/officeDocument/2006/relationships" id="260" r:id="R2ccd786a20d5406b"/>
+    <p:sldId xmlns:r="http://schemas.openxmlformats.org/officeDocument/2006/relationships" id="261" r:id="Rc9879d9f2af64a89"/>
+    <p:sldId xmlns:r="http://schemas.openxmlformats.org/officeDocument/2006/relationships" id="262" r:id="R20053fb61c7647c4"/>
+    <p:sldId xmlns:r="http://schemas.openxmlformats.org/officeDocument/2006/relationships" id="263" r:id="Rcfd0ceef604e4948"/>
+    <p:sldId xmlns:r="http://schemas.openxmlformats.org/officeDocument/2006/relationships" id="264" r:id="R34e82d55fa124560"/>
+    <p:sldId xmlns:r="http://schemas.openxmlformats.org/officeDocument/2006/relationships" id="265" r:id="R776cbf29a481419a"/>
+    <p:sldId xmlns:r="http://schemas.openxmlformats.org/officeDocument/2006/relationships" id="266" r:id="R3b81ebdf469242e8"/>
+    <p:sldId xmlns:r="http://schemas.openxmlformats.org/officeDocument/2006/relationships" id="267" r:id="R8e87bfd2ad5948af"/>
+    <p:sldId xmlns:r="http://schemas.openxmlformats.org/officeDocument/2006/relationships" id="268" r:id="R602d64e7ba254fd0"/>
+    <p:sldId xmlns:r="http://schemas.openxmlformats.org/officeDocument/2006/relationships" id="269" r:id="R2d8596d61b8a454b"/>
+    <p:sldId xmlns:r="http://schemas.openxmlformats.org/officeDocument/2006/relationships" id="270" r:id="Rc68e4e1f3d684bdb"/>
+    <p:sldId xmlns:r="http://schemas.openxmlformats.org/officeDocument/2006/relationships" id="271" r:id="R31295bc62f5d4e6a"/>
+    <p:sldId xmlns:r="http://schemas.openxmlformats.org/officeDocument/2006/relationships" id="272" r:id="R125f8421ff3b4a39"/>
+    <p:sldId xmlns:r="http://schemas.openxmlformats.org/officeDocument/2006/relationships" id="273" r:id="R932f8cba3ea04ecd"/>
+    <p:sldId xmlns:r="http://schemas.openxmlformats.org/officeDocument/2006/relationships" id="274" r:id="R1edcd5e65fac4ccb"/>
+    <p:sldId xmlns:r="http://schemas.openxmlformats.org/officeDocument/2006/relationships" id="275" r:id="Rcc823bf1f66a4813"/>
+    <p:sldId xmlns:r="http://schemas.openxmlformats.org/officeDocument/2006/relationships" id="276" r:id="R6258d5c7dbcc47a7"/>
+    <p:sldId xmlns:r="http://schemas.openxmlformats.org/officeDocument/2006/relationships" id="277" r:id="R775ab72a6a0f4226"/>
   </p:sldIdLst>
   <p:sldSz cx="12192000" cy="6858000"/>
   <p:notesSz cx="6858000" cy="9144000"/>
@@ -544,6 +544,11 @@
           </a:p>
           <a:p xmlns:a="http://schemas.openxmlformats.org/drawingml/2006/main">
             <a:r>
+              <a:t>- https://rescuepoint.com.br/assets/img/logo.png</a:t>
+            </a:r>
+          </a:p>
+          <a:p xmlns:a="http://schemas.openxmlformats.org/drawingml/2006/main">
+            <a:r>
               <a:t>- https://github.com/AnselmoBorges/dbt-moderno-na-pratica/blob/main/roteiros/12-gold-governada-agente-solto.md</a:t>
             </a:r>
           </a:p>
@@ -709,6 +714,11 @@
           </a:p>
           <a:p xmlns:a="http://schemas.openxmlformats.org/drawingml/2006/main">
             <a:r>
+              <a:t>- https://rescuepoint.com.br/assets/img/logo.png</a:t>
+            </a:r>
+          </a:p>
+          <a:p xmlns:a="http://schemas.openxmlformats.org/drawingml/2006/main">
+            <a:r>
               <a:t>- https://github.com/AnselmoBorges/dbt-moderno-na-pratica/blob/main/roteiros/12-gold-governada-agente-solto.md</a:t>
             </a:r>
           </a:p>
@@ -874,6 +884,11 @@
           </a:p>
           <a:p xmlns:a="http://schemas.openxmlformats.org/drawingml/2006/main">
             <a:r>
+              <a:t>- https://rescuepoint.com.br/assets/img/logo.png</a:t>
+            </a:r>
+          </a:p>
+          <a:p xmlns:a="http://schemas.openxmlformats.org/drawingml/2006/main">
+            <a:r>
               <a:t>- https://github.com/AnselmoBorges/dbt-moderno-na-pratica/blob/main/roteiros/12-gold-governada-agente-solto.md</a:t>
             </a:r>
           </a:p>
@@ -1039,6 +1054,11 @@
           </a:p>
           <a:p xmlns:a="http://schemas.openxmlformats.org/drawingml/2006/main">
             <a:r>
+              <a:t>- https://rescuepoint.com.br/assets/img/logo.png</a:t>
+            </a:r>
+          </a:p>
+          <a:p xmlns:a="http://schemas.openxmlformats.org/drawingml/2006/main">
+            <a:r>
               <a:t>- https://github.com/AnselmoBorges/dbt-moderno-na-pratica/blob/main/roteiros/12-gold-governada-agente-solto.md</a:t>
             </a:r>
           </a:p>
@@ -1209,6 +1229,11 @@
           </a:p>
           <a:p xmlns:a="http://schemas.openxmlformats.org/drawingml/2006/main">
             <a:r>
+              <a:t>- https://rescuepoint.com.br/assets/img/logo.png</a:t>
+            </a:r>
+          </a:p>
+          <a:p xmlns:a="http://schemas.openxmlformats.org/drawingml/2006/main">
+            <a:r>
               <a:t>- https://github.com/AnselmoBorges/dbt-moderno-na-pratica/blob/main/roteiros/12-gold-governada-agente-solto.md</a:t>
             </a:r>
           </a:p>
@@ -1374,6 +1399,11 @@
           </a:p>
           <a:p xmlns:a="http://schemas.openxmlformats.org/drawingml/2006/main">
             <a:r>
+              <a:t>- https://rescuepoint.com.br/assets/img/logo.png</a:t>
+            </a:r>
+          </a:p>
+          <a:p xmlns:a="http://schemas.openxmlformats.org/drawingml/2006/main">
+            <a:r>
               <a:t>- https://github.com/AnselmoBorges/dbt-moderno-na-pratica/blob/main/roteiros/12-gold-governada-agente-solto.md</a:t>
             </a:r>
           </a:p>
@@ -1539,6 +1569,11 @@
           </a:p>
           <a:p xmlns:a="http://schemas.openxmlformats.org/drawingml/2006/main">
             <a:r>
+              <a:t>- https://rescuepoint.com.br/assets/img/logo.png</a:t>
+            </a:r>
+          </a:p>
+          <a:p xmlns:a="http://schemas.openxmlformats.org/drawingml/2006/main">
+            <a:r>
               <a:t>- https://github.com/AnselmoBorges/dbt-moderno-na-pratica/blob/main/roteiros/12-gold-governada-agente-solto.md</a:t>
             </a:r>
           </a:p>
@@ -1704,6 +1739,11 @@
           </a:p>
           <a:p xmlns:a="http://schemas.openxmlformats.org/drawingml/2006/main">
             <a:r>
+              <a:t>- https://rescuepoint.com.br/assets/img/logo.png</a:t>
+            </a:r>
+          </a:p>
+          <a:p xmlns:a="http://schemas.openxmlformats.org/drawingml/2006/main">
+            <a:r>
               <a:t>- https://github.com/AnselmoBorges/dbt-moderno-na-pratica/blob/main/roteiros/12-gold-governada-agente-solto.md</a:t>
             </a:r>
           </a:p>
@@ -1869,6 +1909,11 @@
           </a:p>
           <a:p xmlns:a="http://schemas.openxmlformats.org/drawingml/2006/main">
             <a:r>
+              <a:t>- https://rescuepoint.com.br/assets/img/logo.png</a:t>
+            </a:r>
+          </a:p>
+          <a:p xmlns:a="http://schemas.openxmlformats.org/drawingml/2006/main">
+            <a:r>
               <a:t>- https://github.com/AnselmoBorges/dbt-moderno-na-pratica/blob/main/roteiros/12-gold-governada-agente-solto.md</a:t>
             </a:r>
           </a:p>
@@ -2034,6 +2079,11 @@
           </a:p>
           <a:p xmlns:a="http://schemas.openxmlformats.org/drawingml/2006/main">
             <a:r>
+              <a:t>- https://rescuepoint.com.br/assets/img/logo.png</a:t>
+            </a:r>
+          </a:p>
+          <a:p xmlns:a="http://schemas.openxmlformats.org/drawingml/2006/main">
+            <a:r>
               <a:t>- https://github.com/AnselmoBorges/dbt-moderno-na-pratica/blob/main/roteiros/12-gold-governada-agente-solto.md</a:t>
             </a:r>
           </a:p>
@@ -2199,6 +2249,11 @@
           </a:p>
           <a:p xmlns:a="http://schemas.openxmlformats.org/drawingml/2006/main">
             <a:r>
+              <a:t>- https://rescuepoint.com.br/assets/img/logo.png</a:t>
+            </a:r>
+          </a:p>
+          <a:p xmlns:a="http://schemas.openxmlformats.org/drawingml/2006/main">
+            <a:r>
               <a:t>- https://github.com/AnselmoBorges/dbt-moderno-na-pratica/blob/main/roteiros/12-gold-governada-agente-solto.md</a:t>
             </a:r>
           </a:p>
@@ -2364,6 +2419,11 @@
           </a:p>
           <a:p xmlns:a="http://schemas.openxmlformats.org/drawingml/2006/main">
             <a:r>
+              <a:t>- https://rescuepoint.com.br/assets/img/logo.png</a:t>
+            </a:r>
+          </a:p>
+          <a:p xmlns:a="http://schemas.openxmlformats.org/drawingml/2006/main">
+            <a:r>
               <a:t>- https://github.com/AnselmoBorges/dbt-moderno-na-pratica/blob/main/roteiros/12-gold-governada-agente-solto.md</a:t>
             </a:r>
           </a:p>
@@ -2529,6 +2589,11 @@
           </a:p>
           <a:p xmlns:a="http://schemas.openxmlformats.org/drawingml/2006/main">
             <a:r>
+              <a:t>- https://rescuepoint.com.br/assets/img/logo.png</a:t>
+            </a:r>
+          </a:p>
+          <a:p xmlns:a="http://schemas.openxmlformats.org/drawingml/2006/main">
+            <a:r>
               <a:t>- https://github.com/AnselmoBorges/dbt-moderno-na-pratica/blob/main/roteiros/12-gold-governada-agente-solto.md</a:t>
             </a:r>
           </a:p>
@@ -2694,6 +2759,11 @@
           </a:p>
           <a:p xmlns:a="http://schemas.openxmlformats.org/drawingml/2006/main">
             <a:r>
+              <a:t>- https://rescuepoint.com.br/assets/img/logo.png</a:t>
+            </a:r>
+          </a:p>
+          <a:p xmlns:a="http://schemas.openxmlformats.org/drawingml/2006/main">
+            <a:r>
               <a:t>- https://github.com/AnselmoBorges/dbt-moderno-na-pratica/blob/main/roteiros/12-gold-governada-agente-solto.md</a:t>
             </a:r>
           </a:p>
@@ -2859,6 +2929,11 @@
           </a:p>
           <a:p xmlns:a="http://schemas.openxmlformats.org/drawingml/2006/main">
             <a:r>
+              <a:t>- https://rescuepoint.com.br/assets/img/logo.png</a:t>
+            </a:r>
+          </a:p>
+          <a:p xmlns:a="http://schemas.openxmlformats.org/drawingml/2006/main">
+            <a:r>
               <a:t>- https://github.com/AnselmoBorges/dbt-moderno-na-pratica/blob/main/roteiros/12-gold-governada-agente-solto.md</a:t>
             </a:r>
           </a:p>
@@ -3024,6 +3099,11 @@
           </a:p>
           <a:p xmlns:a="http://schemas.openxmlformats.org/drawingml/2006/main">
             <a:r>
+              <a:t>- https://rescuepoint.com.br/assets/img/logo.png</a:t>
+            </a:r>
+          </a:p>
+          <a:p xmlns:a="http://schemas.openxmlformats.org/drawingml/2006/main">
+            <a:r>
               <a:t>- https://github.com/AnselmoBorges/dbt-moderno-na-pratica/blob/main/roteiros/12-gold-governada-agente-solto.md</a:t>
             </a:r>
           </a:p>
@@ -3189,6 +3269,11 @@
           </a:p>
           <a:p xmlns:a="http://schemas.openxmlformats.org/drawingml/2006/main">
             <a:r>
+              <a:t>- https://rescuepoint.com.br/assets/img/logo.png</a:t>
+            </a:r>
+          </a:p>
+          <a:p xmlns:a="http://schemas.openxmlformats.org/drawingml/2006/main">
+            <a:r>
               <a:t>- https://github.com/AnselmoBorges/dbt-moderno-na-pratica/blob/main/roteiros/12-gold-governada-agente-solto.md</a:t>
             </a:r>
           </a:p>
@@ -3354,6 +3439,11 @@
           </a:p>
           <a:p xmlns:a="http://schemas.openxmlformats.org/drawingml/2006/main">
             <a:r>
+              <a:t>- https://rescuepoint.com.br/assets/img/logo.png</a:t>
+            </a:r>
+          </a:p>
+          <a:p xmlns:a="http://schemas.openxmlformats.org/drawingml/2006/main">
+            <a:r>
               <a:t>- https://github.com/AnselmoBorges/dbt-moderno-na-pratica/blob/main/roteiros/12-gold-governada-agente-solto.md</a:t>
             </a:r>
           </a:p>
@@ -3519,6 +3609,11 @@
           </a:p>
           <a:p xmlns:a="http://schemas.openxmlformats.org/drawingml/2006/main">
             <a:r>
+              <a:t>- https://rescuepoint.com.br/assets/img/logo.png</a:t>
+            </a:r>
+          </a:p>
+          <a:p xmlns:a="http://schemas.openxmlformats.org/drawingml/2006/main">
+            <a:r>
               <a:t>- https://github.com/AnselmoBorges/dbt-moderno-na-pratica/blob/main/roteiros/12-gold-governada-agente-solto.md</a:t>
             </a:r>
           </a:p>
@@ -3684,6 +3779,11 @@
           </a:p>
           <a:p xmlns:a="http://schemas.openxmlformats.org/drawingml/2006/main">
             <a:r>
+              <a:t>- https://rescuepoint.com.br/assets/img/logo.png</a:t>
+            </a:r>
+          </a:p>
+          <a:p xmlns:a="http://schemas.openxmlformats.org/drawingml/2006/main">
+            <a:r>
               <a:t>- https://github.com/AnselmoBorges/dbt-moderno-na-pratica/blob/main/roteiros/12-gold-governada-agente-solto.md</a:t>
             </a:r>
           </a:p>
@@ -3849,6 +3949,11 @@
           </a:p>
           <a:p xmlns:a="http://schemas.openxmlformats.org/drawingml/2006/main">
             <a:r>
+              <a:t>- https://rescuepoint.com.br/assets/img/logo.png</a:t>
+            </a:r>
+          </a:p>
+          <a:p xmlns:a="http://schemas.openxmlformats.org/drawingml/2006/main">
+            <a:r>
               <a:t>- https://github.com/AnselmoBorges/dbt-moderno-na-pratica/blob/main/roteiros/12-gold-governada-agente-solto.md</a:t>
             </a:r>
           </a:p>
@@ -4010,6 +4115,11 @@
           <a:p xmlns:a="http://schemas.openxmlformats.org/drawingml/2006/main">
             <a:r>
               <a:t>- https://www.getdbt.com/case-studies/impact.com</a:t>
+            </a:r>
+          </a:p>
+          <a:p xmlns:a="http://schemas.openxmlformats.org/drawingml/2006/main">
+            <a:r>
+              <a:t>- https://rescuepoint.com.br/assets/img/logo.png</a:t>
             </a:r>
           </a:p>
           <a:p xmlns:a="http://schemas.openxmlformats.org/drawingml/2006/main">
@@ -4131,7 +4241,7 @@
   </p:cSld>
   <p:clrMap bg1="lt1" tx1="dk1" bg2="lt2" tx2="dk2" accent1="accent1" accent2="accent2" accent3="accent3" accent4="accent4" accent5="accent5" accent6="accent6" hlink="hlink" folHlink="folHlink"/>
   <p:sldLayoutIdLst>
-    <p:sldLayoutId xmlns:r="http://schemas.openxmlformats.org/officeDocument/2006/relationships" id="2147483649" r:id="Ra05e491241bc40f1"/>
+    <p:sldLayoutId xmlns:r="http://schemas.openxmlformats.org/officeDocument/2006/relationships" id="2147483649" r:id="R25c8416af81d4f89"/>
   </p:sldLayoutIdLst>
   <p:txStyles>
     <p:titleStyle>
@@ -4429,8 +4539,8 @@
   </p:cSld>
   <p:clrMap bg1="lt1" tx1="dk1" bg2="lt2" tx2="dk2" accent1="accent1" accent2="accent2" accent3="accent3" accent4="accent4" accent5="accent5" accent6="accent6" hlink="hlink" folHlink="folHlink"/>
   <p:sldLayoutIdLst>
-    <p:sldLayoutId xmlns:r="http://schemas.openxmlformats.org/officeDocument/2006/relationships" id="2147483651" r:id="Rd7b932e783204509"/>
-    <p:sldLayoutId xmlns:r="http://schemas.openxmlformats.org/officeDocument/2006/relationships" id="2147483652" r:id="R991da4e698b644a2"/>
+    <p:sldLayoutId xmlns:r="http://schemas.openxmlformats.org/officeDocument/2006/relationships" id="2147483651" r:id="R6e7514f7d2394355"/>
+    <p:sldLayoutId xmlns:r="http://schemas.openxmlformats.org/officeDocument/2006/relationships" id="2147483652" r:id="R3e9963f68ef64af2"/>
   </p:sldLayoutIdLst>
 </p:sldMaster>
 </file>
@@ -4954,14 +5064,14 @@
       </p:grpSpPr>
       <p:pic>
         <p:nvPicPr>
-          <p:cNvPr id="10" name="" descr="Ilustração conceitual autoral da capa: EPISÓDIO 12 — Gold governada versus agente solto."/>
+          <p:cNvPr id="13" name="" descr="Ilustração conceitual autoral da capa: EPISÓDIO 12 — Gold governada versus agente solto."/>
           <p:cNvPicPr>
             <a:picLocks xmlns:a="http://schemas.openxmlformats.org/drawingml/2006/main" noChangeAspect="1"/>
           </p:cNvPicPr>
           <p:nvPr/>
         </p:nvPicPr>
         <p:blipFill>
-          <a:blip xmlns:r="http://schemas.openxmlformats.org/officeDocument/2006/relationships" xmlns:a="http://schemas.openxmlformats.org/drawingml/2006/main" r:embed="R90f847dfdd4a4e96"/>
+          <a:blip xmlns:r="http://schemas.openxmlformats.org/officeDocument/2006/relationships" xmlns:a="http://schemas.openxmlformats.org/drawingml/2006/main" r:embed="Rb2fb2c3c80504e29"/>
           <a:srcRect xmlns:a="http://schemas.openxmlformats.org/drawingml/2006/main" l="19785" t="0" r="19785" b="0"/>
           <a:stretch xmlns:a="http://schemas.openxmlformats.org/drawingml/2006/main">
             <a:fillRect l="0" t="0" r="0" b="0"/>
@@ -4982,7 +5092,7 @@
           <p:cNvPr id="2" name="cover-text-surface">
             <a:extLst xmlns:a="http://schemas.openxmlformats.org/drawingml/2006/main">
               <a:ext uri="{FF2B5EF4-FFF2-40B4-BE49-F238E27FC236}">
-                <a16:creationId xmlns:a16="http://schemas.microsoft.com/office/drawing/2014/main" id="{5DF47493-C011-4B2E-B3EA-E578BA7DCA21}"/>
+                <a16:creationId xmlns:a16="http://schemas.microsoft.com/office/drawing/2014/main" id="{7D6F5656-FB44-4BE9-892A-D39F93773F00}"/>
               </a:ext>
             </a:extLst>
           </p:cNvPr>
@@ -5015,7 +5125,7 @@
           <p:cNvPr id="3" name="cover-divider">
             <a:extLst xmlns:a="http://schemas.openxmlformats.org/drawingml/2006/main">
               <a:ext uri="{FF2B5EF4-FFF2-40B4-BE49-F238E27FC236}">
-                <a16:creationId xmlns:a16="http://schemas.microsoft.com/office/drawing/2014/main" id="{72983899-2265-4985-A9FF-5B1886B16836}"/>
+                <a16:creationId xmlns:a16="http://schemas.microsoft.com/office/drawing/2014/main" id="{F37B1CA6-4251-49EA-A364-5059B00F882B}"/>
               </a:ext>
             </a:extLst>
           </p:cNvPr>
@@ -5046,7 +5156,7 @@
           <p:cNvPr id="4" name="cover-episode">
             <a:extLst xmlns:a="http://schemas.openxmlformats.org/drawingml/2006/main">
               <a:ext uri="{FF2B5EF4-FFF2-40B4-BE49-F238E27FC236}">
-                <a16:creationId xmlns:a16="http://schemas.microsoft.com/office/drawing/2014/main" id="{AE592D8B-C582-4DFD-BEE6-64D2AE029EA2}"/>
+                <a16:creationId xmlns:a16="http://schemas.microsoft.com/office/drawing/2014/main" id="{A3E33AF8-4FDD-4AD6-971A-FAB2B32529EC}"/>
               </a:ext>
             </a:extLst>
           </p:cNvPr>
@@ -5094,10 +5204,69 @@
       </p:sp>
       <p:sp>
         <p:nvSpPr>
-          <p:cNvPr id="5" name="cover-title">
-            <a:extLst xmlns:a="http://schemas.openxmlformats.org/drawingml/2006/main">
-              <a:ext uri="{FF2B5EF4-FFF2-40B4-BE49-F238E27FC236}">
-                <a16:creationId xmlns:a16="http://schemas.microsoft.com/office/drawing/2014/main" id="{9EAC6671-B7BE-49A8-B8FA-89F3B40654DF}"/>
+          <p:cNvPr id="5" name="rescue-point-logo-background">
+            <a:extLst xmlns:a="http://schemas.openxmlformats.org/drawingml/2006/main">
+              <a:ext uri="{FF2B5EF4-FFF2-40B4-BE49-F238E27FC236}">
+                <a16:creationId xmlns:a16="http://schemas.microsoft.com/office/drawing/2014/main" id="{63B56569-B1B6-46A8-AD0E-DA93DA4B5220}"/>
+              </a:ext>
+            </a:extLst>
+          </p:cNvPr>
+          <p:cNvSpPr>
+            <a:spLocks xmlns:a="http://schemas.openxmlformats.org/drawingml/2006/main" noGrp="1"/>
+          </p:cNvSpPr>
+          <p:nvPr/>
+        </p:nvSpPr>
+        <p:spPr>
+          <a:xfrm xmlns:a="http://schemas.openxmlformats.org/drawingml/2006/main">
+            <a:off x="9772650" y="133350"/>
+            <a:ext cx="1733550" cy="457200"/>
+          </a:xfrm>
+          <a:prstGeom xmlns:a="http://schemas.openxmlformats.org/drawingml/2006/main" prst="roundRect">
+            <a:avLst>
+              <a:gd name="adj" fmla="val 16667"/>
+            </a:avLst>
+          </a:prstGeom>
+          <a:solidFill xmlns:a="http://schemas.openxmlformats.org/drawingml/2006/main">
+            <a:srgbClr val="06142E"/>
+          </a:solidFill>
+          <a:ln xmlns:a="http://schemas.openxmlformats.org/drawingml/2006/main" w="9525">
+            <a:solidFill>
+              <a:srgbClr val="1EC5FF">
+                <a:alpha val="33333"/>
+              </a:srgbClr>
+            </a:solidFill>
+            <a:prstDash val="solid"/>
+          </a:ln>
+        </p:spPr>
+      </p:sp>
+      <p:pic>
+        <p:nvPicPr>
+          <p:cNvPr id="18" name="" descr="Ilustração conceitual autoral da capa: EPISÓDIO 12 — Gold governada versus agente solto."/>
+          <p:cNvPicPr>
+            <a:picLocks xmlns:a="http://schemas.openxmlformats.org/drawingml/2006/main" noChangeAspect="1"/>
+          </p:cNvPicPr>
+          <p:nvPr/>
+        </p:nvPicPr>
+        <p:blipFill>
+          <a:blip xmlns:r="http://schemas.openxmlformats.org/officeDocument/2006/relationships" xmlns:a="http://schemas.openxmlformats.org/drawingml/2006/main" r:embed="R972aee8efc694737"/>
+          <a:stretch xmlns:a="http://schemas.openxmlformats.org/drawingml/2006/main"/>
+        </p:blipFill>
+        <p:spPr>
+          <a:xfrm xmlns:a="http://schemas.openxmlformats.org/drawingml/2006/main">
+            <a:off x="9893718" y="209550"/>
+            <a:ext cx="1491414" cy="323850"/>
+          </a:xfrm>
+          <a:prstGeom xmlns:a="http://schemas.openxmlformats.org/drawingml/2006/main" prst="rect">
+            <a:avLst/>
+          </a:prstGeom>
+        </p:spPr>
+      </p:pic>
+      <p:sp>
+        <p:nvSpPr>
+          <p:cNvPr id="7" name="cover-title">
+            <a:extLst xmlns:a="http://schemas.openxmlformats.org/drawingml/2006/main">
+              <a:ext uri="{FF2B5EF4-FFF2-40B4-BE49-F238E27FC236}">
+                <a16:creationId xmlns:a16="http://schemas.microsoft.com/office/drawing/2014/main" id="{081BC1CD-16C7-47D1-8DDF-0D9902198D93}"/>
               </a:ext>
             </a:extLst>
           </p:cNvPr>
@@ -5145,10 +5314,10 @@
       </p:sp>
       <p:sp>
         <p:nvSpPr>
-          <p:cNvPr id="6" name="cover-subtitle">
-            <a:extLst xmlns:a="http://schemas.openxmlformats.org/drawingml/2006/main">
-              <a:ext uri="{FF2B5EF4-FFF2-40B4-BE49-F238E27FC236}">
-                <a16:creationId xmlns:a16="http://schemas.microsoft.com/office/drawing/2014/main" id="{8E18E20D-8A29-46D1-A2D3-B2A187AC4ABF}"/>
+          <p:cNvPr id="8" name="cover-subtitle">
+            <a:extLst xmlns:a="http://schemas.openxmlformats.org/drawingml/2006/main">
+              <a:ext uri="{FF2B5EF4-FFF2-40B4-BE49-F238E27FC236}">
+                <a16:creationId xmlns:a16="http://schemas.microsoft.com/office/drawing/2014/main" id="{92F74D2E-E7D2-4C0D-9784-5E80352E4207}"/>
               </a:ext>
             </a:extLst>
           </p:cNvPr>
@@ -5196,10 +5365,10 @@
       </p:sp>
       <p:sp>
         <p:nvSpPr>
-          <p:cNvPr id="7" name="cover-accent">
-            <a:extLst xmlns:a="http://schemas.openxmlformats.org/drawingml/2006/main">
-              <a:ext uri="{FF2B5EF4-FFF2-40B4-BE49-F238E27FC236}">
-                <a16:creationId xmlns:a16="http://schemas.microsoft.com/office/drawing/2014/main" id="{21654A85-C216-4105-9F77-CA68D3F2DCCD}"/>
+          <p:cNvPr id="9" name="cover-accent">
+            <a:extLst xmlns:a="http://schemas.openxmlformats.org/drawingml/2006/main">
+              <a:ext uri="{FF2B5EF4-FFF2-40B4-BE49-F238E27FC236}">
+                <a16:creationId xmlns:a16="http://schemas.microsoft.com/office/drawing/2014/main" id="{DCAFDB19-5A8C-4536-895A-82D4A00BBD4D}"/>
               </a:ext>
             </a:extLst>
           </p:cNvPr>
@@ -5227,10 +5396,10 @@
       </p:sp>
       <p:sp>
         <p:nvSpPr>
-          <p:cNvPr id="8" name="cover-meta">
-            <a:extLst xmlns:a="http://schemas.openxmlformats.org/drawingml/2006/main">
-              <a:ext uri="{FF2B5EF4-FFF2-40B4-BE49-F238E27FC236}">
-                <a16:creationId xmlns:a16="http://schemas.microsoft.com/office/drawing/2014/main" id="{DD8F5B97-6DCD-4520-8081-C8168EEDA6BB}"/>
+          <p:cNvPr id="10" name="cover-meta">
+            <a:extLst xmlns:a="http://schemas.openxmlformats.org/drawingml/2006/main">
+              <a:ext uri="{FF2B5EF4-FFF2-40B4-BE49-F238E27FC236}">
+                <a16:creationId xmlns:a16="http://schemas.microsoft.com/office/drawing/2014/main" id="{10C8D0FF-4A95-4CB3-A30B-A9B063385FD6}"/>
               </a:ext>
             </a:extLst>
           </p:cNvPr>
@@ -5283,7 +5452,7 @@
     </p:spTree>
     <p:extLst>
       <p:ext uri="{BB962C8B-B14F-4D97-AF65-F5344CB8AC3E}">
-        <p14:creationId xmlns:p14="http://schemas.microsoft.com/office/powerpoint/2010/main" val="1502744422"/>
+        <p14:creationId xmlns:p14="http://schemas.microsoft.com/office/powerpoint/2010/main" val="1787354688"/>
       </p:ext>
     </p:extLst>
   </p:cSld>
@@ -5319,10 +5488,10 @@
       </p:grpSpPr>
       <p:sp>
         <p:nvSpPr>
-          <p:cNvPr id="12" name="slide-title">
-            <a:extLst xmlns:a="http://schemas.openxmlformats.org/drawingml/2006/main">
-              <a:ext uri="{FF2B5EF4-FFF2-40B4-BE49-F238E27FC236}">
-                <a16:creationId xmlns:a16="http://schemas.microsoft.com/office/drawing/2014/main" id="{D1C2AED1-EA17-4E4E-86DF-0111CF1179C9}"/>
+          <p:cNvPr id="14" name="slide-title">
+            <a:extLst xmlns:a="http://schemas.openxmlformats.org/drawingml/2006/main">
+              <a:ext uri="{FF2B5EF4-FFF2-40B4-BE49-F238E27FC236}">
+                <a16:creationId xmlns:a16="http://schemas.microsoft.com/office/drawing/2014/main" id="{8D663EDA-B5F6-4AC2-B8A6-AB2BFA97757B}"/>
               </a:ext>
             </a:extLst>
           </p:cNvPr>
@@ -5373,7 +5542,7 @@
           <p:cNvPr id="2" name="status-dot-1">
             <a:extLst xmlns:a="http://schemas.openxmlformats.org/drawingml/2006/main">
               <a:ext uri="{FF2B5EF4-FFF2-40B4-BE49-F238E27FC236}">
-                <a16:creationId xmlns:a16="http://schemas.microsoft.com/office/drawing/2014/main" id="{CF53DC1D-16DA-493F-8E03-DFD0030ECB23}"/>
+                <a16:creationId xmlns:a16="http://schemas.microsoft.com/office/drawing/2014/main" id="{AEE82F13-D140-4A89-AD29-A3F9E4A80183}"/>
               </a:ext>
             </a:extLst>
           </p:cNvPr>
@@ -5406,7 +5575,7 @@
           <p:cNvPr id="3" name="status-label-1">
             <a:extLst xmlns:a="http://schemas.openxmlformats.org/drawingml/2006/main">
               <a:ext uri="{FF2B5EF4-FFF2-40B4-BE49-F238E27FC236}">
-                <a16:creationId xmlns:a16="http://schemas.microsoft.com/office/drawing/2014/main" id="{813102CB-61C4-4410-AB4C-F2264E58B9C0}"/>
+                <a16:creationId xmlns:a16="http://schemas.microsoft.com/office/drawing/2014/main" id="{6BBF6E7E-1297-4D07-BCE0-01EFBC83BF7C}"/>
               </a:ext>
             </a:extLst>
           </p:cNvPr>
@@ -5457,7 +5626,7 @@
           <p:cNvPr id="4" name="status-dot-2">
             <a:extLst xmlns:a="http://schemas.openxmlformats.org/drawingml/2006/main">
               <a:ext uri="{FF2B5EF4-FFF2-40B4-BE49-F238E27FC236}">
-                <a16:creationId xmlns:a16="http://schemas.microsoft.com/office/drawing/2014/main" id="{BAFBEA50-6D91-4801-AF78-7F8329BA8E99}"/>
+                <a16:creationId xmlns:a16="http://schemas.microsoft.com/office/drawing/2014/main" id="{C5F98343-A6C6-446E-8214-4B728944649F}"/>
               </a:ext>
             </a:extLst>
           </p:cNvPr>
@@ -5490,7 +5659,7 @@
           <p:cNvPr id="5" name="status-label-2">
             <a:extLst xmlns:a="http://schemas.openxmlformats.org/drawingml/2006/main">
               <a:ext uri="{FF2B5EF4-FFF2-40B4-BE49-F238E27FC236}">
-                <a16:creationId xmlns:a16="http://schemas.microsoft.com/office/drawing/2014/main" id="{E64F01F1-EA1C-47D1-A8DF-E6AF4C69AB5D}"/>
+                <a16:creationId xmlns:a16="http://schemas.microsoft.com/office/drawing/2014/main" id="{0F7C412A-FA2A-45AF-BB29-E5A96C18C39C}"/>
               </a:ext>
             </a:extLst>
           </p:cNvPr>
@@ -5541,7 +5710,7 @@
           <p:cNvPr id="6" name="status-dot-3">
             <a:extLst xmlns:a="http://schemas.openxmlformats.org/drawingml/2006/main">
               <a:ext uri="{FF2B5EF4-FFF2-40B4-BE49-F238E27FC236}">
-                <a16:creationId xmlns:a16="http://schemas.microsoft.com/office/drawing/2014/main" id="{44253190-DDD7-4D55-934C-42058475BE09}"/>
+                <a16:creationId xmlns:a16="http://schemas.microsoft.com/office/drawing/2014/main" id="{D5B29349-DD25-403D-A418-E712710B3AC0}"/>
               </a:ext>
             </a:extLst>
           </p:cNvPr>
@@ -5574,7 +5743,7 @@
           <p:cNvPr id="7" name="status-label-3">
             <a:extLst xmlns:a="http://schemas.openxmlformats.org/drawingml/2006/main">
               <a:ext uri="{FF2B5EF4-FFF2-40B4-BE49-F238E27FC236}">
-                <a16:creationId xmlns:a16="http://schemas.microsoft.com/office/drawing/2014/main" id="{C2D2B534-3FA2-4335-A0C0-6C584F76E914}"/>
+                <a16:creationId xmlns:a16="http://schemas.microsoft.com/office/drawing/2014/main" id="{2F95EC10-8806-440A-B4A0-E74D02BD3D88}"/>
               </a:ext>
             </a:extLst>
           </p:cNvPr>
@@ -5625,7 +5794,7 @@
           <p:cNvPr id="8" name="eyebrow">
             <a:extLst xmlns:a="http://schemas.openxmlformats.org/drawingml/2006/main">
               <a:ext uri="{FF2B5EF4-FFF2-40B4-BE49-F238E27FC236}">
-                <a16:creationId xmlns:a16="http://schemas.microsoft.com/office/drawing/2014/main" id="{19DD9351-FB26-4A2D-86E9-E06BF8FF2E04}"/>
+                <a16:creationId xmlns:a16="http://schemas.microsoft.com/office/drawing/2014/main" id="{2BE2FF46-7CFD-435F-830D-BFFE10DFBBB9}"/>
               </a:ext>
             </a:extLst>
           </p:cNvPr>
@@ -5673,10 +5842,69 @@
       </p:sp>
       <p:sp>
         <p:nvSpPr>
-          <p:cNvPr id="9" name="footer-rule">
-            <a:extLst xmlns:a="http://schemas.openxmlformats.org/drawingml/2006/main">
-              <a:ext uri="{FF2B5EF4-FFF2-40B4-BE49-F238E27FC236}">
-                <a16:creationId xmlns:a16="http://schemas.microsoft.com/office/drawing/2014/main" id="{928C752C-5E01-4E55-923C-EC74C35A88A4}"/>
+          <p:cNvPr id="9" name="rescue-point-logo-background">
+            <a:extLst xmlns:a="http://schemas.openxmlformats.org/drawingml/2006/main">
+              <a:ext uri="{FF2B5EF4-FFF2-40B4-BE49-F238E27FC236}">
+                <a16:creationId xmlns:a16="http://schemas.microsoft.com/office/drawing/2014/main" id="{D89B6942-AE6E-4D22-BBCB-078FF672E8B0}"/>
+              </a:ext>
+            </a:extLst>
+          </p:cNvPr>
+          <p:cNvSpPr>
+            <a:spLocks xmlns:a="http://schemas.openxmlformats.org/drawingml/2006/main" noGrp="1"/>
+          </p:cNvSpPr>
+          <p:nvPr/>
+        </p:nvSpPr>
+        <p:spPr>
+          <a:xfrm xmlns:a="http://schemas.openxmlformats.org/drawingml/2006/main">
+            <a:off x="9772650" y="133350"/>
+            <a:ext cx="1733550" cy="457200"/>
+          </a:xfrm>
+          <a:prstGeom xmlns:a="http://schemas.openxmlformats.org/drawingml/2006/main" prst="roundRect">
+            <a:avLst>
+              <a:gd name="adj" fmla="val 16667"/>
+            </a:avLst>
+          </a:prstGeom>
+          <a:solidFill xmlns:a="http://schemas.openxmlformats.org/drawingml/2006/main">
+            <a:srgbClr val="06142E"/>
+          </a:solidFill>
+          <a:ln xmlns:a="http://schemas.openxmlformats.org/drawingml/2006/main" w="9525">
+            <a:solidFill>
+              <a:srgbClr val="1EC5FF">
+                <a:alpha val="33333"/>
+              </a:srgbClr>
+            </a:solidFill>
+            <a:prstDash val="solid"/>
+          </a:ln>
+        </p:spPr>
+      </p:sp>
+      <p:pic>
+        <p:nvPicPr>
+          <p:cNvPr id="25" name="" descr="Figura oficial da documentação dbt usada para explicar: Fixture não é execução real — Fixture."/>
+          <p:cNvPicPr>
+            <a:picLocks xmlns:a="http://schemas.openxmlformats.org/drawingml/2006/main" noChangeAspect="1"/>
+          </p:cNvPicPr>
+          <p:nvPr/>
+        </p:nvPicPr>
+        <p:blipFill>
+          <a:blip xmlns:r="http://schemas.openxmlformats.org/officeDocument/2006/relationships" xmlns:a="http://schemas.openxmlformats.org/drawingml/2006/main" r:embed="R0f6df8528753446c"/>
+          <a:stretch xmlns:a="http://schemas.openxmlformats.org/drawingml/2006/main"/>
+        </p:blipFill>
+        <p:spPr>
+          <a:xfrm xmlns:a="http://schemas.openxmlformats.org/drawingml/2006/main">
+            <a:off x="9893718" y="209550"/>
+            <a:ext cx="1491414" cy="323850"/>
+          </a:xfrm>
+          <a:prstGeom xmlns:a="http://schemas.openxmlformats.org/drawingml/2006/main" prst="rect">
+            <a:avLst/>
+          </a:prstGeom>
+        </p:spPr>
+      </p:pic>
+      <p:sp>
+        <p:nvSpPr>
+          <p:cNvPr id="11" name="footer-rule">
+            <a:extLst xmlns:a="http://schemas.openxmlformats.org/drawingml/2006/main">
+              <a:ext uri="{FF2B5EF4-FFF2-40B4-BE49-F238E27FC236}">
+                <a16:creationId xmlns:a16="http://schemas.microsoft.com/office/drawing/2014/main" id="{CA6E8942-D623-4732-9CCB-42CBE76A9B79}"/>
               </a:ext>
             </a:extLst>
           </p:cNvPr>
@@ -5706,10 +5934,10 @@
       </p:sp>
       <p:sp>
         <p:nvSpPr>
-          <p:cNvPr id="10" name="footer">
-            <a:extLst xmlns:a="http://schemas.openxmlformats.org/drawingml/2006/main">
-              <a:ext uri="{FF2B5EF4-FFF2-40B4-BE49-F238E27FC236}">
-                <a16:creationId xmlns:a16="http://schemas.microsoft.com/office/drawing/2014/main" id="{BD3E3FC0-6EE3-43E3-8757-7FEE0A2CB28A}"/>
+          <p:cNvPr id="12" name="footer">
+            <a:extLst xmlns:a="http://schemas.openxmlformats.org/drawingml/2006/main">
+              <a:ext uri="{FF2B5EF4-FFF2-40B4-BE49-F238E27FC236}">
+                <a16:creationId xmlns:a16="http://schemas.microsoft.com/office/drawing/2014/main" id="{0BEE199F-9499-447A-B56F-50A630287525}"/>
               </a:ext>
             </a:extLst>
           </p:cNvPr>
@@ -5761,10 +5989,10 @@
       </p:sp>
       <p:sp>
         <p:nvSpPr>
-          <p:cNvPr id="11" name="page-number">
-            <a:extLst xmlns:a="http://schemas.openxmlformats.org/drawingml/2006/main">
-              <a:ext uri="{FF2B5EF4-FFF2-40B4-BE49-F238E27FC236}">
-                <a16:creationId xmlns:a16="http://schemas.microsoft.com/office/drawing/2014/main" id="{25B9C998-A6DC-4544-9645-1C41A82DF33B}"/>
+          <p:cNvPr id="13" name="page-number">
+            <a:extLst xmlns:a="http://schemas.openxmlformats.org/drawingml/2006/main">
+              <a:ext uri="{FF2B5EF4-FFF2-40B4-BE49-F238E27FC236}">
+                <a16:creationId xmlns:a16="http://schemas.microsoft.com/office/drawing/2014/main" id="{7BDF8944-44B7-4917-9418-566E227743A2}"/>
               </a:ext>
             </a:extLst>
           </p:cNvPr>
@@ -5817,7 +6045,7 @@
     </p:spTree>
     <p:extLst>
       <p:ext uri="{BB962C8B-B14F-4D97-AF65-F5344CB8AC3E}">
-        <p14:creationId xmlns:p14="http://schemas.microsoft.com/office/powerpoint/2010/main" val="1867787668"/>
+        <p14:creationId xmlns:p14="http://schemas.microsoft.com/office/powerpoint/2010/main" val="828710220"/>
       </p:ext>
     </p:extLst>
   </p:cSld>
@@ -5853,10 +6081,10 @@
       </p:grpSpPr>
       <p:sp>
         <p:nvSpPr>
-          <p:cNvPr id="11" name="slide-title">
-            <a:extLst xmlns:a="http://schemas.openxmlformats.org/drawingml/2006/main">
-              <a:ext uri="{FF2B5EF4-FFF2-40B4-BE49-F238E27FC236}">
-                <a16:creationId xmlns:a16="http://schemas.microsoft.com/office/drawing/2014/main" id="{862E3E8C-9055-44E0-AA0A-F3D8A1D30A2E}"/>
+          <p:cNvPr id="13" name="slide-title">
+            <a:extLst xmlns:a="http://schemas.openxmlformats.org/drawingml/2006/main">
+              <a:ext uri="{FF2B5EF4-FFF2-40B4-BE49-F238E27FC236}">
+                <a16:creationId xmlns:a16="http://schemas.microsoft.com/office/drawing/2014/main" id="{DD3C02C1-E0AF-41A7-9E20-17A141DBBF78}"/>
               </a:ext>
             </a:extLst>
           </p:cNvPr>
@@ -5907,7 +6135,7 @@
           <p:cNvPr id="2" name="slide-subtitle">
             <a:extLst xmlns:a="http://schemas.openxmlformats.org/drawingml/2006/main">
               <a:ext uri="{FF2B5EF4-FFF2-40B4-BE49-F238E27FC236}">
-                <a16:creationId xmlns:a16="http://schemas.microsoft.com/office/drawing/2014/main" id="{6816D2D9-1FAA-4CE0-A585-DE04E597E919}"/>
+                <a16:creationId xmlns:a16="http://schemas.microsoft.com/office/drawing/2014/main" id="{EAFBC92C-2BC2-4E29-9067-CD7181E784D9}"/>
               </a:ext>
             </a:extLst>
           </p:cNvPr>
@@ -5958,7 +6186,7 @@
           <p:cNvPr id="3" name="bullets">
             <a:extLst xmlns:a="http://schemas.openxmlformats.org/drawingml/2006/main">
               <a:ext uri="{FF2B5EF4-FFF2-40B4-BE49-F238E27FC236}">
-                <a16:creationId xmlns:a16="http://schemas.microsoft.com/office/drawing/2014/main" id="{AA44A22E-A90E-49CB-8CD6-B5BCA283D295}"/>
+                <a16:creationId xmlns:a16="http://schemas.microsoft.com/office/drawing/2014/main" id="{68229744-421D-4504-B883-4243A054E245}"/>
               </a:ext>
             </a:extLst>
           </p:cNvPr>
@@ -6045,7 +6273,7 @@
           <p:cNvPr id="4" name="ambient-glow">
             <a:extLst xmlns:a="http://schemas.openxmlformats.org/drawingml/2006/main">
               <a:ext uri="{FF2B5EF4-FFF2-40B4-BE49-F238E27FC236}">
-                <a16:creationId xmlns:a16="http://schemas.microsoft.com/office/drawing/2014/main" id="{04F0F8D4-27B3-48B2-8ED6-0E536D43E72B}"/>
+                <a16:creationId xmlns:a16="http://schemas.microsoft.com/office/drawing/2014/main" id="{E9449B12-ECB0-4973-AA32-776EF62F1132}"/>
               </a:ext>
             </a:extLst>
           </p:cNvPr>
@@ -6082,7 +6310,7 @@
           <p:cNvPr id="5" name="ambient-core">
             <a:extLst xmlns:a="http://schemas.openxmlformats.org/drawingml/2006/main">
               <a:ext uri="{FF2B5EF4-FFF2-40B4-BE49-F238E27FC236}">
-                <a16:creationId xmlns:a16="http://schemas.microsoft.com/office/drawing/2014/main" id="{428CD9B0-CA04-43F5-9A77-635BBA394FB5}"/>
+                <a16:creationId xmlns:a16="http://schemas.microsoft.com/office/drawing/2014/main" id="{F01778B9-F1CB-48CB-8F3D-0F7848E060CB}"/>
               </a:ext>
             </a:extLst>
           </p:cNvPr>
@@ -6119,7 +6347,7 @@
           <p:cNvPr id="6" name="section-number">
             <a:extLst xmlns:a="http://schemas.openxmlformats.org/drawingml/2006/main">
               <a:ext uri="{FF2B5EF4-FFF2-40B4-BE49-F238E27FC236}">
-                <a16:creationId xmlns:a16="http://schemas.microsoft.com/office/drawing/2014/main" id="{0E705F8E-0B7C-4041-9618-E7BC03762366}"/>
+                <a16:creationId xmlns:a16="http://schemas.microsoft.com/office/drawing/2014/main" id="{820D2AD3-17D1-47C4-9233-770EFE516B0A}"/>
               </a:ext>
             </a:extLst>
           </p:cNvPr>
@@ -6170,7 +6398,7 @@
           <p:cNvPr id="7" name="eyebrow">
             <a:extLst xmlns:a="http://schemas.openxmlformats.org/drawingml/2006/main">
               <a:ext uri="{FF2B5EF4-FFF2-40B4-BE49-F238E27FC236}">
-                <a16:creationId xmlns:a16="http://schemas.microsoft.com/office/drawing/2014/main" id="{456F2BAE-60A9-49CF-A586-BF38A899825C}"/>
+                <a16:creationId xmlns:a16="http://schemas.microsoft.com/office/drawing/2014/main" id="{0E135254-3FD9-4588-8FD9-1708A88C64BD}"/>
               </a:ext>
             </a:extLst>
           </p:cNvPr>
@@ -6218,10 +6446,69 @@
       </p:sp>
       <p:sp>
         <p:nvSpPr>
-          <p:cNvPr id="8" name="footer-rule">
-            <a:extLst xmlns:a="http://schemas.openxmlformats.org/drawingml/2006/main">
-              <a:ext uri="{FF2B5EF4-FFF2-40B4-BE49-F238E27FC236}">
-                <a16:creationId xmlns:a16="http://schemas.microsoft.com/office/drawing/2014/main" id="{BFAEE1BC-2E27-465E-9502-99A6D61F7C5E}"/>
+          <p:cNvPr id="8" name="rescue-point-logo-background">
+            <a:extLst xmlns:a="http://schemas.openxmlformats.org/drawingml/2006/main">
+              <a:ext uri="{FF2B5EF4-FFF2-40B4-BE49-F238E27FC236}">
+                <a16:creationId xmlns:a16="http://schemas.microsoft.com/office/drawing/2014/main" id="{3458F6AB-0D44-4282-8A52-A0A038156FFB}"/>
+              </a:ext>
+            </a:extLst>
+          </p:cNvPr>
+          <p:cNvSpPr>
+            <a:spLocks xmlns:a="http://schemas.openxmlformats.org/drawingml/2006/main" noGrp="1"/>
+          </p:cNvSpPr>
+          <p:nvPr/>
+        </p:nvSpPr>
+        <p:spPr>
+          <a:xfrm xmlns:a="http://schemas.openxmlformats.org/drawingml/2006/main">
+            <a:off x="9772650" y="133350"/>
+            <a:ext cx="1733550" cy="457200"/>
+          </a:xfrm>
+          <a:prstGeom xmlns:a="http://schemas.openxmlformats.org/drawingml/2006/main" prst="roundRect">
+            <a:avLst>
+              <a:gd name="adj" fmla="val 16667"/>
+            </a:avLst>
+          </a:prstGeom>
+          <a:solidFill xmlns:a="http://schemas.openxmlformats.org/drawingml/2006/main">
+            <a:srgbClr val="06142E"/>
+          </a:solidFill>
+          <a:ln xmlns:a="http://schemas.openxmlformats.org/drawingml/2006/main" w="9525">
+            <a:solidFill>
+              <a:srgbClr val="1EC5FF">
+                <a:alpha val="33333"/>
+              </a:srgbClr>
+            </a:solidFill>
+            <a:prstDash val="solid"/>
+          </a:ln>
+        </p:spPr>
+      </p:sp>
+      <p:pic>
+        <p:nvPicPr>
+          <p:cNvPr id="23" name="" descr="Figura oficial da documentação dbt usada para explicar: A recomendação oficial favorece contexto semântico — Mais modelagem tende a ampliar precisão e segurança das respostas.."/>
+          <p:cNvPicPr>
+            <a:picLocks xmlns:a="http://schemas.openxmlformats.org/drawingml/2006/main" noChangeAspect="1"/>
+          </p:cNvPicPr>
+          <p:nvPr/>
+        </p:nvPicPr>
+        <p:blipFill>
+          <a:blip xmlns:r="http://schemas.openxmlformats.org/officeDocument/2006/relationships" xmlns:a="http://schemas.openxmlformats.org/drawingml/2006/main" r:embed="R64dfe94809944367"/>
+          <a:stretch xmlns:a="http://schemas.openxmlformats.org/drawingml/2006/main"/>
+        </p:blipFill>
+        <p:spPr>
+          <a:xfrm xmlns:a="http://schemas.openxmlformats.org/drawingml/2006/main">
+            <a:off x="9893718" y="209550"/>
+            <a:ext cx="1491414" cy="323850"/>
+          </a:xfrm>
+          <a:prstGeom xmlns:a="http://schemas.openxmlformats.org/drawingml/2006/main" prst="rect">
+            <a:avLst/>
+          </a:prstGeom>
+        </p:spPr>
+      </p:pic>
+      <p:sp>
+        <p:nvSpPr>
+          <p:cNvPr id="10" name="footer-rule">
+            <a:extLst xmlns:a="http://schemas.openxmlformats.org/drawingml/2006/main">
+              <a:ext uri="{FF2B5EF4-FFF2-40B4-BE49-F238E27FC236}">
+                <a16:creationId xmlns:a16="http://schemas.microsoft.com/office/drawing/2014/main" id="{D37839E2-944C-4705-B9DB-3632A40E775D}"/>
               </a:ext>
             </a:extLst>
           </p:cNvPr>
@@ -6251,10 +6538,10 @@
       </p:sp>
       <p:sp>
         <p:nvSpPr>
-          <p:cNvPr id="9" name="footer">
-            <a:extLst xmlns:a="http://schemas.openxmlformats.org/drawingml/2006/main">
-              <a:ext uri="{FF2B5EF4-FFF2-40B4-BE49-F238E27FC236}">
-                <a16:creationId xmlns:a16="http://schemas.microsoft.com/office/drawing/2014/main" id="{24553964-5FC5-4BF0-AAC9-8449C3F3C489}"/>
+          <p:cNvPr id="11" name="footer">
+            <a:extLst xmlns:a="http://schemas.openxmlformats.org/drawingml/2006/main">
+              <a:ext uri="{FF2B5EF4-FFF2-40B4-BE49-F238E27FC236}">
+                <a16:creationId xmlns:a16="http://schemas.microsoft.com/office/drawing/2014/main" id="{864D2FAB-163D-43F9-BBB1-A7A591DEB6A8}"/>
               </a:ext>
             </a:extLst>
           </p:cNvPr>
@@ -6306,10 +6593,10 @@
       </p:sp>
       <p:sp>
         <p:nvSpPr>
-          <p:cNvPr id="10" name="page-number">
-            <a:extLst xmlns:a="http://schemas.openxmlformats.org/drawingml/2006/main">
-              <a:ext uri="{FF2B5EF4-FFF2-40B4-BE49-F238E27FC236}">
-                <a16:creationId xmlns:a16="http://schemas.microsoft.com/office/drawing/2014/main" id="{68C22770-36E9-47E3-86C9-F58DD7648D57}"/>
+          <p:cNvPr id="12" name="page-number">
+            <a:extLst xmlns:a="http://schemas.openxmlformats.org/drawingml/2006/main">
+              <a:ext uri="{FF2B5EF4-FFF2-40B4-BE49-F238E27FC236}">
+                <a16:creationId xmlns:a16="http://schemas.microsoft.com/office/drawing/2014/main" id="{EEEBCB78-83B6-417B-8A8D-A78020300812}"/>
               </a:ext>
             </a:extLst>
           </p:cNvPr>
@@ -6362,7 +6649,7 @@
     </p:spTree>
     <p:extLst>
       <p:ext uri="{BB962C8B-B14F-4D97-AF65-F5344CB8AC3E}">
-        <p14:creationId xmlns:p14="http://schemas.microsoft.com/office/powerpoint/2010/main" val="779467482"/>
+        <p14:creationId xmlns:p14="http://schemas.microsoft.com/office/powerpoint/2010/main" val="1738883156"/>
       </p:ext>
     </p:extLst>
   </p:cSld>
@@ -6390,10 +6677,10 @@
       </p:grpSpPr>
       <p:sp>
         <p:nvSpPr>
-          <p:cNvPr id="10" name="slide-title">
-            <a:extLst xmlns:a="http://schemas.openxmlformats.org/drawingml/2006/main">
-              <a:ext uri="{FF2B5EF4-FFF2-40B4-BE49-F238E27FC236}">
-                <a16:creationId xmlns:a16="http://schemas.microsoft.com/office/drawing/2014/main" id="{E230E5E5-433B-4D34-9FEE-1524DEA60C8E}"/>
+          <p:cNvPr id="12" name="slide-title">
+            <a:extLst xmlns:a="http://schemas.openxmlformats.org/drawingml/2006/main">
+              <a:ext uri="{FF2B5EF4-FFF2-40B4-BE49-F238E27FC236}">
+                <a16:creationId xmlns:a16="http://schemas.microsoft.com/office/drawing/2014/main" id="{CC2BBAEF-B482-4FD9-B6EC-524D17F145C6}"/>
               </a:ext>
             </a:extLst>
           </p:cNvPr>
@@ -6444,7 +6731,7 @@
           <p:cNvPr id="2" name="visual-claim">
             <a:extLst xmlns:a="http://schemas.openxmlformats.org/drawingml/2006/main">
               <a:ext uri="{FF2B5EF4-FFF2-40B4-BE49-F238E27FC236}">
-                <a16:creationId xmlns:a16="http://schemas.microsoft.com/office/drawing/2014/main" id="{FB549398-3BF5-46CE-AD09-8DEC4F99A61A}"/>
+                <a16:creationId xmlns:a16="http://schemas.microsoft.com/office/drawing/2014/main" id="{0B532FFB-C183-48CD-B158-FC2C1E41E373}"/>
               </a:ext>
             </a:extLst>
           </p:cNvPr>
@@ -6495,7 +6782,7 @@
           <p:cNvPr id="3" name="image-surface">
             <a:extLst xmlns:a="http://schemas.openxmlformats.org/drawingml/2006/main">
               <a:ext uri="{FF2B5EF4-FFF2-40B4-BE49-F238E27FC236}">
-                <a16:creationId xmlns:a16="http://schemas.microsoft.com/office/drawing/2014/main" id="{D6DF8E0F-506D-4570-9D90-22B44AB26AAF}"/>
+                <a16:creationId xmlns:a16="http://schemas.microsoft.com/office/drawing/2014/main" id="{D720DE8B-6DEE-4F1D-9CB7-80EDEC3AAF37}"/>
               </a:ext>
             </a:extLst>
           </p:cNvPr>
@@ -6527,14 +6814,14 @@
       </p:sp>
       <p:pic>
         <p:nvPicPr>
-          <p:cNvPr id="15" name="" descr="Figura oficial da documentação dbt usada para explicar: A recomendação oficial favorece contexto semântico — Mais modelagem tende a ampliar precisão e segurança das respostas.."/>
+          <p:cNvPr id="18" name="" descr="Figura oficial da documentação dbt usada para explicar: A recomendação oficial favorece contexto semântico — Mais modelagem tende a ampliar precisão e segurança das respostas.."/>
           <p:cNvPicPr>
             <a:picLocks xmlns:a="http://schemas.openxmlformats.org/drawingml/2006/main" noChangeAspect="1"/>
           </p:cNvPicPr>
           <p:nvPr/>
         </p:nvPicPr>
         <p:blipFill>
-          <a:blip xmlns:r="http://schemas.openxmlformats.org/officeDocument/2006/relationships" xmlns:a="http://schemas.openxmlformats.org/drawingml/2006/main" r:embed="R72c26d719aa541f5"/>
+          <a:blip xmlns:r="http://schemas.openxmlformats.org/officeDocument/2006/relationships" xmlns:a="http://schemas.openxmlformats.org/drawingml/2006/main" r:embed="R23507c6c873a45b8"/>
           <a:stretch xmlns:a="http://schemas.openxmlformats.org/drawingml/2006/main"/>
         </p:blipFill>
         <p:spPr>
@@ -6552,7 +6839,7 @@
           <p:cNvPr id="5" name="image-caption">
             <a:extLst xmlns:a="http://schemas.openxmlformats.org/drawingml/2006/main">
               <a:ext uri="{FF2B5EF4-FFF2-40B4-BE49-F238E27FC236}">
-                <a16:creationId xmlns:a16="http://schemas.microsoft.com/office/drawing/2014/main" id="{D7F8EE24-6D86-4D88-A03C-45E64EF86D0C}"/>
+                <a16:creationId xmlns:a16="http://schemas.microsoft.com/office/drawing/2014/main" id="{0024C966-E250-4A18-A7B0-F704F41EA41B}"/>
               </a:ext>
             </a:extLst>
           </p:cNvPr>
@@ -6603,7 +6890,7 @@
           <p:cNvPr id="6" name="eyebrow">
             <a:extLst xmlns:a="http://schemas.openxmlformats.org/drawingml/2006/main">
               <a:ext uri="{FF2B5EF4-FFF2-40B4-BE49-F238E27FC236}">
-                <a16:creationId xmlns:a16="http://schemas.microsoft.com/office/drawing/2014/main" id="{BE3A7CCD-9CA0-44C1-B6E2-B70590550127}"/>
+                <a16:creationId xmlns:a16="http://schemas.microsoft.com/office/drawing/2014/main" id="{6CBC1DAD-83E7-4B48-A786-3A8A436CFCF9}"/>
               </a:ext>
             </a:extLst>
           </p:cNvPr>
@@ -6651,10 +6938,69 @@
       </p:sp>
       <p:sp>
         <p:nvSpPr>
-          <p:cNvPr id="7" name="footer-rule">
-            <a:extLst xmlns:a="http://schemas.openxmlformats.org/drawingml/2006/main">
-              <a:ext uri="{FF2B5EF4-FFF2-40B4-BE49-F238E27FC236}">
-                <a16:creationId xmlns:a16="http://schemas.microsoft.com/office/drawing/2014/main" id="{4197D3A6-041B-466C-9661-7EE75324516D}"/>
+          <p:cNvPr id="7" name="rescue-point-logo-background">
+            <a:extLst xmlns:a="http://schemas.openxmlformats.org/drawingml/2006/main">
+              <a:ext uri="{FF2B5EF4-FFF2-40B4-BE49-F238E27FC236}">
+                <a16:creationId xmlns:a16="http://schemas.microsoft.com/office/drawing/2014/main" id="{D24CD34F-B0E7-4DE0-B0A2-1C84DCCC5CB4}"/>
+              </a:ext>
+            </a:extLst>
+          </p:cNvPr>
+          <p:cNvSpPr>
+            <a:spLocks xmlns:a="http://schemas.openxmlformats.org/drawingml/2006/main" noGrp="1"/>
+          </p:cNvSpPr>
+          <p:nvPr/>
+        </p:nvSpPr>
+        <p:spPr>
+          <a:xfrm xmlns:a="http://schemas.openxmlformats.org/drawingml/2006/main">
+            <a:off x="9772650" y="133350"/>
+            <a:ext cx="1733550" cy="457200"/>
+          </a:xfrm>
+          <a:prstGeom xmlns:a="http://schemas.openxmlformats.org/drawingml/2006/main" prst="roundRect">
+            <a:avLst>
+              <a:gd name="adj" fmla="val 16667"/>
+            </a:avLst>
+          </a:prstGeom>
+          <a:solidFill xmlns:a="http://schemas.openxmlformats.org/drawingml/2006/main">
+            <a:srgbClr val="06142E"/>
+          </a:solidFill>
+          <a:ln xmlns:a="http://schemas.openxmlformats.org/drawingml/2006/main" w="9525">
+            <a:solidFill>
+              <a:srgbClr val="1EC5FF">
+                <a:alpha val="33333"/>
+              </a:srgbClr>
+            </a:solidFill>
+            <a:prstDash val="solid"/>
+          </a:ln>
+        </p:spPr>
+      </p:sp>
+      <p:pic>
+        <p:nvPicPr>
+          <p:cNvPr id="22" name="" descr="Figura oficial da documentação dbt usada para explicar: A recomendação oficial favorece contexto semântico — Mais modelagem tende a ampliar precisão e segurança das respostas.."/>
+          <p:cNvPicPr>
+            <a:picLocks xmlns:a="http://schemas.openxmlformats.org/drawingml/2006/main" noChangeAspect="1"/>
+          </p:cNvPicPr>
+          <p:nvPr/>
+        </p:nvPicPr>
+        <p:blipFill>
+          <a:blip xmlns:r="http://schemas.openxmlformats.org/officeDocument/2006/relationships" xmlns:a="http://schemas.openxmlformats.org/drawingml/2006/main" r:embed="R9e5643e497ea4462"/>
+          <a:stretch xmlns:a="http://schemas.openxmlformats.org/drawingml/2006/main"/>
+        </p:blipFill>
+        <p:spPr>
+          <a:xfrm xmlns:a="http://schemas.openxmlformats.org/drawingml/2006/main">
+            <a:off x="9893718" y="209550"/>
+            <a:ext cx="1491414" cy="323850"/>
+          </a:xfrm>
+          <a:prstGeom xmlns:a="http://schemas.openxmlformats.org/drawingml/2006/main" prst="rect">
+            <a:avLst/>
+          </a:prstGeom>
+        </p:spPr>
+      </p:pic>
+      <p:sp>
+        <p:nvSpPr>
+          <p:cNvPr id="9" name="footer-rule">
+            <a:extLst xmlns:a="http://schemas.openxmlformats.org/drawingml/2006/main">
+              <a:ext uri="{FF2B5EF4-FFF2-40B4-BE49-F238E27FC236}">
+                <a16:creationId xmlns:a16="http://schemas.microsoft.com/office/drawing/2014/main" id="{DF9FE027-417C-4A89-9AE2-82B0E9EEE38A}"/>
               </a:ext>
             </a:extLst>
           </p:cNvPr>
@@ -6684,10 +7030,10 @@
       </p:sp>
       <p:sp>
         <p:nvSpPr>
-          <p:cNvPr id="8" name="footer">
-            <a:extLst xmlns:a="http://schemas.openxmlformats.org/drawingml/2006/main">
-              <a:ext uri="{FF2B5EF4-FFF2-40B4-BE49-F238E27FC236}">
-                <a16:creationId xmlns:a16="http://schemas.microsoft.com/office/drawing/2014/main" id="{74E431F0-440F-4A73-B60F-1190C9B69AFA}"/>
+          <p:cNvPr id="10" name="footer">
+            <a:extLst xmlns:a="http://schemas.openxmlformats.org/drawingml/2006/main">
+              <a:ext uri="{FF2B5EF4-FFF2-40B4-BE49-F238E27FC236}">
+                <a16:creationId xmlns:a16="http://schemas.microsoft.com/office/drawing/2014/main" id="{AF6BC473-E56F-4C72-A9A0-0A3F2F46B39D}"/>
               </a:ext>
             </a:extLst>
           </p:cNvPr>
@@ -6739,10 +7085,10 @@
       </p:sp>
       <p:sp>
         <p:nvSpPr>
-          <p:cNvPr id="9" name="page-number">
-            <a:extLst xmlns:a="http://schemas.openxmlformats.org/drawingml/2006/main">
-              <a:ext uri="{FF2B5EF4-FFF2-40B4-BE49-F238E27FC236}">
-                <a16:creationId xmlns:a16="http://schemas.microsoft.com/office/drawing/2014/main" id="{4B1ED727-0CE8-4982-AD30-04B9E073A655}"/>
+          <p:cNvPr id="11" name="page-number">
+            <a:extLst xmlns:a="http://schemas.openxmlformats.org/drawingml/2006/main">
+              <a:ext uri="{FF2B5EF4-FFF2-40B4-BE49-F238E27FC236}">
+                <a16:creationId xmlns:a16="http://schemas.microsoft.com/office/drawing/2014/main" id="{97E93C80-91AC-4842-8C43-BED4FF63F603}"/>
               </a:ext>
             </a:extLst>
           </p:cNvPr>
@@ -6795,7 +7141,7 @@
     </p:spTree>
     <p:extLst>
       <p:ext uri="{BB962C8B-B14F-4D97-AF65-F5344CB8AC3E}">
-        <p14:creationId xmlns:p14="http://schemas.microsoft.com/office/powerpoint/2010/main" val="504751038"/>
+        <p14:creationId xmlns:p14="http://schemas.microsoft.com/office/powerpoint/2010/main" val="1017433300"/>
       </p:ext>
     </p:extLst>
   </p:cSld>
@@ -6823,10 +7169,10 @@
       </p:grpSpPr>
       <p:sp>
         <p:nvSpPr>
-          <p:cNvPr id="11" name="slide-title">
-            <a:extLst xmlns:a="http://schemas.openxmlformats.org/drawingml/2006/main">
-              <a:ext uri="{FF2B5EF4-FFF2-40B4-BE49-F238E27FC236}">
-                <a16:creationId xmlns:a16="http://schemas.microsoft.com/office/drawing/2014/main" id="{E1439299-6A7F-48EE-A193-7850025035D7}"/>
+          <p:cNvPr id="13" name="slide-title">
+            <a:extLst xmlns:a="http://schemas.openxmlformats.org/drawingml/2006/main">
+              <a:ext uri="{FF2B5EF4-FFF2-40B4-BE49-F238E27FC236}">
+                <a16:creationId xmlns:a16="http://schemas.microsoft.com/office/drawing/2014/main" id="{D038573B-9B20-42FD-9C46-0A924955687B}"/>
               </a:ext>
             </a:extLst>
           </p:cNvPr>
@@ -6877,7 +7223,7 @@
           <p:cNvPr id="2" name="slide-subtitle">
             <a:extLst xmlns:a="http://schemas.openxmlformats.org/drawingml/2006/main">
               <a:ext uri="{FF2B5EF4-FFF2-40B4-BE49-F238E27FC236}">
-                <a16:creationId xmlns:a16="http://schemas.microsoft.com/office/drawing/2014/main" id="{63E5B39D-9C7D-48B6-AB95-3B92232B8D8D}"/>
+                <a16:creationId xmlns:a16="http://schemas.microsoft.com/office/drawing/2014/main" id="{B8CD6501-F7B0-4DFC-87A6-EC340F45C1F1}"/>
               </a:ext>
             </a:extLst>
           </p:cNvPr>
@@ -6928,7 +7274,7 @@
           <p:cNvPr id="3" name="bullets">
             <a:extLst xmlns:a="http://schemas.openxmlformats.org/drawingml/2006/main">
               <a:ext uri="{FF2B5EF4-FFF2-40B4-BE49-F238E27FC236}">
-                <a16:creationId xmlns:a16="http://schemas.microsoft.com/office/drawing/2014/main" id="{FB4549F6-AA1E-48D1-B4AA-868C1E1E105A}"/>
+                <a16:creationId xmlns:a16="http://schemas.microsoft.com/office/drawing/2014/main" id="{E532DF11-8E5E-402D-ADFB-96A00D96421F}"/>
               </a:ext>
             </a:extLst>
           </p:cNvPr>
@@ -7033,7 +7379,7 @@
           <p:cNvPr id="4" name="ambient-glow">
             <a:extLst xmlns:a="http://schemas.openxmlformats.org/drawingml/2006/main">
               <a:ext uri="{FF2B5EF4-FFF2-40B4-BE49-F238E27FC236}">
-                <a16:creationId xmlns:a16="http://schemas.microsoft.com/office/drawing/2014/main" id="{E69EB1D8-DA07-4ABA-A2F7-09FFA0892DC4}"/>
+                <a16:creationId xmlns:a16="http://schemas.microsoft.com/office/drawing/2014/main" id="{DDA80105-C410-4857-8AB3-966BB37F1185}"/>
               </a:ext>
             </a:extLst>
           </p:cNvPr>
@@ -7070,7 +7416,7 @@
           <p:cNvPr id="5" name="ambient-core">
             <a:extLst xmlns:a="http://schemas.openxmlformats.org/drawingml/2006/main">
               <a:ext uri="{FF2B5EF4-FFF2-40B4-BE49-F238E27FC236}">
-                <a16:creationId xmlns:a16="http://schemas.microsoft.com/office/drawing/2014/main" id="{4533DF4F-8208-4D44-A436-A69373C76C7F}"/>
+                <a16:creationId xmlns:a16="http://schemas.microsoft.com/office/drawing/2014/main" id="{31E94939-B772-4A5F-ADF8-C757B67ECE55}"/>
               </a:ext>
             </a:extLst>
           </p:cNvPr>
@@ -7107,7 +7453,7 @@
           <p:cNvPr id="6" name="section-number">
             <a:extLst xmlns:a="http://schemas.openxmlformats.org/drawingml/2006/main">
               <a:ext uri="{FF2B5EF4-FFF2-40B4-BE49-F238E27FC236}">
-                <a16:creationId xmlns:a16="http://schemas.microsoft.com/office/drawing/2014/main" id="{05B7AB63-610B-4FB3-A367-ADA551375A10}"/>
+                <a16:creationId xmlns:a16="http://schemas.microsoft.com/office/drawing/2014/main" id="{F485157B-91F0-40D2-AD19-2E39FAD64BED}"/>
               </a:ext>
             </a:extLst>
           </p:cNvPr>
@@ -7158,7 +7504,7 @@
           <p:cNvPr id="7" name="eyebrow">
             <a:extLst xmlns:a="http://schemas.openxmlformats.org/drawingml/2006/main">
               <a:ext uri="{FF2B5EF4-FFF2-40B4-BE49-F238E27FC236}">
-                <a16:creationId xmlns:a16="http://schemas.microsoft.com/office/drawing/2014/main" id="{3FBF499F-3785-4CC7-BA75-55F50606F78B}"/>
+                <a16:creationId xmlns:a16="http://schemas.microsoft.com/office/drawing/2014/main" id="{23FAB472-480D-4F42-8758-52D0D7D31EAF}"/>
               </a:ext>
             </a:extLst>
           </p:cNvPr>
@@ -7206,10 +7552,69 @@
       </p:sp>
       <p:sp>
         <p:nvSpPr>
-          <p:cNvPr id="8" name="footer-rule">
-            <a:extLst xmlns:a="http://schemas.openxmlformats.org/drawingml/2006/main">
-              <a:ext uri="{FF2B5EF4-FFF2-40B4-BE49-F238E27FC236}">
-                <a16:creationId xmlns:a16="http://schemas.microsoft.com/office/drawing/2014/main" id="{AF5EFFEE-E7A4-4B33-BDBD-0B4D81416CBD}"/>
+          <p:cNvPr id="8" name="rescue-point-logo-background">
+            <a:extLst xmlns:a="http://schemas.openxmlformats.org/drawingml/2006/main">
+              <a:ext uri="{FF2B5EF4-FFF2-40B4-BE49-F238E27FC236}">
+                <a16:creationId xmlns:a16="http://schemas.microsoft.com/office/drawing/2014/main" id="{063A1AC4-1BFA-484C-9DFD-F7CE598B25F8}"/>
+              </a:ext>
+            </a:extLst>
+          </p:cNvPr>
+          <p:cNvSpPr>
+            <a:spLocks xmlns:a="http://schemas.openxmlformats.org/drawingml/2006/main" noGrp="1"/>
+          </p:cNvSpPr>
+          <p:nvPr/>
+        </p:nvSpPr>
+        <p:spPr>
+          <a:xfrm xmlns:a="http://schemas.openxmlformats.org/drawingml/2006/main">
+            <a:off x="9772650" y="133350"/>
+            <a:ext cx="1733550" cy="457200"/>
+          </a:xfrm>
+          <a:prstGeom xmlns:a="http://schemas.openxmlformats.org/drawingml/2006/main" prst="roundRect">
+            <a:avLst>
+              <a:gd name="adj" fmla="val 16667"/>
+            </a:avLst>
+          </a:prstGeom>
+          <a:solidFill xmlns:a="http://schemas.openxmlformats.org/drawingml/2006/main">
+            <a:srgbClr val="06142E"/>
+          </a:solidFill>
+          <a:ln xmlns:a="http://schemas.openxmlformats.org/drawingml/2006/main" w="9525">
+            <a:solidFill>
+              <a:srgbClr val="1EC5FF">
+                <a:alpha val="33333"/>
+              </a:srgbClr>
+            </a:solidFill>
+            <a:prstDash val="solid"/>
+          </a:ln>
+        </p:spPr>
+      </p:sp>
+      <p:pic>
+        <p:nvPicPr>
+          <p:cNvPr id="23" name="" descr="Figura oficial da documentação dbt usada para explicar: A arquitetura recomendada termina no agente — Regras ficam na Gold e nas métricas; o agente consome e explica.."/>
+          <p:cNvPicPr>
+            <a:picLocks xmlns:a="http://schemas.openxmlformats.org/drawingml/2006/main" noChangeAspect="1"/>
+          </p:cNvPicPr>
+          <p:nvPr/>
+        </p:nvPicPr>
+        <p:blipFill>
+          <a:blip xmlns:r="http://schemas.openxmlformats.org/officeDocument/2006/relationships" xmlns:a="http://schemas.openxmlformats.org/drawingml/2006/main" r:embed="Rf3e88a5a2aec49d2"/>
+          <a:stretch xmlns:a="http://schemas.openxmlformats.org/drawingml/2006/main"/>
+        </p:blipFill>
+        <p:spPr>
+          <a:xfrm xmlns:a="http://schemas.openxmlformats.org/drawingml/2006/main">
+            <a:off x="9893718" y="209550"/>
+            <a:ext cx="1491414" cy="323850"/>
+          </a:xfrm>
+          <a:prstGeom xmlns:a="http://schemas.openxmlformats.org/drawingml/2006/main" prst="rect">
+            <a:avLst/>
+          </a:prstGeom>
+        </p:spPr>
+      </p:pic>
+      <p:sp>
+        <p:nvSpPr>
+          <p:cNvPr id="10" name="footer-rule">
+            <a:extLst xmlns:a="http://schemas.openxmlformats.org/drawingml/2006/main">
+              <a:ext uri="{FF2B5EF4-FFF2-40B4-BE49-F238E27FC236}">
+                <a16:creationId xmlns:a16="http://schemas.microsoft.com/office/drawing/2014/main" id="{CD937D28-C587-4434-AD8D-992E2049923F}"/>
               </a:ext>
             </a:extLst>
           </p:cNvPr>
@@ -7239,10 +7644,10 @@
       </p:sp>
       <p:sp>
         <p:nvSpPr>
-          <p:cNvPr id="9" name="footer">
-            <a:extLst xmlns:a="http://schemas.openxmlformats.org/drawingml/2006/main">
-              <a:ext uri="{FF2B5EF4-FFF2-40B4-BE49-F238E27FC236}">
-                <a16:creationId xmlns:a16="http://schemas.microsoft.com/office/drawing/2014/main" id="{B7227ECD-0FF8-470E-BB6F-3E7E23F0470D}"/>
+          <p:cNvPr id="11" name="footer">
+            <a:extLst xmlns:a="http://schemas.openxmlformats.org/drawingml/2006/main">
+              <a:ext uri="{FF2B5EF4-FFF2-40B4-BE49-F238E27FC236}">
+                <a16:creationId xmlns:a16="http://schemas.microsoft.com/office/drawing/2014/main" id="{2729B1A9-9C2E-4424-892E-B4F6EAB4BF17}"/>
               </a:ext>
             </a:extLst>
           </p:cNvPr>
@@ -7294,10 +7699,10 @@
       </p:sp>
       <p:sp>
         <p:nvSpPr>
-          <p:cNvPr id="10" name="page-number">
-            <a:extLst xmlns:a="http://schemas.openxmlformats.org/drawingml/2006/main">
-              <a:ext uri="{FF2B5EF4-FFF2-40B4-BE49-F238E27FC236}">
-                <a16:creationId xmlns:a16="http://schemas.microsoft.com/office/drawing/2014/main" id="{FFE41434-8866-479C-90D9-6C94CC3BFC6A}"/>
+          <p:cNvPr id="12" name="page-number">
+            <a:extLst xmlns:a="http://schemas.openxmlformats.org/drawingml/2006/main">
+              <a:ext uri="{FF2B5EF4-FFF2-40B4-BE49-F238E27FC236}">
+                <a16:creationId xmlns:a16="http://schemas.microsoft.com/office/drawing/2014/main" id="{CFB5D7AD-998F-4D58-BB40-51A435FD63A1}"/>
               </a:ext>
             </a:extLst>
           </p:cNvPr>
@@ -7350,7 +7755,7 @@
     </p:spTree>
     <p:extLst>
       <p:ext uri="{BB962C8B-B14F-4D97-AF65-F5344CB8AC3E}">
-        <p14:creationId xmlns:p14="http://schemas.microsoft.com/office/powerpoint/2010/main" val="1845175226"/>
+        <p14:creationId xmlns:p14="http://schemas.microsoft.com/office/powerpoint/2010/main" val="310726546"/>
       </p:ext>
     </p:extLst>
   </p:cSld>
@@ -7386,10 +7791,10 @@
       </p:grpSpPr>
       <p:sp>
         <p:nvSpPr>
-          <p:cNvPr id="15" name="slide-title">
-            <a:extLst xmlns:a="http://schemas.openxmlformats.org/drawingml/2006/main">
-              <a:ext uri="{FF2B5EF4-FFF2-40B4-BE49-F238E27FC236}">
-                <a16:creationId xmlns:a16="http://schemas.microsoft.com/office/drawing/2014/main" id="{A0C01727-1383-4D9A-9106-B96C0387B575}"/>
+          <p:cNvPr id="17" name="slide-title">
+            <a:extLst xmlns:a="http://schemas.openxmlformats.org/drawingml/2006/main">
+              <a:ext uri="{FF2B5EF4-FFF2-40B4-BE49-F238E27FC236}">
+                <a16:creationId xmlns:a16="http://schemas.microsoft.com/office/drawing/2014/main" id="{DF20DC77-0594-4311-85F9-BCA928BE11D5}"/>
               </a:ext>
             </a:extLst>
           </p:cNvPr>
@@ -7440,7 +7845,7 @@
           <p:cNvPr id="2" name="flow-1">
             <a:extLst xmlns:a="http://schemas.openxmlformats.org/drawingml/2006/main">
               <a:ext uri="{FF2B5EF4-FFF2-40B4-BE49-F238E27FC236}">
-                <a16:creationId xmlns:a16="http://schemas.microsoft.com/office/drawing/2014/main" id="{9FF173A0-1260-4FB4-8BF8-F35284BA45C0}"/>
+                <a16:creationId xmlns:a16="http://schemas.microsoft.com/office/drawing/2014/main" id="{738A5EA5-EB67-4A4E-8B83-4C281E002C30}"/>
               </a:ext>
             </a:extLst>
           </p:cNvPr>
@@ -7497,7 +7902,7 @@
           <p:cNvPr id="3" name="flow-2">
             <a:extLst xmlns:a="http://schemas.openxmlformats.org/drawingml/2006/main">
               <a:ext uri="{FF2B5EF4-FFF2-40B4-BE49-F238E27FC236}">
-                <a16:creationId xmlns:a16="http://schemas.microsoft.com/office/drawing/2014/main" id="{9AC0EDB2-DCB2-4D3F-BBCC-285777CBFCC7}"/>
+                <a16:creationId xmlns:a16="http://schemas.microsoft.com/office/drawing/2014/main" id="{345834F1-9DB9-4D75-9706-7B64FC3F4B61}"/>
               </a:ext>
             </a:extLst>
           </p:cNvPr>
@@ -7554,7 +7959,7 @@
           <p:cNvPr id="4" name="flow-3">
             <a:extLst xmlns:a="http://schemas.openxmlformats.org/drawingml/2006/main">
               <a:ext uri="{FF2B5EF4-FFF2-40B4-BE49-F238E27FC236}">
-                <a16:creationId xmlns:a16="http://schemas.microsoft.com/office/drawing/2014/main" id="{21BB07FB-2CED-4FEF-BA29-3C2E0D33B3F4}"/>
+                <a16:creationId xmlns:a16="http://schemas.microsoft.com/office/drawing/2014/main" id="{CC596352-DB98-4F31-9D3B-E05BF8EEA7C3}"/>
               </a:ext>
             </a:extLst>
           </p:cNvPr>
@@ -7611,7 +8016,7 @@
           <p:cNvPr id="5" name="flow-4">
             <a:extLst xmlns:a="http://schemas.openxmlformats.org/drawingml/2006/main">
               <a:ext uri="{FF2B5EF4-FFF2-40B4-BE49-F238E27FC236}">
-                <a16:creationId xmlns:a16="http://schemas.microsoft.com/office/drawing/2014/main" id="{5F3CDB39-061A-478E-9FB5-C6C4F22C532E}"/>
+                <a16:creationId xmlns:a16="http://schemas.microsoft.com/office/drawing/2014/main" id="{523831B5-972D-44EA-9794-DFDBF112B58D}"/>
               </a:ext>
             </a:extLst>
           </p:cNvPr>
@@ -7668,7 +8073,7 @@
           <p:cNvPr id="6" name="flow-5">
             <a:extLst xmlns:a="http://schemas.openxmlformats.org/drawingml/2006/main">
               <a:ext uri="{FF2B5EF4-FFF2-40B4-BE49-F238E27FC236}">
-                <a16:creationId xmlns:a16="http://schemas.microsoft.com/office/drawing/2014/main" id="{A87B7C09-DC77-47B0-816D-DB75AF247E5B}"/>
+                <a16:creationId xmlns:a16="http://schemas.microsoft.com/office/drawing/2014/main" id="{34CEF486-EB6A-4E5C-BBE9-9BCFB9042725}"/>
               </a:ext>
             </a:extLst>
           </p:cNvPr>
@@ -7722,7 +8127,7 @@
       </p:sp>
       <p:cxnSp>
         <p:nvCxnSpPr>
-          <p:cNvPr id="31" name=""/>
+          <p:cNvPr id="34" name=""/>
           <p:cNvCxnSpPr>
             <a:stCxn xmlns:a="http://schemas.openxmlformats.org/drawingml/2006/main" id="2" idx="3"/>
             <a:endCxn xmlns:a="http://schemas.openxmlformats.org/drawingml/2006/main" id="3" idx="1"/>
@@ -7748,7 +8153,7 @@
       </p:cxnSp>
       <p:cxnSp>
         <p:nvCxnSpPr>
-          <p:cNvPr id="32" name=""/>
+          <p:cNvPr id="35" name=""/>
           <p:cNvCxnSpPr>
             <a:stCxn xmlns:a="http://schemas.openxmlformats.org/drawingml/2006/main" id="3" idx="3"/>
             <a:endCxn xmlns:a="http://schemas.openxmlformats.org/drawingml/2006/main" id="4" idx="1"/>
@@ -7774,7 +8179,7 @@
       </p:cxnSp>
       <p:cxnSp>
         <p:nvCxnSpPr>
-          <p:cNvPr id="33" name=""/>
+          <p:cNvPr id="36" name=""/>
           <p:cNvCxnSpPr>
             <a:stCxn xmlns:a="http://schemas.openxmlformats.org/drawingml/2006/main" id="4" idx="3"/>
             <a:endCxn xmlns:a="http://schemas.openxmlformats.org/drawingml/2006/main" id="5" idx="1"/>
@@ -7800,7 +8205,7 @@
       </p:cxnSp>
       <p:cxnSp>
         <p:nvCxnSpPr>
-          <p:cNvPr id="34" name=""/>
+          <p:cNvPr id="37" name=""/>
           <p:cNvCxnSpPr>
             <a:stCxn xmlns:a="http://schemas.openxmlformats.org/drawingml/2006/main" id="5" idx="3"/>
             <a:endCxn xmlns:a="http://schemas.openxmlformats.org/drawingml/2006/main" id="6" idx="1"/>
@@ -7829,7 +8234,7 @@
           <p:cNvPr id="11" name="eyebrow">
             <a:extLst xmlns:a="http://schemas.openxmlformats.org/drawingml/2006/main">
               <a:ext uri="{FF2B5EF4-FFF2-40B4-BE49-F238E27FC236}">
-                <a16:creationId xmlns:a16="http://schemas.microsoft.com/office/drawing/2014/main" id="{D32300B0-638B-40A7-97E6-F461C012E118}"/>
+                <a16:creationId xmlns:a16="http://schemas.microsoft.com/office/drawing/2014/main" id="{BA592E84-C4B1-4189-B44D-9C2FDEC9E9C4}"/>
               </a:ext>
             </a:extLst>
           </p:cNvPr>
@@ -7877,10 +8282,69 @@
       </p:sp>
       <p:sp>
         <p:nvSpPr>
-          <p:cNvPr id="12" name="footer-rule">
-            <a:extLst xmlns:a="http://schemas.openxmlformats.org/drawingml/2006/main">
-              <a:ext uri="{FF2B5EF4-FFF2-40B4-BE49-F238E27FC236}">
-                <a16:creationId xmlns:a16="http://schemas.microsoft.com/office/drawing/2014/main" id="{D65765FD-5A1F-4D63-AFC1-59DDAEE371EF}"/>
+          <p:cNvPr id="12" name="rescue-point-logo-background">
+            <a:extLst xmlns:a="http://schemas.openxmlformats.org/drawingml/2006/main">
+              <a:ext uri="{FF2B5EF4-FFF2-40B4-BE49-F238E27FC236}">
+                <a16:creationId xmlns:a16="http://schemas.microsoft.com/office/drawing/2014/main" id="{B5B651C7-3FA6-46FA-9AA5-68FD7EE7460F}"/>
+              </a:ext>
+            </a:extLst>
+          </p:cNvPr>
+          <p:cNvSpPr>
+            <a:spLocks xmlns:a="http://schemas.openxmlformats.org/drawingml/2006/main" noGrp="1"/>
+          </p:cNvSpPr>
+          <p:nvPr/>
+        </p:nvSpPr>
+        <p:spPr>
+          <a:xfrm xmlns:a="http://schemas.openxmlformats.org/drawingml/2006/main">
+            <a:off x="9772650" y="133350"/>
+            <a:ext cx="1733550" cy="457200"/>
+          </a:xfrm>
+          <a:prstGeom xmlns:a="http://schemas.openxmlformats.org/drawingml/2006/main" prst="roundRect">
+            <a:avLst>
+              <a:gd name="adj" fmla="val 16667"/>
+            </a:avLst>
+          </a:prstGeom>
+          <a:solidFill xmlns:a="http://schemas.openxmlformats.org/drawingml/2006/main">
+            <a:srgbClr val="06142E"/>
+          </a:solidFill>
+          <a:ln xmlns:a="http://schemas.openxmlformats.org/drawingml/2006/main" w="9525">
+            <a:solidFill>
+              <a:srgbClr val="1EC5FF">
+                <a:alpha val="33333"/>
+              </a:srgbClr>
+            </a:solidFill>
+            <a:prstDash val="solid"/>
+          </a:ln>
+        </p:spPr>
+      </p:sp>
+      <p:pic>
+        <p:nvPicPr>
+          <p:cNvPr id="40" name="" descr="Figura oficial da documentação dbt usada para explicar: A arquitetura recomendada termina no agente — Silver."/>
+          <p:cNvPicPr>
+            <a:picLocks xmlns:a="http://schemas.openxmlformats.org/drawingml/2006/main" noChangeAspect="1"/>
+          </p:cNvPicPr>
+          <p:nvPr/>
+        </p:nvPicPr>
+        <p:blipFill>
+          <a:blip xmlns:r="http://schemas.openxmlformats.org/officeDocument/2006/relationships" xmlns:a="http://schemas.openxmlformats.org/drawingml/2006/main" r:embed="R1c438b35c05e4b4c"/>
+          <a:stretch xmlns:a="http://schemas.openxmlformats.org/drawingml/2006/main"/>
+        </p:blipFill>
+        <p:spPr>
+          <a:xfrm xmlns:a="http://schemas.openxmlformats.org/drawingml/2006/main">
+            <a:off x="9893718" y="209550"/>
+            <a:ext cx="1491414" cy="323850"/>
+          </a:xfrm>
+          <a:prstGeom xmlns:a="http://schemas.openxmlformats.org/drawingml/2006/main" prst="rect">
+            <a:avLst/>
+          </a:prstGeom>
+        </p:spPr>
+      </p:pic>
+      <p:sp>
+        <p:nvSpPr>
+          <p:cNvPr id="14" name="footer-rule">
+            <a:extLst xmlns:a="http://schemas.openxmlformats.org/drawingml/2006/main">
+              <a:ext uri="{FF2B5EF4-FFF2-40B4-BE49-F238E27FC236}">
+                <a16:creationId xmlns:a16="http://schemas.microsoft.com/office/drawing/2014/main" id="{C032E889-3022-4CDF-B204-FC64D4E13AEF}"/>
               </a:ext>
             </a:extLst>
           </p:cNvPr>
@@ -7910,10 +8374,10 @@
       </p:sp>
       <p:sp>
         <p:nvSpPr>
-          <p:cNvPr id="13" name="footer">
-            <a:extLst xmlns:a="http://schemas.openxmlformats.org/drawingml/2006/main">
-              <a:ext uri="{FF2B5EF4-FFF2-40B4-BE49-F238E27FC236}">
-                <a16:creationId xmlns:a16="http://schemas.microsoft.com/office/drawing/2014/main" id="{344C0BA9-2FC1-43D5-9881-2B48858721B1}"/>
+          <p:cNvPr id="15" name="footer">
+            <a:extLst xmlns:a="http://schemas.openxmlformats.org/drawingml/2006/main">
+              <a:ext uri="{FF2B5EF4-FFF2-40B4-BE49-F238E27FC236}">
+                <a16:creationId xmlns:a16="http://schemas.microsoft.com/office/drawing/2014/main" id="{CA32632A-760A-4275-9EB1-88C125D53E9D}"/>
               </a:ext>
             </a:extLst>
           </p:cNvPr>
@@ -7965,10 +8429,10 @@
       </p:sp>
       <p:sp>
         <p:nvSpPr>
-          <p:cNvPr id="14" name="page-number">
-            <a:extLst xmlns:a="http://schemas.openxmlformats.org/drawingml/2006/main">
-              <a:ext uri="{FF2B5EF4-FFF2-40B4-BE49-F238E27FC236}">
-                <a16:creationId xmlns:a16="http://schemas.microsoft.com/office/drawing/2014/main" id="{7F8986B3-119D-409A-B858-59733B588F91}"/>
+          <p:cNvPr id="16" name="page-number">
+            <a:extLst xmlns:a="http://schemas.openxmlformats.org/drawingml/2006/main">
+              <a:ext uri="{FF2B5EF4-FFF2-40B4-BE49-F238E27FC236}">
+                <a16:creationId xmlns:a16="http://schemas.microsoft.com/office/drawing/2014/main" id="{DD4F79C2-66E0-4592-9267-FFFB225FBDBA}"/>
               </a:ext>
             </a:extLst>
           </p:cNvPr>
@@ -8021,7 +8485,7 @@
     </p:spTree>
     <p:extLst>
       <p:ext uri="{BB962C8B-B14F-4D97-AF65-F5344CB8AC3E}">
-        <p14:creationId xmlns:p14="http://schemas.microsoft.com/office/powerpoint/2010/main" val="1447465290"/>
+        <p14:creationId xmlns:p14="http://schemas.microsoft.com/office/powerpoint/2010/main" val="525835618"/>
       </p:ext>
     </p:extLst>
   </p:cSld>
@@ -8057,10 +8521,10 @@
       </p:grpSpPr>
       <p:sp>
         <p:nvSpPr>
-          <p:cNvPr id="9" name="slide-title">
-            <a:extLst xmlns:a="http://schemas.openxmlformats.org/drawingml/2006/main">
-              <a:ext uri="{FF2B5EF4-FFF2-40B4-BE49-F238E27FC236}">
-                <a16:creationId xmlns:a16="http://schemas.microsoft.com/office/drawing/2014/main" id="{5C1B5FB0-F0A5-4D8A-AD99-9B80ADEFF9BC}"/>
+          <p:cNvPr id="11" name="slide-title">
+            <a:extLst xmlns:a="http://schemas.openxmlformats.org/drawingml/2006/main">
+              <a:ext uri="{FF2B5EF4-FFF2-40B4-BE49-F238E27FC236}">
+                <a16:creationId xmlns:a16="http://schemas.microsoft.com/office/drawing/2014/main" id="{C4C0247B-1250-4EF3-8C79-F2CEF91ED081}"/>
               </a:ext>
             </a:extLst>
           </p:cNvPr>
@@ -8111,7 +8575,7 @@
           <p:cNvPr id="2" name="code-surface">
             <a:extLst xmlns:a="http://schemas.openxmlformats.org/drawingml/2006/main">
               <a:ext uri="{FF2B5EF4-FFF2-40B4-BE49-F238E27FC236}">
-                <a16:creationId xmlns:a16="http://schemas.microsoft.com/office/drawing/2014/main" id="{463F474F-F4CC-4492-AD48-0014C9B77363}"/>
+                <a16:creationId xmlns:a16="http://schemas.microsoft.com/office/drawing/2014/main" id="{35F7E344-7825-41C4-B0AC-6C8EDE9A28B1}"/>
               </a:ext>
             </a:extLst>
           </p:cNvPr>
@@ -8146,7 +8610,7 @@
           <p:cNvPr id="3" name="command">
             <a:extLst xmlns:a="http://schemas.openxmlformats.org/drawingml/2006/main">
               <a:ext uri="{FF2B5EF4-FFF2-40B4-BE49-F238E27FC236}">
-                <a16:creationId xmlns:a16="http://schemas.microsoft.com/office/drawing/2014/main" id="{7C8C38BE-A9D5-44FE-AB08-A3B04D1CFF37}"/>
+                <a16:creationId xmlns:a16="http://schemas.microsoft.com/office/drawing/2014/main" id="{BF8B5A6E-28A8-4A0F-860E-C1A396BC9D19}"/>
               </a:ext>
             </a:extLst>
           </p:cNvPr>
@@ -8197,7 +8661,7 @@
           <p:cNvPr id="4" name="command-help">
             <a:extLst xmlns:a="http://schemas.openxmlformats.org/drawingml/2006/main">
               <a:ext uri="{FF2B5EF4-FFF2-40B4-BE49-F238E27FC236}">
-                <a16:creationId xmlns:a16="http://schemas.microsoft.com/office/drawing/2014/main" id="{8F4D8085-C650-42EC-B82C-6F03FD989BDA}"/>
+                <a16:creationId xmlns:a16="http://schemas.microsoft.com/office/drawing/2014/main" id="{0DF9035A-B035-43B8-A110-4D955442DA93}"/>
               </a:ext>
             </a:extLst>
           </p:cNvPr>
@@ -8248,7 +8712,7 @@
           <p:cNvPr id="5" name="eyebrow">
             <a:extLst xmlns:a="http://schemas.openxmlformats.org/drawingml/2006/main">
               <a:ext uri="{FF2B5EF4-FFF2-40B4-BE49-F238E27FC236}">
-                <a16:creationId xmlns:a16="http://schemas.microsoft.com/office/drawing/2014/main" id="{B5CCFAF2-3182-4D2C-978A-15446E0D3D0B}"/>
+                <a16:creationId xmlns:a16="http://schemas.microsoft.com/office/drawing/2014/main" id="{99BC13AB-79C9-452D-B4A9-1160E7E01518}"/>
               </a:ext>
             </a:extLst>
           </p:cNvPr>
@@ -8296,10 +8760,69 @@
       </p:sp>
       <p:sp>
         <p:nvSpPr>
-          <p:cNvPr id="6" name="footer-rule">
-            <a:extLst xmlns:a="http://schemas.openxmlformats.org/drawingml/2006/main">
-              <a:ext uri="{FF2B5EF4-FFF2-40B4-BE49-F238E27FC236}">
-                <a16:creationId xmlns:a16="http://schemas.microsoft.com/office/drawing/2014/main" id="{791A7B0A-C89B-4052-84EF-C30B08802CFF}"/>
+          <p:cNvPr id="6" name="rescue-point-logo-background">
+            <a:extLst xmlns:a="http://schemas.openxmlformats.org/drawingml/2006/main">
+              <a:ext uri="{FF2B5EF4-FFF2-40B4-BE49-F238E27FC236}">
+                <a16:creationId xmlns:a16="http://schemas.microsoft.com/office/drawing/2014/main" id="{962FAF5E-B4C4-43BF-B7D0-DDC0739DDC7A}"/>
+              </a:ext>
+            </a:extLst>
+          </p:cNvPr>
+          <p:cNvSpPr>
+            <a:spLocks xmlns:a="http://schemas.openxmlformats.org/drawingml/2006/main" noGrp="1"/>
+          </p:cNvSpPr>
+          <p:nvPr/>
+        </p:nvSpPr>
+        <p:spPr>
+          <a:xfrm xmlns:a="http://schemas.openxmlformats.org/drawingml/2006/main">
+            <a:off x="9772650" y="133350"/>
+            <a:ext cx="1733550" cy="457200"/>
+          </a:xfrm>
+          <a:prstGeom xmlns:a="http://schemas.openxmlformats.org/drawingml/2006/main" prst="roundRect">
+            <a:avLst>
+              <a:gd name="adj" fmla="val 16667"/>
+            </a:avLst>
+          </a:prstGeom>
+          <a:solidFill xmlns:a="http://schemas.openxmlformats.org/drawingml/2006/main">
+            <a:srgbClr val="06142E"/>
+          </a:solidFill>
+          <a:ln xmlns:a="http://schemas.openxmlformats.org/drawingml/2006/main" w="9525">
+            <a:solidFill>
+              <a:srgbClr val="1EC5FF">
+                <a:alpha val="33333"/>
+              </a:srgbClr>
+            </a:solidFill>
+            <a:prstDash val="solid"/>
+          </a:ln>
+        </p:spPr>
+      </p:sp>
+      <p:pic>
+        <p:nvPicPr>
+          <p:cNvPr id="19" name="" descr="Figura oficial da documentação dbt usada para explicar: Demonstração — execute — python course.py checkpoint 12."/>
+          <p:cNvPicPr>
+            <a:picLocks xmlns:a="http://schemas.openxmlformats.org/drawingml/2006/main" noChangeAspect="1"/>
+          </p:cNvPicPr>
+          <p:nvPr/>
+        </p:nvPicPr>
+        <p:blipFill>
+          <a:blip xmlns:r="http://schemas.openxmlformats.org/officeDocument/2006/relationships" xmlns:a="http://schemas.openxmlformats.org/drawingml/2006/main" r:embed="R01c898d57500405e"/>
+          <a:stretch xmlns:a="http://schemas.openxmlformats.org/drawingml/2006/main"/>
+        </p:blipFill>
+        <p:spPr>
+          <a:xfrm xmlns:a="http://schemas.openxmlformats.org/drawingml/2006/main">
+            <a:off x="9893718" y="209550"/>
+            <a:ext cx="1491414" cy="323850"/>
+          </a:xfrm>
+          <a:prstGeom xmlns:a="http://schemas.openxmlformats.org/drawingml/2006/main" prst="rect">
+            <a:avLst/>
+          </a:prstGeom>
+        </p:spPr>
+      </p:pic>
+      <p:sp>
+        <p:nvSpPr>
+          <p:cNvPr id="8" name="footer-rule">
+            <a:extLst xmlns:a="http://schemas.openxmlformats.org/drawingml/2006/main">
+              <a:ext uri="{FF2B5EF4-FFF2-40B4-BE49-F238E27FC236}">
+                <a16:creationId xmlns:a16="http://schemas.microsoft.com/office/drawing/2014/main" id="{C092F1C5-D62E-4583-9CF6-C141781602B2}"/>
               </a:ext>
             </a:extLst>
           </p:cNvPr>
@@ -8329,10 +8852,10 @@
       </p:sp>
       <p:sp>
         <p:nvSpPr>
-          <p:cNvPr id="7" name="footer">
-            <a:extLst xmlns:a="http://schemas.openxmlformats.org/drawingml/2006/main">
-              <a:ext uri="{FF2B5EF4-FFF2-40B4-BE49-F238E27FC236}">
-                <a16:creationId xmlns:a16="http://schemas.microsoft.com/office/drawing/2014/main" id="{3EEBB1FE-2451-49DA-B2DE-3527ACD57449}"/>
+          <p:cNvPr id="9" name="footer">
+            <a:extLst xmlns:a="http://schemas.openxmlformats.org/drawingml/2006/main">
+              <a:ext uri="{FF2B5EF4-FFF2-40B4-BE49-F238E27FC236}">
+                <a16:creationId xmlns:a16="http://schemas.microsoft.com/office/drawing/2014/main" id="{41BFBC88-92B2-4100-868E-47DE8EA655AE}"/>
               </a:ext>
             </a:extLst>
           </p:cNvPr>
@@ -8384,10 +8907,10 @@
       </p:sp>
       <p:sp>
         <p:nvSpPr>
-          <p:cNvPr id="8" name="page-number">
-            <a:extLst xmlns:a="http://schemas.openxmlformats.org/drawingml/2006/main">
-              <a:ext uri="{FF2B5EF4-FFF2-40B4-BE49-F238E27FC236}">
-                <a16:creationId xmlns:a16="http://schemas.microsoft.com/office/drawing/2014/main" id="{43874FBF-9701-4E02-84C6-CD60B778EE86}"/>
+          <p:cNvPr id="10" name="page-number">
+            <a:extLst xmlns:a="http://schemas.openxmlformats.org/drawingml/2006/main">
+              <a:ext uri="{FF2B5EF4-FFF2-40B4-BE49-F238E27FC236}">
+                <a16:creationId xmlns:a16="http://schemas.microsoft.com/office/drawing/2014/main" id="{000895BF-D889-47AF-B35F-454A1EAC9305}"/>
               </a:ext>
             </a:extLst>
           </p:cNvPr>
@@ -8440,7 +8963,7 @@
     </p:spTree>
     <p:extLst>
       <p:ext uri="{BB962C8B-B14F-4D97-AF65-F5344CB8AC3E}">
-        <p14:creationId xmlns:p14="http://schemas.microsoft.com/office/powerpoint/2010/main" val="1938995599"/>
+        <p14:creationId xmlns:p14="http://schemas.microsoft.com/office/powerpoint/2010/main" val="1774602183"/>
       </p:ext>
     </p:extLst>
   </p:cSld>
@@ -8468,10 +8991,10 @@
       </p:grpSpPr>
       <p:sp>
         <p:nvSpPr>
-          <p:cNvPr id="14" name="slide-title">
-            <a:extLst xmlns:a="http://schemas.openxmlformats.org/drawingml/2006/main">
-              <a:ext uri="{FF2B5EF4-FFF2-40B4-BE49-F238E27FC236}">
-                <a16:creationId xmlns:a16="http://schemas.microsoft.com/office/drawing/2014/main" id="{D4DCD0DC-9C62-40C0-8B3F-EECB6F9DD2CA}"/>
+          <p:cNvPr id="16" name="slide-title">
+            <a:extLst xmlns:a="http://schemas.openxmlformats.org/drawingml/2006/main">
+              <a:ext uri="{FF2B5EF4-FFF2-40B4-BE49-F238E27FC236}">
+                <a16:creationId xmlns:a16="http://schemas.microsoft.com/office/drawing/2014/main" id="{09F3996B-6080-463A-8EE9-B92535ADEE09}"/>
               </a:ext>
             </a:extLst>
           </p:cNvPr>
@@ -8522,7 +9045,7 @@
           <p:cNvPr id="2" name="step-num-1">
             <a:extLst xmlns:a="http://schemas.openxmlformats.org/drawingml/2006/main">
               <a:ext uri="{FF2B5EF4-FFF2-40B4-BE49-F238E27FC236}">
-                <a16:creationId xmlns:a16="http://schemas.microsoft.com/office/drawing/2014/main" id="{3F0AF369-6269-4C95-869E-2181F2D47605}"/>
+                <a16:creationId xmlns:a16="http://schemas.microsoft.com/office/drawing/2014/main" id="{CCD1548B-E849-446A-A4B5-457B38B18086}"/>
               </a:ext>
             </a:extLst>
           </p:cNvPr>
@@ -8573,7 +9096,7 @@
           <p:cNvPr id="3" name="step-label-1">
             <a:extLst xmlns:a="http://schemas.openxmlformats.org/drawingml/2006/main">
               <a:ext uri="{FF2B5EF4-FFF2-40B4-BE49-F238E27FC236}">
-                <a16:creationId xmlns:a16="http://schemas.microsoft.com/office/drawing/2014/main" id="{FE48B13A-F416-4008-AFB6-4B6E82A07B8A}"/>
+                <a16:creationId xmlns:a16="http://schemas.microsoft.com/office/drawing/2014/main" id="{81E0B74B-B57C-4B48-8286-7C0242D29773}"/>
               </a:ext>
             </a:extLst>
           </p:cNvPr>
@@ -8624,7 +9147,7 @@
           <p:cNvPr id="4" name="step-line-1">
             <a:extLst xmlns:a="http://schemas.openxmlformats.org/drawingml/2006/main">
               <a:ext uri="{FF2B5EF4-FFF2-40B4-BE49-F238E27FC236}">
-                <a16:creationId xmlns:a16="http://schemas.microsoft.com/office/drawing/2014/main" id="{69AD1D0E-E887-40EA-ADCE-FDC0D67575AC}"/>
+                <a16:creationId xmlns:a16="http://schemas.microsoft.com/office/drawing/2014/main" id="{03F3EEA0-724B-4222-BF81-9F94DD04424A}"/>
               </a:ext>
             </a:extLst>
           </p:cNvPr>
@@ -8655,7 +9178,7 @@
           <p:cNvPr id="5" name="step-num-2">
             <a:extLst xmlns:a="http://schemas.openxmlformats.org/drawingml/2006/main">
               <a:ext uri="{FF2B5EF4-FFF2-40B4-BE49-F238E27FC236}">
-                <a16:creationId xmlns:a16="http://schemas.microsoft.com/office/drawing/2014/main" id="{690EBE5F-0FA8-4B44-B4CC-77E0C2E70095}"/>
+                <a16:creationId xmlns:a16="http://schemas.microsoft.com/office/drawing/2014/main" id="{52F80038-9A11-4973-84A4-60D49F345384}"/>
               </a:ext>
             </a:extLst>
           </p:cNvPr>
@@ -8706,7 +9229,7 @@
           <p:cNvPr id="6" name="step-label-2">
             <a:extLst xmlns:a="http://schemas.openxmlformats.org/drawingml/2006/main">
               <a:ext uri="{FF2B5EF4-FFF2-40B4-BE49-F238E27FC236}">
-                <a16:creationId xmlns:a16="http://schemas.microsoft.com/office/drawing/2014/main" id="{92D40F8A-5EA8-484A-BAD4-ACAA9287163F}"/>
+                <a16:creationId xmlns:a16="http://schemas.microsoft.com/office/drawing/2014/main" id="{445F293F-CD08-4D9F-A154-86FE745CFC0B}"/>
               </a:ext>
             </a:extLst>
           </p:cNvPr>
@@ -8757,7 +9280,7 @@
           <p:cNvPr id="7" name="step-line-2">
             <a:extLst xmlns:a="http://schemas.openxmlformats.org/drawingml/2006/main">
               <a:ext uri="{FF2B5EF4-FFF2-40B4-BE49-F238E27FC236}">
-                <a16:creationId xmlns:a16="http://schemas.microsoft.com/office/drawing/2014/main" id="{3F5A57C3-42C3-46DF-B877-9DBF911434AC}"/>
+                <a16:creationId xmlns:a16="http://schemas.microsoft.com/office/drawing/2014/main" id="{BCE054A3-78CD-4308-B7E2-81AD07FDCA4C}"/>
               </a:ext>
             </a:extLst>
           </p:cNvPr>
@@ -8788,7 +9311,7 @@
           <p:cNvPr id="8" name="step-num-3">
             <a:extLst xmlns:a="http://schemas.openxmlformats.org/drawingml/2006/main">
               <a:ext uri="{FF2B5EF4-FFF2-40B4-BE49-F238E27FC236}">
-                <a16:creationId xmlns:a16="http://schemas.microsoft.com/office/drawing/2014/main" id="{23999DDC-5B5E-4ECD-9385-A01948461E9D}"/>
+                <a16:creationId xmlns:a16="http://schemas.microsoft.com/office/drawing/2014/main" id="{B36A0DF8-D8F7-45AC-8871-A459B3E08F94}"/>
               </a:ext>
             </a:extLst>
           </p:cNvPr>
@@ -8839,7 +9362,7 @@
           <p:cNvPr id="9" name="step-label-3">
             <a:extLst xmlns:a="http://schemas.openxmlformats.org/drawingml/2006/main">
               <a:ext uri="{FF2B5EF4-FFF2-40B4-BE49-F238E27FC236}">
-                <a16:creationId xmlns:a16="http://schemas.microsoft.com/office/drawing/2014/main" id="{649C1EEB-CB1B-45F1-A3CA-4E95159F5A11}"/>
+                <a16:creationId xmlns:a16="http://schemas.microsoft.com/office/drawing/2014/main" id="{45022A36-39B7-4F95-8285-9C0B931B9924}"/>
               </a:ext>
             </a:extLst>
           </p:cNvPr>
@@ -8890,7 +9413,7 @@
           <p:cNvPr id="10" name="eyebrow">
             <a:extLst xmlns:a="http://schemas.openxmlformats.org/drawingml/2006/main">
               <a:ext uri="{FF2B5EF4-FFF2-40B4-BE49-F238E27FC236}">
-                <a16:creationId xmlns:a16="http://schemas.microsoft.com/office/drawing/2014/main" id="{19AEFEE7-214A-495D-B4FC-42901765F6FF}"/>
+                <a16:creationId xmlns:a16="http://schemas.microsoft.com/office/drawing/2014/main" id="{750D7870-3BED-4D82-853E-CBA4475061D5}"/>
               </a:ext>
             </a:extLst>
           </p:cNvPr>
@@ -8938,10 +9461,69 @@
       </p:sp>
       <p:sp>
         <p:nvSpPr>
-          <p:cNvPr id="11" name="footer-rule">
-            <a:extLst xmlns:a="http://schemas.openxmlformats.org/drawingml/2006/main">
-              <a:ext uri="{FF2B5EF4-FFF2-40B4-BE49-F238E27FC236}">
-                <a16:creationId xmlns:a16="http://schemas.microsoft.com/office/drawing/2014/main" id="{C66D4605-E0D8-429B-BFD1-EBD98AB9FB93}"/>
+          <p:cNvPr id="11" name="rescue-point-logo-background">
+            <a:extLst xmlns:a="http://schemas.openxmlformats.org/drawingml/2006/main">
+              <a:ext uri="{FF2B5EF4-FFF2-40B4-BE49-F238E27FC236}">
+                <a16:creationId xmlns:a16="http://schemas.microsoft.com/office/drawing/2014/main" id="{1E3B3541-74E0-498E-BAB9-765FE45CAE5B}"/>
+              </a:ext>
+            </a:extLst>
+          </p:cNvPr>
+          <p:cNvSpPr>
+            <a:spLocks xmlns:a="http://schemas.openxmlformats.org/drawingml/2006/main" noGrp="1"/>
+          </p:cNvSpPr>
+          <p:nvPr/>
+        </p:nvSpPr>
+        <p:spPr>
+          <a:xfrm xmlns:a="http://schemas.openxmlformats.org/drawingml/2006/main">
+            <a:off x="9772650" y="133350"/>
+            <a:ext cx="1733550" cy="457200"/>
+          </a:xfrm>
+          <a:prstGeom xmlns:a="http://schemas.openxmlformats.org/drawingml/2006/main" prst="roundRect">
+            <a:avLst>
+              <a:gd name="adj" fmla="val 16667"/>
+            </a:avLst>
+          </a:prstGeom>
+          <a:solidFill xmlns:a="http://schemas.openxmlformats.org/drawingml/2006/main">
+            <a:srgbClr val="06142E"/>
+          </a:solidFill>
+          <a:ln xmlns:a="http://schemas.openxmlformats.org/drawingml/2006/main" w="9525">
+            <a:solidFill>
+              <a:srgbClr val="1EC5FF">
+                <a:alpha val="33333"/>
+              </a:srgbClr>
+            </a:solidFill>
+            <a:prstDash val="solid"/>
+          </a:ln>
+        </p:spPr>
+      </p:sp>
+      <p:pic>
+        <p:nvPicPr>
+          <p:cNvPr id="29" name="" descr="Figura oficial da documentação dbt usada para explicar: Demonstração — observe — 01."/>
+          <p:cNvPicPr>
+            <a:picLocks xmlns:a="http://schemas.openxmlformats.org/drawingml/2006/main" noChangeAspect="1"/>
+          </p:cNvPicPr>
+          <p:nvPr/>
+        </p:nvPicPr>
+        <p:blipFill>
+          <a:blip xmlns:r="http://schemas.openxmlformats.org/officeDocument/2006/relationships" xmlns:a="http://schemas.openxmlformats.org/drawingml/2006/main" r:embed="Rcc03cba9c0b440e4"/>
+          <a:stretch xmlns:a="http://schemas.openxmlformats.org/drawingml/2006/main"/>
+        </p:blipFill>
+        <p:spPr>
+          <a:xfrm xmlns:a="http://schemas.openxmlformats.org/drawingml/2006/main">
+            <a:off x="9893718" y="209550"/>
+            <a:ext cx="1491414" cy="323850"/>
+          </a:xfrm>
+          <a:prstGeom xmlns:a="http://schemas.openxmlformats.org/drawingml/2006/main" prst="rect">
+            <a:avLst/>
+          </a:prstGeom>
+        </p:spPr>
+      </p:pic>
+      <p:sp>
+        <p:nvSpPr>
+          <p:cNvPr id="13" name="footer-rule">
+            <a:extLst xmlns:a="http://schemas.openxmlformats.org/drawingml/2006/main">
+              <a:ext uri="{FF2B5EF4-FFF2-40B4-BE49-F238E27FC236}">
+                <a16:creationId xmlns:a16="http://schemas.microsoft.com/office/drawing/2014/main" id="{18371A92-21EA-4A89-B8D6-4520351912EB}"/>
               </a:ext>
             </a:extLst>
           </p:cNvPr>
@@ -8971,10 +9553,10 @@
       </p:sp>
       <p:sp>
         <p:nvSpPr>
-          <p:cNvPr id="12" name="footer">
-            <a:extLst xmlns:a="http://schemas.openxmlformats.org/drawingml/2006/main">
-              <a:ext uri="{FF2B5EF4-FFF2-40B4-BE49-F238E27FC236}">
-                <a16:creationId xmlns:a16="http://schemas.microsoft.com/office/drawing/2014/main" id="{31E87497-7209-4EAC-B63E-8E15E3DF5164}"/>
+          <p:cNvPr id="14" name="footer">
+            <a:extLst xmlns:a="http://schemas.openxmlformats.org/drawingml/2006/main">
+              <a:ext uri="{FF2B5EF4-FFF2-40B4-BE49-F238E27FC236}">
+                <a16:creationId xmlns:a16="http://schemas.microsoft.com/office/drawing/2014/main" id="{26D9D88B-CE6B-42D9-BC95-62C30205242B}"/>
               </a:ext>
             </a:extLst>
           </p:cNvPr>
@@ -9026,10 +9608,10 @@
       </p:sp>
       <p:sp>
         <p:nvSpPr>
-          <p:cNvPr id="13" name="page-number">
-            <a:extLst xmlns:a="http://schemas.openxmlformats.org/drawingml/2006/main">
-              <a:ext uri="{FF2B5EF4-FFF2-40B4-BE49-F238E27FC236}">
-                <a16:creationId xmlns:a16="http://schemas.microsoft.com/office/drawing/2014/main" id="{BF2B1C0B-DED2-45ED-ABEB-F3982A7797DA}"/>
+          <p:cNvPr id="15" name="page-number">
+            <a:extLst xmlns:a="http://schemas.openxmlformats.org/drawingml/2006/main">
+              <a:ext uri="{FF2B5EF4-FFF2-40B4-BE49-F238E27FC236}">
+                <a16:creationId xmlns:a16="http://schemas.microsoft.com/office/drawing/2014/main" id="{DE4D90E3-1449-45A9-A841-E802948CEA06}"/>
               </a:ext>
             </a:extLst>
           </p:cNvPr>
@@ -9082,7 +9664,7 @@
     </p:spTree>
     <p:extLst>
       <p:ext uri="{BB962C8B-B14F-4D97-AF65-F5344CB8AC3E}">
-        <p14:creationId xmlns:p14="http://schemas.microsoft.com/office/powerpoint/2010/main" val="276543595"/>
+        <p14:creationId xmlns:p14="http://schemas.microsoft.com/office/powerpoint/2010/main" val="228601334"/>
       </p:ext>
     </p:extLst>
   </p:cSld>
@@ -9118,10 +9700,10 @@
       </p:grpSpPr>
       <p:sp>
         <p:nvSpPr>
-          <p:cNvPr id="10" name="result-label">
-            <a:extLst xmlns:a="http://schemas.openxmlformats.org/drawingml/2006/main">
-              <a:ext uri="{FF2B5EF4-FFF2-40B4-BE49-F238E27FC236}">
-                <a16:creationId xmlns:a16="http://schemas.microsoft.com/office/drawing/2014/main" id="{29C60EDE-ED96-4FF4-BA3A-63C8DC3197A5}"/>
+          <p:cNvPr id="12" name="result-label">
+            <a:extLst xmlns:a="http://schemas.openxmlformats.org/drawingml/2006/main">
+              <a:ext uri="{FF2B5EF4-FFF2-40B4-BE49-F238E27FC236}">
+                <a16:creationId xmlns:a16="http://schemas.microsoft.com/office/drawing/2014/main" id="{3FFAC867-BDF9-4C6F-AAB2-CEC3EFF71A08}"/>
               </a:ext>
             </a:extLst>
           </p:cNvPr>
@@ -9172,7 +9754,7 @@
           <p:cNvPr id="2" name="result">
             <a:extLst xmlns:a="http://schemas.openxmlformats.org/drawingml/2006/main">
               <a:ext uri="{FF2B5EF4-FFF2-40B4-BE49-F238E27FC236}">
-                <a16:creationId xmlns:a16="http://schemas.microsoft.com/office/drawing/2014/main" id="{CC6BEE7D-CCE3-454F-9164-372E232B0806}"/>
+                <a16:creationId xmlns:a16="http://schemas.microsoft.com/office/drawing/2014/main" id="{4FD11024-2C4B-471C-BD7D-63BAD4014D9A}"/>
               </a:ext>
             </a:extLst>
           </p:cNvPr>
@@ -9223,7 +9805,7 @@
           <p:cNvPr id="3" name="result-meta">
             <a:extLst xmlns:a="http://schemas.openxmlformats.org/drawingml/2006/main">
               <a:ext uri="{FF2B5EF4-FFF2-40B4-BE49-F238E27FC236}">
-                <a16:creationId xmlns:a16="http://schemas.microsoft.com/office/drawing/2014/main" id="{903856D0-9B13-4398-BAD9-80C966FE3BE3}"/>
+                <a16:creationId xmlns:a16="http://schemas.microsoft.com/office/drawing/2014/main" id="{1FA047D2-9962-4928-A4D9-CB63F1984B0D}"/>
               </a:ext>
             </a:extLst>
           </p:cNvPr>
@@ -9274,7 +9856,7 @@
           <p:cNvPr id="4" name="ambient-glow">
             <a:extLst xmlns:a="http://schemas.openxmlformats.org/drawingml/2006/main">
               <a:ext uri="{FF2B5EF4-FFF2-40B4-BE49-F238E27FC236}">
-                <a16:creationId xmlns:a16="http://schemas.microsoft.com/office/drawing/2014/main" id="{421C2E82-3D38-4787-BA0F-EEB820BAD418}"/>
+                <a16:creationId xmlns:a16="http://schemas.microsoft.com/office/drawing/2014/main" id="{48A44E6E-7653-4DF4-B151-B75618F85BB1}"/>
               </a:ext>
             </a:extLst>
           </p:cNvPr>
@@ -9311,7 +9893,7 @@
           <p:cNvPr id="5" name="ambient-core">
             <a:extLst xmlns:a="http://schemas.openxmlformats.org/drawingml/2006/main">
               <a:ext uri="{FF2B5EF4-FFF2-40B4-BE49-F238E27FC236}">
-                <a16:creationId xmlns:a16="http://schemas.microsoft.com/office/drawing/2014/main" id="{971DA236-2728-44B7-8A4E-C09EC7762D1A}"/>
+                <a16:creationId xmlns:a16="http://schemas.microsoft.com/office/drawing/2014/main" id="{E59FD33F-3EED-48B5-9A88-776DCEAD2110}"/>
               </a:ext>
             </a:extLst>
           </p:cNvPr>
@@ -9348,7 +9930,7 @@
           <p:cNvPr id="6" name="eyebrow">
             <a:extLst xmlns:a="http://schemas.openxmlformats.org/drawingml/2006/main">
               <a:ext uri="{FF2B5EF4-FFF2-40B4-BE49-F238E27FC236}">
-                <a16:creationId xmlns:a16="http://schemas.microsoft.com/office/drawing/2014/main" id="{0882E2E2-96CB-4295-944C-D4955AD5C1D6}"/>
+                <a16:creationId xmlns:a16="http://schemas.microsoft.com/office/drawing/2014/main" id="{00C51356-FED5-4F66-9A86-A88EAFD674DA}"/>
               </a:ext>
             </a:extLst>
           </p:cNvPr>
@@ -9396,10 +9978,69 @@
       </p:sp>
       <p:sp>
         <p:nvSpPr>
-          <p:cNvPr id="7" name="footer-rule">
-            <a:extLst xmlns:a="http://schemas.openxmlformats.org/drawingml/2006/main">
-              <a:ext uri="{FF2B5EF4-FFF2-40B4-BE49-F238E27FC236}">
-                <a16:creationId xmlns:a16="http://schemas.microsoft.com/office/drawing/2014/main" id="{0EB5FF98-4BA1-48E8-8134-72ADBC3EB8B7}"/>
+          <p:cNvPr id="7" name="rescue-point-logo-background">
+            <a:extLst xmlns:a="http://schemas.openxmlformats.org/drawingml/2006/main">
+              <a:ext uri="{FF2B5EF4-FFF2-40B4-BE49-F238E27FC236}">
+                <a16:creationId xmlns:a16="http://schemas.microsoft.com/office/drawing/2014/main" id="{A138F1DA-4B1A-458E-91D4-0DAB03D5C9B2}"/>
+              </a:ext>
+            </a:extLst>
+          </p:cNvPr>
+          <p:cNvSpPr>
+            <a:spLocks xmlns:a="http://schemas.openxmlformats.org/drawingml/2006/main" noGrp="1"/>
+          </p:cNvSpPr>
+          <p:nvPr/>
+        </p:nvSpPr>
+        <p:spPr>
+          <a:xfrm xmlns:a="http://schemas.openxmlformats.org/drawingml/2006/main">
+            <a:off x="9772650" y="133350"/>
+            <a:ext cx="1733550" cy="457200"/>
+          </a:xfrm>
+          <a:prstGeom xmlns:a="http://schemas.openxmlformats.org/drawingml/2006/main" prst="roundRect">
+            <a:avLst>
+              <a:gd name="adj" fmla="val 16667"/>
+            </a:avLst>
+          </a:prstGeom>
+          <a:solidFill xmlns:a="http://schemas.openxmlformats.org/drawingml/2006/main">
+            <a:srgbClr val="06142E"/>
+          </a:solidFill>
+          <a:ln xmlns:a="http://schemas.openxmlformats.org/drawingml/2006/main" w="9525">
+            <a:solidFill>
+              <a:srgbClr val="1EC5FF">
+                <a:alpha val="33333"/>
+              </a:srgbClr>
+            </a:solidFill>
+            <a:prstDash val="solid"/>
+          </a:ln>
+        </p:spPr>
+      </p:sp>
+      <p:pic>
+        <p:nvPicPr>
+          <p:cNvPr id="21" name="" descr="Figura oficial da documentação dbt usada para explicar: RESULTADO ESPERADO — Benchmark determinístico sem chave de LLM."/>
+          <p:cNvPicPr>
+            <a:picLocks xmlns:a="http://schemas.openxmlformats.org/drawingml/2006/main" noChangeAspect="1"/>
+          </p:cNvPicPr>
+          <p:nvPr/>
+        </p:nvPicPr>
+        <p:blipFill>
+          <a:blip xmlns:r="http://schemas.openxmlformats.org/officeDocument/2006/relationships" xmlns:a="http://schemas.openxmlformats.org/drawingml/2006/main" r:embed="R2dc855520fca4f98"/>
+          <a:stretch xmlns:a="http://schemas.openxmlformats.org/drawingml/2006/main"/>
+        </p:blipFill>
+        <p:spPr>
+          <a:xfrm xmlns:a="http://schemas.openxmlformats.org/drawingml/2006/main">
+            <a:off x="9893718" y="209550"/>
+            <a:ext cx="1491414" cy="323850"/>
+          </a:xfrm>
+          <a:prstGeom xmlns:a="http://schemas.openxmlformats.org/drawingml/2006/main" prst="rect">
+            <a:avLst/>
+          </a:prstGeom>
+        </p:spPr>
+      </p:pic>
+      <p:sp>
+        <p:nvSpPr>
+          <p:cNvPr id="9" name="footer-rule">
+            <a:extLst xmlns:a="http://schemas.openxmlformats.org/drawingml/2006/main">
+              <a:ext uri="{FF2B5EF4-FFF2-40B4-BE49-F238E27FC236}">
+                <a16:creationId xmlns:a16="http://schemas.microsoft.com/office/drawing/2014/main" id="{DFF36B4D-5BA1-43B1-B2A8-720721226998}"/>
               </a:ext>
             </a:extLst>
           </p:cNvPr>
@@ -9429,10 +10070,10 @@
       </p:sp>
       <p:sp>
         <p:nvSpPr>
-          <p:cNvPr id="8" name="footer">
-            <a:extLst xmlns:a="http://schemas.openxmlformats.org/drawingml/2006/main">
-              <a:ext uri="{FF2B5EF4-FFF2-40B4-BE49-F238E27FC236}">
-                <a16:creationId xmlns:a16="http://schemas.microsoft.com/office/drawing/2014/main" id="{34C2D54C-B52E-4A97-9116-2194D097CC8A}"/>
+          <p:cNvPr id="10" name="footer">
+            <a:extLst xmlns:a="http://schemas.openxmlformats.org/drawingml/2006/main">
+              <a:ext uri="{FF2B5EF4-FFF2-40B4-BE49-F238E27FC236}">
+                <a16:creationId xmlns:a16="http://schemas.microsoft.com/office/drawing/2014/main" id="{B512FF48-B34B-4979-81C1-97EB297052A9}"/>
               </a:ext>
             </a:extLst>
           </p:cNvPr>
@@ -9484,10 +10125,10 @@
       </p:sp>
       <p:sp>
         <p:nvSpPr>
-          <p:cNvPr id="9" name="page-number">
-            <a:extLst xmlns:a="http://schemas.openxmlformats.org/drawingml/2006/main">
-              <a:ext uri="{FF2B5EF4-FFF2-40B4-BE49-F238E27FC236}">
-                <a16:creationId xmlns:a16="http://schemas.microsoft.com/office/drawing/2014/main" id="{B5ACE3E7-F6F1-4F56-928F-B4D078767836}"/>
+          <p:cNvPr id="11" name="page-number">
+            <a:extLst xmlns:a="http://schemas.openxmlformats.org/drawingml/2006/main">
+              <a:ext uri="{FF2B5EF4-FFF2-40B4-BE49-F238E27FC236}">
+                <a16:creationId xmlns:a16="http://schemas.microsoft.com/office/drawing/2014/main" id="{A8FBF440-CF09-45CE-BEBE-67FB0D77FA6D}"/>
               </a:ext>
             </a:extLst>
           </p:cNvPr>
@@ -9540,7 +10181,7 @@
     </p:spTree>
     <p:extLst>
       <p:ext uri="{BB962C8B-B14F-4D97-AF65-F5344CB8AC3E}">
-        <p14:creationId xmlns:p14="http://schemas.microsoft.com/office/powerpoint/2010/main" val="1720471817"/>
+        <p14:creationId xmlns:p14="http://schemas.microsoft.com/office/powerpoint/2010/main" val="293282282"/>
       </p:ext>
     </p:extLst>
   </p:cSld>
@@ -9568,10 +10209,10 @@
       </p:grpSpPr>
       <p:sp>
         <p:nvSpPr>
-          <p:cNvPr id="14" name="slide-title">
-            <a:extLst xmlns:a="http://schemas.openxmlformats.org/drawingml/2006/main">
-              <a:ext uri="{FF2B5EF4-FFF2-40B4-BE49-F238E27FC236}">
-                <a16:creationId xmlns:a16="http://schemas.microsoft.com/office/drawing/2014/main" id="{66D0BCE7-0B11-487A-86D6-59EB6AF212AC}"/>
+          <p:cNvPr id="16" name="slide-title">
+            <a:extLst xmlns:a="http://schemas.openxmlformats.org/drawingml/2006/main">
+              <a:ext uri="{FF2B5EF4-FFF2-40B4-BE49-F238E27FC236}">
+                <a16:creationId xmlns:a16="http://schemas.microsoft.com/office/drawing/2014/main" id="{275FC526-E649-4BF6-90B3-0D5D9EB18B41}"/>
               </a:ext>
             </a:extLst>
           </p:cNvPr>
@@ -9622,7 +10263,7 @@
           <p:cNvPr id="2" name="step-num-1">
             <a:extLst xmlns:a="http://schemas.openxmlformats.org/drawingml/2006/main">
               <a:ext uri="{FF2B5EF4-FFF2-40B4-BE49-F238E27FC236}">
-                <a16:creationId xmlns:a16="http://schemas.microsoft.com/office/drawing/2014/main" id="{53AC287A-451F-4B6E-92E6-01BD622E772F}"/>
+                <a16:creationId xmlns:a16="http://schemas.microsoft.com/office/drawing/2014/main" id="{74704659-3BF3-4BFC-958E-A26B30E22F7F}"/>
               </a:ext>
             </a:extLst>
           </p:cNvPr>
@@ -9673,7 +10314,7 @@
           <p:cNvPr id="3" name="step-label-1">
             <a:extLst xmlns:a="http://schemas.openxmlformats.org/drawingml/2006/main">
               <a:ext uri="{FF2B5EF4-FFF2-40B4-BE49-F238E27FC236}">
-                <a16:creationId xmlns:a16="http://schemas.microsoft.com/office/drawing/2014/main" id="{B6E49422-D871-43CB-9B8E-79CC2324AA21}"/>
+                <a16:creationId xmlns:a16="http://schemas.microsoft.com/office/drawing/2014/main" id="{35CD9F67-96A3-49FF-999C-79ADF18DE29A}"/>
               </a:ext>
             </a:extLst>
           </p:cNvPr>
@@ -9724,7 +10365,7 @@
           <p:cNvPr id="4" name="step-line-1">
             <a:extLst xmlns:a="http://schemas.openxmlformats.org/drawingml/2006/main">
               <a:ext uri="{FF2B5EF4-FFF2-40B4-BE49-F238E27FC236}">
-                <a16:creationId xmlns:a16="http://schemas.microsoft.com/office/drawing/2014/main" id="{2FAF4C03-7978-493E-9F5D-9A5E1B164553}"/>
+                <a16:creationId xmlns:a16="http://schemas.microsoft.com/office/drawing/2014/main" id="{BC38736D-0FCD-4084-87F5-A1F81BF501A4}"/>
               </a:ext>
             </a:extLst>
           </p:cNvPr>
@@ -9755,7 +10396,7 @@
           <p:cNvPr id="5" name="step-num-2">
             <a:extLst xmlns:a="http://schemas.openxmlformats.org/drawingml/2006/main">
               <a:ext uri="{FF2B5EF4-FFF2-40B4-BE49-F238E27FC236}">
-                <a16:creationId xmlns:a16="http://schemas.microsoft.com/office/drawing/2014/main" id="{D7A84FCB-441E-4BD9-98E4-11FF21DD3959}"/>
+                <a16:creationId xmlns:a16="http://schemas.microsoft.com/office/drawing/2014/main" id="{AC664BB0-FD0A-4555-BA87-FFC630522690}"/>
               </a:ext>
             </a:extLst>
           </p:cNvPr>
@@ -9806,7 +10447,7 @@
           <p:cNvPr id="6" name="step-label-2">
             <a:extLst xmlns:a="http://schemas.openxmlformats.org/drawingml/2006/main">
               <a:ext uri="{FF2B5EF4-FFF2-40B4-BE49-F238E27FC236}">
-                <a16:creationId xmlns:a16="http://schemas.microsoft.com/office/drawing/2014/main" id="{0FF3B595-4C8C-4DF8-A571-A1144A20A7F5}"/>
+                <a16:creationId xmlns:a16="http://schemas.microsoft.com/office/drawing/2014/main" id="{96D18136-9282-4331-9417-0B04E277E44C}"/>
               </a:ext>
             </a:extLst>
           </p:cNvPr>
@@ -9857,7 +10498,7 @@
           <p:cNvPr id="7" name="step-line-2">
             <a:extLst xmlns:a="http://schemas.openxmlformats.org/drawingml/2006/main">
               <a:ext uri="{FF2B5EF4-FFF2-40B4-BE49-F238E27FC236}">
-                <a16:creationId xmlns:a16="http://schemas.microsoft.com/office/drawing/2014/main" id="{28923FFA-FE70-4A97-A7DE-CAB60496335C}"/>
+                <a16:creationId xmlns:a16="http://schemas.microsoft.com/office/drawing/2014/main" id="{8A93F935-8AC5-4C1E-8548-18ABAEF69767}"/>
               </a:ext>
             </a:extLst>
           </p:cNvPr>
@@ -9888,7 +10529,7 @@
           <p:cNvPr id="8" name="step-num-3">
             <a:extLst xmlns:a="http://schemas.openxmlformats.org/drawingml/2006/main">
               <a:ext uri="{FF2B5EF4-FFF2-40B4-BE49-F238E27FC236}">
-                <a16:creationId xmlns:a16="http://schemas.microsoft.com/office/drawing/2014/main" id="{5B9B2F6D-C0F5-4A74-96B1-55DAE15A9C55}"/>
+                <a16:creationId xmlns:a16="http://schemas.microsoft.com/office/drawing/2014/main" id="{55F222A2-DE50-4A8F-B7A0-563CC616C44F}"/>
               </a:ext>
             </a:extLst>
           </p:cNvPr>
@@ -9939,7 +10580,7 @@
           <p:cNvPr id="9" name="step-label-3">
             <a:extLst xmlns:a="http://schemas.openxmlformats.org/drawingml/2006/main">
               <a:ext uri="{FF2B5EF4-FFF2-40B4-BE49-F238E27FC236}">
-                <a16:creationId xmlns:a16="http://schemas.microsoft.com/office/drawing/2014/main" id="{08F7FA93-7AA7-4159-BD71-9DAF63E84D0D}"/>
+                <a16:creationId xmlns:a16="http://schemas.microsoft.com/office/drawing/2014/main" id="{4054582B-041E-43A0-9A5B-0A1B4B728EF5}"/>
               </a:ext>
             </a:extLst>
           </p:cNvPr>
@@ -9990,7 +10631,7 @@
           <p:cNvPr id="10" name="eyebrow">
             <a:extLst xmlns:a="http://schemas.openxmlformats.org/drawingml/2006/main">
               <a:ext uri="{FF2B5EF4-FFF2-40B4-BE49-F238E27FC236}">
-                <a16:creationId xmlns:a16="http://schemas.microsoft.com/office/drawing/2014/main" id="{E3B5D8C4-29F2-4786-9078-7457C0D45A0A}"/>
+                <a16:creationId xmlns:a16="http://schemas.microsoft.com/office/drawing/2014/main" id="{E02C35A8-3308-4BA1-88C7-1B1D43025A49}"/>
               </a:ext>
             </a:extLst>
           </p:cNvPr>
@@ -10038,10 +10679,69 @@
       </p:sp>
       <p:sp>
         <p:nvSpPr>
-          <p:cNvPr id="11" name="footer-rule">
-            <a:extLst xmlns:a="http://schemas.openxmlformats.org/drawingml/2006/main">
-              <a:ext uri="{FF2B5EF4-FFF2-40B4-BE49-F238E27FC236}">
-                <a16:creationId xmlns:a16="http://schemas.microsoft.com/office/drawing/2014/main" id="{94F98582-AE94-4427-A810-10E106911F18}"/>
+          <p:cNvPr id="11" name="rescue-point-logo-background">
+            <a:extLst xmlns:a="http://schemas.openxmlformats.org/drawingml/2006/main">
+              <a:ext uri="{FF2B5EF4-FFF2-40B4-BE49-F238E27FC236}">
+                <a16:creationId xmlns:a16="http://schemas.microsoft.com/office/drawing/2014/main" id="{60600965-38AD-40BD-8A5C-7F3E2AE36D60}"/>
+              </a:ext>
+            </a:extLst>
+          </p:cNvPr>
+          <p:cNvSpPr>
+            <a:spLocks xmlns:a="http://schemas.openxmlformats.org/drawingml/2006/main" noGrp="1"/>
+          </p:cNvSpPr>
+          <p:nvPr/>
+        </p:nvSpPr>
+        <p:spPr>
+          <a:xfrm xmlns:a="http://schemas.openxmlformats.org/drawingml/2006/main">
+            <a:off x="9772650" y="133350"/>
+            <a:ext cx="1733550" cy="457200"/>
+          </a:xfrm>
+          <a:prstGeom xmlns:a="http://schemas.openxmlformats.org/drawingml/2006/main" prst="roundRect">
+            <a:avLst>
+              <a:gd name="adj" fmla="val 16667"/>
+            </a:avLst>
+          </a:prstGeom>
+          <a:solidFill xmlns:a="http://schemas.openxmlformats.org/drawingml/2006/main">
+            <a:srgbClr val="06142E"/>
+          </a:solidFill>
+          <a:ln xmlns:a="http://schemas.openxmlformats.org/drawingml/2006/main" w="9525">
+            <a:solidFill>
+              <a:srgbClr val="1EC5FF">
+                <a:alpha val="33333"/>
+              </a:srgbClr>
+            </a:solidFill>
+            <a:prstDash val="solid"/>
+          </a:ln>
+        </p:spPr>
+      </p:sp>
+      <p:pic>
+        <p:nvPicPr>
+          <p:cNvPr id="29" name="" descr="Figura oficial da documentação dbt usada para explicar: O mesmo recurso afeta três decisões — 01."/>
+          <p:cNvPicPr>
+            <a:picLocks xmlns:a="http://schemas.openxmlformats.org/drawingml/2006/main" noChangeAspect="1"/>
+          </p:cNvPicPr>
+          <p:nvPr/>
+        </p:nvPicPr>
+        <p:blipFill>
+          <a:blip xmlns:r="http://schemas.openxmlformats.org/officeDocument/2006/relationships" xmlns:a="http://schemas.openxmlformats.org/drawingml/2006/main" r:embed="R377f8c681eb941c4"/>
+          <a:stretch xmlns:a="http://schemas.openxmlformats.org/drawingml/2006/main"/>
+        </p:blipFill>
+        <p:spPr>
+          <a:xfrm xmlns:a="http://schemas.openxmlformats.org/drawingml/2006/main">
+            <a:off x="9893718" y="209550"/>
+            <a:ext cx="1491414" cy="323850"/>
+          </a:xfrm>
+          <a:prstGeom xmlns:a="http://schemas.openxmlformats.org/drawingml/2006/main" prst="rect">
+            <a:avLst/>
+          </a:prstGeom>
+        </p:spPr>
+      </p:pic>
+      <p:sp>
+        <p:nvSpPr>
+          <p:cNvPr id="13" name="footer-rule">
+            <a:extLst xmlns:a="http://schemas.openxmlformats.org/drawingml/2006/main">
+              <a:ext uri="{FF2B5EF4-FFF2-40B4-BE49-F238E27FC236}">
+                <a16:creationId xmlns:a16="http://schemas.microsoft.com/office/drawing/2014/main" id="{220A50B7-B66A-4554-B026-AA877451F899}"/>
               </a:ext>
             </a:extLst>
           </p:cNvPr>
@@ -10071,10 +10771,10 @@
       </p:sp>
       <p:sp>
         <p:nvSpPr>
-          <p:cNvPr id="12" name="footer">
-            <a:extLst xmlns:a="http://schemas.openxmlformats.org/drawingml/2006/main">
-              <a:ext uri="{FF2B5EF4-FFF2-40B4-BE49-F238E27FC236}">
-                <a16:creationId xmlns:a16="http://schemas.microsoft.com/office/drawing/2014/main" id="{D9603670-ED57-44CF-BAD3-E5389E7D4A14}"/>
+          <p:cNvPr id="14" name="footer">
+            <a:extLst xmlns:a="http://schemas.openxmlformats.org/drawingml/2006/main">
+              <a:ext uri="{FF2B5EF4-FFF2-40B4-BE49-F238E27FC236}">
+                <a16:creationId xmlns:a16="http://schemas.microsoft.com/office/drawing/2014/main" id="{6932C2AF-7F9B-4B3F-927B-A22663DA7390}"/>
               </a:ext>
             </a:extLst>
           </p:cNvPr>
@@ -10126,10 +10826,10 @@
       </p:sp>
       <p:sp>
         <p:nvSpPr>
-          <p:cNvPr id="13" name="page-number">
-            <a:extLst xmlns:a="http://schemas.openxmlformats.org/drawingml/2006/main">
-              <a:ext uri="{FF2B5EF4-FFF2-40B4-BE49-F238E27FC236}">
-                <a16:creationId xmlns:a16="http://schemas.microsoft.com/office/drawing/2014/main" id="{82D6CB49-26B4-47F9-BE89-F4285BC74CCE}"/>
+          <p:cNvPr id="15" name="page-number">
+            <a:extLst xmlns:a="http://schemas.openxmlformats.org/drawingml/2006/main">
+              <a:ext uri="{FF2B5EF4-FFF2-40B4-BE49-F238E27FC236}">
+                <a16:creationId xmlns:a16="http://schemas.microsoft.com/office/drawing/2014/main" id="{B04402AF-C36D-439B-9285-E76966D5F263}"/>
               </a:ext>
             </a:extLst>
           </p:cNvPr>
@@ -10182,7 +10882,7 @@
     </p:spTree>
     <p:extLst>
       <p:ext uri="{BB962C8B-B14F-4D97-AF65-F5344CB8AC3E}">
-        <p14:creationId xmlns:p14="http://schemas.microsoft.com/office/powerpoint/2010/main" val="1069308818"/>
+        <p14:creationId xmlns:p14="http://schemas.microsoft.com/office/powerpoint/2010/main" val="2103512770"/>
       </p:ext>
     </p:extLst>
   </p:cSld>
@@ -10218,10 +10918,10 @@
       </p:grpSpPr>
       <p:sp>
         <p:nvSpPr>
-          <p:cNvPr id="9" name="case-number">
-            <a:extLst xmlns:a="http://schemas.openxmlformats.org/drawingml/2006/main">
-              <a:ext uri="{FF2B5EF4-FFF2-40B4-BE49-F238E27FC236}">
-                <a16:creationId xmlns:a16="http://schemas.microsoft.com/office/drawing/2014/main" id="{64A93F80-E002-430B-AF5D-A2C6AB1EE9C5}"/>
+          <p:cNvPr id="11" name="case-number">
+            <a:extLst xmlns:a="http://schemas.openxmlformats.org/drawingml/2006/main">
+              <a:ext uri="{FF2B5EF4-FFF2-40B4-BE49-F238E27FC236}">
+                <a16:creationId xmlns:a16="http://schemas.microsoft.com/office/drawing/2014/main" id="{DA701192-1F4D-45FD-8D25-7817C2E35699}"/>
               </a:ext>
             </a:extLst>
           </p:cNvPr>
@@ -10272,7 +10972,7 @@
           <p:cNvPr id="2" name="case-label">
             <a:extLst xmlns:a="http://schemas.openxmlformats.org/drawingml/2006/main">
               <a:ext uri="{FF2B5EF4-FFF2-40B4-BE49-F238E27FC236}">
-                <a16:creationId xmlns:a16="http://schemas.microsoft.com/office/drawing/2014/main" id="{E8EE6405-3632-4788-88B8-608DCF5F60D3}"/>
+                <a16:creationId xmlns:a16="http://schemas.microsoft.com/office/drawing/2014/main" id="{4D059A3A-05E6-427A-A0F5-3789E76C3A5B}"/>
               </a:ext>
             </a:extLst>
           </p:cNvPr>
@@ -10323,7 +11023,7 @@
           <p:cNvPr id="3" name="case-divider">
             <a:extLst xmlns:a="http://schemas.openxmlformats.org/drawingml/2006/main">
               <a:ext uri="{FF2B5EF4-FFF2-40B4-BE49-F238E27FC236}">
-                <a16:creationId xmlns:a16="http://schemas.microsoft.com/office/drawing/2014/main" id="{5CA734A2-1559-408D-B256-A93EA556BC0F}"/>
+                <a16:creationId xmlns:a16="http://schemas.microsoft.com/office/drawing/2014/main" id="{8D02E8B0-3E0C-4D58-B398-65C2BC299E94}"/>
               </a:ext>
             </a:extLst>
           </p:cNvPr>
@@ -10356,7 +11056,7 @@
           <p:cNvPr id="4" name="case-caveat">
             <a:extLst xmlns:a="http://schemas.openxmlformats.org/drawingml/2006/main">
               <a:ext uri="{FF2B5EF4-FFF2-40B4-BE49-F238E27FC236}">
-                <a16:creationId xmlns:a16="http://schemas.microsoft.com/office/drawing/2014/main" id="{57DAAA8F-FF66-498D-AE50-DCFADC470D75}"/>
+                <a16:creationId xmlns:a16="http://schemas.microsoft.com/office/drawing/2014/main" id="{4DE9CAFD-1500-43B3-83D5-EF89CCA9C99E}"/>
               </a:ext>
             </a:extLst>
           </p:cNvPr>
@@ -10407,7 +11107,7 @@
           <p:cNvPr id="5" name="eyebrow">
             <a:extLst xmlns:a="http://schemas.openxmlformats.org/drawingml/2006/main">
               <a:ext uri="{FF2B5EF4-FFF2-40B4-BE49-F238E27FC236}">
-                <a16:creationId xmlns:a16="http://schemas.microsoft.com/office/drawing/2014/main" id="{8CA998D0-DF4D-4163-BB85-17454C6FD5BD}"/>
+                <a16:creationId xmlns:a16="http://schemas.microsoft.com/office/drawing/2014/main" id="{297C7DBD-AECD-48E2-BEA0-97DD62D2B1D7}"/>
               </a:ext>
             </a:extLst>
           </p:cNvPr>
@@ -10455,10 +11155,69 @@
       </p:sp>
       <p:sp>
         <p:nvSpPr>
-          <p:cNvPr id="6" name="footer-rule">
-            <a:extLst xmlns:a="http://schemas.openxmlformats.org/drawingml/2006/main">
-              <a:ext uri="{FF2B5EF4-FFF2-40B4-BE49-F238E27FC236}">
-                <a16:creationId xmlns:a16="http://schemas.microsoft.com/office/drawing/2014/main" id="{5F3A4AD2-E506-4612-9C4B-BE5C26364B21}"/>
+          <p:cNvPr id="6" name="rescue-point-logo-background">
+            <a:extLst xmlns:a="http://schemas.openxmlformats.org/drawingml/2006/main">
+              <a:ext uri="{FF2B5EF4-FFF2-40B4-BE49-F238E27FC236}">
+                <a16:creationId xmlns:a16="http://schemas.microsoft.com/office/drawing/2014/main" id="{3AD67AFE-1E32-41E9-A763-E58B76523028}"/>
+              </a:ext>
+            </a:extLst>
+          </p:cNvPr>
+          <p:cNvSpPr>
+            <a:spLocks xmlns:a="http://schemas.openxmlformats.org/drawingml/2006/main" noGrp="1"/>
+          </p:cNvSpPr>
+          <p:nvPr/>
+        </p:nvSpPr>
+        <p:spPr>
+          <a:xfrm xmlns:a="http://schemas.openxmlformats.org/drawingml/2006/main">
+            <a:off x="9772650" y="133350"/>
+            <a:ext cx="1733550" cy="457200"/>
+          </a:xfrm>
+          <a:prstGeom xmlns:a="http://schemas.openxmlformats.org/drawingml/2006/main" prst="roundRect">
+            <a:avLst>
+              <a:gd name="adj" fmla="val 16667"/>
+            </a:avLst>
+          </a:prstGeom>
+          <a:solidFill xmlns:a="http://schemas.openxmlformats.org/drawingml/2006/main">
+            <a:srgbClr val="06142E"/>
+          </a:solidFill>
+          <a:ln xmlns:a="http://schemas.openxmlformats.org/drawingml/2006/main" w="9525">
+            <a:solidFill>
+              <a:srgbClr val="1EC5FF">
+                <a:alpha val="33333"/>
+              </a:srgbClr>
+            </a:solidFill>
+            <a:prstDash val="solid"/>
+          </a:ln>
+        </p:spPr>
+      </p:sp>
+      <p:pic>
+        <p:nvPicPr>
+          <p:cNvPr id="19" name="" descr="Figura oficial da documentação dbt usada para explicar: 80% — redução de analytics reportada pela Bilt."/>
+          <p:cNvPicPr>
+            <a:picLocks xmlns:a="http://schemas.openxmlformats.org/drawingml/2006/main" noChangeAspect="1"/>
+          </p:cNvPicPr>
+          <p:nvPr/>
+        </p:nvPicPr>
+        <p:blipFill>
+          <a:blip xmlns:r="http://schemas.openxmlformats.org/officeDocument/2006/relationships" xmlns:a="http://schemas.openxmlformats.org/drawingml/2006/main" r:embed="R7f8b05be59764dec"/>
+          <a:stretch xmlns:a="http://schemas.openxmlformats.org/drawingml/2006/main"/>
+        </p:blipFill>
+        <p:spPr>
+          <a:xfrm xmlns:a="http://schemas.openxmlformats.org/drawingml/2006/main">
+            <a:off x="9893718" y="209550"/>
+            <a:ext cx="1491414" cy="323850"/>
+          </a:xfrm>
+          <a:prstGeom xmlns:a="http://schemas.openxmlformats.org/drawingml/2006/main" prst="rect">
+            <a:avLst/>
+          </a:prstGeom>
+        </p:spPr>
+      </p:pic>
+      <p:sp>
+        <p:nvSpPr>
+          <p:cNvPr id="8" name="footer-rule">
+            <a:extLst xmlns:a="http://schemas.openxmlformats.org/drawingml/2006/main">
+              <a:ext uri="{FF2B5EF4-FFF2-40B4-BE49-F238E27FC236}">
+                <a16:creationId xmlns:a16="http://schemas.microsoft.com/office/drawing/2014/main" id="{FB0A8833-005F-486E-90E3-894D97A36F76}"/>
               </a:ext>
             </a:extLst>
           </p:cNvPr>
@@ -10488,10 +11247,10 @@
       </p:sp>
       <p:sp>
         <p:nvSpPr>
-          <p:cNvPr id="7" name="footer">
-            <a:extLst xmlns:a="http://schemas.openxmlformats.org/drawingml/2006/main">
-              <a:ext uri="{FF2B5EF4-FFF2-40B4-BE49-F238E27FC236}">
-                <a16:creationId xmlns:a16="http://schemas.microsoft.com/office/drawing/2014/main" id="{63490C0D-1F19-4F9C-B01C-AC70FE35118E}"/>
+          <p:cNvPr id="9" name="footer">
+            <a:extLst xmlns:a="http://schemas.openxmlformats.org/drawingml/2006/main">
+              <a:ext uri="{FF2B5EF4-FFF2-40B4-BE49-F238E27FC236}">
+                <a16:creationId xmlns:a16="http://schemas.microsoft.com/office/drawing/2014/main" id="{636C7E52-3934-4FEC-A17B-B7DF9710A75F}"/>
               </a:ext>
             </a:extLst>
           </p:cNvPr>
@@ -10543,10 +11302,10 @@
       </p:sp>
       <p:sp>
         <p:nvSpPr>
-          <p:cNvPr id="8" name="page-number">
-            <a:extLst xmlns:a="http://schemas.openxmlformats.org/drawingml/2006/main">
-              <a:ext uri="{FF2B5EF4-FFF2-40B4-BE49-F238E27FC236}">
-                <a16:creationId xmlns:a16="http://schemas.microsoft.com/office/drawing/2014/main" id="{4F7B79BA-B553-4314-B365-F763529836C1}"/>
+          <p:cNvPr id="10" name="page-number">
+            <a:extLst xmlns:a="http://schemas.openxmlformats.org/drawingml/2006/main">
+              <a:ext uri="{FF2B5EF4-FFF2-40B4-BE49-F238E27FC236}">
+                <a16:creationId xmlns:a16="http://schemas.microsoft.com/office/drawing/2014/main" id="{D1D93EB3-25AB-4FCB-9818-A7A5343A3E5E}"/>
               </a:ext>
             </a:extLst>
           </p:cNvPr>
@@ -10599,7 +11358,7 @@
     </p:spTree>
     <p:extLst>
       <p:ext uri="{BB962C8B-B14F-4D97-AF65-F5344CB8AC3E}">
-        <p14:creationId xmlns:p14="http://schemas.microsoft.com/office/powerpoint/2010/main" val="1542669828"/>
+        <p14:creationId xmlns:p14="http://schemas.microsoft.com/office/powerpoint/2010/main" val="1468375926"/>
       </p:ext>
     </p:extLst>
   </p:cSld>
@@ -10627,10 +11386,10 @@
       </p:grpSpPr>
       <p:sp>
         <p:nvSpPr>
-          <p:cNvPr id="10" name="hook">
-            <a:extLst xmlns:a="http://schemas.openxmlformats.org/drawingml/2006/main">
-              <a:ext uri="{FF2B5EF4-FFF2-40B4-BE49-F238E27FC236}">
-                <a16:creationId xmlns:a16="http://schemas.microsoft.com/office/drawing/2014/main" id="{0D1BBAAC-8A8C-4A04-9314-14650F323DAD}"/>
+          <p:cNvPr id="12" name="hook">
+            <a:extLst xmlns:a="http://schemas.openxmlformats.org/drawingml/2006/main">
+              <a:ext uri="{FF2B5EF4-FFF2-40B4-BE49-F238E27FC236}">
+                <a16:creationId xmlns:a16="http://schemas.microsoft.com/office/drawing/2014/main" id="{5D3FA91F-EAD1-47FE-813E-DB32594C472F}"/>
               </a:ext>
             </a:extLst>
           </p:cNvPr>
@@ -10681,7 +11440,7 @@
           <p:cNvPr id="2" name="hook-rule">
             <a:extLst xmlns:a="http://schemas.openxmlformats.org/drawingml/2006/main">
               <a:ext uri="{FF2B5EF4-FFF2-40B4-BE49-F238E27FC236}">
-                <a16:creationId xmlns:a16="http://schemas.microsoft.com/office/drawing/2014/main" id="{995B537B-3765-44B2-8E6F-A5F924037210}"/>
+                <a16:creationId xmlns:a16="http://schemas.microsoft.com/office/drawing/2014/main" id="{2C407628-B847-4807-ACFA-87DCD94B7F2D}"/>
               </a:ext>
             </a:extLst>
           </p:cNvPr>
@@ -10712,7 +11471,7 @@
           <p:cNvPr id="3" name="hook-label">
             <a:extLst xmlns:a="http://schemas.openxmlformats.org/drawingml/2006/main">
               <a:ext uri="{FF2B5EF4-FFF2-40B4-BE49-F238E27FC236}">
-                <a16:creationId xmlns:a16="http://schemas.microsoft.com/office/drawing/2014/main" id="{ED91165E-D2A2-40E3-99D6-1065970069D6}"/>
+                <a16:creationId xmlns:a16="http://schemas.microsoft.com/office/drawing/2014/main" id="{34D30D94-E900-49D7-B936-D46AD4C60250}"/>
               </a:ext>
             </a:extLst>
           </p:cNvPr>
@@ -10763,7 +11522,7 @@
           <p:cNvPr id="4" name="diagram-surface">
             <a:extLst xmlns:a="http://schemas.openxmlformats.org/drawingml/2006/main">
               <a:ext uri="{FF2B5EF4-FFF2-40B4-BE49-F238E27FC236}">
-                <a16:creationId xmlns:a16="http://schemas.microsoft.com/office/drawing/2014/main" id="{2CEBB954-0329-4E9C-8493-6BAEB081C249}"/>
+                <a16:creationId xmlns:a16="http://schemas.microsoft.com/office/drawing/2014/main" id="{B441BF5F-A68F-4DF9-9242-2E0D04C6D25F}"/>
               </a:ext>
             </a:extLst>
           </p:cNvPr>
@@ -10795,14 +11554,14 @@
       </p:sp>
       <p:pic>
         <p:nvPicPr>
-          <p:cNvPr id="16" name="" descr="Diagrama didático autoral que apresenta: O agente não deve inventar as regras que o pipeline pode executar e testar. — A pergunta que guia a aula."/>
+          <p:cNvPr id="19" name="" descr="Diagrama didático autoral que apresenta: O agente não deve inventar as regras que o pipeline pode executar e testar. — A pergunta que guia a aula."/>
           <p:cNvPicPr>
             <a:picLocks xmlns:a="http://schemas.openxmlformats.org/drawingml/2006/main" noChangeAspect="1"/>
           </p:cNvPicPr>
           <p:nvPr/>
         </p:nvPicPr>
         <p:blipFill>
-          <a:blip xmlns:r="http://schemas.openxmlformats.org/officeDocument/2006/relationships" xmlns:a="http://schemas.openxmlformats.org/drawingml/2006/main" r:embed="R5f079af318ab4faf"/>
+          <a:blip xmlns:r="http://schemas.openxmlformats.org/officeDocument/2006/relationships" xmlns:a="http://schemas.openxmlformats.org/drawingml/2006/main" r:embed="Rf7accfe40d4d4f0b"/>
           <a:stretch xmlns:a="http://schemas.openxmlformats.org/drawingml/2006/main"/>
         </p:blipFill>
         <p:spPr>
@@ -10820,7 +11579,7 @@
           <p:cNvPr id="6" name="eyebrow">
             <a:extLst xmlns:a="http://schemas.openxmlformats.org/drawingml/2006/main">
               <a:ext uri="{FF2B5EF4-FFF2-40B4-BE49-F238E27FC236}">
-                <a16:creationId xmlns:a16="http://schemas.microsoft.com/office/drawing/2014/main" id="{C1DB829C-DDF8-49F5-BF15-5540307986C9}"/>
+                <a16:creationId xmlns:a16="http://schemas.microsoft.com/office/drawing/2014/main" id="{0189E408-D173-440C-B2B8-0232657E9D8B}"/>
               </a:ext>
             </a:extLst>
           </p:cNvPr>
@@ -10868,10 +11627,69 @@
       </p:sp>
       <p:sp>
         <p:nvSpPr>
-          <p:cNvPr id="7" name="footer-rule">
-            <a:extLst xmlns:a="http://schemas.openxmlformats.org/drawingml/2006/main">
-              <a:ext uri="{FF2B5EF4-FFF2-40B4-BE49-F238E27FC236}">
-                <a16:creationId xmlns:a16="http://schemas.microsoft.com/office/drawing/2014/main" id="{FC7A4249-B7F0-4761-BAA8-94CD8520F59A}"/>
+          <p:cNvPr id="7" name="rescue-point-logo-background">
+            <a:extLst xmlns:a="http://schemas.openxmlformats.org/drawingml/2006/main">
+              <a:ext uri="{FF2B5EF4-FFF2-40B4-BE49-F238E27FC236}">
+                <a16:creationId xmlns:a16="http://schemas.microsoft.com/office/drawing/2014/main" id="{A1F4E377-F9F4-4634-99CC-9D1CBB09C526}"/>
+              </a:ext>
+            </a:extLst>
+          </p:cNvPr>
+          <p:cNvSpPr>
+            <a:spLocks xmlns:a="http://schemas.openxmlformats.org/drawingml/2006/main" noGrp="1"/>
+          </p:cNvSpPr>
+          <p:nvPr/>
+        </p:nvSpPr>
+        <p:spPr>
+          <a:xfrm xmlns:a="http://schemas.openxmlformats.org/drawingml/2006/main">
+            <a:off x="9772650" y="133350"/>
+            <a:ext cx="1733550" cy="457200"/>
+          </a:xfrm>
+          <a:prstGeom xmlns:a="http://schemas.openxmlformats.org/drawingml/2006/main" prst="roundRect">
+            <a:avLst>
+              <a:gd name="adj" fmla="val 16667"/>
+            </a:avLst>
+          </a:prstGeom>
+          <a:solidFill xmlns:a="http://schemas.openxmlformats.org/drawingml/2006/main">
+            <a:srgbClr val="06142E"/>
+          </a:solidFill>
+          <a:ln xmlns:a="http://schemas.openxmlformats.org/drawingml/2006/main" w="9525">
+            <a:solidFill>
+              <a:srgbClr val="1EC5FF">
+                <a:alpha val="33333"/>
+              </a:srgbClr>
+            </a:solidFill>
+            <a:prstDash val="solid"/>
+          </a:ln>
+        </p:spPr>
+      </p:sp>
+      <p:pic>
+        <p:nvPicPr>
+          <p:cNvPr id="22" name="" descr="Diagrama didático autoral que apresenta: O agente não deve inventar as regras que o pipeline pode executar e testar. — A pergunta que guia a aula."/>
+          <p:cNvPicPr>
+            <a:picLocks xmlns:a="http://schemas.openxmlformats.org/drawingml/2006/main" noChangeAspect="1"/>
+          </p:cNvPicPr>
+          <p:nvPr/>
+        </p:nvPicPr>
+        <p:blipFill>
+          <a:blip xmlns:r="http://schemas.openxmlformats.org/officeDocument/2006/relationships" xmlns:a="http://schemas.openxmlformats.org/drawingml/2006/main" r:embed="R0ea3e878d0da4632"/>
+          <a:stretch xmlns:a="http://schemas.openxmlformats.org/drawingml/2006/main"/>
+        </p:blipFill>
+        <p:spPr>
+          <a:xfrm xmlns:a="http://schemas.openxmlformats.org/drawingml/2006/main">
+            <a:off x="9893718" y="209550"/>
+            <a:ext cx="1491414" cy="323850"/>
+          </a:xfrm>
+          <a:prstGeom xmlns:a="http://schemas.openxmlformats.org/drawingml/2006/main" prst="rect">
+            <a:avLst/>
+          </a:prstGeom>
+        </p:spPr>
+      </p:pic>
+      <p:sp>
+        <p:nvSpPr>
+          <p:cNvPr id="9" name="footer-rule">
+            <a:extLst xmlns:a="http://schemas.openxmlformats.org/drawingml/2006/main">
+              <a:ext uri="{FF2B5EF4-FFF2-40B4-BE49-F238E27FC236}">
+                <a16:creationId xmlns:a16="http://schemas.microsoft.com/office/drawing/2014/main" id="{AA5596C3-7C38-43A8-B496-7B7003C63CCF}"/>
               </a:ext>
             </a:extLst>
           </p:cNvPr>
@@ -10901,10 +11719,10 @@
       </p:sp>
       <p:sp>
         <p:nvSpPr>
-          <p:cNvPr id="8" name="footer">
-            <a:extLst xmlns:a="http://schemas.openxmlformats.org/drawingml/2006/main">
-              <a:ext uri="{FF2B5EF4-FFF2-40B4-BE49-F238E27FC236}">
-                <a16:creationId xmlns:a16="http://schemas.microsoft.com/office/drawing/2014/main" id="{4BE148DC-C856-43E8-A626-C0C2D2F55FB2}"/>
+          <p:cNvPr id="10" name="footer">
+            <a:extLst xmlns:a="http://schemas.openxmlformats.org/drawingml/2006/main">
+              <a:ext uri="{FF2B5EF4-FFF2-40B4-BE49-F238E27FC236}">
+                <a16:creationId xmlns:a16="http://schemas.microsoft.com/office/drawing/2014/main" id="{260F7F3B-7C69-4A68-BB82-11BEB4BB15E1}"/>
               </a:ext>
             </a:extLst>
           </p:cNvPr>
@@ -10956,10 +11774,10 @@
       </p:sp>
       <p:sp>
         <p:nvSpPr>
-          <p:cNvPr id="9" name="page-number">
-            <a:extLst xmlns:a="http://schemas.openxmlformats.org/drawingml/2006/main">
-              <a:ext uri="{FF2B5EF4-FFF2-40B4-BE49-F238E27FC236}">
-                <a16:creationId xmlns:a16="http://schemas.microsoft.com/office/drawing/2014/main" id="{1E68CD4E-12A6-4A26-AADA-FB06AF0BA228}"/>
+          <p:cNvPr id="11" name="page-number">
+            <a:extLst xmlns:a="http://schemas.openxmlformats.org/drawingml/2006/main">
+              <a:ext uri="{FF2B5EF4-FFF2-40B4-BE49-F238E27FC236}">
+                <a16:creationId xmlns:a16="http://schemas.microsoft.com/office/drawing/2014/main" id="{4979CEB7-275C-4EF7-B66E-C6E3CEF1A3AA}"/>
               </a:ext>
             </a:extLst>
           </p:cNvPr>
@@ -11012,7 +11830,7 @@
     </p:spTree>
     <p:extLst>
       <p:ext uri="{BB962C8B-B14F-4D97-AF65-F5344CB8AC3E}">
-        <p14:creationId xmlns:p14="http://schemas.microsoft.com/office/powerpoint/2010/main" val="204315732"/>
+        <p14:creationId xmlns:p14="http://schemas.microsoft.com/office/powerpoint/2010/main" val="426103403"/>
       </p:ext>
     </p:extLst>
   </p:cSld>
@@ -11040,10 +11858,10 @@
       </p:grpSpPr>
       <p:sp>
         <p:nvSpPr>
-          <p:cNvPr id="7" name="slide-title">
-            <a:extLst xmlns:a="http://schemas.openxmlformats.org/drawingml/2006/main">
-              <a:ext uri="{FF2B5EF4-FFF2-40B4-BE49-F238E27FC236}">
-                <a16:creationId xmlns:a16="http://schemas.microsoft.com/office/drawing/2014/main" id="{709D3CCA-8C6B-4837-B838-DA5219C2708C}"/>
+          <p:cNvPr id="9" name="slide-title">
+            <a:extLst xmlns:a="http://schemas.openxmlformats.org/drawingml/2006/main">
+              <a:ext uri="{FF2B5EF4-FFF2-40B4-BE49-F238E27FC236}">
+                <a16:creationId xmlns:a16="http://schemas.microsoft.com/office/drawing/2014/main" id="{9CA4DBAA-BDB5-4EB4-8CAC-93740FE6B8BE}"/>
               </a:ext>
             </a:extLst>
           </p:cNvPr>
@@ -11094,7 +11912,7 @@
           <p:cNvPr id="2" name="bullets">
             <a:extLst xmlns:a="http://schemas.openxmlformats.org/drawingml/2006/main">
               <a:ext uri="{FF2B5EF4-FFF2-40B4-BE49-F238E27FC236}">
-                <a16:creationId xmlns:a16="http://schemas.microsoft.com/office/drawing/2014/main" id="{1346411D-BE74-446B-B31D-0B18994DC12A}"/>
+                <a16:creationId xmlns:a16="http://schemas.microsoft.com/office/drawing/2014/main" id="{721BBF78-2CEF-4B0A-B203-E55E6D75A3FE}"/>
               </a:ext>
             </a:extLst>
           </p:cNvPr>
@@ -11181,7 +11999,7 @@
           <p:cNvPr id="3" name="eyebrow">
             <a:extLst xmlns:a="http://schemas.openxmlformats.org/drawingml/2006/main">
               <a:ext uri="{FF2B5EF4-FFF2-40B4-BE49-F238E27FC236}">
-                <a16:creationId xmlns:a16="http://schemas.microsoft.com/office/drawing/2014/main" id="{0AED0728-E882-4B9D-8D93-7A68E0643113}"/>
+                <a16:creationId xmlns:a16="http://schemas.microsoft.com/office/drawing/2014/main" id="{32E2921A-8B89-447F-8BED-2FBB0A5746B3}"/>
               </a:ext>
             </a:extLst>
           </p:cNvPr>
@@ -11229,10 +12047,69 @@
       </p:sp>
       <p:sp>
         <p:nvSpPr>
-          <p:cNvPr id="4" name="footer-rule">
-            <a:extLst xmlns:a="http://schemas.openxmlformats.org/drawingml/2006/main">
-              <a:ext uri="{FF2B5EF4-FFF2-40B4-BE49-F238E27FC236}">
-                <a16:creationId xmlns:a16="http://schemas.microsoft.com/office/drawing/2014/main" id="{8202EB16-448F-4900-94A6-19D0409DA5A3}"/>
+          <p:cNvPr id="4" name="rescue-point-logo-background">
+            <a:extLst xmlns:a="http://schemas.openxmlformats.org/drawingml/2006/main">
+              <a:ext uri="{FF2B5EF4-FFF2-40B4-BE49-F238E27FC236}">
+                <a16:creationId xmlns:a16="http://schemas.microsoft.com/office/drawing/2014/main" id="{7DCF810B-E362-473D-BCA5-896E3B939CE6}"/>
+              </a:ext>
+            </a:extLst>
+          </p:cNvPr>
+          <p:cNvSpPr>
+            <a:spLocks xmlns:a="http://schemas.openxmlformats.org/drawingml/2006/main" noGrp="1"/>
+          </p:cNvSpPr>
+          <p:nvPr/>
+        </p:nvSpPr>
+        <p:spPr>
+          <a:xfrm xmlns:a="http://schemas.openxmlformats.org/drawingml/2006/main">
+            <a:off x="9772650" y="133350"/>
+            <a:ext cx="1733550" cy="457200"/>
+          </a:xfrm>
+          <a:prstGeom xmlns:a="http://schemas.openxmlformats.org/drawingml/2006/main" prst="roundRect">
+            <a:avLst>
+              <a:gd name="adj" fmla="val 16667"/>
+            </a:avLst>
+          </a:prstGeom>
+          <a:solidFill xmlns:a="http://schemas.openxmlformats.org/drawingml/2006/main">
+            <a:srgbClr val="06142E"/>
+          </a:solidFill>
+          <a:ln xmlns:a="http://schemas.openxmlformats.org/drawingml/2006/main" w="9525">
+            <a:solidFill>
+              <a:srgbClr val="1EC5FF">
+                <a:alpha val="33333"/>
+              </a:srgbClr>
+            </a:solidFill>
+            <a:prstDash val="solid"/>
+          </a:ln>
+        </p:spPr>
+      </p:sp>
+      <p:pic>
+        <p:nvPicPr>
+          <p:cNvPr id="15" name="" descr="Figura oficial da documentação dbt usada para explicar: Limitações que precisam permanecer visíveis — • Fixtures não medem qualidade real do modelo."/>
+          <p:cNvPicPr>
+            <a:picLocks xmlns:a="http://schemas.openxmlformats.org/drawingml/2006/main" noChangeAspect="1"/>
+          </p:cNvPicPr>
+          <p:nvPr/>
+        </p:nvPicPr>
+        <p:blipFill>
+          <a:blip xmlns:r="http://schemas.openxmlformats.org/officeDocument/2006/relationships" xmlns:a="http://schemas.openxmlformats.org/drawingml/2006/main" r:embed="Rc9b0c16af27547ed"/>
+          <a:stretch xmlns:a="http://schemas.openxmlformats.org/drawingml/2006/main"/>
+        </p:blipFill>
+        <p:spPr>
+          <a:xfrm xmlns:a="http://schemas.openxmlformats.org/drawingml/2006/main">
+            <a:off x="9893718" y="209550"/>
+            <a:ext cx="1491414" cy="323850"/>
+          </a:xfrm>
+          <a:prstGeom xmlns:a="http://schemas.openxmlformats.org/drawingml/2006/main" prst="rect">
+            <a:avLst/>
+          </a:prstGeom>
+        </p:spPr>
+      </p:pic>
+      <p:sp>
+        <p:nvSpPr>
+          <p:cNvPr id="6" name="footer-rule">
+            <a:extLst xmlns:a="http://schemas.openxmlformats.org/drawingml/2006/main">
+              <a:ext uri="{FF2B5EF4-FFF2-40B4-BE49-F238E27FC236}">
+                <a16:creationId xmlns:a16="http://schemas.microsoft.com/office/drawing/2014/main" id="{0C595258-7288-4B41-A58C-069F6DD464C5}"/>
               </a:ext>
             </a:extLst>
           </p:cNvPr>
@@ -11262,10 +12139,10 @@
       </p:sp>
       <p:sp>
         <p:nvSpPr>
-          <p:cNvPr id="5" name="footer">
-            <a:extLst xmlns:a="http://schemas.openxmlformats.org/drawingml/2006/main">
-              <a:ext uri="{FF2B5EF4-FFF2-40B4-BE49-F238E27FC236}">
-                <a16:creationId xmlns:a16="http://schemas.microsoft.com/office/drawing/2014/main" id="{8CF22769-1A94-4E18-854D-30EED36F0E71}"/>
+          <p:cNvPr id="7" name="footer">
+            <a:extLst xmlns:a="http://schemas.openxmlformats.org/drawingml/2006/main">
+              <a:ext uri="{FF2B5EF4-FFF2-40B4-BE49-F238E27FC236}">
+                <a16:creationId xmlns:a16="http://schemas.microsoft.com/office/drawing/2014/main" id="{76E6F78F-CF5D-44B9-BF3C-E83440EBC293}"/>
               </a:ext>
             </a:extLst>
           </p:cNvPr>
@@ -11317,10 +12194,10 @@
       </p:sp>
       <p:sp>
         <p:nvSpPr>
-          <p:cNvPr id="6" name="page-number">
-            <a:extLst xmlns:a="http://schemas.openxmlformats.org/drawingml/2006/main">
-              <a:ext uri="{FF2B5EF4-FFF2-40B4-BE49-F238E27FC236}">
-                <a16:creationId xmlns:a16="http://schemas.microsoft.com/office/drawing/2014/main" id="{34AA1359-038A-45AF-9AF8-80B24CE4DA31}"/>
+          <p:cNvPr id="8" name="page-number">
+            <a:extLst xmlns:a="http://schemas.openxmlformats.org/drawingml/2006/main">
+              <a:ext uri="{FF2B5EF4-FFF2-40B4-BE49-F238E27FC236}">
+                <a16:creationId xmlns:a16="http://schemas.microsoft.com/office/drawing/2014/main" id="{3BF4079B-F7AB-4C09-9CAC-12EFCB927FAC}"/>
               </a:ext>
             </a:extLst>
           </p:cNvPr>
@@ -11373,7 +12250,7 @@
     </p:spTree>
     <p:extLst>
       <p:ext uri="{BB962C8B-B14F-4D97-AF65-F5344CB8AC3E}">
-        <p14:creationId xmlns:p14="http://schemas.microsoft.com/office/powerpoint/2010/main" val="1439164258"/>
+        <p14:creationId xmlns:p14="http://schemas.microsoft.com/office/powerpoint/2010/main" val="2009730745"/>
       </p:ext>
     </p:extLst>
   </p:cSld>
@@ -11409,10 +12286,10 @@
       </p:grpSpPr>
       <p:sp>
         <p:nvSpPr>
-          <p:cNvPr id="10" name="radar-label">
-            <a:extLst xmlns:a="http://schemas.openxmlformats.org/drawingml/2006/main">
-              <a:ext uri="{FF2B5EF4-FFF2-40B4-BE49-F238E27FC236}">
-                <a16:creationId xmlns:a16="http://schemas.microsoft.com/office/drawing/2014/main" id="{BE3D7116-AF36-4A62-B6D7-63CAE9994615}"/>
+          <p:cNvPr id="12" name="radar-label">
+            <a:extLst xmlns:a="http://schemas.openxmlformats.org/drawingml/2006/main">
+              <a:ext uri="{FF2B5EF4-FFF2-40B4-BE49-F238E27FC236}">
+                <a16:creationId xmlns:a16="http://schemas.microsoft.com/office/drawing/2014/main" id="{1D962F8E-1A24-4582-A79F-59A680C3B588}"/>
               </a:ext>
             </a:extLst>
           </p:cNvPr>
@@ -11463,7 +12340,7 @@
           <p:cNvPr id="2" name="radar-text">
             <a:extLst xmlns:a="http://schemas.openxmlformats.org/drawingml/2006/main">
               <a:ext uri="{FF2B5EF4-FFF2-40B4-BE49-F238E27FC236}">
-                <a16:creationId xmlns:a16="http://schemas.microsoft.com/office/drawing/2014/main" id="{260BFC0C-C9DF-45F3-8DFE-8943A6B3F725}"/>
+                <a16:creationId xmlns:a16="http://schemas.microsoft.com/office/drawing/2014/main" id="{8F8035C3-DFC5-414F-89DB-7072F91F8A31}"/>
               </a:ext>
             </a:extLst>
           </p:cNvPr>
@@ -11514,7 +12391,7 @@
           <p:cNvPr id="3" name="radar-rule">
             <a:extLst xmlns:a="http://schemas.openxmlformats.org/drawingml/2006/main">
               <a:ext uri="{FF2B5EF4-FFF2-40B4-BE49-F238E27FC236}">
-                <a16:creationId xmlns:a16="http://schemas.microsoft.com/office/drawing/2014/main" id="{698287F3-FE19-4D72-90F0-523179887085}"/>
+                <a16:creationId xmlns:a16="http://schemas.microsoft.com/office/drawing/2014/main" id="{A03B199F-ECBD-447E-8A75-45EEC89D7FE1}"/>
               </a:ext>
             </a:extLst>
           </p:cNvPr>
@@ -11565,7 +12442,7 @@
           <p:cNvPr id="4" name="ambient-glow">
             <a:extLst xmlns:a="http://schemas.openxmlformats.org/drawingml/2006/main">
               <a:ext uri="{FF2B5EF4-FFF2-40B4-BE49-F238E27FC236}">
-                <a16:creationId xmlns:a16="http://schemas.microsoft.com/office/drawing/2014/main" id="{1ACB701E-4494-46D3-B6BF-C3136A7C180D}"/>
+                <a16:creationId xmlns:a16="http://schemas.microsoft.com/office/drawing/2014/main" id="{A3187890-38D0-4C4F-8813-AB2B8A19B13B}"/>
               </a:ext>
             </a:extLst>
           </p:cNvPr>
@@ -11602,7 +12479,7 @@
           <p:cNvPr id="5" name="ambient-core">
             <a:extLst xmlns:a="http://schemas.openxmlformats.org/drawingml/2006/main">
               <a:ext uri="{FF2B5EF4-FFF2-40B4-BE49-F238E27FC236}">
-                <a16:creationId xmlns:a16="http://schemas.microsoft.com/office/drawing/2014/main" id="{6BE98D31-910B-4F30-90A6-48D865488F00}"/>
+                <a16:creationId xmlns:a16="http://schemas.microsoft.com/office/drawing/2014/main" id="{9E82E2B6-D17F-44FC-8A22-076FF1E25D50}"/>
               </a:ext>
             </a:extLst>
           </p:cNvPr>
@@ -11639,7 +12516,7 @@
           <p:cNvPr id="6" name="eyebrow">
             <a:extLst xmlns:a="http://schemas.openxmlformats.org/drawingml/2006/main">
               <a:ext uri="{FF2B5EF4-FFF2-40B4-BE49-F238E27FC236}">
-                <a16:creationId xmlns:a16="http://schemas.microsoft.com/office/drawing/2014/main" id="{144BB543-A0D4-47EA-8080-A4BFA88E25EE}"/>
+                <a16:creationId xmlns:a16="http://schemas.microsoft.com/office/drawing/2014/main" id="{29B58CEE-141E-4C13-9FD6-299D995EEBFE}"/>
               </a:ext>
             </a:extLst>
           </p:cNvPr>
@@ -11687,10 +12564,69 @@
       </p:sp>
       <p:sp>
         <p:nvSpPr>
-          <p:cNvPr id="7" name="footer-rule">
-            <a:extLst xmlns:a="http://schemas.openxmlformats.org/drawingml/2006/main">
-              <a:ext uri="{FF2B5EF4-FFF2-40B4-BE49-F238E27FC236}">
-                <a16:creationId xmlns:a16="http://schemas.microsoft.com/office/drawing/2014/main" id="{C5E79D7B-796E-423B-9E94-09BA594B6345}"/>
+          <p:cNvPr id="7" name="rescue-point-logo-background">
+            <a:extLst xmlns:a="http://schemas.openxmlformats.org/drawingml/2006/main">
+              <a:ext uri="{FF2B5EF4-FFF2-40B4-BE49-F238E27FC236}">
+                <a16:creationId xmlns:a16="http://schemas.microsoft.com/office/drawing/2014/main" id="{22748454-E31F-4864-926A-DAA2A1B8234E}"/>
+              </a:ext>
+            </a:extLst>
+          </p:cNvPr>
+          <p:cNvSpPr>
+            <a:spLocks xmlns:a="http://schemas.openxmlformats.org/drawingml/2006/main" noGrp="1"/>
+          </p:cNvSpPr>
+          <p:nvPr/>
+        </p:nvSpPr>
+        <p:spPr>
+          <a:xfrm xmlns:a="http://schemas.openxmlformats.org/drawingml/2006/main">
+            <a:off x="9772650" y="133350"/>
+            <a:ext cx="1733550" cy="457200"/>
+          </a:xfrm>
+          <a:prstGeom xmlns:a="http://schemas.openxmlformats.org/drawingml/2006/main" prst="roundRect">
+            <a:avLst>
+              <a:gd name="adj" fmla="val 16667"/>
+            </a:avLst>
+          </a:prstGeom>
+          <a:solidFill xmlns:a="http://schemas.openxmlformats.org/drawingml/2006/main">
+            <a:srgbClr val="06142E"/>
+          </a:solidFill>
+          <a:ln xmlns:a="http://schemas.openxmlformats.org/drawingml/2006/main" w="9525">
+            <a:solidFill>
+              <a:srgbClr val="1EC5FF">
+                <a:alpha val="33333"/>
+              </a:srgbClr>
+            </a:solidFill>
+            <a:prstDash val="solid"/>
+          </a:ln>
+        </p:spPr>
+      </p:sp>
+      <p:pic>
+        <p:nvPicPr>
+          <p:cNvPr id="21" name="" descr="Figura oficial da documentação dbt usada para explicar: RADAR — dbt State e MCP gerenciado continuam fora da aceitação open.."/>
+          <p:cNvPicPr>
+            <a:picLocks xmlns:a="http://schemas.openxmlformats.org/drawingml/2006/main" noChangeAspect="1"/>
+          </p:cNvPicPr>
+          <p:nvPr/>
+        </p:nvPicPr>
+        <p:blipFill>
+          <a:blip xmlns:r="http://schemas.openxmlformats.org/officeDocument/2006/relationships" xmlns:a="http://schemas.openxmlformats.org/drawingml/2006/main" r:embed="R57890e575e904ba8"/>
+          <a:stretch xmlns:a="http://schemas.openxmlformats.org/drawingml/2006/main"/>
+        </p:blipFill>
+        <p:spPr>
+          <a:xfrm xmlns:a="http://schemas.openxmlformats.org/drawingml/2006/main">
+            <a:off x="9893718" y="209550"/>
+            <a:ext cx="1491414" cy="323850"/>
+          </a:xfrm>
+          <a:prstGeom xmlns:a="http://schemas.openxmlformats.org/drawingml/2006/main" prst="rect">
+            <a:avLst/>
+          </a:prstGeom>
+        </p:spPr>
+      </p:pic>
+      <p:sp>
+        <p:nvSpPr>
+          <p:cNvPr id="9" name="footer-rule">
+            <a:extLst xmlns:a="http://schemas.openxmlformats.org/drawingml/2006/main">
+              <a:ext uri="{FF2B5EF4-FFF2-40B4-BE49-F238E27FC236}">
+                <a16:creationId xmlns:a16="http://schemas.microsoft.com/office/drawing/2014/main" id="{C8256D92-5674-40F8-A573-15EE62CF161B}"/>
               </a:ext>
             </a:extLst>
           </p:cNvPr>
@@ -11720,10 +12656,10 @@
       </p:sp>
       <p:sp>
         <p:nvSpPr>
-          <p:cNvPr id="8" name="footer">
-            <a:extLst xmlns:a="http://schemas.openxmlformats.org/drawingml/2006/main">
-              <a:ext uri="{FF2B5EF4-FFF2-40B4-BE49-F238E27FC236}">
-                <a16:creationId xmlns:a16="http://schemas.microsoft.com/office/drawing/2014/main" id="{003708F0-E920-4689-852C-7A98E8B7F2AD}"/>
+          <p:cNvPr id="10" name="footer">
+            <a:extLst xmlns:a="http://schemas.openxmlformats.org/drawingml/2006/main">
+              <a:ext uri="{FF2B5EF4-FFF2-40B4-BE49-F238E27FC236}">
+                <a16:creationId xmlns:a16="http://schemas.microsoft.com/office/drawing/2014/main" id="{474D357B-5F37-4950-B0ED-CEF4AA47EDCA}"/>
               </a:ext>
             </a:extLst>
           </p:cNvPr>
@@ -11775,10 +12711,10 @@
       </p:sp>
       <p:sp>
         <p:nvSpPr>
-          <p:cNvPr id="9" name="page-number">
-            <a:extLst xmlns:a="http://schemas.openxmlformats.org/drawingml/2006/main">
-              <a:ext uri="{FF2B5EF4-FFF2-40B4-BE49-F238E27FC236}">
-                <a16:creationId xmlns:a16="http://schemas.microsoft.com/office/drawing/2014/main" id="{43E6DCA5-808F-48E8-BE35-7B88ECF5BD57}"/>
+          <p:cNvPr id="11" name="page-number">
+            <a:extLst xmlns:a="http://schemas.openxmlformats.org/drawingml/2006/main">
+              <a:ext uri="{FF2B5EF4-FFF2-40B4-BE49-F238E27FC236}">
+                <a16:creationId xmlns:a16="http://schemas.microsoft.com/office/drawing/2014/main" id="{A81B5486-1CA2-4B04-9913-3B2BE205E79B}"/>
               </a:ext>
             </a:extLst>
           </p:cNvPr>
@@ -11831,7 +12767,7 @@
     </p:spTree>
     <p:extLst>
       <p:ext uri="{BB962C8B-B14F-4D97-AF65-F5344CB8AC3E}">
-        <p14:creationId xmlns:p14="http://schemas.microsoft.com/office/powerpoint/2010/main" val="499828775"/>
+        <p14:creationId xmlns:p14="http://schemas.microsoft.com/office/powerpoint/2010/main" val="1262906837"/>
       </p:ext>
     </p:extLst>
   </p:cSld>
@@ -11859,10 +12795,10 @@
       </p:grpSpPr>
       <p:sp>
         <p:nvSpPr>
-          <p:cNvPr id="8" name="cta-label">
-            <a:extLst xmlns:a="http://schemas.openxmlformats.org/drawingml/2006/main">
-              <a:ext uri="{FF2B5EF4-FFF2-40B4-BE49-F238E27FC236}">
-                <a16:creationId xmlns:a16="http://schemas.microsoft.com/office/drawing/2014/main" id="{8745D593-4D9F-4ED1-8414-219D661F2C22}"/>
+          <p:cNvPr id="10" name="cta-label">
+            <a:extLst xmlns:a="http://schemas.openxmlformats.org/drawingml/2006/main">
+              <a:ext uri="{FF2B5EF4-FFF2-40B4-BE49-F238E27FC236}">
+                <a16:creationId xmlns:a16="http://schemas.microsoft.com/office/drawing/2014/main" id="{00043C49-797F-40C2-89D6-91A9E389D312}"/>
               </a:ext>
             </a:extLst>
           </p:cNvPr>
@@ -11913,7 +12849,7 @@
           <p:cNvPr id="2" name="cta">
             <a:extLst xmlns:a="http://schemas.openxmlformats.org/drawingml/2006/main">
               <a:ext uri="{FF2B5EF4-FFF2-40B4-BE49-F238E27FC236}">
-                <a16:creationId xmlns:a16="http://schemas.microsoft.com/office/drawing/2014/main" id="{10052003-0F4A-45BF-BF97-C102A2F52B8B}"/>
+                <a16:creationId xmlns:a16="http://schemas.microsoft.com/office/drawing/2014/main" id="{472807EC-FEF0-4DEF-B33B-15AC02FEAAD5}"/>
               </a:ext>
             </a:extLst>
           </p:cNvPr>
@@ -11964,7 +12900,7 @@
           <p:cNvPr id="3" name="cta-meta">
             <a:extLst xmlns:a="http://schemas.openxmlformats.org/drawingml/2006/main">
               <a:ext uri="{FF2B5EF4-FFF2-40B4-BE49-F238E27FC236}">
-                <a16:creationId xmlns:a16="http://schemas.microsoft.com/office/drawing/2014/main" id="{B79B5574-770C-4013-B014-806811C14BB8}"/>
+                <a16:creationId xmlns:a16="http://schemas.microsoft.com/office/drawing/2014/main" id="{45045482-6322-4747-9854-59156B13F529}"/>
               </a:ext>
             </a:extLst>
           </p:cNvPr>
@@ -12015,7 +12951,7 @@
           <p:cNvPr id="4" name="eyebrow">
             <a:extLst xmlns:a="http://schemas.openxmlformats.org/drawingml/2006/main">
               <a:ext uri="{FF2B5EF4-FFF2-40B4-BE49-F238E27FC236}">
-                <a16:creationId xmlns:a16="http://schemas.microsoft.com/office/drawing/2014/main" id="{FCEB0D33-C76A-4FE1-A312-0B0566D6856B}"/>
+                <a16:creationId xmlns:a16="http://schemas.microsoft.com/office/drawing/2014/main" id="{78F51FC4-F51A-4634-9671-102AC92FEEF2}"/>
               </a:ext>
             </a:extLst>
           </p:cNvPr>
@@ -12063,10 +12999,69 @@
       </p:sp>
       <p:sp>
         <p:nvSpPr>
-          <p:cNvPr id="5" name="footer-rule">
-            <a:extLst xmlns:a="http://schemas.openxmlformats.org/drawingml/2006/main">
-              <a:ext uri="{FF2B5EF4-FFF2-40B4-BE49-F238E27FC236}">
-                <a16:creationId xmlns:a16="http://schemas.microsoft.com/office/drawing/2014/main" id="{EE10ED78-C6A9-4D40-9A73-CB897CF1C2ED}"/>
+          <p:cNvPr id="5" name="rescue-point-logo-background">
+            <a:extLst xmlns:a="http://schemas.openxmlformats.org/drawingml/2006/main">
+              <a:ext uri="{FF2B5EF4-FFF2-40B4-BE49-F238E27FC236}">
+                <a16:creationId xmlns:a16="http://schemas.microsoft.com/office/drawing/2014/main" id="{E2ED1193-D2E9-4240-B7C7-0BD8355F01AC}"/>
+              </a:ext>
+            </a:extLst>
+          </p:cNvPr>
+          <p:cNvSpPr>
+            <a:spLocks xmlns:a="http://schemas.openxmlformats.org/drawingml/2006/main" noGrp="1"/>
+          </p:cNvSpPr>
+          <p:nvPr/>
+        </p:nvSpPr>
+        <p:spPr>
+          <a:xfrm xmlns:a="http://schemas.openxmlformats.org/drawingml/2006/main">
+            <a:off x="9772650" y="133350"/>
+            <a:ext cx="1733550" cy="457200"/>
+          </a:xfrm>
+          <a:prstGeom xmlns:a="http://schemas.openxmlformats.org/drawingml/2006/main" prst="roundRect">
+            <a:avLst>
+              <a:gd name="adj" fmla="val 16667"/>
+            </a:avLst>
+          </a:prstGeom>
+          <a:solidFill xmlns:a="http://schemas.openxmlformats.org/drawingml/2006/main">
+            <a:srgbClr val="06142E"/>
+          </a:solidFill>
+          <a:ln xmlns:a="http://schemas.openxmlformats.org/drawingml/2006/main" w="9525">
+            <a:solidFill>
+              <a:srgbClr val="1EC5FF">
+                <a:alpha val="33333"/>
+              </a:srgbClr>
+            </a:solidFill>
+            <a:prstDash val="solid"/>
+          </a:ln>
+        </p:spPr>
+      </p:sp>
+      <p:pic>
+        <p:nvPicPr>
+          <p:cNvPr id="17" name="" descr="Figura oficial da documentação dbt usada para explicar: PRÓXIMO PASSO — Mova uma regra determinística do prompt para o pipeline e teste-a.."/>
+          <p:cNvPicPr>
+            <a:picLocks xmlns:a="http://schemas.openxmlformats.org/drawingml/2006/main" noChangeAspect="1"/>
+          </p:cNvPicPr>
+          <p:nvPr/>
+        </p:nvPicPr>
+        <p:blipFill>
+          <a:blip xmlns:r="http://schemas.openxmlformats.org/officeDocument/2006/relationships" xmlns:a="http://schemas.openxmlformats.org/drawingml/2006/main" r:embed="R552d4ac199ed4445"/>
+          <a:stretch xmlns:a="http://schemas.openxmlformats.org/drawingml/2006/main"/>
+        </p:blipFill>
+        <p:spPr>
+          <a:xfrm xmlns:a="http://schemas.openxmlformats.org/drawingml/2006/main">
+            <a:off x="9893718" y="209550"/>
+            <a:ext cx="1491414" cy="323850"/>
+          </a:xfrm>
+          <a:prstGeom xmlns:a="http://schemas.openxmlformats.org/drawingml/2006/main" prst="rect">
+            <a:avLst/>
+          </a:prstGeom>
+        </p:spPr>
+      </p:pic>
+      <p:sp>
+        <p:nvSpPr>
+          <p:cNvPr id="7" name="footer-rule">
+            <a:extLst xmlns:a="http://schemas.openxmlformats.org/drawingml/2006/main">
+              <a:ext uri="{FF2B5EF4-FFF2-40B4-BE49-F238E27FC236}">
+                <a16:creationId xmlns:a16="http://schemas.microsoft.com/office/drawing/2014/main" id="{3A84789E-DF52-4FAE-817B-1CD2C74A128E}"/>
               </a:ext>
             </a:extLst>
           </p:cNvPr>
@@ -12096,10 +13091,10 @@
       </p:sp>
       <p:sp>
         <p:nvSpPr>
-          <p:cNvPr id="6" name="footer">
-            <a:extLst xmlns:a="http://schemas.openxmlformats.org/drawingml/2006/main">
-              <a:ext uri="{FF2B5EF4-FFF2-40B4-BE49-F238E27FC236}">
-                <a16:creationId xmlns:a16="http://schemas.microsoft.com/office/drawing/2014/main" id="{275422DE-0E3D-4D12-95D0-10E949D7EAA2}"/>
+          <p:cNvPr id="8" name="footer">
+            <a:extLst xmlns:a="http://schemas.openxmlformats.org/drawingml/2006/main">
+              <a:ext uri="{FF2B5EF4-FFF2-40B4-BE49-F238E27FC236}">
+                <a16:creationId xmlns:a16="http://schemas.microsoft.com/office/drawing/2014/main" id="{D989F004-3DC0-4164-9021-99425FB919B6}"/>
               </a:ext>
             </a:extLst>
           </p:cNvPr>
@@ -12151,10 +13146,10 @@
       </p:sp>
       <p:sp>
         <p:nvSpPr>
-          <p:cNvPr id="7" name="page-number">
-            <a:extLst xmlns:a="http://schemas.openxmlformats.org/drawingml/2006/main">
-              <a:ext uri="{FF2B5EF4-FFF2-40B4-BE49-F238E27FC236}">
-                <a16:creationId xmlns:a16="http://schemas.microsoft.com/office/drawing/2014/main" id="{C8C09E47-BB29-46EB-95E5-886ADDB6EC3D}"/>
+          <p:cNvPr id="9" name="page-number">
+            <a:extLst xmlns:a="http://schemas.openxmlformats.org/drawingml/2006/main">
+              <a:ext uri="{FF2B5EF4-FFF2-40B4-BE49-F238E27FC236}">
+                <a16:creationId xmlns:a16="http://schemas.microsoft.com/office/drawing/2014/main" id="{750C7AC8-9DB0-402C-AE62-A92225D6ADC4}"/>
               </a:ext>
             </a:extLst>
           </p:cNvPr>
@@ -12207,7 +13202,7 @@
     </p:spTree>
     <p:extLst>
       <p:ext uri="{BB962C8B-B14F-4D97-AF65-F5344CB8AC3E}">
-        <p14:creationId xmlns:p14="http://schemas.microsoft.com/office/powerpoint/2010/main" val="237323660"/>
+        <p14:creationId xmlns:p14="http://schemas.microsoft.com/office/powerpoint/2010/main" val="1308604642"/>
       </p:ext>
     </p:extLst>
   </p:cSld>
@@ -12243,10 +13238,10 @@
       </p:grpSpPr>
       <p:sp>
         <p:nvSpPr>
-          <p:cNvPr id="14" name="slide-title">
-            <a:extLst xmlns:a="http://schemas.openxmlformats.org/drawingml/2006/main">
-              <a:ext uri="{FF2B5EF4-FFF2-40B4-BE49-F238E27FC236}">
-                <a16:creationId xmlns:a16="http://schemas.microsoft.com/office/drawing/2014/main" id="{4AB3F278-4684-4A9F-9F3E-92962157948F}"/>
+          <p:cNvPr id="16" name="slide-title">
+            <a:extLst xmlns:a="http://schemas.openxmlformats.org/drawingml/2006/main">
+              <a:ext uri="{FF2B5EF4-FFF2-40B4-BE49-F238E27FC236}">
+                <a16:creationId xmlns:a16="http://schemas.microsoft.com/office/drawing/2014/main" id="{4296D562-CF73-43BF-A587-45F3DD5B6F6E}"/>
               </a:ext>
             </a:extLst>
           </p:cNvPr>
@@ -12297,7 +13292,7 @@
           <p:cNvPr id="2" name="step-num-1">
             <a:extLst xmlns:a="http://schemas.openxmlformats.org/drawingml/2006/main">
               <a:ext uri="{FF2B5EF4-FFF2-40B4-BE49-F238E27FC236}">
-                <a16:creationId xmlns:a16="http://schemas.microsoft.com/office/drawing/2014/main" id="{384C4C46-F8F6-4483-A2EB-6A32E204FC40}"/>
+                <a16:creationId xmlns:a16="http://schemas.microsoft.com/office/drawing/2014/main" id="{43628A81-DD22-4680-9080-53AAD095D9E3}"/>
               </a:ext>
             </a:extLst>
           </p:cNvPr>
@@ -12348,7 +13343,7 @@
           <p:cNvPr id="3" name="step-label-1">
             <a:extLst xmlns:a="http://schemas.openxmlformats.org/drawingml/2006/main">
               <a:ext uri="{FF2B5EF4-FFF2-40B4-BE49-F238E27FC236}">
-                <a16:creationId xmlns:a16="http://schemas.microsoft.com/office/drawing/2014/main" id="{0D6A836B-C17D-4B34-9D37-74D36E7B7B1A}"/>
+                <a16:creationId xmlns:a16="http://schemas.microsoft.com/office/drawing/2014/main" id="{F2B1E898-6868-4203-B91E-484ED354D164}"/>
               </a:ext>
             </a:extLst>
           </p:cNvPr>
@@ -12399,7 +13394,7 @@
           <p:cNvPr id="4" name="step-line-1">
             <a:extLst xmlns:a="http://schemas.openxmlformats.org/drawingml/2006/main">
               <a:ext uri="{FF2B5EF4-FFF2-40B4-BE49-F238E27FC236}">
-                <a16:creationId xmlns:a16="http://schemas.microsoft.com/office/drawing/2014/main" id="{F80CEB3D-3C08-49C6-A17C-47A4C2B60CBA}"/>
+                <a16:creationId xmlns:a16="http://schemas.microsoft.com/office/drawing/2014/main" id="{3F82DEFA-4B72-49FC-8C6B-244939810E1B}"/>
               </a:ext>
             </a:extLst>
           </p:cNvPr>
@@ -12430,7 +13425,7 @@
           <p:cNvPr id="5" name="step-num-2">
             <a:extLst xmlns:a="http://schemas.openxmlformats.org/drawingml/2006/main">
               <a:ext uri="{FF2B5EF4-FFF2-40B4-BE49-F238E27FC236}">
-                <a16:creationId xmlns:a16="http://schemas.microsoft.com/office/drawing/2014/main" id="{25FC2777-D056-4174-8F6E-F2871C0BA81F}"/>
+                <a16:creationId xmlns:a16="http://schemas.microsoft.com/office/drawing/2014/main" id="{4BF99071-3D0C-4BF4-85E6-EC895D82A441}"/>
               </a:ext>
             </a:extLst>
           </p:cNvPr>
@@ -12481,7 +13476,7 @@
           <p:cNvPr id="6" name="step-label-2">
             <a:extLst xmlns:a="http://schemas.openxmlformats.org/drawingml/2006/main">
               <a:ext uri="{FF2B5EF4-FFF2-40B4-BE49-F238E27FC236}">
-                <a16:creationId xmlns:a16="http://schemas.microsoft.com/office/drawing/2014/main" id="{9395651D-DE0C-4BEB-BF1A-0B66D17C7C9D}"/>
+                <a16:creationId xmlns:a16="http://schemas.microsoft.com/office/drawing/2014/main" id="{6E717412-3A24-426D-8555-AED951B3B64C}"/>
               </a:ext>
             </a:extLst>
           </p:cNvPr>
@@ -12532,7 +13527,7 @@
           <p:cNvPr id="7" name="step-line-2">
             <a:extLst xmlns:a="http://schemas.openxmlformats.org/drawingml/2006/main">
               <a:ext uri="{FF2B5EF4-FFF2-40B4-BE49-F238E27FC236}">
-                <a16:creationId xmlns:a16="http://schemas.microsoft.com/office/drawing/2014/main" id="{CF58045A-3A04-4D9D-BDA2-12FB7E932B20}"/>
+                <a16:creationId xmlns:a16="http://schemas.microsoft.com/office/drawing/2014/main" id="{5161BE0E-8100-4A45-A757-A30AE38F02A8}"/>
               </a:ext>
             </a:extLst>
           </p:cNvPr>
@@ -12563,7 +13558,7 @@
           <p:cNvPr id="8" name="step-num-3">
             <a:extLst xmlns:a="http://schemas.openxmlformats.org/drawingml/2006/main">
               <a:ext uri="{FF2B5EF4-FFF2-40B4-BE49-F238E27FC236}">
-                <a16:creationId xmlns:a16="http://schemas.microsoft.com/office/drawing/2014/main" id="{BB41FCB6-B03D-45DA-AEB2-96CF5267FD55}"/>
+                <a16:creationId xmlns:a16="http://schemas.microsoft.com/office/drawing/2014/main" id="{1FE10DB5-F7E1-444C-8355-E6CFE71AA2EE}"/>
               </a:ext>
             </a:extLst>
           </p:cNvPr>
@@ -12614,7 +13609,7 @@
           <p:cNvPr id="9" name="step-label-3">
             <a:extLst xmlns:a="http://schemas.openxmlformats.org/drawingml/2006/main">
               <a:ext uri="{FF2B5EF4-FFF2-40B4-BE49-F238E27FC236}">
-                <a16:creationId xmlns:a16="http://schemas.microsoft.com/office/drawing/2014/main" id="{26243B3D-0287-4486-8B68-5B4705F502D5}"/>
+                <a16:creationId xmlns:a16="http://schemas.microsoft.com/office/drawing/2014/main" id="{3941964B-D964-4D69-847E-D460A463DF8C}"/>
               </a:ext>
             </a:extLst>
           </p:cNvPr>
@@ -12665,7 +13660,7 @@
           <p:cNvPr id="10" name="eyebrow">
             <a:extLst xmlns:a="http://schemas.openxmlformats.org/drawingml/2006/main">
               <a:ext uri="{FF2B5EF4-FFF2-40B4-BE49-F238E27FC236}">
-                <a16:creationId xmlns:a16="http://schemas.microsoft.com/office/drawing/2014/main" id="{9F32C969-44F5-472D-9DC3-8FD3E9FAB7CF}"/>
+                <a16:creationId xmlns:a16="http://schemas.microsoft.com/office/drawing/2014/main" id="{686C7562-3624-4B9F-98DF-0ACA1C8247C8}"/>
               </a:ext>
             </a:extLst>
           </p:cNvPr>
@@ -12713,10 +13708,69 @@
       </p:sp>
       <p:sp>
         <p:nvSpPr>
-          <p:cNvPr id="11" name="footer-rule">
-            <a:extLst xmlns:a="http://schemas.openxmlformats.org/drawingml/2006/main">
-              <a:ext uri="{FF2B5EF4-FFF2-40B4-BE49-F238E27FC236}">
-                <a16:creationId xmlns:a16="http://schemas.microsoft.com/office/drawing/2014/main" id="{91B7FB87-714C-4BD2-B420-3CCF1D86EE18}"/>
+          <p:cNvPr id="11" name="rescue-point-logo-background">
+            <a:extLst xmlns:a="http://schemas.openxmlformats.org/drawingml/2006/main">
+              <a:ext uri="{FF2B5EF4-FFF2-40B4-BE49-F238E27FC236}">
+                <a16:creationId xmlns:a16="http://schemas.microsoft.com/office/drawing/2014/main" id="{BC5CA23F-CBEE-4681-9BE2-0B3C2B5CFCFE}"/>
+              </a:ext>
+            </a:extLst>
+          </p:cNvPr>
+          <p:cNvSpPr>
+            <a:spLocks xmlns:a="http://schemas.openxmlformats.org/drawingml/2006/main" noGrp="1"/>
+          </p:cNvSpPr>
+          <p:nvPr/>
+        </p:nvSpPr>
+        <p:spPr>
+          <a:xfrm xmlns:a="http://schemas.openxmlformats.org/drawingml/2006/main">
+            <a:off x="9772650" y="133350"/>
+            <a:ext cx="1733550" cy="457200"/>
+          </a:xfrm>
+          <a:prstGeom xmlns:a="http://schemas.openxmlformats.org/drawingml/2006/main" prst="roundRect">
+            <a:avLst>
+              <a:gd name="adj" fmla="val 16667"/>
+            </a:avLst>
+          </a:prstGeom>
+          <a:solidFill xmlns:a="http://schemas.openxmlformats.org/drawingml/2006/main">
+            <a:srgbClr val="06142E"/>
+          </a:solidFill>
+          <a:ln xmlns:a="http://schemas.openxmlformats.org/drawingml/2006/main" w="9525">
+            <a:solidFill>
+              <a:srgbClr val="1EC5FF">
+                <a:alpha val="33333"/>
+              </a:srgbClr>
+            </a:solidFill>
+            <a:prstDash val="solid"/>
+          </a:ln>
+        </p:spPr>
+      </p:sp>
+      <p:pic>
+        <p:nvPicPr>
+          <p:cNvPr id="29" name="" descr="Figura oficial da documentação dbt usada para explicar: Ao final, você consegue... — 01."/>
+          <p:cNvPicPr>
+            <a:picLocks xmlns:a="http://schemas.openxmlformats.org/drawingml/2006/main" noChangeAspect="1"/>
+          </p:cNvPicPr>
+          <p:nvPr/>
+        </p:nvPicPr>
+        <p:blipFill>
+          <a:blip xmlns:r="http://schemas.openxmlformats.org/officeDocument/2006/relationships" xmlns:a="http://schemas.openxmlformats.org/drawingml/2006/main" r:embed="R78ab23179c44433c"/>
+          <a:stretch xmlns:a="http://schemas.openxmlformats.org/drawingml/2006/main"/>
+        </p:blipFill>
+        <p:spPr>
+          <a:xfrm xmlns:a="http://schemas.openxmlformats.org/drawingml/2006/main">
+            <a:off x="9893718" y="209550"/>
+            <a:ext cx="1491414" cy="323850"/>
+          </a:xfrm>
+          <a:prstGeom xmlns:a="http://schemas.openxmlformats.org/drawingml/2006/main" prst="rect">
+            <a:avLst/>
+          </a:prstGeom>
+        </p:spPr>
+      </p:pic>
+      <p:sp>
+        <p:nvSpPr>
+          <p:cNvPr id="13" name="footer-rule">
+            <a:extLst xmlns:a="http://schemas.openxmlformats.org/drawingml/2006/main">
+              <a:ext uri="{FF2B5EF4-FFF2-40B4-BE49-F238E27FC236}">
+                <a16:creationId xmlns:a16="http://schemas.microsoft.com/office/drawing/2014/main" id="{0883C247-8160-410A-8FD1-79BD476075E8}"/>
               </a:ext>
             </a:extLst>
           </p:cNvPr>
@@ -12746,10 +13800,10 @@
       </p:sp>
       <p:sp>
         <p:nvSpPr>
-          <p:cNvPr id="12" name="footer">
-            <a:extLst xmlns:a="http://schemas.openxmlformats.org/drawingml/2006/main">
-              <a:ext uri="{FF2B5EF4-FFF2-40B4-BE49-F238E27FC236}">
-                <a16:creationId xmlns:a16="http://schemas.microsoft.com/office/drawing/2014/main" id="{FF6D1A98-C8E6-4436-B16D-C972C5B561CE}"/>
+          <p:cNvPr id="14" name="footer">
+            <a:extLst xmlns:a="http://schemas.openxmlformats.org/drawingml/2006/main">
+              <a:ext uri="{FF2B5EF4-FFF2-40B4-BE49-F238E27FC236}">
+                <a16:creationId xmlns:a16="http://schemas.microsoft.com/office/drawing/2014/main" id="{4ED96C98-C993-4E18-AC94-279BAD0A3D3B}"/>
               </a:ext>
             </a:extLst>
           </p:cNvPr>
@@ -12801,10 +13855,10 @@
       </p:sp>
       <p:sp>
         <p:nvSpPr>
-          <p:cNvPr id="13" name="page-number">
-            <a:extLst xmlns:a="http://schemas.openxmlformats.org/drawingml/2006/main">
-              <a:ext uri="{FF2B5EF4-FFF2-40B4-BE49-F238E27FC236}">
-                <a16:creationId xmlns:a16="http://schemas.microsoft.com/office/drawing/2014/main" id="{840AB92F-7A26-4783-B555-AB2D041857CE}"/>
+          <p:cNvPr id="15" name="page-number">
+            <a:extLst xmlns:a="http://schemas.openxmlformats.org/drawingml/2006/main">
+              <a:ext uri="{FF2B5EF4-FFF2-40B4-BE49-F238E27FC236}">
+                <a16:creationId xmlns:a16="http://schemas.microsoft.com/office/drawing/2014/main" id="{F209DC19-59A2-4C11-AC59-8BA0434BFEF1}"/>
               </a:ext>
             </a:extLst>
           </p:cNvPr>
@@ -12857,7 +13911,7 @@
     </p:spTree>
     <p:extLst>
       <p:ext uri="{BB962C8B-B14F-4D97-AF65-F5344CB8AC3E}">
-        <p14:creationId xmlns:p14="http://schemas.microsoft.com/office/powerpoint/2010/main" val="1631010664"/>
+        <p14:creationId xmlns:p14="http://schemas.microsoft.com/office/powerpoint/2010/main" val="862206592"/>
       </p:ext>
     </p:extLst>
   </p:cSld>
@@ -12893,10 +13947,10 @@
       </p:grpSpPr>
       <p:sp>
         <p:nvSpPr>
-          <p:cNvPr id="11" name="slide-title">
-            <a:extLst xmlns:a="http://schemas.openxmlformats.org/drawingml/2006/main">
-              <a:ext uri="{FF2B5EF4-FFF2-40B4-BE49-F238E27FC236}">
-                <a16:creationId xmlns:a16="http://schemas.microsoft.com/office/drawing/2014/main" id="{A01586AA-D8B8-4775-9056-3894BAE4186B}"/>
+          <p:cNvPr id="13" name="slide-title">
+            <a:extLst xmlns:a="http://schemas.openxmlformats.org/drawingml/2006/main">
+              <a:ext uri="{FF2B5EF4-FFF2-40B4-BE49-F238E27FC236}">
+                <a16:creationId xmlns:a16="http://schemas.microsoft.com/office/drawing/2014/main" id="{CBD7DD6B-E5C9-46B2-84E8-411309582BA2}"/>
               </a:ext>
             </a:extLst>
           </p:cNvPr>
@@ -12947,7 +14001,7 @@
           <p:cNvPr id="2" name="slide-subtitle">
             <a:extLst xmlns:a="http://schemas.openxmlformats.org/drawingml/2006/main">
               <a:ext uri="{FF2B5EF4-FFF2-40B4-BE49-F238E27FC236}">
-                <a16:creationId xmlns:a16="http://schemas.microsoft.com/office/drawing/2014/main" id="{A269241A-5854-412E-AA05-95B68F1B9329}"/>
+                <a16:creationId xmlns:a16="http://schemas.microsoft.com/office/drawing/2014/main" id="{BDABF4A3-E3A2-4235-9F5C-DAD02502993F}"/>
               </a:ext>
             </a:extLst>
           </p:cNvPr>
@@ -12998,7 +14052,7 @@
           <p:cNvPr id="3" name="bullets">
             <a:extLst xmlns:a="http://schemas.openxmlformats.org/drawingml/2006/main">
               <a:ext uri="{FF2B5EF4-FFF2-40B4-BE49-F238E27FC236}">
-                <a16:creationId xmlns:a16="http://schemas.microsoft.com/office/drawing/2014/main" id="{B79D76C0-0E6E-4C2C-BF62-66A0A1A0C43B}"/>
+                <a16:creationId xmlns:a16="http://schemas.microsoft.com/office/drawing/2014/main" id="{9A2F35F4-A4FE-4F37-B807-D273719CE8FA}"/>
               </a:ext>
             </a:extLst>
           </p:cNvPr>
@@ -13085,7 +14139,7 @@
           <p:cNvPr id="4" name="ambient-glow">
             <a:extLst xmlns:a="http://schemas.openxmlformats.org/drawingml/2006/main">
               <a:ext uri="{FF2B5EF4-FFF2-40B4-BE49-F238E27FC236}">
-                <a16:creationId xmlns:a16="http://schemas.microsoft.com/office/drawing/2014/main" id="{BD3072DB-8228-42FC-B5C1-7B73FC08B0C4}"/>
+                <a16:creationId xmlns:a16="http://schemas.microsoft.com/office/drawing/2014/main" id="{0EFB6D1F-BDB1-41CA-9E33-7FC2215D8EA8}"/>
               </a:ext>
             </a:extLst>
           </p:cNvPr>
@@ -13122,7 +14176,7 @@
           <p:cNvPr id="5" name="ambient-core">
             <a:extLst xmlns:a="http://schemas.openxmlformats.org/drawingml/2006/main">
               <a:ext uri="{FF2B5EF4-FFF2-40B4-BE49-F238E27FC236}">
-                <a16:creationId xmlns:a16="http://schemas.microsoft.com/office/drawing/2014/main" id="{CB760B36-AA11-48F6-B579-5D0D42814A69}"/>
+                <a16:creationId xmlns:a16="http://schemas.microsoft.com/office/drawing/2014/main" id="{4907D197-4EDB-424D-9F52-BEEF8DB88545}"/>
               </a:ext>
             </a:extLst>
           </p:cNvPr>
@@ -13159,7 +14213,7 @@
           <p:cNvPr id="6" name="section-number">
             <a:extLst xmlns:a="http://schemas.openxmlformats.org/drawingml/2006/main">
               <a:ext uri="{FF2B5EF4-FFF2-40B4-BE49-F238E27FC236}">
-                <a16:creationId xmlns:a16="http://schemas.microsoft.com/office/drawing/2014/main" id="{8F797759-ADE8-495E-B260-629654C4C5E4}"/>
+                <a16:creationId xmlns:a16="http://schemas.microsoft.com/office/drawing/2014/main" id="{B7E5A93D-C4FB-4332-BAA8-4343282FA156}"/>
               </a:ext>
             </a:extLst>
           </p:cNvPr>
@@ -13210,7 +14264,7 @@
           <p:cNvPr id="7" name="eyebrow">
             <a:extLst xmlns:a="http://schemas.openxmlformats.org/drawingml/2006/main">
               <a:ext uri="{FF2B5EF4-FFF2-40B4-BE49-F238E27FC236}">
-                <a16:creationId xmlns:a16="http://schemas.microsoft.com/office/drawing/2014/main" id="{265F9007-C206-4F33-A76D-6F9EDEFF9CAA}"/>
+                <a16:creationId xmlns:a16="http://schemas.microsoft.com/office/drawing/2014/main" id="{C0D7C467-E0FC-4094-ABDC-B34EAFF1095D}"/>
               </a:ext>
             </a:extLst>
           </p:cNvPr>
@@ -13258,10 +14312,69 @@
       </p:sp>
       <p:sp>
         <p:nvSpPr>
-          <p:cNvPr id="8" name="footer-rule">
-            <a:extLst xmlns:a="http://schemas.openxmlformats.org/drawingml/2006/main">
-              <a:ext uri="{FF2B5EF4-FFF2-40B4-BE49-F238E27FC236}">
-                <a16:creationId xmlns:a16="http://schemas.microsoft.com/office/drawing/2014/main" id="{38073427-92A7-4426-BD2A-1166F8819E18}"/>
+          <p:cNvPr id="8" name="rescue-point-logo-background">
+            <a:extLst xmlns:a="http://schemas.openxmlformats.org/drawingml/2006/main">
+              <a:ext uri="{FF2B5EF4-FFF2-40B4-BE49-F238E27FC236}">
+                <a16:creationId xmlns:a16="http://schemas.microsoft.com/office/drawing/2014/main" id="{912310E0-2157-47AD-95F0-FD5690F74604}"/>
+              </a:ext>
+            </a:extLst>
+          </p:cNvPr>
+          <p:cNvSpPr>
+            <a:spLocks xmlns:a="http://schemas.openxmlformats.org/drawingml/2006/main" noGrp="1"/>
+          </p:cNvSpPr>
+          <p:nvPr/>
+        </p:nvSpPr>
+        <p:spPr>
+          <a:xfrm xmlns:a="http://schemas.openxmlformats.org/drawingml/2006/main">
+            <a:off x="9772650" y="133350"/>
+            <a:ext cx="1733550" cy="457200"/>
+          </a:xfrm>
+          <a:prstGeom xmlns:a="http://schemas.openxmlformats.org/drawingml/2006/main" prst="roundRect">
+            <a:avLst>
+              <a:gd name="adj" fmla="val 16667"/>
+            </a:avLst>
+          </a:prstGeom>
+          <a:solidFill xmlns:a="http://schemas.openxmlformats.org/drawingml/2006/main">
+            <a:srgbClr val="06142E"/>
+          </a:solidFill>
+          <a:ln xmlns:a="http://schemas.openxmlformats.org/drawingml/2006/main" w="9525">
+            <a:solidFill>
+              <a:srgbClr val="1EC5FF">
+                <a:alpha val="33333"/>
+              </a:srgbClr>
+            </a:solidFill>
+            <a:prstDash val="solid"/>
+          </a:ln>
+        </p:spPr>
+      </p:sp>
+      <p:pic>
+        <p:nvPicPr>
+          <p:cNvPr id="23" name="" descr="Figura oficial da documentação dbt usada para explicar: Três tratamentos, uma pergunta — Tudo permanece igual, exceto a interface oferecida ao agente.."/>
+          <p:cNvPicPr>
+            <a:picLocks xmlns:a="http://schemas.openxmlformats.org/drawingml/2006/main" noChangeAspect="1"/>
+          </p:cNvPicPr>
+          <p:nvPr/>
+        </p:nvPicPr>
+        <p:blipFill>
+          <a:blip xmlns:r="http://schemas.openxmlformats.org/officeDocument/2006/relationships" xmlns:a="http://schemas.openxmlformats.org/drawingml/2006/main" r:embed="R415e2608a1ff4f09"/>
+          <a:stretch xmlns:a="http://schemas.openxmlformats.org/drawingml/2006/main"/>
+        </p:blipFill>
+        <p:spPr>
+          <a:xfrm xmlns:a="http://schemas.openxmlformats.org/drawingml/2006/main">
+            <a:off x="9893718" y="209550"/>
+            <a:ext cx="1491414" cy="323850"/>
+          </a:xfrm>
+          <a:prstGeom xmlns:a="http://schemas.openxmlformats.org/drawingml/2006/main" prst="rect">
+            <a:avLst/>
+          </a:prstGeom>
+        </p:spPr>
+      </p:pic>
+      <p:sp>
+        <p:nvSpPr>
+          <p:cNvPr id="10" name="footer-rule">
+            <a:extLst xmlns:a="http://schemas.openxmlformats.org/drawingml/2006/main">
+              <a:ext uri="{FF2B5EF4-FFF2-40B4-BE49-F238E27FC236}">
+                <a16:creationId xmlns:a16="http://schemas.microsoft.com/office/drawing/2014/main" id="{BA014AA1-8F01-44E1-8C62-294E3AC8234E}"/>
               </a:ext>
             </a:extLst>
           </p:cNvPr>
@@ -13291,10 +14404,10 @@
       </p:sp>
       <p:sp>
         <p:nvSpPr>
-          <p:cNvPr id="9" name="footer">
-            <a:extLst xmlns:a="http://schemas.openxmlformats.org/drawingml/2006/main">
-              <a:ext uri="{FF2B5EF4-FFF2-40B4-BE49-F238E27FC236}">
-                <a16:creationId xmlns:a16="http://schemas.microsoft.com/office/drawing/2014/main" id="{E44C47C4-B209-43BC-A21E-25AED9739FCC}"/>
+          <p:cNvPr id="11" name="footer">
+            <a:extLst xmlns:a="http://schemas.openxmlformats.org/drawingml/2006/main">
+              <a:ext uri="{FF2B5EF4-FFF2-40B4-BE49-F238E27FC236}">
+                <a16:creationId xmlns:a16="http://schemas.microsoft.com/office/drawing/2014/main" id="{83DB5C6F-4C32-4914-8D90-83D02506D49E}"/>
               </a:ext>
             </a:extLst>
           </p:cNvPr>
@@ -13346,10 +14459,10 @@
       </p:sp>
       <p:sp>
         <p:nvSpPr>
-          <p:cNvPr id="10" name="page-number">
-            <a:extLst xmlns:a="http://schemas.openxmlformats.org/drawingml/2006/main">
-              <a:ext uri="{FF2B5EF4-FFF2-40B4-BE49-F238E27FC236}">
-                <a16:creationId xmlns:a16="http://schemas.microsoft.com/office/drawing/2014/main" id="{3CB7FA8D-B3FB-4424-8993-FCD9DC0868E2}"/>
+          <p:cNvPr id="12" name="page-number">
+            <a:extLst xmlns:a="http://schemas.openxmlformats.org/drawingml/2006/main">
+              <a:ext uri="{FF2B5EF4-FFF2-40B4-BE49-F238E27FC236}">
+                <a16:creationId xmlns:a16="http://schemas.microsoft.com/office/drawing/2014/main" id="{61B6389D-91BF-4E29-BF1C-F0DE4524DD01}"/>
               </a:ext>
             </a:extLst>
           </p:cNvPr>
@@ -13402,7 +14515,7 @@
     </p:spTree>
     <p:extLst>
       <p:ext uri="{BB962C8B-B14F-4D97-AF65-F5344CB8AC3E}">
-        <p14:creationId xmlns:p14="http://schemas.microsoft.com/office/powerpoint/2010/main" val="286195960"/>
+        <p14:creationId xmlns:p14="http://schemas.microsoft.com/office/powerpoint/2010/main" val="1214778308"/>
       </p:ext>
     </p:extLst>
   </p:cSld>
@@ -13430,10 +14543,10 @@
       </p:grpSpPr>
       <p:sp>
         <p:nvSpPr>
-          <p:cNvPr id="11" name="slide-title">
-            <a:extLst xmlns:a="http://schemas.openxmlformats.org/drawingml/2006/main">
-              <a:ext uri="{FF2B5EF4-FFF2-40B4-BE49-F238E27FC236}">
-                <a16:creationId xmlns:a16="http://schemas.microsoft.com/office/drawing/2014/main" id="{1C174756-928A-4B71-8DBA-54396C47F14A}"/>
+          <p:cNvPr id="13" name="slide-title">
+            <a:extLst xmlns:a="http://schemas.openxmlformats.org/drawingml/2006/main">
+              <a:ext uri="{FF2B5EF4-FFF2-40B4-BE49-F238E27FC236}">
+                <a16:creationId xmlns:a16="http://schemas.microsoft.com/office/drawing/2014/main" id="{B8EA2B69-5826-42C9-BB1E-1263357F32B6}"/>
               </a:ext>
             </a:extLst>
           </p:cNvPr>
@@ -13484,7 +14597,7 @@
           <p:cNvPr id="2" name="slide-subtitle">
             <a:extLst xmlns:a="http://schemas.openxmlformats.org/drawingml/2006/main">
               <a:ext uri="{FF2B5EF4-FFF2-40B4-BE49-F238E27FC236}">
-                <a16:creationId xmlns:a16="http://schemas.microsoft.com/office/drawing/2014/main" id="{666437D0-2090-4C66-BB97-835FBD7E1348}"/>
+                <a16:creationId xmlns:a16="http://schemas.microsoft.com/office/drawing/2014/main" id="{41B93535-47B0-4D10-9F04-648DD9B727D5}"/>
               </a:ext>
             </a:extLst>
           </p:cNvPr>
@@ -13535,7 +14648,7 @@
           <p:cNvPr id="3" name="bullets">
             <a:extLst xmlns:a="http://schemas.openxmlformats.org/drawingml/2006/main">
               <a:ext uri="{FF2B5EF4-FFF2-40B4-BE49-F238E27FC236}">
-                <a16:creationId xmlns:a16="http://schemas.microsoft.com/office/drawing/2014/main" id="{9002407E-E3DC-44E6-8F27-6B5A7FACC759}"/>
+                <a16:creationId xmlns:a16="http://schemas.microsoft.com/office/drawing/2014/main" id="{FAD61805-076C-41C3-BEBE-94A7CBBFDD9C}"/>
               </a:ext>
             </a:extLst>
           </p:cNvPr>
@@ -13622,7 +14735,7 @@
           <p:cNvPr id="4" name="ambient-glow">
             <a:extLst xmlns:a="http://schemas.openxmlformats.org/drawingml/2006/main">
               <a:ext uri="{FF2B5EF4-FFF2-40B4-BE49-F238E27FC236}">
-                <a16:creationId xmlns:a16="http://schemas.microsoft.com/office/drawing/2014/main" id="{ECD61FE0-840A-4000-A487-B8E5C8A2DB8D}"/>
+                <a16:creationId xmlns:a16="http://schemas.microsoft.com/office/drawing/2014/main" id="{EB5EB498-7CBE-4C17-AFF2-7FCF6EAE8535}"/>
               </a:ext>
             </a:extLst>
           </p:cNvPr>
@@ -13659,7 +14772,7 @@
           <p:cNvPr id="5" name="ambient-core">
             <a:extLst xmlns:a="http://schemas.openxmlformats.org/drawingml/2006/main">
               <a:ext uri="{FF2B5EF4-FFF2-40B4-BE49-F238E27FC236}">
-                <a16:creationId xmlns:a16="http://schemas.microsoft.com/office/drawing/2014/main" id="{1A9C8E1B-5BD3-4AD0-A711-790E1C848327}"/>
+                <a16:creationId xmlns:a16="http://schemas.microsoft.com/office/drawing/2014/main" id="{F7EEAB35-EED2-4514-ABD3-9A70D8497F23}"/>
               </a:ext>
             </a:extLst>
           </p:cNvPr>
@@ -13696,7 +14809,7 @@
           <p:cNvPr id="6" name="section-number">
             <a:extLst xmlns:a="http://schemas.openxmlformats.org/drawingml/2006/main">
               <a:ext uri="{FF2B5EF4-FFF2-40B4-BE49-F238E27FC236}">
-                <a16:creationId xmlns:a16="http://schemas.microsoft.com/office/drawing/2014/main" id="{4DBBC0BC-D634-496C-825B-34AD0961EA34}"/>
+                <a16:creationId xmlns:a16="http://schemas.microsoft.com/office/drawing/2014/main" id="{290B8B4D-1BB7-4AF4-827F-CD7BD71720A2}"/>
               </a:ext>
             </a:extLst>
           </p:cNvPr>
@@ -13747,7 +14860,7 @@
           <p:cNvPr id="7" name="eyebrow">
             <a:extLst xmlns:a="http://schemas.openxmlformats.org/drawingml/2006/main">
               <a:ext uri="{FF2B5EF4-FFF2-40B4-BE49-F238E27FC236}">
-                <a16:creationId xmlns:a16="http://schemas.microsoft.com/office/drawing/2014/main" id="{59C3C81E-3C43-4A11-94BD-FAC4591BE677}"/>
+                <a16:creationId xmlns:a16="http://schemas.microsoft.com/office/drawing/2014/main" id="{D4CB5716-03EA-4F38-9401-BCFED7343195}"/>
               </a:ext>
             </a:extLst>
           </p:cNvPr>
@@ -13795,10 +14908,69 @@
       </p:sp>
       <p:sp>
         <p:nvSpPr>
-          <p:cNvPr id="8" name="footer-rule">
-            <a:extLst xmlns:a="http://schemas.openxmlformats.org/drawingml/2006/main">
-              <a:ext uri="{FF2B5EF4-FFF2-40B4-BE49-F238E27FC236}">
-                <a16:creationId xmlns:a16="http://schemas.microsoft.com/office/drawing/2014/main" id="{F7D79595-075F-43F4-9E06-7EFACDCC5ECE}"/>
+          <p:cNvPr id="8" name="rescue-point-logo-background">
+            <a:extLst xmlns:a="http://schemas.openxmlformats.org/drawingml/2006/main">
+              <a:ext uri="{FF2B5EF4-FFF2-40B4-BE49-F238E27FC236}">
+                <a16:creationId xmlns:a16="http://schemas.microsoft.com/office/drawing/2014/main" id="{E3EECC7E-8837-468D-A7C7-2510A77EE588}"/>
+              </a:ext>
+            </a:extLst>
+          </p:cNvPr>
+          <p:cNvSpPr>
+            <a:spLocks xmlns:a="http://schemas.openxmlformats.org/drawingml/2006/main" noGrp="1"/>
+          </p:cNvSpPr>
+          <p:nvPr/>
+        </p:nvSpPr>
+        <p:spPr>
+          <a:xfrm xmlns:a="http://schemas.openxmlformats.org/drawingml/2006/main">
+            <a:off x="9772650" y="133350"/>
+            <a:ext cx="1733550" cy="457200"/>
+          </a:xfrm>
+          <a:prstGeom xmlns:a="http://schemas.openxmlformats.org/drawingml/2006/main" prst="roundRect">
+            <a:avLst>
+              <a:gd name="adj" fmla="val 16667"/>
+            </a:avLst>
+          </a:prstGeom>
+          <a:solidFill xmlns:a="http://schemas.openxmlformats.org/drawingml/2006/main">
+            <a:srgbClr val="06142E"/>
+          </a:solidFill>
+          <a:ln xmlns:a="http://schemas.openxmlformats.org/drawingml/2006/main" w="9525">
+            <a:solidFill>
+              <a:srgbClr val="1EC5FF">
+                <a:alpha val="33333"/>
+              </a:srgbClr>
+            </a:solidFill>
+            <a:prstDash val="solid"/>
+          </a:ln>
+        </p:spPr>
+      </p:sp>
+      <p:pic>
+        <p:nvPicPr>
+          <p:cNvPr id="23" name="" descr="Figura oficial da documentação dbt usada para explicar: Ground truth vem antes do LLM — O pipeline calcula as respostas esperadas sem depender do modelo.."/>
+          <p:cNvPicPr>
+            <a:picLocks xmlns:a="http://schemas.openxmlformats.org/drawingml/2006/main" noChangeAspect="1"/>
+          </p:cNvPicPr>
+          <p:nvPr/>
+        </p:nvPicPr>
+        <p:blipFill>
+          <a:blip xmlns:r="http://schemas.openxmlformats.org/officeDocument/2006/relationships" xmlns:a="http://schemas.openxmlformats.org/drawingml/2006/main" r:embed="R6d9439b0fd024811"/>
+          <a:stretch xmlns:a="http://schemas.openxmlformats.org/drawingml/2006/main"/>
+        </p:blipFill>
+        <p:spPr>
+          <a:xfrm xmlns:a="http://schemas.openxmlformats.org/drawingml/2006/main">
+            <a:off x="9893718" y="209550"/>
+            <a:ext cx="1491414" cy="323850"/>
+          </a:xfrm>
+          <a:prstGeom xmlns:a="http://schemas.openxmlformats.org/drawingml/2006/main" prst="rect">
+            <a:avLst/>
+          </a:prstGeom>
+        </p:spPr>
+      </p:pic>
+      <p:sp>
+        <p:nvSpPr>
+          <p:cNvPr id="10" name="footer-rule">
+            <a:extLst xmlns:a="http://schemas.openxmlformats.org/drawingml/2006/main">
+              <a:ext uri="{FF2B5EF4-FFF2-40B4-BE49-F238E27FC236}">
+                <a16:creationId xmlns:a16="http://schemas.microsoft.com/office/drawing/2014/main" id="{BFB39166-A70B-4778-8D0A-8DF2165B092C}"/>
               </a:ext>
             </a:extLst>
           </p:cNvPr>
@@ -13828,10 +15000,10 @@
       </p:sp>
       <p:sp>
         <p:nvSpPr>
-          <p:cNvPr id="9" name="footer">
-            <a:extLst xmlns:a="http://schemas.openxmlformats.org/drawingml/2006/main">
-              <a:ext uri="{FF2B5EF4-FFF2-40B4-BE49-F238E27FC236}">
-                <a16:creationId xmlns:a16="http://schemas.microsoft.com/office/drawing/2014/main" id="{975E1E81-928F-4F8C-BBF9-1B0983AAB109}"/>
+          <p:cNvPr id="11" name="footer">
+            <a:extLst xmlns:a="http://schemas.openxmlformats.org/drawingml/2006/main">
+              <a:ext uri="{FF2B5EF4-FFF2-40B4-BE49-F238E27FC236}">
+                <a16:creationId xmlns:a16="http://schemas.microsoft.com/office/drawing/2014/main" id="{178A84D8-D47F-4E8D-BC3C-80F6314A32D6}"/>
               </a:ext>
             </a:extLst>
           </p:cNvPr>
@@ -13883,10 +15055,10 @@
       </p:sp>
       <p:sp>
         <p:nvSpPr>
-          <p:cNvPr id="10" name="page-number">
-            <a:extLst xmlns:a="http://schemas.openxmlformats.org/drawingml/2006/main">
-              <a:ext uri="{FF2B5EF4-FFF2-40B4-BE49-F238E27FC236}">
-                <a16:creationId xmlns:a16="http://schemas.microsoft.com/office/drawing/2014/main" id="{2B020303-239C-4A53-B03D-317D23F3C5B5}"/>
+          <p:cNvPr id="12" name="page-number">
+            <a:extLst xmlns:a="http://schemas.openxmlformats.org/drawingml/2006/main">
+              <a:ext uri="{FF2B5EF4-FFF2-40B4-BE49-F238E27FC236}">
+                <a16:creationId xmlns:a16="http://schemas.microsoft.com/office/drawing/2014/main" id="{C99DD305-0C8F-420C-B1B0-6BE8F83FEAC5}"/>
               </a:ext>
             </a:extLst>
           </p:cNvPr>
@@ -13939,7 +15111,7 @@
     </p:spTree>
     <p:extLst>
       <p:ext uri="{BB962C8B-B14F-4D97-AF65-F5344CB8AC3E}">
-        <p14:creationId xmlns:p14="http://schemas.microsoft.com/office/powerpoint/2010/main" val="2133685789"/>
+        <p14:creationId xmlns:p14="http://schemas.microsoft.com/office/powerpoint/2010/main" val="680681638"/>
       </p:ext>
     </p:extLst>
   </p:cSld>
@@ -13975,10 +15147,10 @@
       </p:grpSpPr>
       <p:sp>
         <p:nvSpPr>
-          <p:cNvPr id="11" name="slide-title">
-            <a:extLst xmlns:a="http://schemas.openxmlformats.org/drawingml/2006/main">
-              <a:ext uri="{FF2B5EF4-FFF2-40B4-BE49-F238E27FC236}">
-                <a16:creationId xmlns:a16="http://schemas.microsoft.com/office/drawing/2014/main" id="{A28BE5D3-79A2-4FC4-952E-81FBBBC70764}"/>
+          <p:cNvPr id="13" name="slide-title">
+            <a:extLst xmlns:a="http://schemas.openxmlformats.org/drawingml/2006/main">
+              <a:ext uri="{FF2B5EF4-FFF2-40B4-BE49-F238E27FC236}">
+                <a16:creationId xmlns:a16="http://schemas.microsoft.com/office/drawing/2014/main" id="{1B85BB18-BF5C-4B46-AA41-0BCC39C75B74}"/>
               </a:ext>
             </a:extLst>
           </p:cNvPr>
@@ -14029,7 +15201,7 @@
           <p:cNvPr id="2" name="flow-1">
             <a:extLst xmlns:a="http://schemas.openxmlformats.org/drawingml/2006/main">
               <a:ext uri="{FF2B5EF4-FFF2-40B4-BE49-F238E27FC236}">
-                <a16:creationId xmlns:a16="http://schemas.microsoft.com/office/drawing/2014/main" id="{3B0FDBE7-403E-4A4C-87E4-58319E646DE4}"/>
+                <a16:creationId xmlns:a16="http://schemas.microsoft.com/office/drawing/2014/main" id="{122366AD-6971-4247-B7C2-1922FF16BC04}"/>
               </a:ext>
             </a:extLst>
           </p:cNvPr>
@@ -14086,7 +15258,7 @@
           <p:cNvPr id="3" name="flow-2">
             <a:extLst xmlns:a="http://schemas.openxmlformats.org/drawingml/2006/main">
               <a:ext uri="{FF2B5EF4-FFF2-40B4-BE49-F238E27FC236}">
-                <a16:creationId xmlns:a16="http://schemas.microsoft.com/office/drawing/2014/main" id="{D9CA30AA-B811-492E-BBE8-744EB6BA58B0}"/>
+                <a16:creationId xmlns:a16="http://schemas.microsoft.com/office/drawing/2014/main" id="{772CFB6F-4C86-41C8-8836-BB1CA7FEDFA7}"/>
               </a:ext>
             </a:extLst>
           </p:cNvPr>
@@ -14143,7 +15315,7 @@
           <p:cNvPr id="4" name="flow-3">
             <a:extLst xmlns:a="http://schemas.openxmlformats.org/drawingml/2006/main">
               <a:ext uri="{FF2B5EF4-FFF2-40B4-BE49-F238E27FC236}">
-                <a16:creationId xmlns:a16="http://schemas.microsoft.com/office/drawing/2014/main" id="{7B8BB27E-3C0D-4CF3-8728-B91D23B7E890}"/>
+                <a16:creationId xmlns:a16="http://schemas.microsoft.com/office/drawing/2014/main" id="{4907A13B-1453-4E2D-A336-4CA3AF7CDAD7}"/>
               </a:ext>
             </a:extLst>
           </p:cNvPr>
@@ -14197,7 +15369,7 @@
       </p:sp>
       <p:cxnSp>
         <p:nvCxnSpPr>
-          <p:cNvPr id="21" name=""/>
+          <p:cNvPr id="24" name=""/>
           <p:cNvCxnSpPr>
             <a:stCxn xmlns:a="http://schemas.openxmlformats.org/drawingml/2006/main" id="2" idx="3"/>
             <a:endCxn xmlns:a="http://schemas.openxmlformats.org/drawingml/2006/main" id="3" idx="1"/>
@@ -14223,7 +15395,7 @@
       </p:cxnSp>
       <p:cxnSp>
         <p:nvCxnSpPr>
-          <p:cNvPr id="22" name=""/>
+          <p:cNvPr id="25" name=""/>
           <p:cNvCxnSpPr>
             <a:stCxn xmlns:a="http://schemas.openxmlformats.org/drawingml/2006/main" id="3" idx="3"/>
             <a:endCxn xmlns:a="http://schemas.openxmlformats.org/drawingml/2006/main" id="4" idx="1"/>
@@ -14252,7 +15424,7 @@
           <p:cNvPr id="7" name="eyebrow">
             <a:extLst xmlns:a="http://schemas.openxmlformats.org/drawingml/2006/main">
               <a:ext uri="{FF2B5EF4-FFF2-40B4-BE49-F238E27FC236}">
-                <a16:creationId xmlns:a16="http://schemas.microsoft.com/office/drawing/2014/main" id="{BC4BE114-4D15-4B5E-8E20-F523E9CC163A}"/>
+                <a16:creationId xmlns:a16="http://schemas.microsoft.com/office/drawing/2014/main" id="{4B4F6598-0436-431B-924E-838C28A8FD71}"/>
               </a:ext>
             </a:extLst>
           </p:cNvPr>
@@ -14300,10 +15472,69 @@
       </p:sp>
       <p:sp>
         <p:nvSpPr>
-          <p:cNvPr id="8" name="footer-rule">
-            <a:extLst xmlns:a="http://schemas.openxmlformats.org/drawingml/2006/main">
-              <a:ext uri="{FF2B5EF4-FFF2-40B4-BE49-F238E27FC236}">
-                <a16:creationId xmlns:a16="http://schemas.microsoft.com/office/drawing/2014/main" id="{B7DB97C5-0419-439B-AC13-D19D650BF477}"/>
+          <p:cNvPr id="8" name="rescue-point-logo-background">
+            <a:extLst xmlns:a="http://schemas.openxmlformats.org/drawingml/2006/main">
+              <a:ext uri="{FF2B5EF4-FFF2-40B4-BE49-F238E27FC236}">
+                <a16:creationId xmlns:a16="http://schemas.microsoft.com/office/drawing/2014/main" id="{6D913C10-8BCE-4C0A-A2FF-79B98C69BCDD}"/>
+              </a:ext>
+            </a:extLst>
+          </p:cNvPr>
+          <p:cNvSpPr>
+            <a:spLocks xmlns:a="http://schemas.openxmlformats.org/drawingml/2006/main" noGrp="1"/>
+          </p:cNvSpPr>
+          <p:nvPr/>
+        </p:nvSpPr>
+        <p:spPr>
+          <a:xfrm xmlns:a="http://schemas.openxmlformats.org/drawingml/2006/main">
+            <a:off x="9772650" y="133350"/>
+            <a:ext cx="1733550" cy="457200"/>
+          </a:xfrm>
+          <a:prstGeom xmlns:a="http://schemas.openxmlformats.org/drawingml/2006/main" prst="roundRect">
+            <a:avLst>
+              <a:gd name="adj" fmla="val 16667"/>
+            </a:avLst>
+          </a:prstGeom>
+          <a:solidFill xmlns:a="http://schemas.openxmlformats.org/drawingml/2006/main">
+            <a:srgbClr val="06142E"/>
+          </a:solidFill>
+          <a:ln xmlns:a="http://schemas.openxmlformats.org/drawingml/2006/main" w="9525">
+            <a:solidFill>
+              <a:srgbClr val="1EC5FF">
+                <a:alpha val="33333"/>
+              </a:srgbClr>
+            </a:solidFill>
+            <a:prstDash val="solid"/>
+          </a:ln>
+        </p:spPr>
+      </p:sp>
+      <p:pic>
+        <p:nvPicPr>
+          <p:cNvPr id="28" name="" descr="Figura oficial da documentação dbt usada para explicar: Ground truth vem antes do LLM — Pipeline."/>
+          <p:cNvPicPr>
+            <a:picLocks xmlns:a="http://schemas.openxmlformats.org/drawingml/2006/main" noChangeAspect="1"/>
+          </p:cNvPicPr>
+          <p:nvPr/>
+        </p:nvPicPr>
+        <p:blipFill>
+          <a:blip xmlns:r="http://schemas.openxmlformats.org/officeDocument/2006/relationships" xmlns:a="http://schemas.openxmlformats.org/drawingml/2006/main" r:embed="R87631b3d6af84765"/>
+          <a:stretch xmlns:a="http://schemas.openxmlformats.org/drawingml/2006/main"/>
+        </p:blipFill>
+        <p:spPr>
+          <a:xfrm xmlns:a="http://schemas.openxmlformats.org/drawingml/2006/main">
+            <a:off x="9893718" y="209550"/>
+            <a:ext cx="1491414" cy="323850"/>
+          </a:xfrm>
+          <a:prstGeom xmlns:a="http://schemas.openxmlformats.org/drawingml/2006/main" prst="rect">
+            <a:avLst/>
+          </a:prstGeom>
+        </p:spPr>
+      </p:pic>
+      <p:sp>
+        <p:nvSpPr>
+          <p:cNvPr id="10" name="footer-rule">
+            <a:extLst xmlns:a="http://schemas.openxmlformats.org/drawingml/2006/main">
+              <a:ext uri="{FF2B5EF4-FFF2-40B4-BE49-F238E27FC236}">
+                <a16:creationId xmlns:a16="http://schemas.microsoft.com/office/drawing/2014/main" id="{6E9A6A6C-43EA-40C4-8F34-111DE795A221}"/>
               </a:ext>
             </a:extLst>
           </p:cNvPr>
@@ -14333,10 +15564,10 @@
       </p:sp>
       <p:sp>
         <p:nvSpPr>
-          <p:cNvPr id="9" name="footer">
-            <a:extLst xmlns:a="http://schemas.openxmlformats.org/drawingml/2006/main">
-              <a:ext uri="{FF2B5EF4-FFF2-40B4-BE49-F238E27FC236}">
-                <a16:creationId xmlns:a16="http://schemas.microsoft.com/office/drawing/2014/main" id="{9C791264-369D-43FF-83C5-95618E6EFEC1}"/>
+          <p:cNvPr id="11" name="footer">
+            <a:extLst xmlns:a="http://schemas.openxmlformats.org/drawingml/2006/main">
+              <a:ext uri="{FF2B5EF4-FFF2-40B4-BE49-F238E27FC236}">
+                <a16:creationId xmlns:a16="http://schemas.microsoft.com/office/drawing/2014/main" id="{8C4D1983-4003-4754-92E3-3143A96ABC8C}"/>
               </a:ext>
             </a:extLst>
           </p:cNvPr>
@@ -14388,10 +15619,10 @@
       </p:sp>
       <p:sp>
         <p:nvSpPr>
-          <p:cNvPr id="10" name="page-number">
-            <a:extLst xmlns:a="http://schemas.openxmlformats.org/drawingml/2006/main">
-              <a:ext uri="{FF2B5EF4-FFF2-40B4-BE49-F238E27FC236}">
-                <a16:creationId xmlns:a16="http://schemas.microsoft.com/office/drawing/2014/main" id="{49C4534D-A837-4346-A87E-78CC8F4F0837}"/>
+          <p:cNvPr id="12" name="page-number">
+            <a:extLst xmlns:a="http://schemas.openxmlformats.org/drawingml/2006/main">
+              <a:ext uri="{FF2B5EF4-FFF2-40B4-BE49-F238E27FC236}">
+                <a16:creationId xmlns:a16="http://schemas.microsoft.com/office/drawing/2014/main" id="{8AAF633F-B046-4953-A1FA-3EB36C2B3B42}"/>
               </a:ext>
             </a:extLst>
           </p:cNvPr>
@@ -14444,7 +15675,7 @@
     </p:spTree>
     <p:extLst>
       <p:ext uri="{BB962C8B-B14F-4D97-AF65-F5344CB8AC3E}">
-        <p14:creationId xmlns:p14="http://schemas.microsoft.com/office/powerpoint/2010/main" val="88068566"/>
+        <p14:creationId xmlns:p14="http://schemas.microsoft.com/office/powerpoint/2010/main" val="1445144685"/>
       </p:ext>
     </p:extLst>
   </p:cSld>
@@ -14480,10 +15711,10 @@
       </p:grpSpPr>
       <p:sp>
         <p:nvSpPr>
-          <p:cNvPr id="11" name="slide-title">
-            <a:extLst xmlns:a="http://schemas.openxmlformats.org/drawingml/2006/main">
-              <a:ext uri="{FF2B5EF4-FFF2-40B4-BE49-F238E27FC236}">
-                <a16:creationId xmlns:a16="http://schemas.microsoft.com/office/drawing/2014/main" id="{7FF5A8A3-AB16-4FB4-8038-CFF5B3DEF58D}"/>
+          <p:cNvPr id="13" name="slide-title">
+            <a:extLst xmlns:a="http://schemas.openxmlformats.org/drawingml/2006/main">
+              <a:ext uri="{FF2B5EF4-FFF2-40B4-BE49-F238E27FC236}">
+                <a16:creationId xmlns:a16="http://schemas.microsoft.com/office/drawing/2014/main" id="{2B21091C-9686-4820-9794-7201208FFFF3}"/>
               </a:ext>
             </a:extLst>
           </p:cNvPr>
@@ -14534,7 +15765,7 @@
           <p:cNvPr id="2" name="slide-subtitle">
             <a:extLst xmlns:a="http://schemas.openxmlformats.org/drawingml/2006/main">
               <a:ext uri="{FF2B5EF4-FFF2-40B4-BE49-F238E27FC236}">
-                <a16:creationId xmlns:a16="http://schemas.microsoft.com/office/drawing/2014/main" id="{E6698D04-DCF7-45D7-98B7-FDE0536B5511}"/>
+                <a16:creationId xmlns:a16="http://schemas.microsoft.com/office/drawing/2014/main" id="{EB7FF071-5ACE-483F-9BE9-535F772699B3}"/>
               </a:ext>
             </a:extLst>
           </p:cNvPr>
@@ -14585,7 +15816,7 @@
           <p:cNvPr id="3" name="bullets">
             <a:extLst xmlns:a="http://schemas.openxmlformats.org/drawingml/2006/main">
               <a:ext uri="{FF2B5EF4-FFF2-40B4-BE49-F238E27FC236}">
-                <a16:creationId xmlns:a16="http://schemas.microsoft.com/office/drawing/2014/main" id="{D6E50591-E878-471E-AA21-1A19CAA3E021}"/>
+                <a16:creationId xmlns:a16="http://schemas.microsoft.com/office/drawing/2014/main" id="{BC9A85E9-350A-4BE2-940C-DE93D8808B5C}"/>
               </a:ext>
             </a:extLst>
           </p:cNvPr>
@@ -14690,7 +15921,7 @@
           <p:cNvPr id="4" name="ambient-glow">
             <a:extLst xmlns:a="http://schemas.openxmlformats.org/drawingml/2006/main">
               <a:ext uri="{FF2B5EF4-FFF2-40B4-BE49-F238E27FC236}">
-                <a16:creationId xmlns:a16="http://schemas.microsoft.com/office/drawing/2014/main" id="{16DF29EB-889D-4685-9C28-853F6AC6FDDC}"/>
+                <a16:creationId xmlns:a16="http://schemas.microsoft.com/office/drawing/2014/main" id="{2553A123-C989-4946-A959-70B0E6E9A6A6}"/>
               </a:ext>
             </a:extLst>
           </p:cNvPr>
@@ -14727,7 +15958,7 @@
           <p:cNvPr id="5" name="ambient-core">
             <a:extLst xmlns:a="http://schemas.openxmlformats.org/drawingml/2006/main">
               <a:ext uri="{FF2B5EF4-FFF2-40B4-BE49-F238E27FC236}">
-                <a16:creationId xmlns:a16="http://schemas.microsoft.com/office/drawing/2014/main" id="{3DC7B156-1D23-43FF-A4C5-827EEBB9CA22}"/>
+                <a16:creationId xmlns:a16="http://schemas.microsoft.com/office/drawing/2014/main" id="{6926014C-98B5-4FDB-B81D-6B8A6A5F6711}"/>
               </a:ext>
             </a:extLst>
           </p:cNvPr>
@@ -14764,7 +15995,7 @@
           <p:cNvPr id="6" name="section-number">
             <a:extLst xmlns:a="http://schemas.openxmlformats.org/drawingml/2006/main">
               <a:ext uri="{FF2B5EF4-FFF2-40B4-BE49-F238E27FC236}">
-                <a16:creationId xmlns:a16="http://schemas.microsoft.com/office/drawing/2014/main" id="{0568DF72-99E2-437A-A78C-6553F4F76BD6}"/>
+                <a16:creationId xmlns:a16="http://schemas.microsoft.com/office/drawing/2014/main" id="{3798E0EE-4EC6-4C09-BD10-16E9C4E6FD6C}"/>
               </a:ext>
             </a:extLst>
           </p:cNvPr>
@@ -14815,7 +16046,7 @@
           <p:cNvPr id="7" name="eyebrow">
             <a:extLst xmlns:a="http://schemas.openxmlformats.org/drawingml/2006/main">
               <a:ext uri="{FF2B5EF4-FFF2-40B4-BE49-F238E27FC236}">
-                <a16:creationId xmlns:a16="http://schemas.microsoft.com/office/drawing/2014/main" id="{206F3E84-7860-4154-AF38-6AB812850629}"/>
+                <a16:creationId xmlns:a16="http://schemas.microsoft.com/office/drawing/2014/main" id="{9CB86B60-4F5E-472E-850B-895CB44D0992}"/>
               </a:ext>
             </a:extLst>
           </p:cNvPr>
@@ -14863,10 +16094,69 @@
       </p:sp>
       <p:sp>
         <p:nvSpPr>
-          <p:cNvPr id="8" name="footer-rule">
-            <a:extLst xmlns:a="http://schemas.openxmlformats.org/drawingml/2006/main">
-              <a:ext uri="{FF2B5EF4-FFF2-40B4-BE49-F238E27FC236}">
-                <a16:creationId xmlns:a16="http://schemas.microsoft.com/office/drawing/2014/main" id="{C0AF9E27-5744-4008-B104-D231EB263C45}"/>
+          <p:cNvPr id="8" name="rescue-point-logo-background">
+            <a:extLst xmlns:a="http://schemas.openxmlformats.org/drawingml/2006/main">
+              <a:ext uri="{FF2B5EF4-FFF2-40B4-BE49-F238E27FC236}">
+                <a16:creationId xmlns:a16="http://schemas.microsoft.com/office/drawing/2014/main" id="{06CE685D-6678-4B3E-9F75-5986A76046C5}"/>
+              </a:ext>
+            </a:extLst>
+          </p:cNvPr>
+          <p:cNvSpPr>
+            <a:spLocks xmlns:a="http://schemas.openxmlformats.org/drawingml/2006/main" noGrp="1"/>
+          </p:cNvSpPr>
+          <p:nvPr/>
+        </p:nvSpPr>
+        <p:spPr>
+          <a:xfrm xmlns:a="http://schemas.openxmlformats.org/drawingml/2006/main">
+            <a:off x="9772650" y="133350"/>
+            <a:ext cx="1733550" cy="457200"/>
+          </a:xfrm>
+          <a:prstGeom xmlns:a="http://schemas.openxmlformats.org/drawingml/2006/main" prst="roundRect">
+            <a:avLst>
+              <a:gd name="adj" fmla="val 16667"/>
+            </a:avLst>
+          </a:prstGeom>
+          <a:solidFill xmlns:a="http://schemas.openxmlformats.org/drawingml/2006/main">
+            <a:srgbClr val="06142E"/>
+          </a:solidFill>
+          <a:ln xmlns:a="http://schemas.openxmlformats.org/drawingml/2006/main" w="9525">
+            <a:solidFill>
+              <a:srgbClr val="1EC5FF">
+                <a:alpha val="33333"/>
+              </a:srgbClr>
+            </a:solidFill>
+            <a:prstDash val="solid"/>
+          </a:ln>
+        </p:spPr>
+      </p:sp>
+      <p:pic>
+        <p:nvPicPr>
+          <p:cNvPr id="23" name="" descr="Figura oficial da documentação dbt usada para explicar: Trace transforma opinião em evidência — Resposta, SQL, resultado, tokens, tools e latência ficam no mesmo JSON.."/>
+          <p:cNvPicPr>
+            <a:picLocks xmlns:a="http://schemas.openxmlformats.org/drawingml/2006/main" noChangeAspect="1"/>
+          </p:cNvPicPr>
+          <p:nvPr/>
+        </p:nvPicPr>
+        <p:blipFill>
+          <a:blip xmlns:r="http://schemas.openxmlformats.org/officeDocument/2006/relationships" xmlns:a="http://schemas.openxmlformats.org/drawingml/2006/main" r:embed="Re570eea913f84f12"/>
+          <a:stretch xmlns:a="http://schemas.openxmlformats.org/drawingml/2006/main"/>
+        </p:blipFill>
+        <p:spPr>
+          <a:xfrm xmlns:a="http://schemas.openxmlformats.org/drawingml/2006/main">
+            <a:off x="9893718" y="209550"/>
+            <a:ext cx="1491414" cy="323850"/>
+          </a:xfrm>
+          <a:prstGeom xmlns:a="http://schemas.openxmlformats.org/drawingml/2006/main" prst="rect">
+            <a:avLst/>
+          </a:prstGeom>
+        </p:spPr>
+      </p:pic>
+      <p:sp>
+        <p:nvSpPr>
+          <p:cNvPr id="10" name="footer-rule">
+            <a:extLst xmlns:a="http://schemas.openxmlformats.org/drawingml/2006/main">
+              <a:ext uri="{FF2B5EF4-FFF2-40B4-BE49-F238E27FC236}">
+                <a16:creationId xmlns:a16="http://schemas.microsoft.com/office/drawing/2014/main" id="{4D4692EE-C6A5-4C6E-9A58-422F930EFCA6}"/>
               </a:ext>
             </a:extLst>
           </p:cNvPr>
@@ -14896,10 +16186,10 @@
       </p:sp>
       <p:sp>
         <p:nvSpPr>
-          <p:cNvPr id="9" name="footer">
-            <a:extLst xmlns:a="http://schemas.openxmlformats.org/drawingml/2006/main">
-              <a:ext uri="{FF2B5EF4-FFF2-40B4-BE49-F238E27FC236}">
-                <a16:creationId xmlns:a16="http://schemas.microsoft.com/office/drawing/2014/main" id="{DA44C6BE-B6EE-408E-978E-D80C60489C0E}"/>
+          <p:cNvPr id="11" name="footer">
+            <a:extLst xmlns:a="http://schemas.openxmlformats.org/drawingml/2006/main">
+              <a:ext uri="{FF2B5EF4-FFF2-40B4-BE49-F238E27FC236}">
+                <a16:creationId xmlns:a16="http://schemas.microsoft.com/office/drawing/2014/main" id="{617CDD0E-B61B-4882-A3D1-10D1BD1C7623}"/>
               </a:ext>
             </a:extLst>
           </p:cNvPr>
@@ -14951,10 +16241,10 @@
       </p:sp>
       <p:sp>
         <p:nvSpPr>
-          <p:cNvPr id="10" name="page-number">
-            <a:extLst xmlns:a="http://schemas.openxmlformats.org/drawingml/2006/main">
-              <a:ext uri="{FF2B5EF4-FFF2-40B4-BE49-F238E27FC236}">
-                <a16:creationId xmlns:a16="http://schemas.microsoft.com/office/drawing/2014/main" id="{D2C5361D-2F0A-445D-A942-4E5D40E8E487}"/>
+          <p:cNvPr id="12" name="page-number">
+            <a:extLst xmlns:a="http://schemas.openxmlformats.org/drawingml/2006/main">
+              <a:ext uri="{FF2B5EF4-FFF2-40B4-BE49-F238E27FC236}">
+                <a16:creationId xmlns:a16="http://schemas.microsoft.com/office/drawing/2014/main" id="{BE8B64C1-7BF0-40FF-A174-7A5D9F27B1AB}"/>
               </a:ext>
             </a:extLst>
           </p:cNvPr>
@@ -15007,7 +16297,7 @@
     </p:spTree>
     <p:extLst>
       <p:ext uri="{BB962C8B-B14F-4D97-AF65-F5344CB8AC3E}">
-        <p14:creationId xmlns:p14="http://schemas.microsoft.com/office/powerpoint/2010/main" val="1372762454"/>
+        <p14:creationId xmlns:p14="http://schemas.microsoft.com/office/powerpoint/2010/main" val="1271458922"/>
       </p:ext>
     </p:extLst>
   </p:cSld>
@@ -15035,10 +16325,10 @@
       </p:grpSpPr>
       <p:sp>
         <p:nvSpPr>
-          <p:cNvPr id="17" name="slide-title">
-            <a:extLst xmlns:a="http://schemas.openxmlformats.org/drawingml/2006/main">
-              <a:ext uri="{FF2B5EF4-FFF2-40B4-BE49-F238E27FC236}">
-                <a16:creationId xmlns:a16="http://schemas.microsoft.com/office/drawing/2014/main" id="{EDFB9F59-D376-4B4B-AD59-03D7273D3108}"/>
+          <p:cNvPr id="19" name="slide-title">
+            <a:extLst xmlns:a="http://schemas.openxmlformats.org/drawingml/2006/main">
+              <a:ext uri="{FF2B5EF4-FFF2-40B4-BE49-F238E27FC236}">
+                <a16:creationId xmlns:a16="http://schemas.microsoft.com/office/drawing/2014/main" id="{CA4F861A-50A3-45C2-AA48-F1BFB44645E5}"/>
               </a:ext>
             </a:extLst>
           </p:cNvPr>
@@ -15089,7 +16379,7 @@
           <p:cNvPr id="2" name="step-num-1">
             <a:extLst xmlns:a="http://schemas.openxmlformats.org/drawingml/2006/main">
               <a:ext uri="{FF2B5EF4-FFF2-40B4-BE49-F238E27FC236}">
-                <a16:creationId xmlns:a16="http://schemas.microsoft.com/office/drawing/2014/main" id="{C4ADAAA4-DF5E-4F3D-9B57-8C3E5CB0D0D2}"/>
+                <a16:creationId xmlns:a16="http://schemas.microsoft.com/office/drawing/2014/main" id="{72167604-3D3C-4AC3-A136-FF87D40B65C3}"/>
               </a:ext>
             </a:extLst>
           </p:cNvPr>
@@ -15140,7 +16430,7 @@
           <p:cNvPr id="3" name="step-label-1">
             <a:extLst xmlns:a="http://schemas.openxmlformats.org/drawingml/2006/main">
               <a:ext uri="{FF2B5EF4-FFF2-40B4-BE49-F238E27FC236}">
-                <a16:creationId xmlns:a16="http://schemas.microsoft.com/office/drawing/2014/main" id="{D731B86E-DAC6-46B9-BF6D-7A0FF6DB7795}"/>
+                <a16:creationId xmlns:a16="http://schemas.microsoft.com/office/drawing/2014/main" id="{EE226BA2-38E2-429D-BB8A-34A58EE8D221}"/>
               </a:ext>
             </a:extLst>
           </p:cNvPr>
@@ -15191,7 +16481,7 @@
           <p:cNvPr id="4" name="step-line-1">
             <a:extLst xmlns:a="http://schemas.openxmlformats.org/drawingml/2006/main">
               <a:ext uri="{FF2B5EF4-FFF2-40B4-BE49-F238E27FC236}">
-                <a16:creationId xmlns:a16="http://schemas.microsoft.com/office/drawing/2014/main" id="{C55E4CD7-2FAF-46FA-BAE2-9118CA9C494D}"/>
+                <a16:creationId xmlns:a16="http://schemas.microsoft.com/office/drawing/2014/main" id="{0583534D-B443-4B8E-8A4B-2009E909728F}"/>
               </a:ext>
             </a:extLst>
           </p:cNvPr>
@@ -15222,7 +16512,7 @@
           <p:cNvPr id="5" name="step-num-2">
             <a:extLst xmlns:a="http://schemas.openxmlformats.org/drawingml/2006/main">
               <a:ext uri="{FF2B5EF4-FFF2-40B4-BE49-F238E27FC236}">
-                <a16:creationId xmlns:a16="http://schemas.microsoft.com/office/drawing/2014/main" id="{1BD4DECB-4D74-4077-81C6-14985727994B}"/>
+                <a16:creationId xmlns:a16="http://schemas.microsoft.com/office/drawing/2014/main" id="{40D41D75-7BBD-44B2-B61B-E3AB1AA88F76}"/>
               </a:ext>
             </a:extLst>
           </p:cNvPr>
@@ -15273,7 +16563,7 @@
           <p:cNvPr id="6" name="step-label-2">
             <a:extLst xmlns:a="http://schemas.openxmlformats.org/drawingml/2006/main">
               <a:ext uri="{FF2B5EF4-FFF2-40B4-BE49-F238E27FC236}">
-                <a16:creationId xmlns:a16="http://schemas.microsoft.com/office/drawing/2014/main" id="{BD82C3B5-525B-4393-AD53-750B7998320C}"/>
+                <a16:creationId xmlns:a16="http://schemas.microsoft.com/office/drawing/2014/main" id="{87FD8809-B16F-412D-B538-85E237966F35}"/>
               </a:ext>
             </a:extLst>
           </p:cNvPr>
@@ -15324,7 +16614,7 @@
           <p:cNvPr id="7" name="step-line-2">
             <a:extLst xmlns:a="http://schemas.openxmlformats.org/drawingml/2006/main">
               <a:ext uri="{FF2B5EF4-FFF2-40B4-BE49-F238E27FC236}">
-                <a16:creationId xmlns:a16="http://schemas.microsoft.com/office/drawing/2014/main" id="{DF509681-97E1-4ABA-9BBA-983A5D675BEA}"/>
+                <a16:creationId xmlns:a16="http://schemas.microsoft.com/office/drawing/2014/main" id="{2E0251B6-B130-4E98-A4D9-9BB2ADC66B9D}"/>
               </a:ext>
             </a:extLst>
           </p:cNvPr>
@@ -15355,7 +16645,7 @@
           <p:cNvPr id="8" name="step-num-3">
             <a:extLst xmlns:a="http://schemas.openxmlformats.org/drawingml/2006/main">
               <a:ext uri="{FF2B5EF4-FFF2-40B4-BE49-F238E27FC236}">
-                <a16:creationId xmlns:a16="http://schemas.microsoft.com/office/drawing/2014/main" id="{ED84E8FA-C15A-40EB-9061-651DC7919201}"/>
+                <a16:creationId xmlns:a16="http://schemas.microsoft.com/office/drawing/2014/main" id="{BAD8C2CB-015A-4295-AF0D-9E5322AE9E95}"/>
               </a:ext>
             </a:extLst>
           </p:cNvPr>
@@ -15406,7 +16696,7 @@
           <p:cNvPr id="9" name="step-label-3">
             <a:extLst xmlns:a="http://schemas.openxmlformats.org/drawingml/2006/main">
               <a:ext uri="{FF2B5EF4-FFF2-40B4-BE49-F238E27FC236}">
-                <a16:creationId xmlns:a16="http://schemas.microsoft.com/office/drawing/2014/main" id="{E10FBE7C-F95E-478D-9E56-C41918DBBEC9}"/>
+                <a16:creationId xmlns:a16="http://schemas.microsoft.com/office/drawing/2014/main" id="{89E324F8-DECE-42C6-B611-1865643F0F92}"/>
               </a:ext>
             </a:extLst>
           </p:cNvPr>
@@ -15457,7 +16747,7 @@
           <p:cNvPr id="10" name="step-line-3">
             <a:extLst xmlns:a="http://schemas.openxmlformats.org/drawingml/2006/main">
               <a:ext uri="{FF2B5EF4-FFF2-40B4-BE49-F238E27FC236}">
-                <a16:creationId xmlns:a16="http://schemas.microsoft.com/office/drawing/2014/main" id="{6E9FEFEE-EC89-4BEC-8C05-AD678A0BA97E}"/>
+                <a16:creationId xmlns:a16="http://schemas.microsoft.com/office/drawing/2014/main" id="{3F43B983-2395-474C-9CFD-07A06BD94F25}"/>
               </a:ext>
             </a:extLst>
           </p:cNvPr>
@@ -15488,7 +16778,7 @@
           <p:cNvPr id="11" name="step-num-4">
             <a:extLst xmlns:a="http://schemas.openxmlformats.org/drawingml/2006/main">
               <a:ext uri="{FF2B5EF4-FFF2-40B4-BE49-F238E27FC236}">
-                <a16:creationId xmlns:a16="http://schemas.microsoft.com/office/drawing/2014/main" id="{FFFABC0A-D7E5-40A9-97D6-95DBCB42BF8A}"/>
+                <a16:creationId xmlns:a16="http://schemas.microsoft.com/office/drawing/2014/main" id="{09408B20-9980-4167-9BBC-2DF0DA00DEB4}"/>
               </a:ext>
             </a:extLst>
           </p:cNvPr>
@@ -15539,7 +16829,7 @@
           <p:cNvPr id="12" name="step-label-4">
             <a:extLst xmlns:a="http://schemas.openxmlformats.org/drawingml/2006/main">
               <a:ext uri="{FF2B5EF4-FFF2-40B4-BE49-F238E27FC236}">
-                <a16:creationId xmlns:a16="http://schemas.microsoft.com/office/drawing/2014/main" id="{BC20A137-86D1-4497-9254-16D88FAB0023}"/>
+                <a16:creationId xmlns:a16="http://schemas.microsoft.com/office/drawing/2014/main" id="{8366BE1A-F4F6-48DA-A59B-47D136327538}"/>
               </a:ext>
             </a:extLst>
           </p:cNvPr>
@@ -15590,7 +16880,7 @@
           <p:cNvPr id="13" name="eyebrow">
             <a:extLst xmlns:a="http://schemas.openxmlformats.org/drawingml/2006/main">
               <a:ext uri="{FF2B5EF4-FFF2-40B4-BE49-F238E27FC236}">
-                <a16:creationId xmlns:a16="http://schemas.microsoft.com/office/drawing/2014/main" id="{8AA56859-1379-4591-937A-7F02C27D8EEB}"/>
+                <a16:creationId xmlns:a16="http://schemas.microsoft.com/office/drawing/2014/main" id="{2C3F06DA-CD6C-40F5-BC42-4B2E6889A9B5}"/>
               </a:ext>
             </a:extLst>
           </p:cNvPr>
@@ -15638,10 +16928,69 @@
       </p:sp>
       <p:sp>
         <p:nvSpPr>
-          <p:cNvPr id="14" name="footer-rule">
-            <a:extLst xmlns:a="http://schemas.openxmlformats.org/drawingml/2006/main">
-              <a:ext uri="{FF2B5EF4-FFF2-40B4-BE49-F238E27FC236}">
-                <a16:creationId xmlns:a16="http://schemas.microsoft.com/office/drawing/2014/main" id="{DAE8C454-F6F6-48B2-A50C-C43CA94EBB0D}"/>
+          <p:cNvPr id="14" name="rescue-point-logo-background">
+            <a:extLst xmlns:a="http://schemas.openxmlformats.org/drawingml/2006/main">
+              <a:ext uri="{FF2B5EF4-FFF2-40B4-BE49-F238E27FC236}">
+                <a16:creationId xmlns:a16="http://schemas.microsoft.com/office/drawing/2014/main" id="{8EB3ED49-A02F-48C2-8442-9654B617C6CF}"/>
+              </a:ext>
+            </a:extLst>
+          </p:cNvPr>
+          <p:cNvSpPr>
+            <a:spLocks xmlns:a="http://schemas.openxmlformats.org/drawingml/2006/main" noGrp="1"/>
+          </p:cNvSpPr>
+          <p:nvPr/>
+        </p:nvSpPr>
+        <p:spPr>
+          <a:xfrm xmlns:a="http://schemas.openxmlformats.org/drawingml/2006/main">
+            <a:off x="9772650" y="133350"/>
+            <a:ext cx="1733550" cy="457200"/>
+          </a:xfrm>
+          <a:prstGeom xmlns:a="http://schemas.openxmlformats.org/drawingml/2006/main" prst="roundRect">
+            <a:avLst>
+              <a:gd name="adj" fmla="val 16667"/>
+            </a:avLst>
+          </a:prstGeom>
+          <a:solidFill xmlns:a="http://schemas.openxmlformats.org/drawingml/2006/main">
+            <a:srgbClr val="06142E"/>
+          </a:solidFill>
+          <a:ln xmlns:a="http://schemas.openxmlformats.org/drawingml/2006/main" w="9525">
+            <a:solidFill>
+              <a:srgbClr val="1EC5FF">
+                <a:alpha val="33333"/>
+              </a:srgbClr>
+            </a:solidFill>
+            <a:prstDash val="solid"/>
+          </a:ln>
+        </p:spPr>
+      </p:sp>
+      <p:pic>
+        <p:nvPicPr>
+          <p:cNvPr id="35" name="" descr="Figura oficial da documentação dbt usada para explicar: Trace transforma opinião em evidência — 01."/>
+          <p:cNvPicPr>
+            <a:picLocks xmlns:a="http://schemas.openxmlformats.org/drawingml/2006/main" noChangeAspect="1"/>
+          </p:cNvPicPr>
+          <p:nvPr/>
+        </p:nvPicPr>
+        <p:blipFill>
+          <a:blip xmlns:r="http://schemas.openxmlformats.org/officeDocument/2006/relationships" xmlns:a="http://schemas.openxmlformats.org/drawingml/2006/main" r:embed="R545d4c4e7f6a4743"/>
+          <a:stretch xmlns:a="http://schemas.openxmlformats.org/drawingml/2006/main"/>
+        </p:blipFill>
+        <p:spPr>
+          <a:xfrm xmlns:a="http://schemas.openxmlformats.org/drawingml/2006/main">
+            <a:off x="9893718" y="209550"/>
+            <a:ext cx="1491414" cy="323850"/>
+          </a:xfrm>
+          <a:prstGeom xmlns:a="http://schemas.openxmlformats.org/drawingml/2006/main" prst="rect">
+            <a:avLst/>
+          </a:prstGeom>
+        </p:spPr>
+      </p:pic>
+      <p:sp>
+        <p:nvSpPr>
+          <p:cNvPr id="16" name="footer-rule">
+            <a:extLst xmlns:a="http://schemas.openxmlformats.org/drawingml/2006/main">
+              <a:ext uri="{FF2B5EF4-FFF2-40B4-BE49-F238E27FC236}">
+                <a16:creationId xmlns:a16="http://schemas.microsoft.com/office/drawing/2014/main" id="{F0D5702D-B684-4598-9DED-F77E26EB6177}"/>
               </a:ext>
             </a:extLst>
           </p:cNvPr>
@@ -15671,10 +17020,10 @@
       </p:sp>
       <p:sp>
         <p:nvSpPr>
-          <p:cNvPr id="15" name="footer">
-            <a:extLst xmlns:a="http://schemas.openxmlformats.org/drawingml/2006/main">
-              <a:ext uri="{FF2B5EF4-FFF2-40B4-BE49-F238E27FC236}">
-                <a16:creationId xmlns:a16="http://schemas.microsoft.com/office/drawing/2014/main" id="{074799BF-DCFA-4A18-93E8-B5273B40D898}"/>
+          <p:cNvPr id="17" name="footer">
+            <a:extLst xmlns:a="http://schemas.openxmlformats.org/drawingml/2006/main">
+              <a:ext uri="{FF2B5EF4-FFF2-40B4-BE49-F238E27FC236}">
+                <a16:creationId xmlns:a16="http://schemas.microsoft.com/office/drawing/2014/main" id="{EEE7FF50-7A09-471B-88C2-8E4F2CCE614D}"/>
               </a:ext>
             </a:extLst>
           </p:cNvPr>
@@ -15726,10 +17075,10 @@
       </p:sp>
       <p:sp>
         <p:nvSpPr>
-          <p:cNvPr id="16" name="page-number">
-            <a:extLst xmlns:a="http://schemas.openxmlformats.org/drawingml/2006/main">
-              <a:ext uri="{FF2B5EF4-FFF2-40B4-BE49-F238E27FC236}">
-                <a16:creationId xmlns:a16="http://schemas.microsoft.com/office/drawing/2014/main" id="{95ABB9EC-467F-4FF4-9610-4C9131193971}"/>
+          <p:cNvPr id="18" name="page-number">
+            <a:extLst xmlns:a="http://schemas.openxmlformats.org/drawingml/2006/main">
+              <a:ext uri="{FF2B5EF4-FFF2-40B4-BE49-F238E27FC236}">
+                <a16:creationId xmlns:a16="http://schemas.microsoft.com/office/drawing/2014/main" id="{A7C37ABF-90E0-47DD-B3C1-071FAE461607}"/>
               </a:ext>
             </a:extLst>
           </p:cNvPr>
@@ -15782,7 +17131,7 @@
     </p:spTree>
     <p:extLst>
       <p:ext uri="{BB962C8B-B14F-4D97-AF65-F5344CB8AC3E}">
-        <p14:creationId xmlns:p14="http://schemas.microsoft.com/office/powerpoint/2010/main" val="164921274"/>
+        <p14:creationId xmlns:p14="http://schemas.microsoft.com/office/powerpoint/2010/main" val="1806796779"/>
       </p:ext>
     </p:extLst>
   </p:cSld>
@@ -15810,10 +17159,10 @@
       </p:grpSpPr>
       <p:sp>
         <p:nvSpPr>
-          <p:cNvPr id="11" name="slide-title">
-            <a:extLst xmlns:a="http://schemas.openxmlformats.org/drawingml/2006/main">
-              <a:ext uri="{FF2B5EF4-FFF2-40B4-BE49-F238E27FC236}">
-                <a16:creationId xmlns:a16="http://schemas.microsoft.com/office/drawing/2014/main" id="{85D0D74A-503E-44A0-9CD8-8FD80C4638CC}"/>
+          <p:cNvPr id="13" name="slide-title">
+            <a:extLst xmlns:a="http://schemas.openxmlformats.org/drawingml/2006/main">
+              <a:ext uri="{FF2B5EF4-FFF2-40B4-BE49-F238E27FC236}">
+                <a16:creationId xmlns:a16="http://schemas.microsoft.com/office/drawing/2014/main" id="{E6662F49-2BAD-4C71-AECF-C16361BDF033}"/>
               </a:ext>
             </a:extLst>
           </p:cNvPr>
@@ -15864,7 +17213,7 @@
           <p:cNvPr id="2" name="slide-subtitle">
             <a:extLst xmlns:a="http://schemas.openxmlformats.org/drawingml/2006/main">
               <a:ext uri="{FF2B5EF4-FFF2-40B4-BE49-F238E27FC236}">
-                <a16:creationId xmlns:a16="http://schemas.microsoft.com/office/drawing/2014/main" id="{EC19559D-D5AE-46C8-B8DC-D93FF454E38D}"/>
+                <a16:creationId xmlns:a16="http://schemas.microsoft.com/office/drawing/2014/main" id="{9911B1AE-2A33-4D12-82EA-2FB60FA6D212}"/>
               </a:ext>
             </a:extLst>
           </p:cNvPr>
@@ -15915,7 +17264,7 @@
           <p:cNvPr id="3" name="bullets">
             <a:extLst xmlns:a="http://schemas.openxmlformats.org/drawingml/2006/main">
               <a:ext uri="{FF2B5EF4-FFF2-40B4-BE49-F238E27FC236}">
-                <a16:creationId xmlns:a16="http://schemas.microsoft.com/office/drawing/2014/main" id="{DBE3A678-9B9F-4789-ADEB-BFDD600B87B4}"/>
+                <a16:creationId xmlns:a16="http://schemas.microsoft.com/office/drawing/2014/main" id="{A79773B5-AFAC-4D4A-8A32-1E65356AB9B3}"/>
               </a:ext>
             </a:extLst>
           </p:cNvPr>
@@ -16002,7 +17351,7 @@
           <p:cNvPr id="4" name="ambient-glow">
             <a:extLst xmlns:a="http://schemas.openxmlformats.org/drawingml/2006/main">
               <a:ext uri="{FF2B5EF4-FFF2-40B4-BE49-F238E27FC236}">
-                <a16:creationId xmlns:a16="http://schemas.microsoft.com/office/drawing/2014/main" id="{1BE7C3E8-9FA8-4AB2-AD52-57F23C9F5C78}"/>
+                <a16:creationId xmlns:a16="http://schemas.microsoft.com/office/drawing/2014/main" id="{630505BC-4D3F-4EE7-8CB2-CAF62B314D3A}"/>
               </a:ext>
             </a:extLst>
           </p:cNvPr>
@@ -16039,7 +17388,7 @@
           <p:cNvPr id="5" name="ambient-core">
             <a:extLst xmlns:a="http://schemas.openxmlformats.org/drawingml/2006/main">
               <a:ext uri="{FF2B5EF4-FFF2-40B4-BE49-F238E27FC236}">
-                <a16:creationId xmlns:a16="http://schemas.microsoft.com/office/drawing/2014/main" id="{83EA7244-0A6C-4755-96C5-4BBAD2380A5F}"/>
+                <a16:creationId xmlns:a16="http://schemas.microsoft.com/office/drawing/2014/main" id="{26E67530-6893-4A25-AE6C-F68A5587A706}"/>
               </a:ext>
             </a:extLst>
           </p:cNvPr>
@@ -16076,7 +17425,7 @@
           <p:cNvPr id="6" name="section-number">
             <a:extLst xmlns:a="http://schemas.openxmlformats.org/drawingml/2006/main">
               <a:ext uri="{FF2B5EF4-FFF2-40B4-BE49-F238E27FC236}">
-                <a16:creationId xmlns:a16="http://schemas.microsoft.com/office/drawing/2014/main" id="{6FB10F30-00EA-439A-A300-937CD69D192F}"/>
+                <a16:creationId xmlns:a16="http://schemas.microsoft.com/office/drawing/2014/main" id="{678BFB9E-5022-4B69-AF7B-A51D61A54542}"/>
               </a:ext>
             </a:extLst>
           </p:cNvPr>
@@ -16127,7 +17476,7 @@
           <p:cNvPr id="7" name="eyebrow">
             <a:extLst xmlns:a="http://schemas.openxmlformats.org/drawingml/2006/main">
               <a:ext uri="{FF2B5EF4-FFF2-40B4-BE49-F238E27FC236}">
-                <a16:creationId xmlns:a16="http://schemas.microsoft.com/office/drawing/2014/main" id="{15B3178A-4FCC-4BE8-ADCD-FFFA7B688593}"/>
+                <a16:creationId xmlns:a16="http://schemas.microsoft.com/office/drawing/2014/main" id="{74E2D9CD-8963-4D42-80B2-B32A4E0EEBAE}"/>
               </a:ext>
             </a:extLst>
           </p:cNvPr>
@@ -16175,10 +17524,69 @@
       </p:sp>
       <p:sp>
         <p:nvSpPr>
-          <p:cNvPr id="8" name="footer-rule">
-            <a:extLst xmlns:a="http://schemas.openxmlformats.org/drawingml/2006/main">
-              <a:ext uri="{FF2B5EF4-FFF2-40B4-BE49-F238E27FC236}">
-                <a16:creationId xmlns:a16="http://schemas.microsoft.com/office/drawing/2014/main" id="{D6FC2597-F4EC-4BDA-BFF1-55266C3BC2C9}"/>
+          <p:cNvPr id="8" name="rescue-point-logo-background">
+            <a:extLst xmlns:a="http://schemas.openxmlformats.org/drawingml/2006/main">
+              <a:ext uri="{FF2B5EF4-FFF2-40B4-BE49-F238E27FC236}">
+                <a16:creationId xmlns:a16="http://schemas.microsoft.com/office/drawing/2014/main" id="{4CBB7B1F-2572-4C8C-A69E-C9F99A476253}"/>
+              </a:ext>
+            </a:extLst>
+          </p:cNvPr>
+          <p:cNvSpPr>
+            <a:spLocks xmlns:a="http://schemas.openxmlformats.org/drawingml/2006/main" noGrp="1"/>
+          </p:cNvSpPr>
+          <p:nvPr/>
+        </p:nvSpPr>
+        <p:spPr>
+          <a:xfrm xmlns:a="http://schemas.openxmlformats.org/drawingml/2006/main">
+            <a:off x="9772650" y="133350"/>
+            <a:ext cx="1733550" cy="457200"/>
+          </a:xfrm>
+          <a:prstGeom xmlns:a="http://schemas.openxmlformats.org/drawingml/2006/main" prst="roundRect">
+            <a:avLst>
+              <a:gd name="adj" fmla="val 16667"/>
+            </a:avLst>
+          </a:prstGeom>
+          <a:solidFill xmlns:a="http://schemas.openxmlformats.org/drawingml/2006/main">
+            <a:srgbClr val="06142E"/>
+          </a:solidFill>
+          <a:ln xmlns:a="http://schemas.openxmlformats.org/drawingml/2006/main" w="9525">
+            <a:solidFill>
+              <a:srgbClr val="1EC5FF">
+                <a:alpha val="33333"/>
+              </a:srgbClr>
+            </a:solidFill>
+            <a:prstDash val="solid"/>
+          </a:ln>
+        </p:spPr>
+      </p:sp>
+      <p:pic>
+        <p:nvPicPr>
+          <p:cNvPr id="23" name="" descr="Figura oficial da documentação dbt usada para explicar: Fixture não é execução real — Traces gravados testam o avaliador; não provam desempenho de um LLM.."/>
+          <p:cNvPicPr>
+            <a:picLocks xmlns:a="http://schemas.openxmlformats.org/drawingml/2006/main" noChangeAspect="1"/>
+          </p:cNvPicPr>
+          <p:nvPr/>
+        </p:nvPicPr>
+        <p:blipFill>
+          <a:blip xmlns:r="http://schemas.openxmlformats.org/officeDocument/2006/relationships" xmlns:a="http://schemas.openxmlformats.org/drawingml/2006/main" r:embed="R8f4c227529844012"/>
+          <a:stretch xmlns:a="http://schemas.openxmlformats.org/drawingml/2006/main"/>
+        </p:blipFill>
+        <p:spPr>
+          <a:xfrm xmlns:a="http://schemas.openxmlformats.org/drawingml/2006/main">
+            <a:off x="9893718" y="209550"/>
+            <a:ext cx="1491414" cy="323850"/>
+          </a:xfrm>
+          <a:prstGeom xmlns:a="http://schemas.openxmlformats.org/drawingml/2006/main" prst="rect">
+            <a:avLst/>
+          </a:prstGeom>
+        </p:spPr>
+      </p:pic>
+      <p:sp>
+        <p:nvSpPr>
+          <p:cNvPr id="10" name="footer-rule">
+            <a:extLst xmlns:a="http://schemas.openxmlformats.org/drawingml/2006/main">
+              <a:ext uri="{FF2B5EF4-FFF2-40B4-BE49-F238E27FC236}">
+                <a16:creationId xmlns:a16="http://schemas.microsoft.com/office/drawing/2014/main" id="{C3FE9504-D448-4583-80D1-67F98D384178}"/>
               </a:ext>
             </a:extLst>
           </p:cNvPr>
@@ -16208,10 +17616,10 @@
       </p:sp>
       <p:sp>
         <p:nvSpPr>
-          <p:cNvPr id="9" name="footer">
-            <a:extLst xmlns:a="http://schemas.openxmlformats.org/drawingml/2006/main">
-              <a:ext uri="{FF2B5EF4-FFF2-40B4-BE49-F238E27FC236}">
-                <a16:creationId xmlns:a16="http://schemas.microsoft.com/office/drawing/2014/main" id="{8C78F331-C73E-4FA6-B551-CADF432398FD}"/>
+          <p:cNvPr id="11" name="footer">
+            <a:extLst xmlns:a="http://schemas.openxmlformats.org/drawingml/2006/main">
+              <a:ext uri="{FF2B5EF4-FFF2-40B4-BE49-F238E27FC236}">
+                <a16:creationId xmlns:a16="http://schemas.microsoft.com/office/drawing/2014/main" id="{F16A850C-3C84-41A6-9DE7-89D014CCCEB6}"/>
               </a:ext>
             </a:extLst>
           </p:cNvPr>
@@ -16263,10 +17671,10 @@
       </p:sp>
       <p:sp>
         <p:nvSpPr>
-          <p:cNvPr id="10" name="page-number">
-            <a:extLst xmlns:a="http://schemas.openxmlformats.org/drawingml/2006/main">
-              <a:ext uri="{FF2B5EF4-FFF2-40B4-BE49-F238E27FC236}">
-                <a16:creationId xmlns:a16="http://schemas.microsoft.com/office/drawing/2014/main" id="{70313CE5-B002-4957-9010-6FB4FBC3616A}"/>
+          <p:cNvPr id="12" name="page-number">
+            <a:extLst xmlns:a="http://schemas.openxmlformats.org/drawingml/2006/main">
+              <a:ext uri="{FF2B5EF4-FFF2-40B4-BE49-F238E27FC236}">
+                <a16:creationId xmlns:a16="http://schemas.microsoft.com/office/drawing/2014/main" id="{DD802BBC-2425-4251-BC86-32635F148796}"/>
               </a:ext>
             </a:extLst>
           </p:cNvPr>
@@ -16319,7 +17727,7 @@
     </p:spTree>
     <p:extLst>
       <p:ext uri="{BB962C8B-B14F-4D97-AF65-F5344CB8AC3E}">
-        <p14:creationId xmlns:p14="http://schemas.microsoft.com/office/powerpoint/2010/main" val="743803112"/>
+        <p14:creationId xmlns:p14="http://schemas.microsoft.com/office/powerpoint/2010/main" val="2091693496"/>
       </p:ext>
     </p:extLst>
   </p:cSld>
